--- a/docs/mimamoritai-deck.pptx
+++ b/docs/mimamoritai-deck.pptx
@@ -15,9 +15,12 @@
     <p:sldId id="263" r:id="rId9"/>
     <p:sldId id="264" r:id="rId10"/>
     <p:sldId id="265" r:id="rId11"/>
+    <p:sldId id="266" r:id="rId12"/>
+    <p:sldId id="267" r:id="rId13"/>
+    <p:sldId id="268" r:id="rId14"/>
   </p:sldIdLst>
   <p:notesMasterIdLst>
-    <p:notesMasterId r:id="rId12"/>
+    <p:notesMasterId r:id="rId15"/>
   </p:notesMasterIdLst>
   <p:sldSz cx="9144000" cy="5143500"/>
   <p:notesSz cx="5143500" cy="9144000"/>
@@ -623,6 +626,270 @@
             <a:fld id="{F7021451-1387-4CA6-816F-3879F97B5CBC}" type="slidenum">
               <a:rPr lang="en-US"/>
               <a:t>10</a:t>
+            </a:fld>
+            <a:endParaRPr lang="en-US"/>
+          </a:p>
+        </p:txBody>
+      </p:sp>
+    </p:spTree>
+    <p:extLst>
+      <p:ext uri="{BB962C8B-B14F-4D97-AF65-F5344CB8AC3E}">
+        <p14:creationId xmlns:p14="http://schemas.microsoft.com/office/powerpoint/2010/main" val="1024086991"/>
+      </p:ext>
+    </p:extLst>
+  </p:cSld>
+  <p:clrMapOvr>
+    <a:masterClrMapping/>
+  </p:clrMapOvr>
+</p:notes>
+</file>
+
+<file path=ppt/notesSlides/notesSlide11.xml><?xml version="1.0" encoding="utf-8"?>
+<p:notes xmlns:a="http://schemas.openxmlformats.org/drawingml/2006/main" xmlns:r="http://schemas.openxmlformats.org/officeDocument/2006/relationships" xmlns:p="http://schemas.openxmlformats.org/presentationml/2006/main">
+  <p:cSld>
+    <p:spTree>
+      <p:nvGrpSpPr>
+        <p:cNvPr id="1" name=""/>
+        <p:cNvGrpSpPr/>
+        <p:nvPr/>
+      </p:nvGrpSpPr>
+      <p:grpSpPr>
+        <a:xfrm>
+          <a:off x="0" y="0"/>
+          <a:ext cx="0" cy="0"/>
+          <a:chOff x="0" y="0"/>
+          <a:chExt cx="0" cy="0"/>
+        </a:xfrm>
+      </p:grpSpPr>
+      <p:sp>
+        <p:nvSpPr>
+          <p:cNvPr id="2" name="Slide Image Placeholder 1"/>
+          <p:cNvSpPr>
+            <a:spLocks noGrp="1" noRot="1" noChangeAspect="1"/>
+          </p:cNvSpPr>
+          <p:nvPr>
+            <p:ph type="sldImg"/>
+          </p:nvPr>
+        </p:nvSpPr>
+        <p:spPr/>
+      </p:sp>
+      <p:sp>
+        <p:nvSpPr>
+          <p:cNvPr id="3" name="Notes Placeholder 2"/>
+          <p:cNvSpPr>
+            <a:spLocks noGrp="1"/>
+          </p:cNvSpPr>
+          <p:nvPr>
+            <p:ph type="body" idx="1"/>
+          </p:nvPr>
+        </p:nvSpPr>
+        <p:spPr/>
+        <p:txBody>
+          <a:bodyPr/>
+          <a:lstStyle/>
+          <a:p>
+            <a:r>
+              <a:rPr lang="en-US" dirty="0"/>
+              <a:t/>
+            </a:r>
+            <a:endParaRPr lang="en-US" dirty="0"/>
+          </a:p>
+        </p:txBody>
+      </p:sp>
+      <p:sp>
+        <p:nvSpPr>
+          <p:cNvPr id="4" name="Slide Number Placeholder 3"/>
+          <p:cNvSpPr>
+            <a:spLocks noGrp="1"/>
+          </p:cNvSpPr>
+          <p:nvPr>
+            <p:ph type="sldNum" sz="quarter" idx="10"/>
+          </p:nvPr>
+        </p:nvSpPr>
+        <p:spPr/>
+        <p:txBody>
+          <a:bodyPr/>
+          <a:lstStyle/>
+          <a:p>
+            <a:fld id="{F7021451-1387-4CA6-816F-3879F97B5CBC}" type="slidenum">
+              <a:rPr lang="en-US"/>
+              <a:t>11</a:t>
+            </a:fld>
+            <a:endParaRPr lang="en-US"/>
+          </a:p>
+        </p:txBody>
+      </p:sp>
+    </p:spTree>
+    <p:extLst>
+      <p:ext uri="{BB962C8B-B14F-4D97-AF65-F5344CB8AC3E}">
+        <p14:creationId xmlns:p14="http://schemas.microsoft.com/office/powerpoint/2010/main" val="1024086991"/>
+      </p:ext>
+    </p:extLst>
+  </p:cSld>
+  <p:clrMapOvr>
+    <a:masterClrMapping/>
+  </p:clrMapOvr>
+</p:notes>
+</file>
+
+<file path=ppt/notesSlides/notesSlide12.xml><?xml version="1.0" encoding="utf-8"?>
+<p:notes xmlns:a="http://schemas.openxmlformats.org/drawingml/2006/main" xmlns:r="http://schemas.openxmlformats.org/officeDocument/2006/relationships" xmlns:p="http://schemas.openxmlformats.org/presentationml/2006/main">
+  <p:cSld>
+    <p:spTree>
+      <p:nvGrpSpPr>
+        <p:cNvPr id="1" name=""/>
+        <p:cNvGrpSpPr/>
+        <p:nvPr/>
+      </p:nvGrpSpPr>
+      <p:grpSpPr>
+        <a:xfrm>
+          <a:off x="0" y="0"/>
+          <a:ext cx="0" cy="0"/>
+          <a:chOff x="0" y="0"/>
+          <a:chExt cx="0" cy="0"/>
+        </a:xfrm>
+      </p:grpSpPr>
+      <p:sp>
+        <p:nvSpPr>
+          <p:cNvPr id="2" name="Slide Image Placeholder 1"/>
+          <p:cNvSpPr>
+            <a:spLocks noGrp="1" noRot="1" noChangeAspect="1"/>
+          </p:cNvSpPr>
+          <p:nvPr>
+            <p:ph type="sldImg"/>
+          </p:nvPr>
+        </p:nvSpPr>
+        <p:spPr/>
+      </p:sp>
+      <p:sp>
+        <p:nvSpPr>
+          <p:cNvPr id="3" name="Notes Placeholder 2"/>
+          <p:cNvSpPr>
+            <a:spLocks noGrp="1"/>
+          </p:cNvSpPr>
+          <p:nvPr>
+            <p:ph type="body" idx="1"/>
+          </p:nvPr>
+        </p:nvSpPr>
+        <p:spPr/>
+        <p:txBody>
+          <a:bodyPr/>
+          <a:lstStyle/>
+          <a:p>
+            <a:r>
+              <a:rPr lang="en-US" dirty="0"/>
+              <a:t/>
+            </a:r>
+            <a:endParaRPr lang="en-US" dirty="0"/>
+          </a:p>
+        </p:txBody>
+      </p:sp>
+      <p:sp>
+        <p:nvSpPr>
+          <p:cNvPr id="4" name="Slide Number Placeholder 3"/>
+          <p:cNvSpPr>
+            <a:spLocks noGrp="1"/>
+          </p:cNvSpPr>
+          <p:nvPr>
+            <p:ph type="sldNum" sz="quarter" idx="10"/>
+          </p:nvPr>
+        </p:nvSpPr>
+        <p:spPr/>
+        <p:txBody>
+          <a:bodyPr/>
+          <a:lstStyle/>
+          <a:p>
+            <a:fld id="{F7021451-1387-4CA6-816F-3879F97B5CBC}" type="slidenum">
+              <a:rPr lang="en-US"/>
+              <a:t>12</a:t>
+            </a:fld>
+            <a:endParaRPr lang="en-US"/>
+          </a:p>
+        </p:txBody>
+      </p:sp>
+    </p:spTree>
+    <p:extLst>
+      <p:ext uri="{BB962C8B-B14F-4D97-AF65-F5344CB8AC3E}">
+        <p14:creationId xmlns:p14="http://schemas.microsoft.com/office/powerpoint/2010/main" val="1024086991"/>
+      </p:ext>
+    </p:extLst>
+  </p:cSld>
+  <p:clrMapOvr>
+    <a:masterClrMapping/>
+  </p:clrMapOvr>
+</p:notes>
+</file>
+
+<file path=ppt/notesSlides/notesSlide13.xml><?xml version="1.0" encoding="utf-8"?>
+<p:notes xmlns:a="http://schemas.openxmlformats.org/drawingml/2006/main" xmlns:r="http://schemas.openxmlformats.org/officeDocument/2006/relationships" xmlns:p="http://schemas.openxmlformats.org/presentationml/2006/main">
+  <p:cSld>
+    <p:spTree>
+      <p:nvGrpSpPr>
+        <p:cNvPr id="1" name=""/>
+        <p:cNvGrpSpPr/>
+        <p:nvPr/>
+      </p:nvGrpSpPr>
+      <p:grpSpPr>
+        <a:xfrm>
+          <a:off x="0" y="0"/>
+          <a:ext cx="0" cy="0"/>
+          <a:chOff x="0" y="0"/>
+          <a:chExt cx="0" cy="0"/>
+        </a:xfrm>
+      </p:grpSpPr>
+      <p:sp>
+        <p:nvSpPr>
+          <p:cNvPr id="2" name="Slide Image Placeholder 1"/>
+          <p:cNvSpPr>
+            <a:spLocks noGrp="1" noRot="1" noChangeAspect="1"/>
+          </p:cNvSpPr>
+          <p:nvPr>
+            <p:ph type="sldImg"/>
+          </p:nvPr>
+        </p:nvSpPr>
+        <p:spPr/>
+      </p:sp>
+      <p:sp>
+        <p:nvSpPr>
+          <p:cNvPr id="3" name="Notes Placeholder 2"/>
+          <p:cNvSpPr>
+            <a:spLocks noGrp="1"/>
+          </p:cNvSpPr>
+          <p:nvPr>
+            <p:ph type="body" idx="1"/>
+          </p:nvPr>
+        </p:nvSpPr>
+        <p:spPr/>
+        <p:txBody>
+          <a:bodyPr/>
+          <a:lstStyle/>
+          <a:p>
+            <a:r>
+              <a:rPr lang="en-US" dirty="0"/>
+              <a:t/>
+            </a:r>
+            <a:endParaRPr lang="en-US" dirty="0"/>
+          </a:p>
+        </p:txBody>
+      </p:sp>
+      <p:sp>
+        <p:nvSpPr>
+          <p:cNvPr id="4" name="Slide Number Placeholder 3"/>
+          <p:cNvSpPr>
+            <a:spLocks noGrp="1"/>
+          </p:cNvSpPr>
+          <p:nvPr>
+            <p:ph type="sldNum" sz="quarter" idx="10"/>
+          </p:nvPr>
+        </p:nvSpPr>
+        <p:spPr/>
+        <p:txBody>
+          <a:bodyPr/>
+          <a:lstStyle/>
+          <a:p>
+            <a:fld id="{F7021451-1387-4CA6-816F-3879F97B5CBC}" type="slidenum">
+              <a:rPr lang="en-US"/>
+              <a:t>13</a:t>
             </a:fld>
             <a:endParaRPr lang="en-US"/>
           </a:p>
@@ -1949,6 +2216,2122 @@
     <p:bg>
       <p:bgPr>
         <a:solidFill>
+          <a:srgbClr val="2B1F24"/>
+        </a:solidFill>
+      </p:bgPr>
+    </p:bg>
+    <p:spTree>
+      <p:nvGrpSpPr>
+        <p:cNvPr id="1" name=""/>
+        <p:cNvGrpSpPr/>
+        <p:nvPr/>
+      </p:nvGrpSpPr>
+      <p:grpSpPr>
+        <a:xfrm>
+          <a:off x="0" y="0"/>
+          <a:ext cx="0" cy="0"/>
+          <a:chOff x="0" y="0"/>
+          <a:chExt cx="0" cy="0"/>
+        </a:xfrm>
+      </p:grpSpPr>
+      <p:sp>
+        <p:nvSpPr>
+          <p:cNvPr id="2" name="Shape 0"/>
+          <p:cNvSpPr/>
+          <p:nvPr/>
+        </p:nvSpPr>
+        <p:spPr>
+          <a:xfrm>
+            <a:off x="0" y="0"/>
+            <a:ext cx="164592" cy="5143500"/>
+          </a:xfrm>
+          <a:prstGeom prst="rect">
+            <a:avLst/>
+          </a:prstGeom>
+          <a:solidFill>
+            <a:srgbClr val="B23A48"/>
+          </a:solidFill>
+          <a:ln/>
+        </p:spPr>
+      </p:sp>
+      <p:sp>
+        <p:nvSpPr>
+          <p:cNvPr id="3" name="Text 1"/>
+          <p:cNvSpPr/>
+          <p:nvPr/>
+        </p:nvSpPr>
+        <p:spPr>
+          <a:xfrm>
+            <a:off x="566928" y="438912"/>
+            <a:ext cx="8046720" cy="640080"/>
+          </a:xfrm>
+          <a:prstGeom prst="rect">
+            <a:avLst/>
+          </a:prstGeom>
+          <a:noFill/>
+          <a:ln/>
+        </p:spPr>
+        <p:txBody>
+          <a:bodyPr wrap="square" rtlCol="0" anchor="ctr"/>
+          <a:lstStyle/>
+          <a:p>
+            <a:pPr indent="0" marL="0">
+              <a:buNone/>
+            </a:pPr>
+            <a:r>
+              <a:rPr lang="en-US" sz="3400" b="1" dirty="0">
+                <a:solidFill>
+                  <a:srgbClr val="FFFFFF"/>
+                </a:solidFill>
+                <a:latin typeface="Georgia" pitchFamily="34" charset="0"/>
+                <a:ea typeface="Georgia" pitchFamily="34" charset="-122"/>
+                <a:cs typeface="Georgia" pitchFamily="34" charset="-120"/>
+              </a:rPr>
+              <a:t>沈黙して壊れた</a:t>
+            </a:r>
+            <a:endParaRPr lang="en-US" sz="3400" dirty="0"/>
+          </a:p>
+        </p:txBody>
+      </p:sp>
+      <p:sp>
+        <p:nvSpPr>
+          <p:cNvPr id="4" name="Text 2"/>
+          <p:cNvSpPr/>
+          <p:nvPr/>
+        </p:nvSpPr>
+        <p:spPr>
+          <a:xfrm>
+            <a:off x="566928" y="1097280"/>
+            <a:ext cx="8046720" cy="310896"/>
+          </a:xfrm>
+          <a:prstGeom prst="rect">
+            <a:avLst/>
+          </a:prstGeom>
+          <a:noFill/>
+          <a:ln/>
+        </p:spPr>
+        <p:txBody>
+          <a:bodyPr wrap="square" rtlCol="0" anchor="ctr"/>
+          <a:lstStyle/>
+          <a:p>
+            <a:pPr indent="0" marL="0">
+              <a:buNone/>
+            </a:pPr>
+            <a:r>
+              <a:rPr lang="en-US" sz="1400" dirty="0">
+                <a:solidFill>
+                  <a:srgbClr val="A26769"/>
+                </a:solidFill>
+                <a:latin typeface="Calibri" pitchFamily="34" charset="0"/>
+                <a:ea typeface="Calibri" pitchFamily="34" charset="-122"/>
+                <a:cs typeface="Calibri" pitchFamily="34" charset="-120"/>
+              </a:rPr>
+              <a:t>3件とも、例外は一度も投げていない</a:t>
+            </a:r>
+            <a:endParaRPr lang="en-US" sz="1400" dirty="0"/>
+          </a:p>
+        </p:txBody>
+      </p:sp>
+      <p:sp>
+        <p:nvSpPr>
+          <p:cNvPr id="5" name="Shape 3"/>
+          <p:cNvSpPr/>
+          <p:nvPr/>
+        </p:nvSpPr>
+        <p:spPr>
+          <a:xfrm>
+            <a:off x="566928" y="1627632"/>
+            <a:ext cx="8074152" cy="804672"/>
+          </a:xfrm>
+          <a:prstGeom prst="rect">
+            <a:avLst/>
+          </a:prstGeom>
+          <a:solidFill>
+            <a:srgbClr val="3A2C31"/>
+          </a:solidFill>
+          <a:ln/>
+        </p:spPr>
+      </p:sp>
+      <p:sp>
+        <p:nvSpPr>
+          <p:cNvPr id="6" name="Shape 4"/>
+          <p:cNvSpPr/>
+          <p:nvPr/>
+        </p:nvSpPr>
+        <p:spPr>
+          <a:xfrm>
+            <a:off x="566928" y="1627632"/>
+            <a:ext cx="64008" cy="804672"/>
+          </a:xfrm>
+          <a:prstGeom prst="rect">
+            <a:avLst/>
+          </a:prstGeom>
+          <a:solidFill>
+            <a:srgbClr val="B23A48"/>
+          </a:solidFill>
+          <a:ln/>
+        </p:spPr>
+      </p:sp>
+      <p:sp>
+        <p:nvSpPr>
+          <p:cNvPr id="7" name="Text 5"/>
+          <p:cNvSpPr/>
+          <p:nvPr/>
+        </p:nvSpPr>
+        <p:spPr>
+          <a:xfrm>
+            <a:off x="841248" y="1700784"/>
+            <a:ext cx="7589520" cy="274320"/>
+          </a:xfrm>
+          <a:prstGeom prst="rect">
+            <a:avLst/>
+          </a:prstGeom>
+          <a:noFill/>
+          <a:ln/>
+        </p:spPr>
+        <p:txBody>
+          <a:bodyPr wrap="square" rtlCol="0" anchor="ctr"/>
+          <a:lstStyle/>
+          <a:p>
+            <a:pPr indent="0" marL="0">
+              <a:buNone/>
+            </a:pPr>
+            <a:r>
+              <a:rPr lang="en-US" sz="1400" b="1" dirty="0">
+                <a:solidFill>
+                  <a:srgbClr val="FFFFFF"/>
+                </a:solidFill>
+                <a:latin typeface="Calibri" pitchFamily="34" charset="0"/>
+                <a:ea typeface="Calibri" pitchFamily="34" charset="-122"/>
+                <a:cs typeface="Calibri" pitchFamily="34" charset="-120"/>
+              </a:rPr>
+              <a:t>存在しないテーブルに投げ続けた</a:t>
+            </a:r>
+            <a:endParaRPr lang="en-US" sz="1400" dirty="0"/>
+          </a:p>
+        </p:txBody>
+      </p:sp>
+      <p:sp>
+        <p:nvSpPr>
+          <p:cNvPr id="8" name="Text 6"/>
+          <p:cNvSpPr/>
+          <p:nvPr/>
+        </p:nvSpPr>
+        <p:spPr>
+          <a:xfrm>
+            <a:off x="841248" y="1975104"/>
+            <a:ext cx="7589520" cy="420624"/>
+          </a:xfrm>
+          <a:prstGeom prst="rect">
+            <a:avLst/>
+          </a:prstGeom>
+          <a:noFill/>
+          <a:ln/>
+        </p:spPr>
+        <p:txBody>
+          <a:bodyPr wrap="square" rtlCol="0" anchor="ctr"/>
+          <a:lstStyle/>
+          <a:p>
+            <a:pPr indent="0" marL="0">
+              <a:lnSpc>
+                <a:spcPts val="1500"/>
+              </a:lnSpc>
+              <a:buNone/>
+            </a:pPr>
+            <a:r>
+              <a:rPr lang="en-US" sz="1100" dirty="0">
+                <a:solidFill>
+                  <a:srgbClr val="ECE2D0"/>
+                </a:solidFill>
+                <a:latin typeface="Calibri" pitchFamily="34" charset="0"/>
+                <a:ea typeface="Calibri" pitchFamily="34" charset="-122"/>
+                <a:cs typeface="Calibri" pitchFamily="34" charset="-120"/>
+              </a:rPr>
+              <a:t>アプリ側だけ実装し、Eventhouse にテーブルを作っていなかった。</a:t>
+            </a:r>
+            <a:endParaRPr lang="en-US" sz="1100" dirty="0"/>
+          </a:p>
+          <a:p>
+            <a:pPr indent="0" marL="0">
+              <a:lnSpc>
+                <a:spcPts val="1500"/>
+              </a:lnSpc>
+              <a:buNone/>
+            </a:pPr>
+            <a:r>
+              <a:rPr lang="en-US" sz="1100" dirty="0">
+                <a:solidFill>
+                  <a:srgbClr val="ECE2D0"/>
+                </a:solidFill>
+                <a:latin typeface="Calibri" pitchFamily="34" charset="0"/>
+                <a:ea typeface="Calibri" pitchFamily="34" charset="-122"/>
+                <a:cs typeface="Calibri" pitchFamily="34" charset="-120"/>
+              </a:rPr>
+              <a:t>1日半、400 を返し続けて容量を焼いた。</a:t>
+            </a:r>
+            <a:endParaRPr lang="en-US" sz="1100" dirty="0"/>
+          </a:p>
+        </p:txBody>
+      </p:sp>
+      <p:sp>
+        <p:nvSpPr>
+          <p:cNvPr id="9" name="Shape 7"/>
+          <p:cNvSpPr/>
+          <p:nvPr/>
+        </p:nvSpPr>
+        <p:spPr>
+          <a:xfrm>
+            <a:off x="566928" y="2560320"/>
+            <a:ext cx="8074152" cy="804672"/>
+          </a:xfrm>
+          <a:prstGeom prst="rect">
+            <a:avLst/>
+          </a:prstGeom>
+          <a:solidFill>
+            <a:srgbClr val="3A2C31"/>
+          </a:solidFill>
+          <a:ln/>
+        </p:spPr>
+      </p:sp>
+      <p:sp>
+        <p:nvSpPr>
+          <p:cNvPr id="10" name="Shape 8"/>
+          <p:cNvSpPr/>
+          <p:nvPr/>
+        </p:nvSpPr>
+        <p:spPr>
+          <a:xfrm>
+            <a:off x="566928" y="2560320"/>
+            <a:ext cx="64008" cy="804672"/>
+          </a:xfrm>
+          <a:prstGeom prst="rect">
+            <a:avLst/>
+          </a:prstGeom>
+          <a:solidFill>
+            <a:srgbClr val="B23A48"/>
+          </a:solidFill>
+          <a:ln/>
+        </p:spPr>
+      </p:sp>
+      <p:sp>
+        <p:nvSpPr>
+          <p:cNvPr id="11" name="Text 9"/>
+          <p:cNvSpPr/>
+          <p:nvPr/>
+        </p:nvSpPr>
+        <p:spPr>
+          <a:xfrm>
+            <a:off x="841248" y="2633472"/>
+            <a:ext cx="7589520" cy="274320"/>
+          </a:xfrm>
+          <a:prstGeom prst="rect">
+            <a:avLst/>
+          </a:prstGeom>
+          <a:noFill/>
+          <a:ln/>
+        </p:spPr>
+        <p:txBody>
+          <a:bodyPr wrap="square" rtlCol="0" anchor="ctr"/>
+          <a:lstStyle/>
+          <a:p>
+            <a:pPr indent="0" marL="0">
+              <a:buNone/>
+            </a:pPr>
+            <a:r>
+              <a:rPr lang="en-US" sz="1400" b="1" dirty="0">
+                <a:solidFill>
+                  <a:srgbClr val="FFFFFF"/>
+                </a:solidFill>
+                <a:latin typeface="Calibri" pitchFamily="34" charset="0"/>
+                <a:ea typeface="Calibri" pitchFamily="34" charset="-122"/>
+                <a:cs typeface="Calibri" pitchFamily="34" charset="-120"/>
+              </a:rPr>
+              <a:t>宛先が Paused のまま、送信は成功していた</a:t>
+            </a:r>
+            <a:endParaRPr lang="en-US" sz="1400" dirty="0"/>
+          </a:p>
+        </p:txBody>
+      </p:sp>
+      <p:sp>
+        <p:nvSpPr>
+          <p:cNvPr id="12" name="Text 10"/>
+          <p:cNvSpPr/>
+          <p:nvPr/>
+        </p:nvSpPr>
+        <p:spPr>
+          <a:xfrm>
+            <a:off x="841248" y="2907792"/>
+            <a:ext cx="7589520" cy="420624"/>
+          </a:xfrm>
+          <a:prstGeom prst="rect">
+            <a:avLst/>
+          </a:prstGeom>
+          <a:noFill/>
+          <a:ln/>
+        </p:spPr>
+        <p:txBody>
+          <a:bodyPr wrap="square" rtlCol="0" anchor="ctr"/>
+          <a:lstStyle/>
+          <a:p>
+            <a:pPr indent="0" marL="0">
+              <a:lnSpc>
+                <a:spcPts val="1500"/>
+              </a:lnSpc>
+              <a:buNone/>
+            </a:pPr>
+            <a:r>
+              <a:rPr lang="en-US" sz="1100" dirty="0">
+                <a:solidFill>
+                  <a:srgbClr val="ECE2D0"/>
+                </a:solidFill>
+                <a:latin typeface="Calibri" pitchFamily="34" charset="0"/>
+                <a:ea typeface="Calibri" pitchFamily="34" charset="-122"/>
+                <a:cs typeface="Calibri" pitchFamily="34" charset="-120"/>
+              </a:rPr>
+              <a:t>Event Hub は正常に受理し、アプリは「送信済み」を記録。</a:t>
+            </a:r>
+            <a:endParaRPr lang="en-US" sz="1100" dirty="0"/>
+          </a:p>
+          <a:p>
+            <a:pPr indent="0" marL="0">
+              <a:lnSpc>
+                <a:spcPts val="1500"/>
+              </a:lnSpc>
+              <a:buNone/>
+            </a:pPr>
+            <a:r>
+              <a:rPr lang="en-US" sz="1100" dirty="0">
+                <a:solidFill>
+                  <a:srgbClr val="ECE2D0"/>
+                </a:solidFill>
+                <a:latin typeface="Calibri" pitchFamily="34" charset="0"/>
+                <a:ea typeface="Calibri" pitchFamily="34" charset="-122"/>
+                <a:cs typeface="Calibri" pitchFamily="34" charset="-120"/>
+              </a:rPr>
+              <a:t>3日分のデータが静かに消えた。</a:t>
+            </a:r>
+            <a:endParaRPr lang="en-US" sz="1100" dirty="0"/>
+          </a:p>
+        </p:txBody>
+      </p:sp>
+      <p:sp>
+        <p:nvSpPr>
+          <p:cNvPr id="13" name="Shape 11"/>
+          <p:cNvSpPr/>
+          <p:nvPr/>
+        </p:nvSpPr>
+        <p:spPr>
+          <a:xfrm>
+            <a:off x="566928" y="3493008"/>
+            <a:ext cx="8074152" cy="804672"/>
+          </a:xfrm>
+          <a:prstGeom prst="rect">
+            <a:avLst/>
+          </a:prstGeom>
+          <a:solidFill>
+            <a:srgbClr val="3A2C31"/>
+          </a:solidFill>
+          <a:ln/>
+        </p:spPr>
+      </p:sp>
+      <p:sp>
+        <p:nvSpPr>
+          <p:cNvPr id="14" name="Shape 12"/>
+          <p:cNvSpPr/>
+          <p:nvPr/>
+        </p:nvSpPr>
+        <p:spPr>
+          <a:xfrm>
+            <a:off x="566928" y="3493008"/>
+            <a:ext cx="64008" cy="804672"/>
+          </a:xfrm>
+          <a:prstGeom prst="rect">
+            <a:avLst/>
+          </a:prstGeom>
+          <a:solidFill>
+            <a:srgbClr val="B23A48"/>
+          </a:solidFill>
+          <a:ln/>
+        </p:spPr>
+      </p:sp>
+      <p:sp>
+        <p:nvSpPr>
+          <p:cNvPr id="15" name="Text 13"/>
+          <p:cNvSpPr/>
+          <p:nvPr/>
+        </p:nvSpPr>
+        <p:spPr>
+          <a:xfrm>
+            <a:off x="841248" y="3566160"/>
+            <a:ext cx="7589520" cy="274320"/>
+          </a:xfrm>
+          <a:prstGeom prst="rect">
+            <a:avLst/>
+          </a:prstGeom>
+          <a:noFill/>
+          <a:ln/>
+        </p:spPr>
+        <p:txBody>
+          <a:bodyPr wrap="square" rtlCol="0" anchor="ctr"/>
+          <a:lstStyle/>
+          <a:p>
+            <a:pPr indent="0" marL="0">
+              <a:buNone/>
+            </a:pPr>
+            <a:r>
+              <a:rPr lang="en-US" sz="1400" b="1" dirty="0">
+                <a:solidFill>
+                  <a:srgbClr val="FFFFFF"/>
+                </a:solidFill>
+                <a:latin typeface="Calibri" pitchFamily="34" charset="0"/>
+                <a:ea typeface="Calibri" pitchFamily="34" charset="-122"/>
+                <a:cs typeface="Calibri" pitchFamily="34" charset="-120"/>
+              </a:rPr>
+              <a:t>3Dマスコットが一度も起動していなかった</a:t>
+            </a:r>
+            <a:endParaRPr lang="en-US" sz="1400" dirty="0"/>
+          </a:p>
+        </p:txBody>
+      </p:sp>
+      <p:sp>
+        <p:nvSpPr>
+          <p:cNvPr id="16" name="Text 14"/>
+          <p:cNvSpPr/>
+          <p:nvPr/>
+        </p:nvSpPr>
+        <p:spPr>
+          <a:xfrm>
+            <a:off x="841248" y="3840480"/>
+            <a:ext cx="7589520" cy="420624"/>
+          </a:xfrm>
+          <a:prstGeom prst="rect">
+            <a:avLst/>
+          </a:prstGeom>
+          <a:noFill/>
+          <a:ln/>
+        </p:spPr>
+        <p:txBody>
+          <a:bodyPr wrap="square" rtlCol="0" anchor="ctr"/>
+          <a:lstStyle/>
+          <a:p>
+            <a:pPr indent="0" marL="0">
+              <a:lnSpc>
+                <a:spcPts val="1500"/>
+              </a:lnSpc>
+              <a:buNone/>
+            </a:pPr>
+            <a:r>
+              <a:rPr lang="en-US" sz="1100" dirty="0">
+                <a:solidFill>
+                  <a:srgbClr val="ECE2D0"/>
+                </a:solidFill>
+                <a:latin typeface="Calibri" pitchFamily="34" charset="0"/>
+                <a:ea typeface="Calibri" pitchFamily="34" charset="-122"/>
+                <a:cs typeface="Calibri" pitchFamily="34" charset="-120"/>
+              </a:rPr>
+              <a:t>「動いている」と報告したが、実際は初期化されていなかった。</a:t>
+            </a:r>
+            <a:endParaRPr lang="en-US" sz="1100" dirty="0"/>
+          </a:p>
+          <a:p>
+            <a:pPr indent="0" marL="0">
+              <a:lnSpc>
+                <a:spcPts val="1500"/>
+              </a:lnSpc>
+              <a:buNone/>
+            </a:pPr>
+            <a:r>
+              <a:rPr lang="en-US" sz="1100" dirty="0">
+                <a:solidFill>
+                  <a:srgbClr val="ECE2D0"/>
+                </a:solidFill>
+                <a:latin typeface="Calibri" pitchFamily="34" charset="0"/>
+                <a:ea typeface="Calibri" pitchFamily="34" charset="-122"/>
+                <a:cs typeface="Calibri" pitchFamily="34" charset="-120"/>
+              </a:rPr>
+              <a:t>計測方法そのものが間違っていた。</a:t>
+            </a:r>
+            <a:endParaRPr lang="en-US" sz="1100" dirty="0"/>
+          </a:p>
+        </p:txBody>
+      </p:sp>
+      <p:sp>
+        <p:nvSpPr>
+          <p:cNvPr id="17" name="Text 15"/>
+          <p:cNvSpPr/>
+          <p:nvPr/>
+        </p:nvSpPr>
+        <p:spPr>
+          <a:xfrm>
+            <a:off x="566928" y="4462272"/>
+            <a:ext cx="8074152" cy="329184"/>
+          </a:xfrm>
+          <a:prstGeom prst="rect">
+            <a:avLst/>
+          </a:prstGeom>
+          <a:noFill/>
+          <a:ln/>
+        </p:spPr>
+        <p:txBody>
+          <a:bodyPr wrap="square" rtlCol="0" anchor="ctr"/>
+          <a:lstStyle/>
+          <a:p>
+            <a:pPr indent="0" marL="0">
+              <a:buNone/>
+            </a:pPr>
+            <a:r>
+              <a:rPr lang="en-US" sz="1300" b="1" i="1" dirty="0">
+                <a:solidFill>
+                  <a:srgbClr val="A26769"/>
+                </a:solidFill>
+                <a:latin typeface="Calibri" pitchFamily="34" charset="0"/>
+                <a:ea typeface="Calibri" pitchFamily="34" charset="-122"/>
+                <a:cs typeface="Calibri" pitchFamily="34" charset="-120"/>
+              </a:rPr>
+              <a:t>「送信成功」は「到達」ではない。届いた側を見ないと気づけない。</a:t>
+            </a:r>
+            <a:endParaRPr lang="en-US" sz="1300" dirty="0"/>
+          </a:p>
+        </p:txBody>
+      </p:sp>
+    </p:spTree>
+  </p:cSld>
+  <p:clrMapOvr>
+    <a:masterClrMapping/>
+  </p:clrMapOvr>
+</p:sld>
+</file>
+
+<file path=ppt/slides/slide11.xml><?xml version="1.0" encoding="utf-8"?>
+<p:sld xmlns:a="http://schemas.openxmlformats.org/drawingml/2006/main" xmlns:r="http://schemas.openxmlformats.org/officeDocument/2006/relationships" xmlns:p="http://schemas.openxmlformats.org/presentationml/2006/main">
+  <p:cSld name="Slide 11">
+    <p:bg>
+      <p:bgPr>
+        <a:solidFill>
+          <a:srgbClr val="FFFFFF"/>
+        </a:solidFill>
+      </p:bgPr>
+    </p:bg>
+    <p:spTree>
+      <p:nvGrpSpPr>
+        <p:cNvPr id="1" name=""/>
+        <p:cNvGrpSpPr/>
+        <p:nvPr/>
+      </p:nvGrpSpPr>
+      <p:grpSpPr>
+        <a:xfrm>
+          <a:off x="0" y="0"/>
+          <a:ext cx="0" cy="0"/>
+          <a:chOff x="0" y="0"/>
+          <a:chExt cx="0" cy="0"/>
+        </a:xfrm>
+      </p:grpSpPr>
+      <p:sp>
+        <p:nvSpPr>
+          <p:cNvPr id="2" name="Shape 0"/>
+          <p:cNvSpPr/>
+          <p:nvPr/>
+        </p:nvSpPr>
+        <p:spPr>
+          <a:xfrm>
+            <a:off x="0" y="0"/>
+            <a:ext cx="164592" cy="5143500"/>
+          </a:xfrm>
+          <a:prstGeom prst="rect">
+            <a:avLst/>
+          </a:prstGeom>
+          <a:solidFill>
+            <a:srgbClr val="6D2E46"/>
+          </a:solidFill>
+          <a:ln/>
+        </p:spPr>
+      </p:sp>
+      <p:sp>
+        <p:nvSpPr>
+          <p:cNvPr id="3" name="Text 1"/>
+          <p:cNvSpPr/>
+          <p:nvPr/>
+        </p:nvSpPr>
+        <p:spPr>
+          <a:xfrm>
+            <a:off x="566928" y="384048"/>
+            <a:ext cx="7955280" cy="658368"/>
+          </a:xfrm>
+          <a:prstGeom prst="rect">
+            <a:avLst/>
+          </a:prstGeom>
+          <a:noFill/>
+          <a:ln/>
+        </p:spPr>
+        <p:txBody>
+          <a:bodyPr wrap="square" rtlCol="0" anchor="ctr"/>
+          <a:lstStyle/>
+          <a:p>
+            <a:pPr indent="0" marL="0">
+              <a:buNone/>
+            </a:pPr>
+            <a:r>
+              <a:rPr lang="en-US" sz="3400" b="1" dirty="0">
+                <a:solidFill>
+                  <a:srgbClr val="2B1F24"/>
+                </a:solidFill>
+                <a:latin typeface="Georgia" pitchFamily="34" charset="0"/>
+                <a:ea typeface="Georgia" pitchFamily="34" charset="-122"/>
+                <a:cs typeface="Georgia" pitchFamily="34" charset="-120"/>
+              </a:rPr>
+              <a:t>見る人と、使う人で画面を分ける</a:t>
+            </a:r>
+            <a:endParaRPr lang="en-US" sz="3400" dirty="0"/>
+          </a:p>
+        </p:txBody>
+      </p:sp>
+      <p:sp>
+        <p:nvSpPr>
+          <p:cNvPr id="4" name="Text 2"/>
+          <p:cNvSpPr/>
+          <p:nvPr/>
+        </p:nvSpPr>
+        <p:spPr>
+          <a:xfrm>
+            <a:off x="566928" y="1042416"/>
+            <a:ext cx="7955280" cy="329184"/>
+          </a:xfrm>
+          <a:prstGeom prst="rect">
+            <a:avLst/>
+          </a:prstGeom>
+          <a:noFill/>
+          <a:ln/>
+        </p:spPr>
+        <p:txBody>
+          <a:bodyPr wrap="square" rtlCol="0" anchor="ctr"/>
+          <a:lstStyle/>
+          <a:p>
+            <a:pPr indent="0" marL="0">
+              <a:buNone/>
+            </a:pPr>
+            <a:r>
+              <a:rPr lang="en-US" sz="1400" dirty="0">
+                <a:solidFill>
+                  <a:srgbClr val="A26769"/>
+                </a:solidFill>
+                <a:latin typeface="Calibri" pitchFamily="34" charset="0"/>
+                <a:ea typeface="Calibri" pitchFamily="34" charset="-122"/>
+                <a:cs typeface="Calibri" pitchFamily="34" charset="-120"/>
+              </a:rPr>
+              <a:t>必要な情報がまったく違うため</a:t>
+            </a:r>
+            <a:endParaRPr lang="en-US" sz="1400" dirty="0"/>
+          </a:p>
+        </p:txBody>
+      </p:sp>
+      <p:sp>
+        <p:nvSpPr>
+          <p:cNvPr id="5" name="Shape 3"/>
+          <p:cNvSpPr/>
+          <p:nvPr/>
+        </p:nvSpPr>
+        <p:spPr>
+          <a:xfrm>
+            <a:off x="493776" y="1554480"/>
+            <a:ext cx="4078224" cy="2587752"/>
+          </a:xfrm>
+          <a:prstGeom prst="rect">
+            <a:avLst/>
+          </a:prstGeom>
+          <a:solidFill>
+            <a:srgbClr val="ECE2D0"/>
+          </a:solidFill>
+          <a:ln/>
+        </p:spPr>
+      </p:sp>
+      <p:pic>
+        <p:nvPicPr>
+          <p:cNvPr id="6" name="Image 0" descr="C:\Users\msoga\OneDrive - Smart Designer\Projects\見守り隊\docs\images\06-one-touch.png">    </p:cNvPr>
+          <p:cNvPicPr>
+            <a:picLocks noChangeAspect="1"/>
+          </p:cNvPicPr>
+          <p:nvPr/>
+        </p:nvPicPr>
+        <p:blipFill>
+          <a:blip r:embed="rId1"/>
+          <a:stretch>
+            <a:fillRect/>
+          </a:stretch>
+        </p:blipFill>
+        <p:spPr>
+          <a:xfrm>
+            <a:off x="566928" y="1627632"/>
+            <a:ext cx="3931920" cy="2441448"/>
+          </a:xfrm>
+          <a:prstGeom prst="rect">
+            <a:avLst/>
+          </a:prstGeom>
+        </p:spPr>
+      </p:pic>
+      <p:sp>
+        <p:nvSpPr>
+          <p:cNvPr id="7" name="Text 4"/>
+          <p:cNvSpPr/>
+          <p:nvPr/>
+        </p:nvSpPr>
+        <p:spPr>
+          <a:xfrm>
+            <a:off x="493776" y="4187952"/>
+            <a:ext cx="4078224" cy="274320"/>
+          </a:xfrm>
+          <a:prstGeom prst="rect">
+            <a:avLst/>
+          </a:prstGeom>
+          <a:noFill/>
+          <a:ln/>
+        </p:spPr>
+        <p:txBody>
+          <a:bodyPr wrap="square" rtlCol="0" anchor="ctr"/>
+          <a:lstStyle/>
+          <a:p>
+            <a:pPr algn="ctr" indent="0" marL="0">
+              <a:buNone/>
+            </a:pPr>
+            <a:r>
+              <a:rPr lang="en-US" sz="1000" dirty="0">
+                <a:solidFill>
+                  <a:srgbClr val="8A7A80"/>
+                </a:solidFill>
+                <a:latin typeface="Calibri" pitchFamily="34" charset="0"/>
+                <a:ea typeface="Calibri" pitchFamily="34" charset="-122"/>
+                <a:cs typeface="Calibri" pitchFamily="34" charset="-120"/>
+              </a:rPr>
+              <a:t>利用者本人が使う /one-touch 画面</a:t>
+            </a:r>
+            <a:endParaRPr lang="en-US" sz="1000" dirty="0"/>
+          </a:p>
+        </p:txBody>
+      </p:sp>
+      <p:sp>
+        <p:nvSpPr>
+          <p:cNvPr id="8" name="Text 5"/>
+          <p:cNvSpPr/>
+          <p:nvPr/>
+        </p:nvSpPr>
+        <p:spPr>
+          <a:xfrm>
+            <a:off x="4864608" y="1691640"/>
+            <a:ext cx="3794760" cy="2560320"/>
+          </a:xfrm>
+          <a:prstGeom prst="rect">
+            <a:avLst/>
+          </a:prstGeom>
+          <a:noFill/>
+          <a:ln/>
+        </p:spPr>
+        <p:txBody>
+          <a:bodyPr wrap="square" rtlCol="0" anchor="ctr"/>
+          <a:lstStyle/>
+          <a:p>
+            <a:pPr indent="0" marL="0">
+              <a:lnSpc>
+                <a:spcPts val="1900"/>
+              </a:lnSpc>
+              <a:buNone/>
+            </a:pPr>
+            <a:r>
+              <a:rPr lang="en-US" sz="1600" b="1" dirty="0">
+                <a:solidFill>
+                  <a:srgbClr val="6D2E46"/>
+                </a:solidFill>
+                <a:latin typeface="Georgia" pitchFamily="34" charset="0"/>
+                <a:ea typeface="Georgia" pitchFamily="34" charset="-122"/>
+                <a:cs typeface="Georgia" pitchFamily="34" charset="-120"/>
+              </a:rPr>
+              <a:t>高齢の利用者本人が使う画面
+</a:t>
+            </a:r>
+            <a:pPr indent="0" marL="0">
+              <a:lnSpc>
+                <a:spcPts val="1900"/>
+              </a:lnSpc>
+              <a:buNone/>
+            </a:pPr>
+            <a:r>
+              <a:rPr lang="en-US" sz="1250" dirty="0">
+                <a:solidFill>
+                  <a:srgbClr val="2B1F24"/>
+                </a:solidFill>
+                <a:latin typeface="Calibri" pitchFamily="34" charset="0"/>
+                <a:ea typeface="Calibri" pitchFamily="34" charset="-122"/>
+                <a:cs typeface="Calibri" pitchFamily="34" charset="-120"/>
+              </a:rPr>
+              <a:t>文字とボタンを大きくした専用画面（/one-touch）を用意。
+見守る側のダッシュボードとは分けている。
+</a:t>
+            </a:r>
+            <a:pPr indent="0" marL="0">
+              <a:lnSpc>
+                <a:spcPts val="1900"/>
+              </a:lnSpc>
+              <a:buNone/>
+            </a:pPr>
+            <a:r>
+              <a:rPr lang="en-US" sz="1600" b="1" dirty="0">
+                <a:solidFill>
+                  <a:srgbClr val="6D2E46"/>
+                </a:solidFill>
+                <a:latin typeface="Georgia" pitchFamily="34" charset="0"/>
+                <a:ea typeface="Georgia" pitchFamily="34" charset="-122"/>
+                <a:cs typeface="Georgia" pitchFamily="34" charset="-120"/>
+              </a:rPr>
+              <a:t>家族はLINEで聞くだけ
+</a:t>
+            </a:r>
+            <a:pPr indent="0" marL="0">
+              <a:lnSpc>
+                <a:spcPts val="1900"/>
+              </a:lnSpc>
+              <a:buNone/>
+            </a:pPr>
+            <a:r>
+              <a:rPr lang="en-US" sz="1250" dirty="0">
+                <a:solidFill>
+                  <a:srgbClr val="2B1F24"/>
+                </a:solidFill>
+                <a:latin typeface="Calibri" pitchFamily="34" charset="0"/>
+                <a:ea typeface="Calibri" pitchFamily="34" charset="-122"/>
+                <a:cs typeface="Calibri" pitchFamily="34" charset="-120"/>
+              </a:rPr>
+              <a:t>専用アプリのインストールは不要。</a:t>
+            </a:r>
+            <a:endParaRPr lang="en-US" sz="1600" dirty="0"/>
+          </a:p>
+          <a:p>
+            <a:pPr indent="0" marL="0">
+              <a:lnSpc>
+                <a:spcPts val="1900"/>
+              </a:lnSpc>
+              <a:buNone/>
+            </a:pPr>
+            <a:r>
+              <a:rPr lang="en-US" sz="1250" dirty="0">
+                <a:solidFill>
+                  <a:srgbClr val="2B1F24"/>
+                </a:solidFill>
+                <a:latin typeface="Calibri" pitchFamily="34" charset="0"/>
+                <a:ea typeface="Calibri" pitchFamily="34" charset="-122"/>
+                <a:cs typeface="Calibri" pitchFamily="34" charset="-120"/>
+              </a:rPr>
+              <a:t>「今日のお母さんどう？」と聞けば、</a:t>
+            </a:r>
+            <a:endParaRPr lang="en-US" sz="1600" dirty="0"/>
+          </a:p>
+          <a:p>
+            <a:pPr indent="0" marL="0">
+              <a:lnSpc>
+                <a:spcPts val="1900"/>
+              </a:lnSpc>
+              <a:buNone/>
+            </a:pPr>
+            <a:r>
+              <a:rPr lang="en-US" sz="1250" dirty="0">
+                <a:solidFill>
+                  <a:srgbClr val="2B1F24"/>
+                </a:solidFill>
+                <a:latin typeface="Calibri" pitchFamily="34" charset="0"/>
+                <a:ea typeface="Calibri" pitchFamily="34" charset="-122"/>
+                <a:cs typeface="Calibri" pitchFamily="34" charset="-120"/>
+              </a:rPr>
+              <a:t>蓄積された生活データから答える</a:t>
+            </a:r>
+            <a:endParaRPr lang="en-US" sz="1600" dirty="0"/>
+          </a:p>
+        </p:txBody>
+      </p:sp>
+      <p:sp>
+        <p:nvSpPr>
+          <p:cNvPr id="9" name="Text 6"/>
+          <p:cNvSpPr/>
+          <p:nvPr/>
+        </p:nvSpPr>
+        <p:spPr>
+          <a:xfrm>
+            <a:off x="411480" y="4759452"/>
+            <a:ext cx="3657600" cy="256032"/>
+          </a:xfrm>
+          <a:prstGeom prst="rect">
+            <a:avLst/>
+          </a:prstGeom>
+          <a:noFill/>
+          <a:ln/>
+        </p:spPr>
+        <p:txBody>
+          <a:bodyPr wrap="square" rtlCol="0" anchor="ctr"/>
+          <a:lstStyle/>
+          <a:p>
+            <a:pPr indent="0" marL="0">
+              <a:buNone/>
+            </a:pPr>
+            <a:r>
+              <a:rPr lang="en-US" sz="1000" dirty="0">
+                <a:solidFill>
+                  <a:srgbClr val="8A7A80"/>
+                </a:solidFill>
+                <a:latin typeface="Calibri" pitchFamily="34" charset="0"/>
+                <a:ea typeface="Calibri" pitchFamily="34" charset="-122"/>
+                <a:cs typeface="Calibri" pitchFamily="34" charset="-120"/>
+              </a:rPr>
+              <a:t>見守り隊 / CareRoute AI</a:t>
+            </a:r>
+            <a:endParaRPr lang="en-US" sz="1000" dirty="0"/>
+          </a:p>
+        </p:txBody>
+      </p:sp>
+      <p:sp>
+        <p:nvSpPr>
+          <p:cNvPr id="10" name="Text 7"/>
+          <p:cNvSpPr/>
+          <p:nvPr/>
+        </p:nvSpPr>
+        <p:spPr>
+          <a:xfrm>
+            <a:off x="8366760" y="4759452"/>
+            <a:ext cx="365760" cy="256032"/>
+          </a:xfrm>
+          <a:prstGeom prst="rect">
+            <a:avLst/>
+          </a:prstGeom>
+          <a:noFill/>
+          <a:ln/>
+        </p:spPr>
+        <p:txBody>
+          <a:bodyPr wrap="square" rtlCol="0" anchor="ctr"/>
+          <a:lstStyle/>
+          <a:p>
+            <a:pPr algn="r" indent="0" marL="0">
+              <a:buNone/>
+            </a:pPr>
+            <a:r>
+              <a:rPr lang="en-US" sz="1000" dirty="0">
+                <a:solidFill>
+                  <a:srgbClr val="8A7A80"/>
+                </a:solidFill>
+                <a:latin typeface="Calibri" pitchFamily="34" charset="0"/>
+                <a:ea typeface="Calibri" pitchFamily="34" charset="-122"/>
+                <a:cs typeface="Calibri" pitchFamily="34" charset="-120"/>
+              </a:rPr>
+              <a:t>11</a:t>
+            </a:r>
+            <a:endParaRPr lang="en-US" sz="1000" dirty="0"/>
+          </a:p>
+        </p:txBody>
+      </p:sp>
+    </p:spTree>
+  </p:cSld>
+  <p:clrMapOvr>
+    <a:masterClrMapping/>
+  </p:clrMapOvr>
+</p:sld>
+</file>
+
+<file path=ppt/slides/slide12.xml><?xml version="1.0" encoding="utf-8"?>
+<p:sld xmlns:a="http://schemas.openxmlformats.org/drawingml/2006/main" xmlns:r="http://schemas.openxmlformats.org/officeDocument/2006/relationships" xmlns:p="http://schemas.openxmlformats.org/presentationml/2006/main">
+  <p:cSld name="Slide 12">
+    <p:bg>
+      <p:bgPr>
+        <a:solidFill>
+          <a:srgbClr val="FFFFFF"/>
+        </a:solidFill>
+      </p:bgPr>
+    </p:bg>
+    <p:spTree>
+      <p:nvGrpSpPr>
+        <p:cNvPr id="1" name=""/>
+        <p:cNvGrpSpPr/>
+        <p:nvPr/>
+      </p:nvGrpSpPr>
+      <p:grpSpPr>
+        <a:xfrm>
+          <a:off x="0" y="0"/>
+          <a:ext cx="0" cy="0"/>
+          <a:chOff x="0" y="0"/>
+          <a:chExt cx="0" cy="0"/>
+        </a:xfrm>
+      </p:grpSpPr>
+      <p:sp>
+        <p:nvSpPr>
+          <p:cNvPr id="2" name="Shape 0"/>
+          <p:cNvSpPr/>
+          <p:nvPr/>
+        </p:nvSpPr>
+        <p:spPr>
+          <a:xfrm>
+            <a:off x="0" y="0"/>
+            <a:ext cx="164592" cy="5143500"/>
+          </a:xfrm>
+          <a:prstGeom prst="rect">
+            <a:avLst/>
+          </a:prstGeom>
+          <a:solidFill>
+            <a:srgbClr val="6D2E46"/>
+          </a:solidFill>
+          <a:ln/>
+        </p:spPr>
+      </p:sp>
+      <p:sp>
+        <p:nvSpPr>
+          <p:cNvPr id="3" name="Text 1"/>
+          <p:cNvSpPr/>
+          <p:nvPr/>
+        </p:nvSpPr>
+        <p:spPr>
+          <a:xfrm>
+            <a:off x="566928" y="384048"/>
+            <a:ext cx="7955280" cy="658368"/>
+          </a:xfrm>
+          <a:prstGeom prst="rect">
+            <a:avLst/>
+          </a:prstGeom>
+          <a:noFill/>
+          <a:ln/>
+        </p:spPr>
+        <p:txBody>
+          <a:bodyPr wrap="square" rtlCol="0" anchor="ctr"/>
+          <a:lstStyle/>
+          <a:p>
+            <a:pPr indent="0" marL="0">
+              <a:buNone/>
+            </a:pPr>
+            <a:r>
+              <a:rPr lang="en-US" sz="3400" b="1" dirty="0">
+                <a:solidFill>
+                  <a:srgbClr val="2B1F24"/>
+                </a:solidFill>
+                <a:latin typeface="Georgia" pitchFamily="34" charset="0"/>
+                <a:ea typeface="Georgia" pitchFamily="34" charset="-122"/>
+                <a:cs typeface="Georgia" pitchFamily="34" charset="-120"/>
+              </a:rPr>
+              <a:t>誰が、いくら払うのか</a:t>
+            </a:r>
+            <a:endParaRPr lang="en-US" sz="3400" dirty="0"/>
+          </a:p>
+        </p:txBody>
+      </p:sp>
+      <p:sp>
+        <p:nvSpPr>
+          <p:cNvPr id="4" name="Text 2"/>
+          <p:cNvSpPr/>
+          <p:nvPr/>
+        </p:nvSpPr>
+        <p:spPr>
+          <a:xfrm>
+            <a:off x="566928" y="1042416"/>
+            <a:ext cx="7955280" cy="329184"/>
+          </a:xfrm>
+          <a:prstGeom prst="rect">
+            <a:avLst/>
+          </a:prstGeom>
+          <a:noFill/>
+          <a:ln/>
+        </p:spPr>
+        <p:txBody>
+          <a:bodyPr wrap="square" rtlCol="0" anchor="ctr"/>
+          <a:lstStyle/>
+          <a:p>
+            <a:pPr indent="0" marL="0">
+              <a:buNone/>
+            </a:pPr>
+            <a:r>
+              <a:rPr lang="en-US" sz="1400" dirty="0">
+                <a:solidFill>
+                  <a:srgbClr val="A26769"/>
+                </a:solidFill>
+                <a:latin typeface="Calibri" pitchFamily="34" charset="0"/>
+                <a:ea typeface="Calibri" pitchFamily="34" charset="-122"/>
+                <a:cs typeface="Calibri" pitchFamily="34" charset="-120"/>
+              </a:rPr>
+              <a:t>カメラを置けなかった家庭が、そのまま顧客になる</a:t>
+            </a:r>
+            <a:endParaRPr lang="en-US" sz="1400" dirty="0"/>
+          </a:p>
+        </p:txBody>
+      </p:sp>
+      <p:sp>
+        <p:nvSpPr>
+          <p:cNvPr id="5" name="Shape 3"/>
+          <p:cNvSpPr/>
+          <p:nvPr/>
+        </p:nvSpPr>
+        <p:spPr>
+          <a:xfrm>
+            <a:off x="566928" y="1536192"/>
+            <a:ext cx="2514600" cy="1371600"/>
+          </a:xfrm>
+          <a:prstGeom prst="rect">
+            <a:avLst/>
+          </a:prstGeom>
+          <a:solidFill>
+            <a:srgbClr val="ECE2D0"/>
+          </a:solidFill>
+          <a:ln/>
+        </p:spPr>
+      </p:sp>
+      <p:sp>
+        <p:nvSpPr>
+          <p:cNvPr id="6" name="Text 4"/>
+          <p:cNvSpPr/>
+          <p:nvPr/>
+        </p:nvSpPr>
+        <p:spPr>
+          <a:xfrm>
+            <a:off x="658368" y="1682496"/>
+            <a:ext cx="2331720" cy="457200"/>
+          </a:xfrm>
+          <a:prstGeom prst="rect">
+            <a:avLst/>
+          </a:prstGeom>
+          <a:noFill/>
+          <a:ln/>
+        </p:spPr>
+        <p:txBody>
+          <a:bodyPr wrap="square" lIns="0" tIns="0" rIns="0" bIns="0" rtlCol="0" anchor="ctr">
+            <a:normAutofit/>
+          </a:bodyPr>
+          <a:lstStyle/>
+          <a:p>
+            <a:pPr algn="ctr" indent="0" marL="0">
+              <a:buNone/>
+            </a:pPr>
+            <a:r>
+              <a:rPr lang="en-US" sz="2700" b="1" dirty="0">
+                <a:solidFill>
+                  <a:srgbClr val="6D2E46"/>
+                </a:solidFill>
+                <a:latin typeface="Georgia" pitchFamily="34" charset="0"/>
+                <a:ea typeface="Georgia" pitchFamily="34" charset="-122"/>
+                <a:cs typeface="Georgia" pitchFamily="34" charset="-120"/>
+              </a:rPr>
+              <a:t>約700万</a:t>
+            </a:r>
+            <a:endParaRPr lang="en-US" sz="2700" dirty="0"/>
+          </a:p>
+        </p:txBody>
+      </p:sp>
+      <p:sp>
+        <p:nvSpPr>
+          <p:cNvPr id="7" name="Text 5"/>
+          <p:cNvSpPr/>
+          <p:nvPr/>
+        </p:nvSpPr>
+        <p:spPr>
+          <a:xfrm>
+            <a:off x="694944" y="2157984"/>
+            <a:ext cx="2258568" cy="219456"/>
+          </a:xfrm>
+          <a:prstGeom prst="rect">
+            <a:avLst/>
+          </a:prstGeom>
+          <a:noFill/>
+          <a:ln/>
+        </p:spPr>
+        <p:txBody>
+          <a:bodyPr wrap="square" lIns="0" tIns="0" rIns="0" bIns="0" rtlCol="0" anchor="ctr"/>
+          <a:lstStyle/>
+          <a:p>
+            <a:pPr algn="ctr" indent="0" marL="0">
+              <a:buNone/>
+            </a:pPr>
+            <a:r>
+              <a:rPr lang="en-US" sz="1100" dirty="0">
+                <a:solidFill>
+                  <a:srgbClr val="A26769"/>
+                </a:solidFill>
+                <a:latin typeface="Calibri" pitchFamily="34" charset="0"/>
+                <a:ea typeface="Calibri" pitchFamily="34" charset="-122"/>
+                <a:cs typeface="Calibri" pitchFamily="34" charset="-120"/>
+              </a:rPr>
+              <a:t>世帯</a:t>
+            </a:r>
+            <a:endParaRPr lang="en-US" sz="1100" dirty="0"/>
+          </a:p>
+        </p:txBody>
+      </p:sp>
+      <p:sp>
+        <p:nvSpPr>
+          <p:cNvPr id="8" name="Text 6"/>
+          <p:cNvSpPr/>
+          <p:nvPr/>
+        </p:nvSpPr>
+        <p:spPr>
+          <a:xfrm>
+            <a:off x="694944" y="2414016"/>
+            <a:ext cx="2258568" cy="420624"/>
+          </a:xfrm>
+          <a:prstGeom prst="rect">
+            <a:avLst/>
+          </a:prstGeom>
+          <a:noFill/>
+          <a:ln/>
+        </p:spPr>
+        <p:txBody>
+          <a:bodyPr wrap="square" lIns="0" tIns="0" rIns="0" bIns="0" rtlCol="0" anchor="ctr"/>
+          <a:lstStyle/>
+          <a:p>
+            <a:pPr algn="ctr" indent="0" marL="0">
+              <a:lnSpc>
+                <a:spcPts val="1200"/>
+              </a:lnSpc>
+              <a:buNone/>
+            </a:pPr>
+            <a:r>
+              <a:rPr lang="en-US" sz="950" dirty="0">
+                <a:solidFill>
+                  <a:srgbClr val="8A7A80"/>
+                </a:solidFill>
+                <a:latin typeface="Calibri" pitchFamily="34" charset="0"/>
+                <a:ea typeface="Calibri" pitchFamily="34" charset="-122"/>
+                <a:cs typeface="Calibri" pitchFamily="34" charset="-120"/>
+              </a:rPr>
+              <a:t>65歳以上の一人暮らし</a:t>
+            </a:r>
+            <a:endParaRPr lang="en-US" sz="950" dirty="0"/>
+          </a:p>
+          <a:p>
+            <a:pPr algn="ctr" indent="0" marL="0">
+              <a:lnSpc>
+                <a:spcPts val="1200"/>
+              </a:lnSpc>
+              <a:buNone/>
+            </a:pPr>
+            <a:r>
+              <a:rPr lang="en-US" sz="950" dirty="0">
+                <a:solidFill>
+                  <a:srgbClr val="8A7A80"/>
+                </a:solidFill>
+                <a:latin typeface="Calibri" pitchFamily="34" charset="0"/>
+                <a:ea typeface="Calibri" pitchFamily="34" charset="-122"/>
+                <a:cs typeface="Calibri" pitchFamily="34" charset="-120"/>
+              </a:rPr>
+              <a:t>（内閣府 高齢社会白書）</a:t>
+            </a:r>
+            <a:endParaRPr lang="en-US" sz="950" dirty="0"/>
+          </a:p>
+        </p:txBody>
+      </p:sp>
+      <p:sp>
+        <p:nvSpPr>
+          <p:cNvPr id="9" name="Shape 7"/>
+          <p:cNvSpPr/>
+          <p:nvPr/>
+        </p:nvSpPr>
+        <p:spPr>
+          <a:xfrm>
+            <a:off x="3291840" y="1536192"/>
+            <a:ext cx="2514600" cy="1371600"/>
+          </a:xfrm>
+          <a:prstGeom prst="rect">
+            <a:avLst/>
+          </a:prstGeom>
+          <a:solidFill>
+            <a:srgbClr val="ECE2D0"/>
+          </a:solidFill>
+          <a:ln/>
+        </p:spPr>
+      </p:sp>
+      <p:sp>
+        <p:nvSpPr>
+          <p:cNvPr id="10" name="Text 8"/>
+          <p:cNvSpPr/>
+          <p:nvPr/>
+        </p:nvSpPr>
+        <p:spPr>
+          <a:xfrm>
+            <a:off x="3383280" y="1682496"/>
+            <a:ext cx="2331720" cy="457200"/>
+          </a:xfrm>
+          <a:prstGeom prst="rect">
+            <a:avLst/>
+          </a:prstGeom>
+          <a:noFill/>
+          <a:ln/>
+        </p:spPr>
+        <p:txBody>
+          <a:bodyPr wrap="square" lIns="0" tIns="0" rIns="0" bIns="0" rtlCol="0" anchor="ctr">
+            <a:normAutofit/>
+          </a:bodyPr>
+          <a:lstStyle/>
+          <a:p>
+            <a:pPr algn="ctr" indent="0" marL="0">
+              <a:buNone/>
+            </a:pPr>
+            <a:r>
+              <a:rPr lang="en-US" sz="1900" b="1" dirty="0">
+                <a:solidFill>
+                  <a:srgbClr val="6D2E46"/>
+                </a:solidFill>
+                <a:latin typeface="Georgia" pitchFamily="34" charset="0"/>
+                <a:ea typeface="Georgia" pitchFamily="34" charset="-122"/>
+                <a:cs typeface="Georgia" pitchFamily="34" charset="-120"/>
+              </a:rPr>
+              <a:t>3,000〜5,000</a:t>
+            </a:r>
+            <a:endParaRPr lang="en-US" sz="1900" dirty="0"/>
+          </a:p>
+        </p:txBody>
+      </p:sp>
+      <p:sp>
+        <p:nvSpPr>
+          <p:cNvPr id="11" name="Text 9"/>
+          <p:cNvSpPr/>
+          <p:nvPr/>
+        </p:nvSpPr>
+        <p:spPr>
+          <a:xfrm>
+            <a:off x="3419856" y="2157984"/>
+            <a:ext cx="2258568" cy="219456"/>
+          </a:xfrm>
+          <a:prstGeom prst="rect">
+            <a:avLst/>
+          </a:prstGeom>
+          <a:noFill/>
+          <a:ln/>
+        </p:spPr>
+        <p:txBody>
+          <a:bodyPr wrap="square" lIns="0" tIns="0" rIns="0" bIns="0" rtlCol="0" anchor="ctr"/>
+          <a:lstStyle/>
+          <a:p>
+            <a:pPr algn="ctr" indent="0" marL="0">
+              <a:buNone/>
+            </a:pPr>
+            <a:r>
+              <a:rPr lang="en-US" sz="1100" dirty="0">
+                <a:solidFill>
+                  <a:srgbClr val="A26769"/>
+                </a:solidFill>
+                <a:latin typeface="Calibri" pitchFamily="34" charset="0"/>
+                <a:ea typeface="Calibri" pitchFamily="34" charset="-122"/>
+                <a:cs typeface="Calibri" pitchFamily="34" charset="-120"/>
+              </a:rPr>
+              <a:t>円 / 月</a:t>
+            </a:r>
+            <a:endParaRPr lang="en-US" sz="1100" dirty="0"/>
+          </a:p>
+        </p:txBody>
+      </p:sp>
+      <p:sp>
+        <p:nvSpPr>
+          <p:cNvPr id="12" name="Text 10"/>
+          <p:cNvSpPr/>
+          <p:nvPr/>
+        </p:nvSpPr>
+        <p:spPr>
+          <a:xfrm>
+            <a:off x="3419856" y="2414016"/>
+            <a:ext cx="2258568" cy="420624"/>
+          </a:xfrm>
+          <a:prstGeom prst="rect">
+            <a:avLst/>
+          </a:prstGeom>
+          <a:noFill/>
+          <a:ln/>
+        </p:spPr>
+        <p:txBody>
+          <a:bodyPr wrap="square" lIns="0" tIns="0" rIns="0" bIns="0" rtlCol="0" anchor="ctr"/>
+          <a:lstStyle/>
+          <a:p>
+            <a:pPr algn="ctr" indent="0" marL="0">
+              <a:lnSpc>
+                <a:spcPts val="1200"/>
+              </a:lnSpc>
+              <a:buNone/>
+            </a:pPr>
+            <a:r>
+              <a:rPr lang="en-US" sz="950" dirty="0">
+                <a:solidFill>
+                  <a:srgbClr val="8A7A80"/>
+                </a:solidFill>
+                <a:latin typeface="Calibri" pitchFamily="34" charset="0"/>
+                <a:ea typeface="Calibri" pitchFamily="34" charset="-122"/>
+                <a:cs typeface="Calibri" pitchFamily="34" charset="-120"/>
+              </a:rPr>
+              <a:t>既存のセンサー型</a:t>
+            </a:r>
+            <a:endParaRPr lang="en-US" sz="950" dirty="0"/>
+          </a:p>
+          <a:p>
+            <a:pPr algn="ctr" indent="0" marL="0">
+              <a:lnSpc>
+                <a:spcPts val="1200"/>
+              </a:lnSpc>
+              <a:buNone/>
+            </a:pPr>
+            <a:r>
+              <a:rPr lang="en-US" sz="950" dirty="0">
+                <a:solidFill>
+                  <a:srgbClr val="8A7A80"/>
+                </a:solidFill>
+                <a:latin typeface="Calibri" pitchFamily="34" charset="0"/>
+                <a:ea typeface="Calibri" pitchFamily="34" charset="-122"/>
+                <a:cs typeface="Calibri" pitchFamily="34" charset="-120"/>
+              </a:rPr>
+              <a:t>見守りサービスの相場</a:t>
+            </a:r>
+            <a:endParaRPr lang="en-US" sz="950" dirty="0"/>
+          </a:p>
+        </p:txBody>
+      </p:sp>
+      <p:sp>
+        <p:nvSpPr>
+          <p:cNvPr id="13" name="Shape 11"/>
+          <p:cNvSpPr/>
+          <p:nvPr/>
+        </p:nvSpPr>
+        <p:spPr>
+          <a:xfrm>
+            <a:off x="6016752" y="1536192"/>
+            <a:ext cx="2514600" cy="1371600"/>
+          </a:xfrm>
+          <a:prstGeom prst="rect">
+            <a:avLst/>
+          </a:prstGeom>
+          <a:solidFill>
+            <a:srgbClr val="ECE2D0"/>
+          </a:solidFill>
+          <a:ln/>
+        </p:spPr>
+      </p:sp>
+      <p:sp>
+        <p:nvSpPr>
+          <p:cNvPr id="14" name="Text 12"/>
+          <p:cNvSpPr/>
+          <p:nvPr/>
+        </p:nvSpPr>
+        <p:spPr>
+          <a:xfrm>
+            <a:off x="6108192" y="1682496"/>
+            <a:ext cx="2331720" cy="457200"/>
+          </a:xfrm>
+          <a:prstGeom prst="rect">
+            <a:avLst/>
+          </a:prstGeom>
+          <a:noFill/>
+          <a:ln/>
+        </p:spPr>
+        <p:txBody>
+          <a:bodyPr wrap="square" lIns="0" tIns="0" rIns="0" bIns="0" rtlCol="0" anchor="ctr">
+            <a:normAutofit/>
+          </a:bodyPr>
+          <a:lstStyle/>
+          <a:p>
+            <a:pPr algn="ctr" indent="0" marL="0">
+              <a:buNone/>
+            </a:pPr>
+            <a:r>
+              <a:rPr lang="en-US" sz="2700" b="1" dirty="0">
+                <a:solidFill>
+                  <a:srgbClr val="6D2E46"/>
+                </a:solidFill>
+                <a:latin typeface="Georgia" pitchFamily="34" charset="0"/>
+                <a:ea typeface="Georgia" pitchFamily="34" charset="-122"/>
+                <a:cs typeface="Georgia" pitchFamily="34" charset="-120"/>
+              </a:rPr>
+              <a:t>0</a:t>
+            </a:r>
+            <a:endParaRPr lang="en-US" sz="2700" dirty="0"/>
+          </a:p>
+        </p:txBody>
+      </p:sp>
+      <p:sp>
+        <p:nvSpPr>
+          <p:cNvPr id="15" name="Text 13"/>
+          <p:cNvSpPr/>
+          <p:nvPr/>
+        </p:nvSpPr>
+        <p:spPr>
+          <a:xfrm>
+            <a:off x="6144768" y="2157984"/>
+            <a:ext cx="2258568" cy="219456"/>
+          </a:xfrm>
+          <a:prstGeom prst="rect">
+            <a:avLst/>
+          </a:prstGeom>
+          <a:noFill/>
+          <a:ln/>
+        </p:spPr>
+        <p:txBody>
+          <a:bodyPr wrap="square" lIns="0" tIns="0" rIns="0" bIns="0" rtlCol="0" anchor="ctr"/>
+          <a:lstStyle/>
+          <a:p>
+            <a:pPr algn="ctr" indent="0" marL="0">
+              <a:buNone/>
+            </a:pPr>
+            <a:r>
+              <a:rPr lang="en-US" sz="1100" dirty="0">
+                <a:solidFill>
+                  <a:srgbClr val="A26769"/>
+                </a:solidFill>
+                <a:latin typeface="Calibri" pitchFamily="34" charset="0"/>
+                <a:ea typeface="Calibri" pitchFamily="34" charset="-122"/>
+                <a:cs typeface="Calibri" pitchFamily="34" charset="-120"/>
+              </a:rPr>
+              <a:t>円</a:t>
+            </a:r>
+            <a:endParaRPr lang="en-US" sz="1100" dirty="0"/>
+          </a:p>
+        </p:txBody>
+      </p:sp>
+      <p:sp>
+        <p:nvSpPr>
+          <p:cNvPr id="16" name="Text 14"/>
+          <p:cNvSpPr/>
+          <p:nvPr/>
+        </p:nvSpPr>
+        <p:spPr>
+          <a:xfrm>
+            <a:off x="6144768" y="2414016"/>
+            <a:ext cx="2258568" cy="420624"/>
+          </a:xfrm>
+          <a:prstGeom prst="rect">
+            <a:avLst/>
+          </a:prstGeom>
+          <a:noFill/>
+          <a:ln/>
+        </p:spPr>
+        <p:txBody>
+          <a:bodyPr wrap="square" lIns="0" tIns="0" rIns="0" bIns="0" rtlCol="0" anchor="ctr"/>
+          <a:lstStyle/>
+          <a:p>
+            <a:pPr algn="ctr" indent="0" marL="0">
+              <a:lnSpc>
+                <a:spcPts val="1200"/>
+              </a:lnSpc>
+              <a:buNone/>
+            </a:pPr>
+            <a:r>
+              <a:rPr lang="en-US" sz="950" dirty="0">
+                <a:solidFill>
+                  <a:srgbClr val="8A7A80"/>
+                </a:solidFill>
+                <a:latin typeface="Calibri" pitchFamily="34" charset="0"/>
+                <a:ea typeface="Calibri" pitchFamily="34" charset="-122"/>
+                <a:cs typeface="Calibri" pitchFamily="34" charset="-120"/>
+              </a:rPr>
+              <a:t>新規の見守り機器</a:t>
+            </a:r>
+            <a:endParaRPr lang="en-US" sz="950" dirty="0"/>
+          </a:p>
+          <a:p>
+            <a:pPr algn="ctr" indent="0" marL="0">
+              <a:lnSpc>
+                <a:spcPts val="1200"/>
+              </a:lnSpc>
+              <a:buNone/>
+            </a:pPr>
+            <a:r>
+              <a:rPr lang="en-US" sz="950" dirty="0">
+                <a:solidFill>
+                  <a:srgbClr val="8A7A80"/>
+                </a:solidFill>
+                <a:latin typeface="Calibri" pitchFamily="34" charset="0"/>
+                <a:ea typeface="Calibri" pitchFamily="34" charset="-122"/>
+                <a:cs typeface="Calibri" pitchFamily="34" charset="-120"/>
+              </a:rPr>
+              <a:t>（家電はすでにある）</a:t>
+            </a:r>
+            <a:endParaRPr lang="en-US" sz="950" dirty="0"/>
+          </a:p>
+        </p:txBody>
+      </p:sp>
+      <p:sp>
+        <p:nvSpPr>
+          <p:cNvPr id="17" name="Text 15"/>
+          <p:cNvSpPr/>
+          <p:nvPr/>
+        </p:nvSpPr>
+        <p:spPr>
+          <a:xfrm>
+            <a:off x="566928" y="3017520"/>
+            <a:ext cx="8074152" cy="292608"/>
+          </a:xfrm>
+          <a:prstGeom prst="rect">
+            <a:avLst/>
+          </a:prstGeom>
+          <a:noFill/>
+          <a:ln/>
+        </p:spPr>
+        <p:txBody>
+          <a:bodyPr wrap="square" rtlCol="0" anchor="ctr"/>
+          <a:lstStyle/>
+          <a:p>
+            <a:pPr indent="0" marL="0">
+              <a:buNone/>
+            </a:pPr>
+            <a:r>
+              <a:rPr lang="en-US" sz="1500" b="1" dirty="0">
+                <a:solidFill>
+                  <a:srgbClr val="2B1F24"/>
+                </a:solidFill>
+                <a:latin typeface="Georgia" pitchFamily="34" charset="0"/>
+                <a:ea typeface="Georgia" pitchFamily="34" charset="-122"/>
+                <a:cs typeface="Georgia" pitchFamily="34" charset="-120"/>
+              </a:rPr>
+              <a:t>成立の条件は「安いこと」ではなく、「置けること」</a:t>
+            </a:r>
+            <a:endParaRPr lang="en-US" sz="1500" dirty="0"/>
+          </a:p>
+        </p:txBody>
+      </p:sp>
+      <p:sp>
+        <p:nvSpPr>
+          <p:cNvPr id="18" name="Shape 16"/>
+          <p:cNvSpPr/>
+          <p:nvPr/>
+        </p:nvSpPr>
+        <p:spPr>
+          <a:xfrm>
+            <a:off x="566928" y="3419856"/>
+            <a:ext cx="64008" cy="292608"/>
+          </a:xfrm>
+          <a:prstGeom prst="rect">
+            <a:avLst/>
+          </a:prstGeom>
+          <a:solidFill>
+            <a:srgbClr val="A26769"/>
+          </a:solidFill>
+          <a:ln/>
+        </p:spPr>
+      </p:sp>
+      <p:sp>
+        <p:nvSpPr>
+          <p:cNvPr id="19" name="Text 17"/>
+          <p:cNvSpPr/>
+          <p:nvPr/>
+        </p:nvSpPr>
+        <p:spPr>
+          <a:xfrm>
+            <a:off x="768096" y="3364992"/>
+            <a:ext cx="1920240" cy="384048"/>
+          </a:xfrm>
+          <a:prstGeom prst="rect">
+            <a:avLst/>
+          </a:prstGeom>
+          <a:noFill/>
+          <a:ln/>
+        </p:spPr>
+        <p:txBody>
+          <a:bodyPr wrap="square" lIns="0" tIns="0" rIns="0" bIns="0" rtlCol="0" anchor="ctr"/>
+          <a:lstStyle/>
+          <a:p>
+            <a:pPr indent="0" marL="0">
+              <a:buNone/>
+            </a:pPr>
+            <a:r>
+              <a:rPr lang="en-US" sz="1150" b="1" dirty="0">
+                <a:solidFill>
+                  <a:srgbClr val="6D2E46"/>
+                </a:solidFill>
+                <a:latin typeface="Calibri" pitchFamily="34" charset="0"/>
+                <a:ea typeface="Calibri" pitchFamily="34" charset="-122"/>
+                <a:cs typeface="Calibri" pitchFamily="34" charset="-120"/>
+              </a:rPr>
+              <a:t>導入の障壁を外した</a:t>
+            </a:r>
+            <a:endParaRPr lang="en-US" sz="1150" dirty="0"/>
+          </a:p>
+        </p:txBody>
+      </p:sp>
+      <p:sp>
+        <p:nvSpPr>
+          <p:cNvPr id="20" name="Text 18"/>
+          <p:cNvSpPr/>
+          <p:nvPr/>
+        </p:nvSpPr>
+        <p:spPr>
+          <a:xfrm>
+            <a:off x="2743200" y="3364992"/>
+            <a:ext cx="5897880" cy="384048"/>
+          </a:xfrm>
+          <a:prstGeom prst="rect">
+            <a:avLst/>
+          </a:prstGeom>
+          <a:noFill/>
+          <a:ln/>
+        </p:spPr>
+        <p:txBody>
+          <a:bodyPr wrap="square" lIns="0" tIns="0" rIns="0" bIns="0" rtlCol="0" anchor="ctr"/>
+          <a:lstStyle/>
+          <a:p>
+            <a:pPr indent="0" marL="0">
+              <a:lnSpc>
+                <a:spcPts val="1200"/>
+              </a:lnSpc>
+              <a:buNone/>
+            </a:pPr>
+            <a:r>
+              <a:rPr lang="en-US" sz="1000" dirty="0">
+                <a:solidFill>
+                  <a:srgbClr val="2B1F24"/>
+                </a:solidFill>
+                <a:latin typeface="Calibri" pitchFamily="34" charset="0"/>
+                <a:ea typeface="Calibri" pitchFamily="34" charset="-122"/>
+                <a:cs typeface="Calibri" pitchFamily="34" charset="-120"/>
+              </a:rPr>
+              <a:t>カメラもマットも要らない。スマートプラグを既存の家電に挿すだけ。</a:t>
+            </a:r>
+            <a:endParaRPr lang="en-US" sz="1000" dirty="0"/>
+          </a:p>
+          <a:p>
+            <a:pPr indent="0" marL="0">
+              <a:lnSpc>
+                <a:spcPts val="1200"/>
+              </a:lnSpc>
+              <a:buNone/>
+            </a:pPr>
+            <a:r>
+              <a:rPr lang="en-US" sz="1000" dirty="0">
+                <a:solidFill>
+                  <a:srgbClr val="2B1F24"/>
+                </a:solidFill>
+                <a:latin typeface="Calibri" pitchFamily="34" charset="0"/>
+                <a:ea typeface="Calibri" pitchFamily="34" charset="-122"/>
+                <a:cs typeface="Calibri" pitchFamily="34" charset="-120"/>
+              </a:rPr>
+              <a:t>「見張られる」と感じさせないから、本人が拒まない。</a:t>
+            </a:r>
+            <a:endParaRPr lang="en-US" sz="1000" dirty="0"/>
+          </a:p>
+        </p:txBody>
+      </p:sp>
+      <p:sp>
+        <p:nvSpPr>
+          <p:cNvPr id="21" name="Shape 19"/>
+          <p:cNvSpPr/>
+          <p:nvPr/>
+        </p:nvSpPr>
+        <p:spPr>
+          <a:xfrm>
+            <a:off x="566928" y="3858768"/>
+            <a:ext cx="64008" cy="292608"/>
+          </a:xfrm>
+          <a:prstGeom prst="rect">
+            <a:avLst/>
+          </a:prstGeom>
+          <a:solidFill>
+            <a:srgbClr val="A26769"/>
+          </a:solidFill>
+          <a:ln/>
+        </p:spPr>
+      </p:sp>
+      <p:sp>
+        <p:nvSpPr>
+          <p:cNvPr id="22" name="Text 20"/>
+          <p:cNvSpPr/>
+          <p:nvPr/>
+        </p:nvSpPr>
+        <p:spPr>
+          <a:xfrm>
+            <a:off x="768096" y="3803904"/>
+            <a:ext cx="1920240" cy="384048"/>
+          </a:xfrm>
+          <a:prstGeom prst="rect">
+            <a:avLst/>
+          </a:prstGeom>
+          <a:noFill/>
+          <a:ln/>
+        </p:spPr>
+        <p:txBody>
+          <a:bodyPr wrap="square" lIns="0" tIns="0" rIns="0" bIns="0" rtlCol="0" anchor="ctr"/>
+          <a:lstStyle/>
+          <a:p>
+            <a:pPr indent="0" marL="0">
+              <a:buNone/>
+            </a:pPr>
+            <a:r>
+              <a:rPr lang="en-US" sz="1150" b="1" dirty="0">
+                <a:solidFill>
+                  <a:srgbClr val="6D2E46"/>
+                </a:solidFill>
+                <a:latin typeface="Calibri" pitchFamily="34" charset="0"/>
+                <a:ea typeface="Calibri" pitchFamily="34" charset="-122"/>
+                <a:cs typeface="Calibri" pitchFamily="34" charset="-120"/>
+              </a:rPr>
+              <a:t>受け手の負担も外した</a:t>
+            </a:r>
+            <a:endParaRPr lang="en-US" sz="1150" dirty="0"/>
+          </a:p>
+        </p:txBody>
+      </p:sp>
+      <p:sp>
+        <p:nvSpPr>
+          <p:cNvPr id="23" name="Text 21"/>
+          <p:cNvSpPr/>
+          <p:nvPr/>
+        </p:nvSpPr>
+        <p:spPr>
+          <a:xfrm>
+            <a:off x="2743200" y="3803904"/>
+            <a:ext cx="5897880" cy="384048"/>
+          </a:xfrm>
+          <a:prstGeom prst="rect">
+            <a:avLst/>
+          </a:prstGeom>
+          <a:noFill/>
+          <a:ln/>
+        </p:spPr>
+        <p:txBody>
+          <a:bodyPr wrap="square" lIns="0" tIns="0" rIns="0" bIns="0" rtlCol="0" anchor="ctr"/>
+          <a:lstStyle/>
+          <a:p>
+            <a:pPr indent="0" marL="0">
+              <a:lnSpc>
+                <a:spcPts val="1200"/>
+              </a:lnSpc>
+              <a:buNone/>
+            </a:pPr>
+            <a:r>
+              <a:rPr lang="en-US" sz="1000" dirty="0">
+                <a:solidFill>
+                  <a:srgbClr val="2B1F24"/>
+                </a:solidFill>
+                <a:latin typeface="Calibri" pitchFamily="34" charset="0"/>
+                <a:ea typeface="Calibri" pitchFamily="34" charset="-122"/>
+                <a:cs typeface="Calibri" pitchFamily="34" charset="-120"/>
+              </a:rPr>
+              <a:t>専用アプリを入れさせない。通知も操作も LINE の中で完結する。</a:t>
+            </a:r>
+            <a:endParaRPr lang="en-US" sz="1000" dirty="0"/>
+          </a:p>
+          <a:p>
+            <a:pPr indent="0" marL="0">
+              <a:lnSpc>
+                <a:spcPts val="1200"/>
+              </a:lnSpc>
+              <a:buNone/>
+            </a:pPr>
+            <a:r>
+              <a:rPr lang="en-US" sz="1000" dirty="0">
+                <a:solidFill>
+                  <a:srgbClr val="2B1F24"/>
+                </a:solidFill>
+                <a:latin typeface="Calibri" pitchFamily="34" charset="0"/>
+                <a:ea typeface="Calibri" pitchFamily="34" charset="-122"/>
+                <a:cs typeface="Calibri" pitchFamily="34" charset="-120"/>
+              </a:rPr>
+              <a:t>インストール率という最大の離脱要因が、そもそも発生しない。</a:t>
+            </a:r>
+            <a:endParaRPr lang="en-US" sz="1000" dirty="0"/>
+          </a:p>
+        </p:txBody>
+      </p:sp>
+      <p:sp>
+        <p:nvSpPr>
+          <p:cNvPr id="24" name="Shape 22"/>
+          <p:cNvSpPr/>
+          <p:nvPr/>
+        </p:nvSpPr>
+        <p:spPr>
+          <a:xfrm>
+            <a:off x="566928" y="4297680"/>
+            <a:ext cx="64008" cy="292608"/>
+          </a:xfrm>
+          <a:prstGeom prst="rect">
+            <a:avLst/>
+          </a:prstGeom>
+          <a:solidFill>
+            <a:srgbClr val="A26769"/>
+          </a:solidFill>
+          <a:ln/>
+        </p:spPr>
+      </p:sp>
+      <p:sp>
+        <p:nvSpPr>
+          <p:cNvPr id="25" name="Text 23"/>
+          <p:cNvSpPr/>
+          <p:nvPr/>
+        </p:nvSpPr>
+        <p:spPr>
+          <a:xfrm>
+            <a:off x="768096" y="4242816"/>
+            <a:ext cx="1920240" cy="384048"/>
+          </a:xfrm>
+          <a:prstGeom prst="rect">
+            <a:avLst/>
+          </a:prstGeom>
+          <a:noFill/>
+          <a:ln/>
+        </p:spPr>
+        <p:txBody>
+          <a:bodyPr wrap="square" lIns="0" tIns="0" rIns="0" bIns="0" rtlCol="0" anchor="ctr"/>
+          <a:lstStyle/>
+          <a:p>
+            <a:pPr indent="0" marL="0">
+              <a:buNone/>
+            </a:pPr>
+            <a:r>
+              <a:rPr lang="en-US" sz="1150" b="1" dirty="0">
+                <a:solidFill>
+                  <a:srgbClr val="6D2E46"/>
+                </a:solidFill>
+                <a:latin typeface="Calibri" pitchFamily="34" charset="0"/>
+                <a:ea typeface="Calibri" pitchFamily="34" charset="-122"/>
+                <a:cs typeface="Calibri" pitchFamily="34" charset="-120"/>
+              </a:rPr>
+              <a:t>原価が積み上がらない</a:t>
+            </a:r>
+            <a:endParaRPr lang="en-US" sz="1150" dirty="0"/>
+          </a:p>
+        </p:txBody>
+      </p:sp>
+      <p:sp>
+        <p:nvSpPr>
+          <p:cNvPr id="26" name="Text 24"/>
+          <p:cNvSpPr/>
+          <p:nvPr/>
+        </p:nvSpPr>
+        <p:spPr>
+          <a:xfrm>
+            <a:off x="2743200" y="4242816"/>
+            <a:ext cx="5897880" cy="384048"/>
+          </a:xfrm>
+          <a:prstGeom prst="rect">
+            <a:avLst/>
+          </a:prstGeom>
+          <a:noFill/>
+          <a:ln/>
+        </p:spPr>
+        <p:txBody>
+          <a:bodyPr wrap="square" lIns="0" tIns="0" rIns="0" bIns="0" rtlCol="0" anchor="ctr"/>
+          <a:lstStyle/>
+          <a:p>
+            <a:pPr indent="0" marL="0">
+              <a:lnSpc>
+                <a:spcPts val="1200"/>
+              </a:lnSpc>
+              <a:buNone/>
+            </a:pPr>
+            <a:r>
+              <a:rPr lang="en-US" sz="1000" dirty="0">
+                <a:solidFill>
+                  <a:srgbClr val="2B1F24"/>
+                </a:solidFill>
+                <a:latin typeface="Calibri" pitchFamily="34" charset="0"/>
+                <a:ea typeface="Calibri" pitchFamily="34" charset="-122"/>
+                <a:cs typeface="Calibri" pitchFamily="34" charset="-120"/>
+              </a:rPr>
+              <a:t>判定はルールベース、LLM は会話時のみ。</a:t>
+            </a:r>
+            <a:endParaRPr lang="en-US" sz="1000" dirty="0"/>
+          </a:p>
+          <a:p>
+            <a:pPr indent="0" marL="0">
+              <a:lnSpc>
+                <a:spcPts val="1200"/>
+              </a:lnSpc>
+              <a:buNone/>
+            </a:pPr>
+            <a:r>
+              <a:rPr lang="en-US" sz="1000" dirty="0">
+                <a:solidFill>
+                  <a:srgbClr val="2B1F24"/>
+                </a:solidFill>
+                <a:latin typeface="Calibri" pitchFamily="34" charset="0"/>
+                <a:ea typeface="Calibri" pitchFamily="34" charset="-122"/>
+                <a:cs typeface="Calibri" pitchFamily="34" charset="-120"/>
+              </a:rPr>
+              <a:t>1世帯あたりの固定費が小さく、月額数百円台でも粗利が残る。</a:t>
+            </a:r>
+            <a:endParaRPr lang="en-US" sz="1000" dirty="0"/>
+          </a:p>
+        </p:txBody>
+      </p:sp>
+      <p:sp>
+        <p:nvSpPr>
+          <p:cNvPr id="27" name="Text 25"/>
+          <p:cNvSpPr/>
+          <p:nvPr/>
+        </p:nvSpPr>
+        <p:spPr>
+          <a:xfrm>
+            <a:off x="411480" y="4759452"/>
+            <a:ext cx="3657600" cy="256032"/>
+          </a:xfrm>
+          <a:prstGeom prst="rect">
+            <a:avLst/>
+          </a:prstGeom>
+          <a:noFill/>
+          <a:ln/>
+        </p:spPr>
+        <p:txBody>
+          <a:bodyPr wrap="square" rtlCol="0" anchor="ctr"/>
+          <a:lstStyle/>
+          <a:p>
+            <a:pPr indent="0" marL="0">
+              <a:buNone/>
+            </a:pPr>
+            <a:r>
+              <a:rPr lang="en-US" sz="1000" dirty="0">
+                <a:solidFill>
+                  <a:srgbClr val="8A7A80"/>
+                </a:solidFill>
+                <a:latin typeface="Calibri" pitchFamily="34" charset="0"/>
+                <a:ea typeface="Calibri" pitchFamily="34" charset="-122"/>
+                <a:cs typeface="Calibri" pitchFamily="34" charset="-120"/>
+              </a:rPr>
+              <a:t>見守り隊 / CareRoute AI</a:t>
+            </a:r>
+            <a:endParaRPr lang="en-US" sz="1000" dirty="0"/>
+          </a:p>
+        </p:txBody>
+      </p:sp>
+      <p:sp>
+        <p:nvSpPr>
+          <p:cNvPr id="28" name="Text 26"/>
+          <p:cNvSpPr/>
+          <p:nvPr/>
+        </p:nvSpPr>
+        <p:spPr>
+          <a:xfrm>
+            <a:off x="8366760" y="4759452"/>
+            <a:ext cx="365760" cy="256032"/>
+          </a:xfrm>
+          <a:prstGeom prst="rect">
+            <a:avLst/>
+          </a:prstGeom>
+          <a:noFill/>
+          <a:ln/>
+        </p:spPr>
+        <p:txBody>
+          <a:bodyPr wrap="square" rtlCol="0" anchor="ctr"/>
+          <a:lstStyle/>
+          <a:p>
+            <a:pPr algn="r" indent="0" marL="0">
+              <a:buNone/>
+            </a:pPr>
+            <a:r>
+              <a:rPr lang="en-US" sz="1000" dirty="0">
+                <a:solidFill>
+                  <a:srgbClr val="8A7A80"/>
+                </a:solidFill>
+                <a:latin typeface="Calibri" pitchFamily="34" charset="0"/>
+                <a:ea typeface="Calibri" pitchFamily="34" charset="-122"/>
+                <a:cs typeface="Calibri" pitchFamily="34" charset="-120"/>
+              </a:rPr>
+              <a:t>12</a:t>
+            </a:r>
+            <a:endParaRPr lang="en-US" sz="1000" dirty="0"/>
+          </a:p>
+        </p:txBody>
+      </p:sp>
+    </p:spTree>
+  </p:cSld>
+  <p:clrMapOvr>
+    <a:masterClrMapping/>
+  </p:clrMapOvr>
+</p:sld>
+</file>
+
+<file path=ppt/slides/slide13.xml><?xml version="1.0" encoding="utf-8"?>
+<p:sld xmlns:a="http://schemas.openxmlformats.org/drawingml/2006/main" xmlns:r="http://schemas.openxmlformats.org/officeDocument/2006/relationships" xmlns:p="http://schemas.openxmlformats.org/presentationml/2006/main">
+  <p:cSld name="Slide 13">
+    <p:bg>
+      <p:bgPr>
+        <a:solidFill>
           <a:srgbClr val="6D2E46"/>
         </a:solidFill>
       </p:bgPr>
@@ -3995,6 +6378,789 @@
     <p:bg>
       <p:bgPr>
         <a:solidFill>
+          <a:srgbClr val="FFFFFF"/>
+        </a:solidFill>
+      </p:bgPr>
+    </p:bg>
+    <p:spTree>
+      <p:nvGrpSpPr>
+        <p:cNvPr id="1" name=""/>
+        <p:cNvGrpSpPr/>
+        <p:nvPr/>
+      </p:nvGrpSpPr>
+      <p:grpSpPr>
+        <a:xfrm>
+          <a:off x="0" y="0"/>
+          <a:ext cx="0" cy="0"/>
+          <a:chOff x="0" y="0"/>
+          <a:chExt cx="0" cy="0"/>
+        </a:xfrm>
+      </p:grpSpPr>
+      <p:sp>
+        <p:nvSpPr>
+          <p:cNvPr id="2" name="Shape 0"/>
+          <p:cNvSpPr/>
+          <p:nvPr/>
+        </p:nvSpPr>
+        <p:spPr>
+          <a:xfrm>
+            <a:off x="0" y="0"/>
+            <a:ext cx="164592" cy="5143500"/>
+          </a:xfrm>
+          <a:prstGeom prst="rect">
+            <a:avLst/>
+          </a:prstGeom>
+          <a:solidFill>
+            <a:srgbClr val="6D2E46"/>
+          </a:solidFill>
+          <a:ln/>
+        </p:spPr>
+      </p:sp>
+      <p:sp>
+        <p:nvSpPr>
+          <p:cNvPr id="3" name="Text 1"/>
+          <p:cNvSpPr/>
+          <p:nvPr/>
+        </p:nvSpPr>
+        <p:spPr>
+          <a:xfrm>
+            <a:off x="566928" y="384048"/>
+            <a:ext cx="7955280" cy="658368"/>
+          </a:xfrm>
+          <a:prstGeom prst="rect">
+            <a:avLst/>
+          </a:prstGeom>
+          <a:noFill/>
+          <a:ln/>
+        </p:spPr>
+        <p:txBody>
+          <a:bodyPr wrap="square" rtlCol="0" anchor="ctr"/>
+          <a:lstStyle/>
+          <a:p>
+            <a:pPr indent="0" marL="0">
+              <a:buNone/>
+            </a:pPr>
+            <a:r>
+              <a:rPr lang="en-US" sz="3400" b="1" dirty="0">
+                <a:solidFill>
+                  <a:srgbClr val="2B1F24"/>
+                </a:solidFill>
+                <a:latin typeface="Georgia" pitchFamily="34" charset="0"/>
+                <a:ea typeface="Georgia" pitchFamily="34" charset="-122"/>
+                <a:cs typeface="Georgia" pitchFamily="34" charset="-120"/>
+              </a:rPr>
+              <a:t>なぜ、AIが要るのか</a:t>
+            </a:r>
+            <a:endParaRPr lang="en-US" sz="3400" dirty="0"/>
+          </a:p>
+        </p:txBody>
+      </p:sp>
+      <p:sp>
+        <p:nvSpPr>
+          <p:cNvPr id="4" name="Text 2"/>
+          <p:cNvSpPr/>
+          <p:nvPr/>
+        </p:nvSpPr>
+        <p:spPr>
+          <a:xfrm>
+            <a:off x="566928" y="1042416"/>
+            <a:ext cx="7955280" cy="329184"/>
+          </a:xfrm>
+          <a:prstGeom prst="rect">
+            <a:avLst/>
+          </a:prstGeom>
+          <a:noFill/>
+          <a:ln/>
+        </p:spPr>
+        <p:txBody>
+          <a:bodyPr wrap="square" rtlCol="0" anchor="ctr"/>
+          <a:lstStyle/>
+          <a:p>
+            <a:pPr indent="0" marL="0">
+              <a:buNone/>
+            </a:pPr>
+            <a:r>
+              <a:rPr lang="en-US" sz="1400" dirty="0">
+                <a:solidFill>
+                  <a:srgbClr val="A26769"/>
+                </a:solidFill>
+                <a:latin typeface="Calibri" pitchFamily="34" charset="0"/>
+                <a:ea typeface="Calibri" pitchFamily="34" charset="-122"/>
+                <a:cs typeface="Calibri" pitchFamily="34" charset="-120"/>
+              </a:rPr>
+              <a:t>ルールだけでは「異常」は出せても、「様子」は答えられない</a:t>
+            </a:r>
+            <a:endParaRPr lang="en-US" sz="1400" dirty="0"/>
+          </a:p>
+        </p:txBody>
+      </p:sp>
+      <p:sp>
+        <p:nvSpPr>
+          <p:cNvPr id="5" name="Shape 3"/>
+          <p:cNvSpPr/>
+          <p:nvPr/>
+        </p:nvSpPr>
+        <p:spPr>
+          <a:xfrm>
+            <a:off x="566928" y="1572768"/>
+            <a:ext cx="3886200" cy="2121408"/>
+          </a:xfrm>
+          <a:prstGeom prst="rect">
+            <a:avLst/>
+          </a:prstGeom>
+          <a:solidFill>
+            <a:srgbClr val="ECE2D0"/>
+          </a:solidFill>
+          <a:ln/>
+        </p:spPr>
+      </p:sp>
+      <p:sp>
+        <p:nvSpPr>
+          <p:cNvPr id="6" name="Shape 4"/>
+          <p:cNvSpPr/>
+          <p:nvPr/>
+        </p:nvSpPr>
+        <p:spPr>
+          <a:xfrm>
+            <a:off x="566928" y="1572768"/>
+            <a:ext cx="3886200" cy="64008"/>
+          </a:xfrm>
+          <a:prstGeom prst="rect">
+            <a:avLst/>
+          </a:prstGeom>
+          <a:solidFill>
+            <a:srgbClr val="4F7A5B"/>
+          </a:solidFill>
+          <a:ln/>
+        </p:spPr>
+      </p:sp>
+      <p:sp>
+        <p:nvSpPr>
+          <p:cNvPr id="7" name="Text 5"/>
+          <p:cNvSpPr/>
+          <p:nvPr/>
+        </p:nvSpPr>
+        <p:spPr>
+          <a:xfrm>
+            <a:off x="804672" y="1719072"/>
+            <a:ext cx="3474720" cy="292608"/>
+          </a:xfrm>
+          <a:prstGeom prst="rect">
+            <a:avLst/>
+          </a:prstGeom>
+          <a:noFill/>
+          <a:ln/>
+        </p:spPr>
+        <p:txBody>
+          <a:bodyPr wrap="square" rtlCol="0" anchor="ctr"/>
+          <a:lstStyle/>
+          <a:p>
+            <a:pPr indent="0" marL="0">
+              <a:buNone/>
+            </a:pPr>
+            <a:r>
+              <a:rPr lang="en-US" sz="1500" b="1" dirty="0">
+                <a:solidFill>
+                  <a:srgbClr val="4F7A5B"/>
+                </a:solidFill>
+                <a:latin typeface="Georgia" pitchFamily="34" charset="0"/>
+                <a:ea typeface="Georgia" pitchFamily="34" charset="-122"/>
+                <a:cs typeface="Georgia" pitchFamily="34" charset="-120"/>
+              </a:rPr>
+              <a:t>ルールベースで足りる</a:t>
+            </a:r>
+            <a:endParaRPr lang="en-US" sz="1500" dirty="0"/>
+          </a:p>
+        </p:txBody>
+      </p:sp>
+      <p:sp>
+        <p:nvSpPr>
+          <p:cNvPr id="8" name="Text 6"/>
+          <p:cNvSpPr/>
+          <p:nvPr/>
+        </p:nvSpPr>
+        <p:spPr>
+          <a:xfrm>
+            <a:off x="804672" y="2066544"/>
+            <a:ext cx="3474720" cy="274320"/>
+          </a:xfrm>
+          <a:prstGeom prst="rect">
+            <a:avLst/>
+          </a:prstGeom>
+          <a:noFill/>
+          <a:ln/>
+        </p:spPr>
+        <p:txBody>
+          <a:bodyPr wrap="square" rtlCol="0" anchor="ctr"/>
+          <a:lstStyle/>
+          <a:p>
+            <a:pPr indent="0" marL="0">
+              <a:buNone/>
+            </a:pPr>
+            <a:r>
+              <a:rPr lang="en-US" sz="1200" dirty="0">
+                <a:solidFill>
+                  <a:srgbClr val="2B1F24"/>
+                </a:solidFill>
+                <a:latin typeface="Calibri" pitchFamily="34" charset="0"/>
+                <a:ea typeface="Calibri" pitchFamily="34" charset="-122"/>
+                <a:cs typeface="Calibri" pitchFamily="34" charset="-120"/>
+              </a:rPr>
+              <a:t>・照明が12時間点かない → 異常</a:t>
+            </a:r>
+            <a:endParaRPr lang="en-US" sz="1200" dirty="0"/>
+          </a:p>
+        </p:txBody>
+      </p:sp>
+      <p:sp>
+        <p:nvSpPr>
+          <p:cNvPr id="9" name="Text 7"/>
+          <p:cNvSpPr/>
+          <p:nvPr/>
+        </p:nvSpPr>
+        <p:spPr>
+          <a:xfrm>
+            <a:off x="804672" y="2350008"/>
+            <a:ext cx="3474720" cy="274320"/>
+          </a:xfrm>
+          <a:prstGeom prst="rect">
+            <a:avLst/>
+          </a:prstGeom>
+          <a:noFill/>
+          <a:ln/>
+        </p:spPr>
+        <p:txBody>
+          <a:bodyPr wrap="square" rtlCol="0" anchor="ctr"/>
+          <a:lstStyle/>
+          <a:p>
+            <a:pPr indent="0" marL="0">
+              <a:buNone/>
+            </a:pPr>
+            <a:r>
+              <a:rPr lang="en-US" sz="1200" dirty="0">
+                <a:solidFill>
+                  <a:srgbClr val="2B1F24"/>
+                </a:solidFill>
+                <a:latin typeface="Calibri" pitchFamily="34" charset="0"/>
+                <a:ea typeface="Calibri" pitchFamily="34" charset="-122"/>
+                <a:cs typeface="Calibri" pitchFamily="34" charset="-120"/>
+              </a:rPr>
+              <a:t>・深夜に3回以上点灯 → 注意</a:t>
+            </a:r>
+            <a:endParaRPr lang="en-US" sz="1200" dirty="0"/>
+          </a:p>
+        </p:txBody>
+      </p:sp>
+      <p:sp>
+        <p:nvSpPr>
+          <p:cNvPr id="10" name="Text 8"/>
+          <p:cNvSpPr/>
+          <p:nvPr/>
+        </p:nvSpPr>
+        <p:spPr>
+          <a:xfrm>
+            <a:off x="804672" y="2633472"/>
+            <a:ext cx="3474720" cy="274320"/>
+          </a:xfrm>
+          <a:prstGeom prst="rect">
+            <a:avLst/>
+          </a:prstGeom>
+          <a:noFill/>
+          <a:ln/>
+        </p:spPr>
+        <p:txBody>
+          <a:bodyPr wrap="square" rtlCol="0" anchor="ctr"/>
+          <a:lstStyle/>
+          <a:p>
+            <a:pPr indent="0" marL="0">
+              <a:buNone/>
+            </a:pPr>
+            <a:r>
+              <a:rPr lang="en-US" sz="1200" dirty="0">
+                <a:solidFill>
+                  <a:srgbClr val="2B1F24"/>
+                </a:solidFill>
+                <a:latin typeface="Calibri" pitchFamily="34" charset="0"/>
+                <a:ea typeface="Calibri" pitchFamily="34" charset="-122"/>
+                <a:cs typeface="Calibri" pitchFamily="34" charset="-120"/>
+              </a:rPr>
+              <a:t>・安全判定（ON/OFF の可否）</a:t>
+            </a:r>
+            <a:endParaRPr lang="en-US" sz="1200" dirty="0"/>
+          </a:p>
+        </p:txBody>
+      </p:sp>
+      <p:sp>
+        <p:nvSpPr>
+          <p:cNvPr id="11" name="Text 9"/>
+          <p:cNvSpPr/>
+          <p:nvPr/>
+        </p:nvSpPr>
+        <p:spPr>
+          <a:xfrm>
+            <a:off x="804672" y="2999232"/>
+            <a:ext cx="3474720" cy="566928"/>
+          </a:xfrm>
+          <a:prstGeom prst="rect">
+            <a:avLst/>
+          </a:prstGeom>
+          <a:noFill/>
+          <a:ln/>
+        </p:spPr>
+        <p:txBody>
+          <a:bodyPr wrap="square" rtlCol="0" anchor="ctr"/>
+          <a:lstStyle/>
+          <a:p>
+            <a:pPr indent="0" marL="0">
+              <a:lnSpc>
+                <a:spcPts val="1400"/>
+              </a:lnSpc>
+              <a:buNone/>
+            </a:pPr>
+            <a:r>
+              <a:rPr lang="en-US" sz="1050" dirty="0">
+                <a:solidFill>
+                  <a:srgbClr val="6B5C62"/>
+                </a:solidFill>
+                <a:latin typeface="Calibri" pitchFamily="34" charset="0"/>
+                <a:ea typeface="Calibri" pitchFamily="34" charset="-122"/>
+                <a:cs typeface="Calibri" pitchFamily="34" charset="-120"/>
+              </a:rPr>
+              <a:t>判定は速く、説明でき、外部APIに依存しない。</a:t>
+            </a:r>
+            <a:endParaRPr lang="en-US" sz="1050" dirty="0"/>
+          </a:p>
+          <a:p>
+            <a:pPr indent="0" marL="0">
+              <a:lnSpc>
+                <a:spcPts val="1400"/>
+              </a:lnSpc>
+              <a:buNone/>
+            </a:pPr>
+            <a:r>
+              <a:rPr lang="en-US" sz="1050" dirty="0">
+                <a:solidFill>
+                  <a:srgbClr val="6B5C62"/>
+                </a:solidFill>
+                <a:latin typeface="Calibri" pitchFamily="34" charset="0"/>
+                <a:ea typeface="Calibri" pitchFamily="34" charset="-122"/>
+                <a:cs typeface="Calibri" pitchFamily="34" charset="-120"/>
+              </a:rPr>
+              <a:t>だからここはAIに渡していない。</a:t>
+            </a:r>
+            <a:endParaRPr lang="en-US" sz="1050" dirty="0"/>
+          </a:p>
+        </p:txBody>
+      </p:sp>
+      <p:sp>
+        <p:nvSpPr>
+          <p:cNvPr id="12" name="Shape 10"/>
+          <p:cNvSpPr/>
+          <p:nvPr/>
+        </p:nvSpPr>
+        <p:spPr>
+          <a:xfrm>
+            <a:off x="4773168" y="1572768"/>
+            <a:ext cx="3886200" cy="2121408"/>
+          </a:xfrm>
+          <a:prstGeom prst="rect">
+            <a:avLst/>
+          </a:prstGeom>
+          <a:solidFill>
+            <a:srgbClr val="ECE2D0"/>
+          </a:solidFill>
+          <a:ln/>
+        </p:spPr>
+      </p:sp>
+      <p:sp>
+        <p:nvSpPr>
+          <p:cNvPr id="13" name="Shape 11"/>
+          <p:cNvSpPr/>
+          <p:nvPr/>
+        </p:nvSpPr>
+        <p:spPr>
+          <a:xfrm>
+            <a:off x="4773168" y="1572768"/>
+            <a:ext cx="3886200" cy="64008"/>
+          </a:xfrm>
+          <a:prstGeom prst="rect">
+            <a:avLst/>
+          </a:prstGeom>
+          <a:solidFill>
+            <a:srgbClr val="B23A48"/>
+          </a:solidFill>
+          <a:ln/>
+        </p:spPr>
+      </p:sp>
+      <p:sp>
+        <p:nvSpPr>
+          <p:cNvPr id="14" name="Text 12"/>
+          <p:cNvSpPr/>
+          <p:nvPr/>
+        </p:nvSpPr>
+        <p:spPr>
+          <a:xfrm>
+            <a:off x="5010912" y="1719072"/>
+            <a:ext cx="3474720" cy="292608"/>
+          </a:xfrm>
+          <a:prstGeom prst="rect">
+            <a:avLst/>
+          </a:prstGeom>
+          <a:noFill/>
+          <a:ln/>
+        </p:spPr>
+        <p:txBody>
+          <a:bodyPr wrap="square" rtlCol="0" anchor="ctr"/>
+          <a:lstStyle/>
+          <a:p>
+            <a:pPr indent="0" marL="0">
+              <a:buNone/>
+            </a:pPr>
+            <a:r>
+              <a:rPr lang="en-US" sz="1500" b="1" dirty="0">
+                <a:solidFill>
+                  <a:srgbClr val="B23A48"/>
+                </a:solidFill>
+                <a:latin typeface="Georgia" pitchFamily="34" charset="0"/>
+                <a:ea typeface="Georgia" pitchFamily="34" charset="-122"/>
+                <a:cs typeface="Georgia" pitchFamily="34" charset="-120"/>
+              </a:rPr>
+              <a:t>ルールベースでは足りない</a:t>
+            </a:r>
+            <a:endParaRPr lang="en-US" sz="1500" dirty="0"/>
+          </a:p>
+        </p:txBody>
+      </p:sp>
+      <p:sp>
+        <p:nvSpPr>
+          <p:cNvPr id="15" name="Text 13"/>
+          <p:cNvSpPr/>
+          <p:nvPr/>
+        </p:nvSpPr>
+        <p:spPr>
+          <a:xfrm>
+            <a:off x="5010912" y="2066544"/>
+            <a:ext cx="3474720" cy="274320"/>
+          </a:xfrm>
+          <a:prstGeom prst="rect">
+            <a:avLst/>
+          </a:prstGeom>
+          <a:noFill/>
+          <a:ln/>
+        </p:spPr>
+        <p:txBody>
+          <a:bodyPr wrap="square" rtlCol="0" anchor="ctr"/>
+          <a:lstStyle/>
+          <a:p>
+            <a:pPr indent="0" marL="0">
+              <a:buNone/>
+            </a:pPr>
+            <a:r>
+              <a:rPr lang="en-US" sz="1200" dirty="0">
+                <a:solidFill>
+                  <a:srgbClr val="2B1F24"/>
+                </a:solidFill>
+                <a:latin typeface="Calibri" pitchFamily="34" charset="0"/>
+                <a:ea typeface="Calibri" pitchFamily="34" charset="-122"/>
+                <a:cs typeface="Calibri" pitchFamily="34" charset="-120"/>
+              </a:rPr>
+              <a:t>・「今日のお母さん、どう？」</a:t>
+            </a:r>
+            <a:endParaRPr lang="en-US" sz="1200" dirty="0"/>
+          </a:p>
+        </p:txBody>
+      </p:sp>
+      <p:sp>
+        <p:nvSpPr>
+          <p:cNvPr id="16" name="Text 14"/>
+          <p:cNvSpPr/>
+          <p:nvPr/>
+        </p:nvSpPr>
+        <p:spPr>
+          <a:xfrm>
+            <a:off x="5010912" y="2350008"/>
+            <a:ext cx="3474720" cy="274320"/>
+          </a:xfrm>
+          <a:prstGeom prst="rect">
+            <a:avLst/>
+          </a:prstGeom>
+          <a:noFill/>
+          <a:ln/>
+        </p:spPr>
+        <p:txBody>
+          <a:bodyPr wrap="square" rtlCol="0" anchor="ctr"/>
+          <a:lstStyle/>
+          <a:p>
+            <a:pPr indent="0" marL="0">
+              <a:buNone/>
+            </a:pPr>
+            <a:r>
+              <a:rPr lang="en-US" sz="1200" dirty="0">
+                <a:solidFill>
+                  <a:srgbClr val="2B1F24"/>
+                </a:solidFill>
+                <a:latin typeface="Calibri" pitchFamily="34" charset="0"/>
+                <a:ea typeface="Calibri" pitchFamily="34" charset="-122"/>
+                <a:cs typeface="Calibri" pitchFamily="34" charset="-120"/>
+              </a:rPr>
+              <a:t>・「最近ちょっと変じゃない？」</a:t>
+            </a:r>
+            <a:endParaRPr lang="en-US" sz="1200" dirty="0"/>
+          </a:p>
+        </p:txBody>
+      </p:sp>
+      <p:sp>
+        <p:nvSpPr>
+          <p:cNvPr id="17" name="Text 15"/>
+          <p:cNvSpPr/>
+          <p:nvPr/>
+        </p:nvSpPr>
+        <p:spPr>
+          <a:xfrm>
+            <a:off x="5010912" y="2633472"/>
+            <a:ext cx="3474720" cy="274320"/>
+          </a:xfrm>
+          <a:prstGeom prst="rect">
+            <a:avLst/>
+          </a:prstGeom>
+          <a:noFill/>
+          <a:ln/>
+        </p:spPr>
+        <p:txBody>
+          <a:bodyPr wrap="square" rtlCol="0" anchor="ctr"/>
+          <a:lstStyle/>
+          <a:p>
+            <a:pPr indent="0" marL="0">
+              <a:buNone/>
+            </a:pPr>
+            <a:r>
+              <a:rPr lang="en-US" sz="1200" dirty="0">
+                <a:solidFill>
+                  <a:srgbClr val="2B1F24"/>
+                </a:solidFill>
+                <a:latin typeface="Calibri" pitchFamily="34" charset="0"/>
+                <a:ea typeface="Calibri" pitchFamily="34" charset="-122"/>
+                <a:cs typeface="Calibri" pitchFamily="34" charset="-120"/>
+              </a:rPr>
+              <a:t>・数値ではなく、言葉で返す</a:t>
+            </a:r>
+            <a:endParaRPr lang="en-US" sz="1200" dirty="0"/>
+          </a:p>
+        </p:txBody>
+      </p:sp>
+      <p:sp>
+        <p:nvSpPr>
+          <p:cNvPr id="18" name="Text 16"/>
+          <p:cNvSpPr/>
+          <p:nvPr/>
+        </p:nvSpPr>
+        <p:spPr>
+          <a:xfrm>
+            <a:off x="5010912" y="2999232"/>
+            <a:ext cx="3474720" cy="566928"/>
+          </a:xfrm>
+          <a:prstGeom prst="rect">
+            <a:avLst/>
+          </a:prstGeom>
+          <a:noFill/>
+          <a:ln/>
+        </p:spPr>
+        <p:txBody>
+          <a:bodyPr wrap="square" rtlCol="0" anchor="ctr"/>
+          <a:lstStyle/>
+          <a:p>
+            <a:pPr indent="0" marL="0">
+              <a:lnSpc>
+                <a:spcPts val="1400"/>
+              </a:lnSpc>
+              <a:buNone/>
+            </a:pPr>
+            <a:r>
+              <a:rPr lang="en-US" sz="1050" dirty="0">
+                <a:solidFill>
+                  <a:srgbClr val="6B5C62"/>
+                </a:solidFill>
+                <a:latin typeface="Calibri" pitchFamily="34" charset="0"/>
+                <a:ea typeface="Calibri" pitchFamily="34" charset="-122"/>
+                <a:cs typeface="Calibri" pitchFamily="34" charset="-120"/>
+              </a:rPr>
+              <a:t>家族が知りたいのは閾値超えの有無ではなく、</a:t>
+            </a:r>
+            <a:endParaRPr lang="en-US" sz="1050" dirty="0"/>
+          </a:p>
+          <a:p>
+            <a:pPr indent="0" marL="0">
+              <a:lnSpc>
+                <a:spcPts val="1400"/>
+              </a:lnSpc>
+              <a:buNone/>
+            </a:pPr>
+            <a:r>
+              <a:rPr lang="en-US" sz="1050" dirty="0">
+                <a:solidFill>
+                  <a:srgbClr val="6B5C62"/>
+                </a:solidFill>
+                <a:latin typeface="Calibri" pitchFamily="34" charset="0"/>
+                <a:ea typeface="Calibri" pitchFamily="34" charset="-122"/>
+                <a:cs typeface="Calibri" pitchFamily="34" charset="-120"/>
+              </a:rPr>
+              <a:t>「いつもと比べてどうか」という解釈。</a:t>
+            </a:r>
+            <a:endParaRPr lang="en-US" sz="1050" dirty="0"/>
+          </a:p>
+        </p:txBody>
+      </p:sp>
+      <p:sp>
+        <p:nvSpPr>
+          <p:cNvPr id="19" name="Shape 17"/>
+          <p:cNvSpPr/>
+          <p:nvPr/>
+        </p:nvSpPr>
+        <p:spPr>
+          <a:xfrm>
+            <a:off x="566928" y="3877056"/>
+            <a:ext cx="8074152" cy="658368"/>
+          </a:xfrm>
+          <a:prstGeom prst="rect">
+            <a:avLst/>
+          </a:prstGeom>
+          <a:solidFill>
+            <a:srgbClr val="2B1F24"/>
+          </a:solidFill>
+          <a:ln/>
+        </p:spPr>
+      </p:sp>
+      <p:sp>
+        <p:nvSpPr>
+          <p:cNvPr id="20" name="Text 18"/>
+          <p:cNvSpPr/>
+          <p:nvPr/>
+        </p:nvSpPr>
+        <p:spPr>
+          <a:xfrm>
+            <a:off x="566928" y="4041648"/>
+            <a:ext cx="8074152" cy="365760"/>
+          </a:xfrm>
+          <a:prstGeom prst="rect">
+            <a:avLst/>
+          </a:prstGeom>
+          <a:noFill/>
+          <a:ln/>
+        </p:spPr>
+        <p:txBody>
+          <a:bodyPr wrap="square" rtlCol="0" anchor="ctr"/>
+          <a:lstStyle/>
+          <a:p>
+            <a:pPr algn="ctr" indent="0" marL="0">
+              <a:buNone/>
+            </a:pPr>
+            <a:r>
+              <a:rPr lang="en-US" sz="1350" b="1" dirty="0">
+                <a:solidFill>
+                  <a:srgbClr val="FFFFFF"/>
+                </a:solidFill>
+                <a:latin typeface="Calibri" pitchFamily="34" charset="0"/>
+                <a:ea typeface="Calibri" pitchFamily="34" charset="-122"/>
+                <a:cs typeface="Calibri" pitchFamily="34" charset="-120"/>
+              </a:rPr>
+              <a:t>AIは「言葉」に使い、「判断」には使わない ― 役割を分けたから、両方を捨てずに済んだ</a:t>
+            </a:r>
+            <a:endParaRPr lang="en-US" sz="1350" dirty="0"/>
+          </a:p>
+        </p:txBody>
+      </p:sp>
+      <p:sp>
+        <p:nvSpPr>
+          <p:cNvPr id="21" name="Text 19"/>
+          <p:cNvSpPr/>
+          <p:nvPr/>
+        </p:nvSpPr>
+        <p:spPr>
+          <a:xfrm>
+            <a:off x="411480" y="4759452"/>
+            <a:ext cx="3657600" cy="256032"/>
+          </a:xfrm>
+          <a:prstGeom prst="rect">
+            <a:avLst/>
+          </a:prstGeom>
+          <a:noFill/>
+          <a:ln/>
+        </p:spPr>
+        <p:txBody>
+          <a:bodyPr wrap="square" rtlCol="0" anchor="ctr"/>
+          <a:lstStyle/>
+          <a:p>
+            <a:pPr indent="0" marL="0">
+              <a:buNone/>
+            </a:pPr>
+            <a:r>
+              <a:rPr lang="en-US" sz="1000" dirty="0">
+                <a:solidFill>
+                  <a:srgbClr val="8A7A80"/>
+                </a:solidFill>
+                <a:latin typeface="Calibri" pitchFamily="34" charset="0"/>
+                <a:ea typeface="Calibri" pitchFamily="34" charset="-122"/>
+                <a:cs typeface="Calibri" pitchFamily="34" charset="-120"/>
+              </a:rPr>
+              <a:t>見守り隊 / CareRoute AI</a:t>
+            </a:r>
+            <a:endParaRPr lang="en-US" sz="1000" dirty="0"/>
+          </a:p>
+        </p:txBody>
+      </p:sp>
+      <p:sp>
+        <p:nvSpPr>
+          <p:cNvPr id="22" name="Text 20"/>
+          <p:cNvSpPr/>
+          <p:nvPr/>
+        </p:nvSpPr>
+        <p:spPr>
+          <a:xfrm>
+            <a:off x="8366760" y="4759452"/>
+            <a:ext cx="365760" cy="256032"/>
+          </a:xfrm>
+          <a:prstGeom prst="rect">
+            <a:avLst/>
+          </a:prstGeom>
+          <a:noFill/>
+          <a:ln/>
+        </p:spPr>
+        <p:txBody>
+          <a:bodyPr wrap="square" rtlCol="0" anchor="ctr"/>
+          <a:lstStyle/>
+          <a:p>
+            <a:pPr algn="r" indent="0" marL="0">
+              <a:buNone/>
+            </a:pPr>
+            <a:r>
+              <a:rPr lang="en-US" sz="1000" dirty="0">
+                <a:solidFill>
+                  <a:srgbClr val="8A7A80"/>
+                </a:solidFill>
+                <a:latin typeface="Calibri" pitchFamily="34" charset="0"/>
+                <a:ea typeface="Calibri" pitchFamily="34" charset="-122"/>
+                <a:cs typeface="Calibri" pitchFamily="34" charset="-120"/>
+              </a:rPr>
+              <a:t>4</a:t>
+            </a:r>
+            <a:endParaRPr lang="en-US" sz="1000" dirty="0"/>
+          </a:p>
+        </p:txBody>
+      </p:sp>
+    </p:spTree>
+  </p:cSld>
+  <p:clrMapOvr>
+    <a:masterClrMapping/>
+  </p:clrMapOvr>
+</p:sld>
+</file>
+
+<file path=ppt/slides/slide5.xml><?xml version="1.0" encoding="utf-8"?>
+<p:sld xmlns:a="http://schemas.openxmlformats.org/drawingml/2006/main" xmlns:r="http://schemas.openxmlformats.org/officeDocument/2006/relationships" xmlns:p="http://schemas.openxmlformats.org/presentationml/2006/main">
+  <p:cSld name="Slide 5">
+    <p:bg>
+      <p:bgPr>
+        <a:solidFill>
           <a:srgbClr val="2B1F24"/>
         </a:solidFill>
       </p:bgPr>
@@ -4662,1049 +7828,6 @@
                 <a:cs typeface="Calibri" pitchFamily="34" charset="-120"/>
               </a:rPr>
               <a:t>「ストーブつけて」→ 拒否。機器は停止中のまま</a:t>
-            </a:r>
-            <a:endParaRPr lang="en-US" sz="1000" dirty="0"/>
-          </a:p>
-        </p:txBody>
-      </p:sp>
-    </p:spTree>
-  </p:cSld>
-  <p:clrMapOvr>
-    <a:masterClrMapping/>
-  </p:clrMapOvr>
-</p:sld>
-</file>
-
-<file path=ppt/slides/slide5.xml><?xml version="1.0" encoding="utf-8"?>
-<p:sld xmlns:a="http://schemas.openxmlformats.org/drawingml/2006/main" xmlns:r="http://schemas.openxmlformats.org/officeDocument/2006/relationships" xmlns:p="http://schemas.openxmlformats.org/presentationml/2006/main">
-  <p:cSld name="Slide 5">
-    <p:bg>
-      <p:bgPr>
-        <a:solidFill>
-          <a:srgbClr val="FFFFFF"/>
-        </a:solidFill>
-      </p:bgPr>
-    </p:bg>
-    <p:spTree>
-      <p:nvGrpSpPr>
-        <p:cNvPr id="1" name=""/>
-        <p:cNvGrpSpPr/>
-        <p:nvPr/>
-      </p:nvGrpSpPr>
-      <p:grpSpPr>
-        <a:xfrm>
-          <a:off x="0" y="0"/>
-          <a:ext cx="0" cy="0"/>
-          <a:chOff x="0" y="0"/>
-          <a:chExt cx="0" cy="0"/>
-        </a:xfrm>
-      </p:grpSpPr>
-      <p:sp>
-        <p:nvSpPr>
-          <p:cNvPr id="2" name="Shape 0"/>
-          <p:cNvSpPr/>
-          <p:nvPr/>
-        </p:nvSpPr>
-        <p:spPr>
-          <a:xfrm>
-            <a:off x="0" y="0"/>
-            <a:ext cx="164592" cy="5143500"/>
-          </a:xfrm>
-          <a:prstGeom prst="rect">
-            <a:avLst/>
-          </a:prstGeom>
-          <a:solidFill>
-            <a:srgbClr val="B23A48"/>
-          </a:solidFill>
-          <a:ln/>
-        </p:spPr>
-      </p:sp>
-      <p:sp>
-        <p:nvSpPr>
-          <p:cNvPr id="3" name="Text 1"/>
-          <p:cNvSpPr/>
-          <p:nvPr/>
-        </p:nvSpPr>
-        <p:spPr>
-          <a:xfrm>
-            <a:off x="566928" y="384048"/>
-            <a:ext cx="7955280" cy="658368"/>
-          </a:xfrm>
-          <a:prstGeom prst="rect">
-            <a:avLst/>
-          </a:prstGeom>
-          <a:noFill/>
-          <a:ln/>
-        </p:spPr>
-        <p:txBody>
-          <a:bodyPr wrap="square" rtlCol="0" anchor="ctr"/>
-          <a:lstStyle/>
-          <a:p>
-            <a:pPr indent="0" marL="0">
-              <a:buNone/>
-            </a:pPr>
-            <a:r>
-              <a:rPr lang="en-US" sz="3400" b="1" dirty="0">
-                <a:solidFill>
-                  <a:srgbClr val="2B1F24"/>
-                </a:solidFill>
-                <a:latin typeface="Georgia" pitchFamily="34" charset="0"/>
-                <a:ea typeface="Georgia" pitchFamily="34" charset="-122"/>
-                <a:cs typeface="Georgia" pitchFamily="34" charset="-120"/>
-              </a:rPr>
-              <a:t>AIの出力は「候補」でしかない</a:t>
-            </a:r>
-            <a:endParaRPr lang="en-US" sz="3400" dirty="0"/>
-          </a:p>
-        </p:txBody>
-      </p:sp>
-      <p:sp>
-        <p:nvSpPr>
-          <p:cNvPr id="4" name="Text 2"/>
-          <p:cNvSpPr/>
-          <p:nvPr/>
-        </p:nvSpPr>
-        <p:spPr>
-          <a:xfrm>
-            <a:off x="566928" y="1042416"/>
-            <a:ext cx="7955280" cy="329184"/>
-          </a:xfrm>
-          <a:prstGeom prst="rect">
-            <a:avLst/>
-          </a:prstGeom>
-          <a:noFill/>
-          <a:ln/>
-        </p:spPr>
-        <p:txBody>
-          <a:bodyPr wrap="square" rtlCol="0" anchor="ctr"/>
-          <a:lstStyle/>
-          <a:p>
-            <a:pPr indent="0" marL="0">
-              <a:buNone/>
-            </a:pPr>
-            <a:r>
-              <a:rPr lang="en-US" sz="1400" dirty="0">
-                <a:solidFill>
-                  <a:srgbClr val="A26769"/>
-                </a:solidFill>
-                <a:latin typeface="Calibri" pitchFamily="34" charset="0"/>
-                <a:ea typeface="Calibri" pitchFamily="34" charset="-122"/>
-                <a:cs typeface="Calibri" pitchFamily="34" charset="-120"/>
-              </a:rPr>
-              <a:t>最終判断は必ずルールベースの層を通る</a:t>
-            </a:r>
-            <a:endParaRPr lang="en-US" sz="1400" dirty="0"/>
-          </a:p>
-        </p:txBody>
-      </p:sp>
-      <p:sp>
-        <p:nvSpPr>
-          <p:cNvPr id="5" name="Shape 3"/>
-          <p:cNvSpPr/>
-          <p:nvPr/>
-        </p:nvSpPr>
-        <p:spPr>
-          <a:xfrm>
-            <a:off x="566928" y="1737360"/>
-            <a:ext cx="1572768" cy="868680"/>
-          </a:xfrm>
-          <a:prstGeom prst="roundRect">
-            <a:avLst>
-              <a:gd name="adj" fmla="val 8421"/>
-            </a:avLst>
-          </a:prstGeom>
-          <a:solidFill>
-            <a:srgbClr val="8A7A80"/>
-          </a:solidFill>
-          <a:ln/>
-        </p:spPr>
-      </p:sp>
-      <p:sp>
-        <p:nvSpPr>
-          <p:cNvPr id="6" name="Text 4"/>
-          <p:cNvSpPr/>
-          <p:nvPr/>
-        </p:nvSpPr>
-        <p:spPr>
-          <a:xfrm>
-            <a:off x="566928" y="1847088"/>
-            <a:ext cx="1572768" cy="658368"/>
-          </a:xfrm>
-          <a:prstGeom prst="rect">
-            <a:avLst/>
-          </a:prstGeom>
-          <a:noFill/>
-          <a:ln/>
-        </p:spPr>
-        <p:txBody>
-          <a:bodyPr wrap="square" rtlCol="0" anchor="ctr"/>
-          <a:lstStyle/>
-          <a:p>
-            <a:pPr algn="ctr" indent="0" marL="0">
-              <a:lnSpc>
-                <a:spcPts val="1500"/>
-              </a:lnSpc>
-              <a:buNone/>
-            </a:pPr>
-            <a:r>
-              <a:rPr lang="en-US" sz="1150" b="1" dirty="0">
-                <a:solidFill>
-                  <a:srgbClr val="FFFFFF"/>
-                </a:solidFill>
-                <a:latin typeface="Calibri" pitchFamily="34" charset="0"/>
-                <a:ea typeface="Calibri" pitchFamily="34" charset="-122"/>
-                <a:cs typeface="Calibri" pitchFamily="34" charset="-120"/>
-              </a:rPr>
-              <a:t>「ストーブつけて」</a:t>
-            </a:r>
-            <a:endParaRPr lang="en-US" sz="1150" dirty="0"/>
-          </a:p>
-        </p:txBody>
-      </p:sp>
-      <p:sp>
-        <p:nvSpPr>
-          <p:cNvPr id="7" name="Text 5"/>
-          <p:cNvSpPr/>
-          <p:nvPr/>
-        </p:nvSpPr>
-        <p:spPr>
-          <a:xfrm>
-            <a:off x="2157984" y="1975104"/>
-            <a:ext cx="329184" cy="365760"/>
-          </a:xfrm>
-          <a:prstGeom prst="rect">
-            <a:avLst/>
-          </a:prstGeom>
-          <a:noFill/>
-          <a:ln/>
-        </p:spPr>
-        <p:txBody>
-          <a:bodyPr wrap="square" rtlCol="0" anchor="ctr"/>
-          <a:lstStyle/>
-          <a:p>
-            <a:pPr algn="ctr" indent="0" marL="0">
-              <a:buNone/>
-            </a:pPr>
-            <a:r>
-              <a:rPr lang="en-US" sz="1200" dirty="0">
-                <a:solidFill>
-                  <a:srgbClr val="8A7A80"/>
-                </a:solidFill>
-                <a:latin typeface="Calibri" pitchFamily="34" charset="0"/>
-                <a:ea typeface="Calibri" pitchFamily="34" charset="-122"/>
-                <a:cs typeface="Calibri" pitchFamily="34" charset="-120"/>
-              </a:rPr>
-              <a:t>▶</a:t>
-            </a:r>
-            <a:endParaRPr lang="en-US" sz="1200" dirty="0"/>
-          </a:p>
-        </p:txBody>
-      </p:sp>
-      <p:sp>
-        <p:nvSpPr>
-          <p:cNvPr id="8" name="Shape 6"/>
-          <p:cNvSpPr/>
-          <p:nvPr/>
-        </p:nvSpPr>
-        <p:spPr>
-          <a:xfrm>
-            <a:off x="2505456" y="1737360"/>
-            <a:ext cx="1234440" cy="868680"/>
-          </a:xfrm>
-          <a:prstGeom prst="roundRect">
-            <a:avLst>
-              <a:gd name="adj" fmla="val 8421"/>
-            </a:avLst>
-          </a:prstGeom>
-          <a:solidFill>
-            <a:srgbClr val="A26769"/>
-          </a:solidFill>
-          <a:ln/>
-        </p:spPr>
-      </p:sp>
-      <p:sp>
-        <p:nvSpPr>
-          <p:cNvPr id="9" name="Text 7"/>
-          <p:cNvSpPr/>
-          <p:nvPr/>
-        </p:nvSpPr>
-        <p:spPr>
-          <a:xfrm>
-            <a:off x="2505456" y="1847088"/>
-            <a:ext cx="1234440" cy="658368"/>
-          </a:xfrm>
-          <a:prstGeom prst="rect">
-            <a:avLst/>
-          </a:prstGeom>
-          <a:noFill/>
-          <a:ln/>
-        </p:spPr>
-        <p:txBody>
-          <a:bodyPr wrap="square" rtlCol="0" anchor="ctr"/>
-          <a:lstStyle/>
-          <a:p>
-            <a:pPr algn="ctr" indent="0" marL="0">
-              <a:lnSpc>
-                <a:spcPts val="1500"/>
-              </a:lnSpc>
-              <a:buNone/>
-            </a:pPr>
-            <a:r>
-              <a:rPr lang="en-US" sz="1150" b="1" dirty="0">
-                <a:solidFill>
-                  <a:srgbClr val="FFFFFF"/>
-                </a:solidFill>
-                <a:latin typeface="Calibri" pitchFamily="34" charset="0"/>
-                <a:ea typeface="Calibri" pitchFamily="34" charset="-122"/>
-                <a:cs typeface="Calibri" pitchFamily="34" charset="-120"/>
-              </a:rPr>
-              <a:t>AI</a:t>
-            </a:r>
-            <a:endParaRPr lang="en-US" sz="1150" dirty="0"/>
-          </a:p>
-          <a:p>
-            <a:pPr algn="ctr" indent="0" marL="0">
-              <a:lnSpc>
-                <a:spcPts val="1500"/>
-              </a:lnSpc>
-              <a:buNone/>
-            </a:pPr>
-            <a:r>
-              <a:rPr lang="en-US" sz="1150" b="1" dirty="0">
-                <a:solidFill>
-                  <a:srgbClr val="FFFFFF"/>
-                </a:solidFill>
-                <a:latin typeface="Calibri" pitchFamily="34" charset="0"/>
-                <a:ea typeface="Calibri" pitchFamily="34" charset="-122"/>
-                <a:cs typeface="Calibri" pitchFamily="34" charset="-120"/>
-              </a:rPr>
-              <a:t>意図解析</a:t>
-            </a:r>
-            <a:endParaRPr lang="en-US" sz="1150" dirty="0"/>
-          </a:p>
-        </p:txBody>
-      </p:sp>
-      <p:sp>
-        <p:nvSpPr>
-          <p:cNvPr id="10" name="Text 8"/>
-          <p:cNvSpPr/>
-          <p:nvPr/>
-        </p:nvSpPr>
-        <p:spPr>
-          <a:xfrm>
-            <a:off x="3758184" y="1975104"/>
-            <a:ext cx="329184" cy="365760"/>
-          </a:xfrm>
-          <a:prstGeom prst="rect">
-            <a:avLst/>
-          </a:prstGeom>
-          <a:noFill/>
-          <a:ln/>
-        </p:spPr>
-        <p:txBody>
-          <a:bodyPr wrap="square" rtlCol="0" anchor="ctr"/>
-          <a:lstStyle/>
-          <a:p>
-            <a:pPr algn="ctr" indent="0" marL="0">
-              <a:buNone/>
-            </a:pPr>
-            <a:r>
-              <a:rPr lang="en-US" sz="1200" dirty="0">
-                <a:solidFill>
-                  <a:srgbClr val="8A7A80"/>
-                </a:solidFill>
-                <a:latin typeface="Calibri" pitchFamily="34" charset="0"/>
-                <a:ea typeface="Calibri" pitchFamily="34" charset="-122"/>
-                <a:cs typeface="Calibri" pitchFamily="34" charset="-120"/>
-              </a:rPr>
-              <a:t>▶</a:t>
-            </a:r>
-            <a:endParaRPr lang="en-US" sz="1200" dirty="0"/>
-          </a:p>
-        </p:txBody>
-      </p:sp>
-      <p:sp>
-        <p:nvSpPr>
-          <p:cNvPr id="11" name="Shape 9"/>
-          <p:cNvSpPr/>
-          <p:nvPr/>
-        </p:nvSpPr>
-        <p:spPr>
-          <a:xfrm>
-            <a:off x="4105656" y="1737360"/>
-            <a:ext cx="1371600" cy="868680"/>
-          </a:xfrm>
-          <a:prstGeom prst="roundRect">
-            <a:avLst>
-              <a:gd name="adj" fmla="val 8421"/>
-            </a:avLst>
-          </a:prstGeom>
-          <a:solidFill>
-            <a:srgbClr val="6D2E46"/>
-          </a:solidFill>
-          <a:ln/>
-        </p:spPr>
-      </p:sp>
-      <p:sp>
-        <p:nvSpPr>
-          <p:cNvPr id="12" name="Text 10"/>
-          <p:cNvSpPr/>
-          <p:nvPr/>
-        </p:nvSpPr>
-        <p:spPr>
-          <a:xfrm>
-            <a:off x="4105656" y="1847088"/>
-            <a:ext cx="1371600" cy="658368"/>
-          </a:xfrm>
-          <a:prstGeom prst="rect">
-            <a:avLst/>
-          </a:prstGeom>
-          <a:noFill/>
-          <a:ln/>
-        </p:spPr>
-        <p:txBody>
-          <a:bodyPr wrap="square" rtlCol="0" anchor="ctr"/>
-          <a:lstStyle/>
-          <a:p>
-            <a:pPr algn="ctr" indent="0" marL="0">
-              <a:lnSpc>
-                <a:spcPts val="1500"/>
-              </a:lnSpc>
-              <a:buNone/>
-            </a:pPr>
-            <a:r>
-              <a:rPr lang="en-US" sz="1150" b="1" dirty="0">
-                <a:solidFill>
-                  <a:srgbClr val="FFFFFF"/>
-                </a:solidFill>
-                <a:latin typeface="Calibri" pitchFamily="34" charset="0"/>
-                <a:ea typeface="Calibri" pitchFamily="34" charset="-122"/>
-                <a:cs typeface="Calibri" pitchFamily="34" charset="-120"/>
-              </a:rPr>
-              <a:t>確信度</a:t>
-            </a:r>
-            <a:endParaRPr lang="en-US" sz="1150" dirty="0"/>
-          </a:p>
-          <a:p>
-            <a:pPr algn="ctr" indent="0" marL="0">
-              <a:lnSpc>
-                <a:spcPts val="1500"/>
-              </a:lnSpc>
-              <a:buNone/>
-            </a:pPr>
-            <a:r>
-              <a:rPr lang="en-US" sz="1150" b="1" dirty="0">
-                <a:solidFill>
-                  <a:srgbClr val="FFFFFF"/>
-                </a:solidFill>
-                <a:latin typeface="Calibri" pitchFamily="34" charset="0"/>
-                <a:ea typeface="Calibri" pitchFamily="34" charset="-122"/>
-                <a:cs typeface="Calibri" pitchFamily="34" charset="-120"/>
-              </a:rPr>
-              <a:t>0.85 以上?</a:t>
-            </a:r>
-            <a:endParaRPr lang="en-US" sz="1150" dirty="0"/>
-          </a:p>
-        </p:txBody>
-      </p:sp>
-      <p:sp>
-        <p:nvSpPr>
-          <p:cNvPr id="13" name="Text 11"/>
-          <p:cNvSpPr/>
-          <p:nvPr/>
-        </p:nvSpPr>
-        <p:spPr>
-          <a:xfrm>
-            <a:off x="5495544" y="1975104"/>
-            <a:ext cx="329184" cy="365760"/>
-          </a:xfrm>
-          <a:prstGeom prst="rect">
-            <a:avLst/>
-          </a:prstGeom>
-          <a:noFill/>
-          <a:ln/>
-        </p:spPr>
-        <p:txBody>
-          <a:bodyPr wrap="square" rtlCol="0" anchor="ctr"/>
-          <a:lstStyle/>
-          <a:p>
-            <a:pPr algn="ctr" indent="0" marL="0">
-              <a:buNone/>
-            </a:pPr>
-            <a:r>
-              <a:rPr lang="en-US" sz="1200" dirty="0">
-                <a:solidFill>
-                  <a:srgbClr val="8A7A80"/>
-                </a:solidFill>
-                <a:latin typeface="Calibri" pitchFamily="34" charset="0"/>
-                <a:ea typeface="Calibri" pitchFamily="34" charset="-122"/>
-                <a:cs typeface="Calibri" pitchFamily="34" charset="-120"/>
-              </a:rPr>
-              <a:t>▶</a:t>
-            </a:r>
-            <a:endParaRPr lang="en-US" sz="1200" dirty="0"/>
-          </a:p>
-        </p:txBody>
-      </p:sp>
-      <p:sp>
-        <p:nvSpPr>
-          <p:cNvPr id="14" name="Shape 12"/>
-          <p:cNvSpPr/>
-          <p:nvPr/>
-        </p:nvSpPr>
-        <p:spPr>
-          <a:xfrm>
-            <a:off x="5843016" y="1737360"/>
-            <a:ext cx="1234440" cy="868680"/>
-          </a:xfrm>
-          <a:prstGeom prst="roundRect">
-            <a:avLst>
-              <a:gd name="adj" fmla="val 8421"/>
-            </a:avLst>
-          </a:prstGeom>
-          <a:solidFill>
-            <a:srgbClr val="6D2E46"/>
-          </a:solidFill>
-          <a:ln/>
-        </p:spPr>
-      </p:sp>
-      <p:sp>
-        <p:nvSpPr>
-          <p:cNvPr id="15" name="Text 13"/>
-          <p:cNvSpPr/>
-          <p:nvPr/>
-        </p:nvSpPr>
-        <p:spPr>
-          <a:xfrm>
-            <a:off x="5843016" y="1847088"/>
-            <a:ext cx="1234440" cy="658368"/>
-          </a:xfrm>
-          <a:prstGeom prst="rect">
-            <a:avLst/>
-          </a:prstGeom>
-          <a:noFill/>
-          <a:ln/>
-        </p:spPr>
-        <p:txBody>
-          <a:bodyPr wrap="square" rtlCol="0" anchor="ctr"/>
-          <a:lstStyle/>
-          <a:p>
-            <a:pPr algn="ctr" indent="0" marL="0">
-              <a:lnSpc>
-                <a:spcPts val="1500"/>
-              </a:lnSpc>
-              <a:buNone/>
-            </a:pPr>
-            <a:r>
-              <a:rPr lang="en-US" sz="1150" b="1" dirty="0">
-                <a:solidFill>
-                  <a:srgbClr val="FFFFFF"/>
-                </a:solidFill>
-                <a:latin typeface="Calibri" pitchFamily="34" charset="0"/>
-                <a:ea typeface="Calibri" pitchFamily="34" charset="-122"/>
-                <a:cs typeface="Calibri" pitchFamily="34" charset="-120"/>
-              </a:rPr>
-              <a:t>機器は</a:t>
-            </a:r>
-            <a:endParaRPr lang="en-US" sz="1150" dirty="0"/>
-          </a:p>
-          <a:p>
-            <a:pPr algn="ctr" indent="0" marL="0">
-              <a:lnSpc>
-                <a:spcPts val="1500"/>
-              </a:lnSpc>
-              <a:buNone/>
-            </a:pPr>
-            <a:r>
-              <a:rPr lang="en-US" sz="1150" b="1" dirty="0">
-                <a:solidFill>
-                  <a:srgbClr val="FFFFFF"/>
-                </a:solidFill>
-                <a:latin typeface="Calibri" pitchFamily="34" charset="0"/>
-                <a:ea typeface="Calibri" pitchFamily="34" charset="-122"/>
-                <a:cs typeface="Calibri" pitchFamily="34" charset="-120"/>
-              </a:rPr>
-              <a:t>Safe?</a:t>
-            </a:r>
-            <a:endParaRPr lang="en-US" sz="1150" dirty="0"/>
-          </a:p>
-        </p:txBody>
-      </p:sp>
-      <p:sp>
-        <p:nvSpPr>
-          <p:cNvPr id="16" name="Text 14"/>
-          <p:cNvSpPr/>
-          <p:nvPr/>
-        </p:nvSpPr>
-        <p:spPr>
-          <a:xfrm>
-            <a:off x="7095744" y="1975104"/>
-            <a:ext cx="329184" cy="365760"/>
-          </a:xfrm>
-          <a:prstGeom prst="rect">
-            <a:avLst/>
-          </a:prstGeom>
-          <a:noFill/>
-          <a:ln/>
-        </p:spPr>
-        <p:txBody>
-          <a:bodyPr wrap="square" rtlCol="0" anchor="ctr"/>
-          <a:lstStyle/>
-          <a:p>
-            <a:pPr algn="ctr" indent="0" marL="0">
-              <a:buNone/>
-            </a:pPr>
-            <a:r>
-              <a:rPr lang="en-US" sz="1200" dirty="0">
-                <a:solidFill>
-                  <a:srgbClr val="8A7A80"/>
-                </a:solidFill>
-                <a:latin typeface="Calibri" pitchFamily="34" charset="0"/>
-                <a:ea typeface="Calibri" pitchFamily="34" charset="-122"/>
-                <a:cs typeface="Calibri" pitchFamily="34" charset="-120"/>
-              </a:rPr>
-              <a:t>▶</a:t>
-            </a:r>
-            <a:endParaRPr lang="en-US" sz="1200" dirty="0"/>
-          </a:p>
-        </p:txBody>
-      </p:sp>
-      <p:sp>
-        <p:nvSpPr>
-          <p:cNvPr id="17" name="Shape 15"/>
-          <p:cNvSpPr/>
-          <p:nvPr/>
-        </p:nvSpPr>
-        <p:spPr>
-          <a:xfrm>
-            <a:off x="7443216" y="1737360"/>
-            <a:ext cx="1051560" cy="868680"/>
-          </a:xfrm>
-          <a:prstGeom prst="roundRect">
-            <a:avLst>
-              <a:gd name="adj" fmla="val 8421"/>
-            </a:avLst>
-          </a:prstGeom>
-          <a:solidFill>
-            <a:srgbClr val="4F7A5B"/>
-          </a:solidFill>
-          <a:ln/>
-        </p:spPr>
-      </p:sp>
-      <p:sp>
-        <p:nvSpPr>
-          <p:cNvPr id="18" name="Text 16"/>
-          <p:cNvSpPr/>
-          <p:nvPr/>
-        </p:nvSpPr>
-        <p:spPr>
-          <a:xfrm>
-            <a:off x="7443216" y="1847088"/>
-            <a:ext cx="1051560" cy="658368"/>
-          </a:xfrm>
-          <a:prstGeom prst="rect">
-            <a:avLst/>
-          </a:prstGeom>
-          <a:noFill/>
-          <a:ln/>
-        </p:spPr>
-        <p:txBody>
-          <a:bodyPr wrap="square" rtlCol="0" anchor="ctr"/>
-          <a:lstStyle/>
-          <a:p>
-            <a:pPr algn="ctr" indent="0" marL="0">
-              <a:lnSpc>
-                <a:spcPts val="1500"/>
-              </a:lnSpc>
-              <a:buNone/>
-            </a:pPr>
-            <a:r>
-              <a:rPr lang="en-US" sz="1150" b="1" dirty="0">
-                <a:solidFill>
-                  <a:srgbClr val="FFFFFF"/>
-                </a:solidFill>
-                <a:latin typeface="Calibri" pitchFamily="34" charset="0"/>
-                <a:ea typeface="Calibri" pitchFamily="34" charset="-122"/>
-                <a:cs typeface="Calibri" pitchFamily="34" charset="-120"/>
-              </a:rPr>
-              <a:t>実行</a:t>
-            </a:r>
-            <a:endParaRPr lang="en-US" sz="1150" dirty="0"/>
-          </a:p>
-        </p:txBody>
-      </p:sp>
-      <p:sp>
-        <p:nvSpPr>
-          <p:cNvPr id="19" name="Shape 17"/>
-          <p:cNvSpPr/>
-          <p:nvPr/>
-        </p:nvSpPr>
-        <p:spPr>
-          <a:xfrm>
-            <a:off x="4777740" y="2606040"/>
-            <a:ext cx="27432" cy="274320"/>
-          </a:xfrm>
-          <a:prstGeom prst="rect">
-            <a:avLst/>
-          </a:prstGeom>
-          <a:solidFill>
-            <a:srgbClr val="8A7A80"/>
-          </a:solidFill>
-          <a:ln/>
-        </p:spPr>
-      </p:sp>
-      <p:sp>
-        <p:nvSpPr>
-          <p:cNvPr id="20" name="Text 18"/>
-          <p:cNvSpPr/>
-          <p:nvPr/>
-        </p:nvSpPr>
-        <p:spPr>
-          <a:xfrm>
-            <a:off x="4846320" y="2596896"/>
-            <a:ext cx="365760" cy="256032"/>
-          </a:xfrm>
-          <a:prstGeom prst="rect">
-            <a:avLst/>
-          </a:prstGeom>
-          <a:noFill/>
-          <a:ln/>
-        </p:spPr>
-        <p:txBody>
-          <a:bodyPr wrap="square" rtlCol="0" anchor="ctr"/>
-          <a:lstStyle/>
-          <a:p>
-            <a:pPr indent="0" marL="0">
-              <a:buNone/>
-            </a:pPr>
-            <a:r>
-              <a:rPr lang="en-US" sz="950" dirty="0">
-                <a:solidFill>
-                  <a:srgbClr val="B23A48"/>
-                </a:solidFill>
-                <a:latin typeface="Calibri" pitchFamily="34" charset="0"/>
-                <a:ea typeface="Calibri" pitchFamily="34" charset="-122"/>
-                <a:cs typeface="Calibri" pitchFamily="34" charset="-120"/>
-              </a:rPr>
-              <a:t>No</a:t>
-            </a:r>
-            <a:endParaRPr lang="en-US" sz="950" dirty="0"/>
-          </a:p>
-        </p:txBody>
-      </p:sp>
-      <p:sp>
-        <p:nvSpPr>
-          <p:cNvPr id="21" name="Shape 19"/>
-          <p:cNvSpPr/>
-          <p:nvPr/>
-        </p:nvSpPr>
-        <p:spPr>
-          <a:xfrm>
-            <a:off x="4105656" y="2880360"/>
-            <a:ext cx="1371600" cy="502920"/>
-          </a:xfrm>
-          <a:prstGeom prst="roundRect">
-            <a:avLst>
-              <a:gd name="adj" fmla="val 10909"/>
-            </a:avLst>
-          </a:prstGeom>
-          <a:solidFill>
-            <a:srgbClr val="ECE2D0"/>
-          </a:solidFill>
-          <a:ln/>
-        </p:spPr>
-      </p:sp>
-      <p:sp>
-        <p:nvSpPr>
-          <p:cNvPr id="22" name="Text 20"/>
-          <p:cNvSpPr/>
-          <p:nvPr/>
-        </p:nvSpPr>
-        <p:spPr>
-          <a:xfrm>
-            <a:off x="4105656" y="2990088"/>
-            <a:ext cx="1371600" cy="292608"/>
-          </a:xfrm>
-          <a:prstGeom prst="rect">
-            <a:avLst/>
-          </a:prstGeom>
-          <a:noFill/>
-          <a:ln/>
-        </p:spPr>
-        <p:txBody>
-          <a:bodyPr wrap="square" rtlCol="0" anchor="ctr"/>
-          <a:lstStyle/>
-          <a:p>
-            <a:pPr algn="ctr" indent="0" marL="0">
-              <a:buNone/>
-            </a:pPr>
-            <a:r>
-              <a:rPr lang="en-US" sz="1100" dirty="0">
-                <a:solidFill>
-                  <a:srgbClr val="2B1F24"/>
-                </a:solidFill>
-                <a:latin typeface="Calibri" pitchFamily="34" charset="0"/>
-                <a:ea typeface="Calibri" pitchFamily="34" charset="-122"/>
-                <a:cs typeface="Calibri" pitchFamily="34" charset="-120"/>
-              </a:rPr>
-              <a:t>確認を返す</a:t>
-            </a:r>
-            <a:endParaRPr lang="en-US" sz="1100" dirty="0"/>
-          </a:p>
-        </p:txBody>
-      </p:sp>
-      <p:sp>
-        <p:nvSpPr>
-          <p:cNvPr id="23" name="Shape 21"/>
-          <p:cNvSpPr/>
-          <p:nvPr/>
-        </p:nvSpPr>
-        <p:spPr>
-          <a:xfrm>
-            <a:off x="6446520" y="2606040"/>
-            <a:ext cx="27432" cy="274320"/>
-          </a:xfrm>
-          <a:prstGeom prst="rect">
-            <a:avLst/>
-          </a:prstGeom>
-          <a:solidFill>
-            <a:srgbClr val="8A7A80"/>
-          </a:solidFill>
-          <a:ln/>
-        </p:spPr>
-      </p:sp>
-      <p:sp>
-        <p:nvSpPr>
-          <p:cNvPr id="24" name="Text 22"/>
-          <p:cNvSpPr/>
-          <p:nvPr/>
-        </p:nvSpPr>
-        <p:spPr>
-          <a:xfrm>
-            <a:off x="6515100" y="2596896"/>
-            <a:ext cx="365760" cy="256032"/>
-          </a:xfrm>
-          <a:prstGeom prst="rect">
-            <a:avLst/>
-          </a:prstGeom>
-          <a:noFill/>
-          <a:ln/>
-        </p:spPr>
-        <p:txBody>
-          <a:bodyPr wrap="square" rtlCol="0" anchor="ctr"/>
-          <a:lstStyle/>
-          <a:p>
-            <a:pPr indent="0" marL="0">
-              <a:buNone/>
-            </a:pPr>
-            <a:r>
-              <a:rPr lang="en-US" sz="950" dirty="0">
-                <a:solidFill>
-                  <a:srgbClr val="B23A48"/>
-                </a:solidFill>
-                <a:latin typeface="Calibri" pitchFamily="34" charset="0"/>
-                <a:ea typeface="Calibri" pitchFamily="34" charset="-122"/>
-                <a:cs typeface="Calibri" pitchFamily="34" charset="-120"/>
-              </a:rPr>
-              <a:t>No</a:t>
-            </a:r>
-            <a:endParaRPr lang="en-US" sz="950" dirty="0"/>
-          </a:p>
-        </p:txBody>
-      </p:sp>
-      <p:sp>
-        <p:nvSpPr>
-          <p:cNvPr id="25" name="Shape 23"/>
-          <p:cNvSpPr/>
-          <p:nvPr/>
-        </p:nvSpPr>
-        <p:spPr>
-          <a:xfrm>
-            <a:off x="5774436" y="2880360"/>
-            <a:ext cx="1371600" cy="502920"/>
-          </a:xfrm>
-          <a:prstGeom prst="roundRect">
-            <a:avLst>
-              <a:gd name="adj" fmla="val 10909"/>
-            </a:avLst>
-          </a:prstGeom>
-          <a:solidFill>
-            <a:srgbClr val="B23A48"/>
-          </a:solidFill>
-          <a:ln/>
-        </p:spPr>
-      </p:sp>
-      <p:sp>
-        <p:nvSpPr>
-          <p:cNvPr id="26" name="Text 24"/>
-          <p:cNvSpPr/>
-          <p:nvPr/>
-        </p:nvSpPr>
-        <p:spPr>
-          <a:xfrm>
-            <a:off x="5774436" y="2990088"/>
-            <a:ext cx="1371600" cy="292608"/>
-          </a:xfrm>
-          <a:prstGeom prst="rect">
-            <a:avLst/>
-          </a:prstGeom>
-          <a:noFill/>
-          <a:ln/>
-        </p:spPr>
-        <p:txBody>
-          <a:bodyPr wrap="square" rtlCol="0" anchor="ctr"/>
-          <a:lstStyle/>
-          <a:p>
-            <a:pPr algn="ctr" indent="0" marL="0">
-              <a:buNone/>
-            </a:pPr>
-            <a:r>
-              <a:rPr lang="en-US" sz="1100" b="1" dirty="0">
-                <a:solidFill>
-                  <a:srgbClr val="FFFFFF"/>
-                </a:solidFill>
-                <a:latin typeface="Calibri" pitchFamily="34" charset="0"/>
-                <a:ea typeface="Calibri" pitchFamily="34" charset="-122"/>
-                <a:cs typeface="Calibri" pitchFamily="34" charset="-120"/>
-              </a:rPr>
-              <a:t>拒否</a:t>
-            </a:r>
-            <a:endParaRPr lang="en-US" sz="1100" dirty="0"/>
-          </a:p>
-        </p:txBody>
-      </p:sp>
-      <p:sp>
-        <p:nvSpPr>
-          <p:cNvPr id="27" name="Shape 25"/>
-          <p:cNvSpPr/>
-          <p:nvPr/>
-        </p:nvSpPr>
-        <p:spPr>
-          <a:xfrm>
-            <a:off x="566928" y="3703320"/>
-            <a:ext cx="8074152" cy="713232"/>
-          </a:xfrm>
-          <a:prstGeom prst="rect">
-            <a:avLst/>
-          </a:prstGeom>
-          <a:solidFill>
-            <a:srgbClr val="2B1F24"/>
-          </a:solidFill>
-          <a:ln/>
-        </p:spPr>
-      </p:sp>
-      <p:sp>
-        <p:nvSpPr>
-          <p:cNvPr id="28" name="Text 26"/>
-          <p:cNvSpPr/>
-          <p:nvPr/>
-        </p:nvSpPr>
-        <p:spPr>
-          <a:xfrm>
-            <a:off x="566928" y="3886200"/>
-            <a:ext cx="8074152" cy="365760"/>
-          </a:xfrm>
-          <a:prstGeom prst="rect">
-            <a:avLst/>
-          </a:prstGeom>
-          <a:noFill/>
-          <a:ln/>
-        </p:spPr>
-        <p:txBody>
-          <a:bodyPr wrap="square" rtlCol="0" anchor="ctr"/>
-          <a:lstStyle/>
-          <a:p>
-            <a:pPr algn="ctr" indent="0" marL="0">
-              <a:buNone/>
-            </a:pPr>
-            <a:r>
-              <a:rPr lang="en-US" sz="1400" b="1" dirty="0">
-                <a:solidFill>
-                  <a:srgbClr val="FFFFFF"/>
-                </a:solidFill>
-                <a:latin typeface="Calibri" pitchFamily="34" charset="0"/>
-                <a:ea typeface="Calibri" pitchFamily="34" charset="-122"/>
-                <a:cs typeface="Calibri" pitchFamily="34" charset="-120"/>
-              </a:rPr>
-              <a:t>すべての経路が監査ログへ集まる ― 成功も、確認も、拒否も</a:t>
-            </a:r>
-            <a:endParaRPr lang="en-US" sz="1400" dirty="0"/>
-          </a:p>
-        </p:txBody>
-      </p:sp>
-      <p:sp>
-        <p:nvSpPr>
-          <p:cNvPr id="29" name="Text 27"/>
-          <p:cNvSpPr/>
-          <p:nvPr/>
-        </p:nvSpPr>
-        <p:spPr>
-          <a:xfrm>
-            <a:off x="411480" y="4759452"/>
-            <a:ext cx="3657600" cy="256032"/>
-          </a:xfrm>
-          <a:prstGeom prst="rect">
-            <a:avLst/>
-          </a:prstGeom>
-          <a:noFill/>
-          <a:ln/>
-        </p:spPr>
-        <p:txBody>
-          <a:bodyPr wrap="square" rtlCol="0" anchor="ctr"/>
-          <a:lstStyle/>
-          <a:p>
-            <a:pPr indent="0" marL="0">
-              <a:buNone/>
-            </a:pPr>
-            <a:r>
-              <a:rPr lang="en-US" sz="1000" dirty="0">
-                <a:solidFill>
-                  <a:srgbClr val="8A7A80"/>
-                </a:solidFill>
-                <a:latin typeface="Calibri" pitchFamily="34" charset="0"/>
-                <a:ea typeface="Calibri" pitchFamily="34" charset="-122"/>
-                <a:cs typeface="Calibri" pitchFamily="34" charset="-120"/>
-              </a:rPr>
-              <a:t>見守り隊 / CareRoute AI</a:t>
-            </a:r>
-            <a:endParaRPr lang="en-US" sz="1000" dirty="0"/>
-          </a:p>
-        </p:txBody>
-      </p:sp>
-      <p:sp>
-        <p:nvSpPr>
-          <p:cNvPr id="30" name="Text 28"/>
-          <p:cNvSpPr/>
-          <p:nvPr/>
-        </p:nvSpPr>
-        <p:spPr>
-          <a:xfrm>
-            <a:off x="8366760" y="4759452"/>
-            <a:ext cx="365760" cy="256032"/>
-          </a:xfrm>
-          <a:prstGeom prst="rect">
-            <a:avLst/>
-          </a:prstGeom>
-          <a:noFill/>
-          <a:ln/>
-        </p:spPr>
-        <p:txBody>
-          <a:bodyPr wrap="square" rtlCol="0" anchor="ctr"/>
-          <a:lstStyle/>
-          <a:p>
-            <a:pPr algn="r" indent="0" marL="0">
-              <a:buNone/>
-            </a:pPr>
-            <a:r>
-              <a:rPr lang="en-US" sz="1000" dirty="0">
-                <a:solidFill>
-                  <a:srgbClr val="8A7A80"/>
-                </a:solidFill>
-                <a:latin typeface="Calibri" pitchFamily="34" charset="0"/>
-                <a:ea typeface="Calibri" pitchFamily="34" charset="-122"/>
-                <a:cs typeface="Calibri" pitchFamily="34" charset="-120"/>
-              </a:rPr>
-              <a:t>5</a:t>
             </a:r>
             <a:endParaRPr lang="en-US" sz="1000" dirty="0"/>
           </a:p>
@@ -5795,7 +7918,7 @@
                 <a:ea typeface="Georgia" pitchFamily="34" charset="-122"/>
                 <a:cs typeface="Georgia" pitchFamily="34" charset="-120"/>
               </a:rPr>
-              <a:t>「消す」は通す</a:t>
+              <a:t>AIの出力は「候補」でしかない</a:t>
             </a:r>
             <a:endParaRPr lang="en-US" sz="3400" dirty="0"/>
           </a:p>
@@ -5834,7 +7957,7 @@
                 <a:ea typeface="Calibri" pitchFamily="34" charset="-122"/>
                 <a:cs typeface="Calibri" pitchFamily="34" charset="-120"/>
               </a:rPr>
-              <a:t>安全性を高める方向の操作まで止めると、使い物にならない</a:t>
+              <a:t>最終判断は必ずルールベースの層を通る</a:t>
             </a:r>
             <a:endParaRPr lang="en-US" sz="1400" dirty="0"/>
           </a:p>
@@ -5848,11 +7971,608 @@
         </p:nvSpPr>
         <p:spPr>
           <a:xfrm>
-            <a:off x="566928" y="1600200"/>
-            <a:ext cx="3886200" cy="1691640"/>
-          </a:xfrm>
-          <a:prstGeom prst="rect">
-            <a:avLst/>
+            <a:off x="566928" y="1737360"/>
+            <a:ext cx="1572768" cy="868680"/>
+          </a:xfrm>
+          <a:prstGeom prst="roundRect">
+            <a:avLst>
+              <a:gd name="adj" fmla="val 8421"/>
+            </a:avLst>
+          </a:prstGeom>
+          <a:solidFill>
+            <a:srgbClr val="8A7A80"/>
+          </a:solidFill>
+          <a:ln/>
+        </p:spPr>
+      </p:sp>
+      <p:sp>
+        <p:nvSpPr>
+          <p:cNvPr id="6" name="Text 4"/>
+          <p:cNvSpPr/>
+          <p:nvPr/>
+        </p:nvSpPr>
+        <p:spPr>
+          <a:xfrm>
+            <a:off x="566928" y="1847088"/>
+            <a:ext cx="1572768" cy="658368"/>
+          </a:xfrm>
+          <a:prstGeom prst="rect">
+            <a:avLst/>
+          </a:prstGeom>
+          <a:noFill/>
+          <a:ln/>
+        </p:spPr>
+        <p:txBody>
+          <a:bodyPr wrap="square" rtlCol="0" anchor="ctr"/>
+          <a:lstStyle/>
+          <a:p>
+            <a:pPr algn="ctr" indent="0" marL="0">
+              <a:lnSpc>
+                <a:spcPts val="1500"/>
+              </a:lnSpc>
+              <a:buNone/>
+            </a:pPr>
+            <a:r>
+              <a:rPr lang="en-US" sz="1150" b="1" dirty="0">
+                <a:solidFill>
+                  <a:srgbClr val="FFFFFF"/>
+                </a:solidFill>
+                <a:latin typeface="Calibri" pitchFamily="34" charset="0"/>
+                <a:ea typeface="Calibri" pitchFamily="34" charset="-122"/>
+                <a:cs typeface="Calibri" pitchFamily="34" charset="-120"/>
+              </a:rPr>
+              <a:t>「ストーブつけて」</a:t>
+            </a:r>
+            <a:endParaRPr lang="en-US" sz="1150" dirty="0"/>
+          </a:p>
+        </p:txBody>
+      </p:sp>
+      <p:sp>
+        <p:nvSpPr>
+          <p:cNvPr id="7" name="Text 5"/>
+          <p:cNvSpPr/>
+          <p:nvPr/>
+        </p:nvSpPr>
+        <p:spPr>
+          <a:xfrm>
+            <a:off x="2157984" y="1975104"/>
+            <a:ext cx="329184" cy="365760"/>
+          </a:xfrm>
+          <a:prstGeom prst="rect">
+            <a:avLst/>
+          </a:prstGeom>
+          <a:noFill/>
+          <a:ln/>
+        </p:spPr>
+        <p:txBody>
+          <a:bodyPr wrap="square" rtlCol="0" anchor="ctr"/>
+          <a:lstStyle/>
+          <a:p>
+            <a:pPr algn="ctr" indent="0" marL="0">
+              <a:buNone/>
+            </a:pPr>
+            <a:r>
+              <a:rPr lang="en-US" sz="1200" dirty="0">
+                <a:solidFill>
+                  <a:srgbClr val="8A7A80"/>
+                </a:solidFill>
+                <a:latin typeface="Calibri" pitchFamily="34" charset="0"/>
+                <a:ea typeface="Calibri" pitchFamily="34" charset="-122"/>
+                <a:cs typeface="Calibri" pitchFamily="34" charset="-120"/>
+              </a:rPr>
+              <a:t>▶</a:t>
+            </a:r>
+            <a:endParaRPr lang="en-US" sz="1200" dirty="0"/>
+          </a:p>
+        </p:txBody>
+      </p:sp>
+      <p:sp>
+        <p:nvSpPr>
+          <p:cNvPr id="8" name="Shape 6"/>
+          <p:cNvSpPr/>
+          <p:nvPr/>
+        </p:nvSpPr>
+        <p:spPr>
+          <a:xfrm>
+            <a:off x="2505456" y="1737360"/>
+            <a:ext cx="1234440" cy="868680"/>
+          </a:xfrm>
+          <a:prstGeom prst="roundRect">
+            <a:avLst>
+              <a:gd name="adj" fmla="val 8421"/>
+            </a:avLst>
+          </a:prstGeom>
+          <a:solidFill>
+            <a:srgbClr val="A26769"/>
+          </a:solidFill>
+          <a:ln/>
+        </p:spPr>
+      </p:sp>
+      <p:sp>
+        <p:nvSpPr>
+          <p:cNvPr id="9" name="Text 7"/>
+          <p:cNvSpPr/>
+          <p:nvPr/>
+        </p:nvSpPr>
+        <p:spPr>
+          <a:xfrm>
+            <a:off x="2505456" y="1847088"/>
+            <a:ext cx="1234440" cy="658368"/>
+          </a:xfrm>
+          <a:prstGeom prst="rect">
+            <a:avLst/>
+          </a:prstGeom>
+          <a:noFill/>
+          <a:ln/>
+        </p:spPr>
+        <p:txBody>
+          <a:bodyPr wrap="square" rtlCol="0" anchor="ctr"/>
+          <a:lstStyle/>
+          <a:p>
+            <a:pPr algn="ctr" indent="0" marL="0">
+              <a:lnSpc>
+                <a:spcPts val="1500"/>
+              </a:lnSpc>
+              <a:buNone/>
+            </a:pPr>
+            <a:r>
+              <a:rPr lang="en-US" sz="1150" b="1" dirty="0">
+                <a:solidFill>
+                  <a:srgbClr val="FFFFFF"/>
+                </a:solidFill>
+                <a:latin typeface="Calibri" pitchFamily="34" charset="0"/>
+                <a:ea typeface="Calibri" pitchFamily="34" charset="-122"/>
+                <a:cs typeface="Calibri" pitchFamily="34" charset="-120"/>
+              </a:rPr>
+              <a:t>AI</a:t>
+            </a:r>
+            <a:endParaRPr lang="en-US" sz="1150" dirty="0"/>
+          </a:p>
+          <a:p>
+            <a:pPr algn="ctr" indent="0" marL="0">
+              <a:lnSpc>
+                <a:spcPts val="1500"/>
+              </a:lnSpc>
+              <a:buNone/>
+            </a:pPr>
+            <a:r>
+              <a:rPr lang="en-US" sz="1150" b="1" dirty="0">
+                <a:solidFill>
+                  <a:srgbClr val="FFFFFF"/>
+                </a:solidFill>
+                <a:latin typeface="Calibri" pitchFamily="34" charset="0"/>
+                <a:ea typeface="Calibri" pitchFamily="34" charset="-122"/>
+                <a:cs typeface="Calibri" pitchFamily="34" charset="-120"/>
+              </a:rPr>
+              <a:t>意図解析</a:t>
+            </a:r>
+            <a:endParaRPr lang="en-US" sz="1150" dirty="0"/>
+          </a:p>
+        </p:txBody>
+      </p:sp>
+      <p:sp>
+        <p:nvSpPr>
+          <p:cNvPr id="10" name="Text 8"/>
+          <p:cNvSpPr/>
+          <p:nvPr/>
+        </p:nvSpPr>
+        <p:spPr>
+          <a:xfrm>
+            <a:off x="3758184" y="1975104"/>
+            <a:ext cx="329184" cy="365760"/>
+          </a:xfrm>
+          <a:prstGeom prst="rect">
+            <a:avLst/>
+          </a:prstGeom>
+          <a:noFill/>
+          <a:ln/>
+        </p:spPr>
+        <p:txBody>
+          <a:bodyPr wrap="square" rtlCol="0" anchor="ctr"/>
+          <a:lstStyle/>
+          <a:p>
+            <a:pPr algn="ctr" indent="0" marL="0">
+              <a:buNone/>
+            </a:pPr>
+            <a:r>
+              <a:rPr lang="en-US" sz="1200" dirty="0">
+                <a:solidFill>
+                  <a:srgbClr val="8A7A80"/>
+                </a:solidFill>
+                <a:latin typeface="Calibri" pitchFamily="34" charset="0"/>
+                <a:ea typeface="Calibri" pitchFamily="34" charset="-122"/>
+                <a:cs typeface="Calibri" pitchFamily="34" charset="-120"/>
+              </a:rPr>
+              <a:t>▶</a:t>
+            </a:r>
+            <a:endParaRPr lang="en-US" sz="1200" dirty="0"/>
+          </a:p>
+        </p:txBody>
+      </p:sp>
+      <p:sp>
+        <p:nvSpPr>
+          <p:cNvPr id="11" name="Shape 9"/>
+          <p:cNvSpPr/>
+          <p:nvPr/>
+        </p:nvSpPr>
+        <p:spPr>
+          <a:xfrm>
+            <a:off x="4105656" y="1737360"/>
+            <a:ext cx="1371600" cy="868680"/>
+          </a:xfrm>
+          <a:prstGeom prst="roundRect">
+            <a:avLst>
+              <a:gd name="adj" fmla="val 8421"/>
+            </a:avLst>
+          </a:prstGeom>
+          <a:solidFill>
+            <a:srgbClr val="6D2E46"/>
+          </a:solidFill>
+          <a:ln/>
+        </p:spPr>
+      </p:sp>
+      <p:sp>
+        <p:nvSpPr>
+          <p:cNvPr id="12" name="Text 10"/>
+          <p:cNvSpPr/>
+          <p:nvPr/>
+        </p:nvSpPr>
+        <p:spPr>
+          <a:xfrm>
+            <a:off x="4105656" y="1847088"/>
+            <a:ext cx="1371600" cy="658368"/>
+          </a:xfrm>
+          <a:prstGeom prst="rect">
+            <a:avLst/>
+          </a:prstGeom>
+          <a:noFill/>
+          <a:ln/>
+        </p:spPr>
+        <p:txBody>
+          <a:bodyPr wrap="square" rtlCol="0" anchor="ctr"/>
+          <a:lstStyle/>
+          <a:p>
+            <a:pPr algn="ctr" indent="0" marL="0">
+              <a:lnSpc>
+                <a:spcPts val="1500"/>
+              </a:lnSpc>
+              <a:buNone/>
+            </a:pPr>
+            <a:r>
+              <a:rPr lang="en-US" sz="1150" b="1" dirty="0">
+                <a:solidFill>
+                  <a:srgbClr val="FFFFFF"/>
+                </a:solidFill>
+                <a:latin typeface="Calibri" pitchFamily="34" charset="0"/>
+                <a:ea typeface="Calibri" pitchFamily="34" charset="-122"/>
+                <a:cs typeface="Calibri" pitchFamily="34" charset="-120"/>
+              </a:rPr>
+              <a:t>確信度</a:t>
+            </a:r>
+            <a:endParaRPr lang="en-US" sz="1150" dirty="0"/>
+          </a:p>
+          <a:p>
+            <a:pPr algn="ctr" indent="0" marL="0">
+              <a:lnSpc>
+                <a:spcPts val="1500"/>
+              </a:lnSpc>
+              <a:buNone/>
+            </a:pPr>
+            <a:r>
+              <a:rPr lang="en-US" sz="1150" b="1" dirty="0">
+                <a:solidFill>
+                  <a:srgbClr val="FFFFFF"/>
+                </a:solidFill>
+                <a:latin typeface="Calibri" pitchFamily="34" charset="0"/>
+                <a:ea typeface="Calibri" pitchFamily="34" charset="-122"/>
+                <a:cs typeface="Calibri" pitchFamily="34" charset="-120"/>
+              </a:rPr>
+              <a:t>0.85 以上?</a:t>
+            </a:r>
+            <a:endParaRPr lang="en-US" sz="1150" dirty="0"/>
+          </a:p>
+        </p:txBody>
+      </p:sp>
+      <p:sp>
+        <p:nvSpPr>
+          <p:cNvPr id="13" name="Text 11"/>
+          <p:cNvSpPr/>
+          <p:nvPr/>
+        </p:nvSpPr>
+        <p:spPr>
+          <a:xfrm>
+            <a:off x="5495544" y="1975104"/>
+            <a:ext cx="329184" cy="365760"/>
+          </a:xfrm>
+          <a:prstGeom prst="rect">
+            <a:avLst/>
+          </a:prstGeom>
+          <a:noFill/>
+          <a:ln/>
+        </p:spPr>
+        <p:txBody>
+          <a:bodyPr wrap="square" rtlCol="0" anchor="ctr"/>
+          <a:lstStyle/>
+          <a:p>
+            <a:pPr algn="ctr" indent="0" marL="0">
+              <a:buNone/>
+            </a:pPr>
+            <a:r>
+              <a:rPr lang="en-US" sz="1200" dirty="0">
+                <a:solidFill>
+                  <a:srgbClr val="8A7A80"/>
+                </a:solidFill>
+                <a:latin typeface="Calibri" pitchFamily="34" charset="0"/>
+                <a:ea typeface="Calibri" pitchFamily="34" charset="-122"/>
+                <a:cs typeface="Calibri" pitchFamily="34" charset="-120"/>
+              </a:rPr>
+              <a:t>▶</a:t>
+            </a:r>
+            <a:endParaRPr lang="en-US" sz="1200" dirty="0"/>
+          </a:p>
+        </p:txBody>
+      </p:sp>
+      <p:sp>
+        <p:nvSpPr>
+          <p:cNvPr id="14" name="Shape 12"/>
+          <p:cNvSpPr/>
+          <p:nvPr/>
+        </p:nvSpPr>
+        <p:spPr>
+          <a:xfrm>
+            <a:off x="5843016" y="1737360"/>
+            <a:ext cx="1234440" cy="868680"/>
+          </a:xfrm>
+          <a:prstGeom prst="roundRect">
+            <a:avLst>
+              <a:gd name="adj" fmla="val 8421"/>
+            </a:avLst>
+          </a:prstGeom>
+          <a:solidFill>
+            <a:srgbClr val="6D2E46"/>
+          </a:solidFill>
+          <a:ln/>
+        </p:spPr>
+      </p:sp>
+      <p:sp>
+        <p:nvSpPr>
+          <p:cNvPr id="15" name="Text 13"/>
+          <p:cNvSpPr/>
+          <p:nvPr/>
+        </p:nvSpPr>
+        <p:spPr>
+          <a:xfrm>
+            <a:off x="5843016" y="1847088"/>
+            <a:ext cx="1234440" cy="658368"/>
+          </a:xfrm>
+          <a:prstGeom prst="rect">
+            <a:avLst/>
+          </a:prstGeom>
+          <a:noFill/>
+          <a:ln/>
+        </p:spPr>
+        <p:txBody>
+          <a:bodyPr wrap="square" rtlCol="0" anchor="ctr"/>
+          <a:lstStyle/>
+          <a:p>
+            <a:pPr algn="ctr" indent="0" marL="0">
+              <a:lnSpc>
+                <a:spcPts val="1500"/>
+              </a:lnSpc>
+              <a:buNone/>
+            </a:pPr>
+            <a:r>
+              <a:rPr lang="en-US" sz="1150" b="1" dirty="0">
+                <a:solidFill>
+                  <a:srgbClr val="FFFFFF"/>
+                </a:solidFill>
+                <a:latin typeface="Calibri" pitchFamily="34" charset="0"/>
+                <a:ea typeface="Calibri" pitchFamily="34" charset="-122"/>
+                <a:cs typeface="Calibri" pitchFamily="34" charset="-120"/>
+              </a:rPr>
+              <a:t>機器は</a:t>
+            </a:r>
+            <a:endParaRPr lang="en-US" sz="1150" dirty="0"/>
+          </a:p>
+          <a:p>
+            <a:pPr algn="ctr" indent="0" marL="0">
+              <a:lnSpc>
+                <a:spcPts val="1500"/>
+              </a:lnSpc>
+              <a:buNone/>
+            </a:pPr>
+            <a:r>
+              <a:rPr lang="en-US" sz="1150" b="1" dirty="0">
+                <a:solidFill>
+                  <a:srgbClr val="FFFFFF"/>
+                </a:solidFill>
+                <a:latin typeface="Calibri" pitchFamily="34" charset="0"/>
+                <a:ea typeface="Calibri" pitchFamily="34" charset="-122"/>
+                <a:cs typeface="Calibri" pitchFamily="34" charset="-120"/>
+              </a:rPr>
+              <a:t>Safe?</a:t>
+            </a:r>
+            <a:endParaRPr lang="en-US" sz="1150" dirty="0"/>
+          </a:p>
+        </p:txBody>
+      </p:sp>
+      <p:sp>
+        <p:nvSpPr>
+          <p:cNvPr id="16" name="Text 14"/>
+          <p:cNvSpPr/>
+          <p:nvPr/>
+        </p:nvSpPr>
+        <p:spPr>
+          <a:xfrm>
+            <a:off x="7095744" y="1975104"/>
+            <a:ext cx="329184" cy="365760"/>
+          </a:xfrm>
+          <a:prstGeom prst="rect">
+            <a:avLst/>
+          </a:prstGeom>
+          <a:noFill/>
+          <a:ln/>
+        </p:spPr>
+        <p:txBody>
+          <a:bodyPr wrap="square" rtlCol="0" anchor="ctr"/>
+          <a:lstStyle/>
+          <a:p>
+            <a:pPr algn="ctr" indent="0" marL="0">
+              <a:buNone/>
+            </a:pPr>
+            <a:r>
+              <a:rPr lang="en-US" sz="1200" dirty="0">
+                <a:solidFill>
+                  <a:srgbClr val="8A7A80"/>
+                </a:solidFill>
+                <a:latin typeface="Calibri" pitchFamily="34" charset="0"/>
+                <a:ea typeface="Calibri" pitchFamily="34" charset="-122"/>
+                <a:cs typeface="Calibri" pitchFamily="34" charset="-120"/>
+              </a:rPr>
+              <a:t>▶</a:t>
+            </a:r>
+            <a:endParaRPr lang="en-US" sz="1200" dirty="0"/>
+          </a:p>
+        </p:txBody>
+      </p:sp>
+      <p:sp>
+        <p:nvSpPr>
+          <p:cNvPr id="17" name="Shape 15"/>
+          <p:cNvSpPr/>
+          <p:nvPr/>
+        </p:nvSpPr>
+        <p:spPr>
+          <a:xfrm>
+            <a:off x="7443216" y="1737360"/>
+            <a:ext cx="1051560" cy="868680"/>
+          </a:xfrm>
+          <a:prstGeom prst="roundRect">
+            <a:avLst>
+              <a:gd name="adj" fmla="val 8421"/>
+            </a:avLst>
+          </a:prstGeom>
+          <a:solidFill>
+            <a:srgbClr val="4F7A5B"/>
+          </a:solidFill>
+          <a:ln/>
+        </p:spPr>
+      </p:sp>
+      <p:sp>
+        <p:nvSpPr>
+          <p:cNvPr id="18" name="Text 16"/>
+          <p:cNvSpPr/>
+          <p:nvPr/>
+        </p:nvSpPr>
+        <p:spPr>
+          <a:xfrm>
+            <a:off x="7443216" y="1847088"/>
+            <a:ext cx="1051560" cy="658368"/>
+          </a:xfrm>
+          <a:prstGeom prst="rect">
+            <a:avLst/>
+          </a:prstGeom>
+          <a:noFill/>
+          <a:ln/>
+        </p:spPr>
+        <p:txBody>
+          <a:bodyPr wrap="square" rtlCol="0" anchor="ctr"/>
+          <a:lstStyle/>
+          <a:p>
+            <a:pPr algn="ctr" indent="0" marL="0">
+              <a:lnSpc>
+                <a:spcPts val="1500"/>
+              </a:lnSpc>
+              <a:buNone/>
+            </a:pPr>
+            <a:r>
+              <a:rPr lang="en-US" sz="1150" b="1" dirty="0">
+                <a:solidFill>
+                  <a:srgbClr val="FFFFFF"/>
+                </a:solidFill>
+                <a:latin typeface="Calibri" pitchFamily="34" charset="0"/>
+                <a:ea typeface="Calibri" pitchFamily="34" charset="-122"/>
+                <a:cs typeface="Calibri" pitchFamily="34" charset="-120"/>
+              </a:rPr>
+              <a:t>実行</a:t>
+            </a:r>
+            <a:endParaRPr lang="en-US" sz="1150" dirty="0"/>
+          </a:p>
+        </p:txBody>
+      </p:sp>
+      <p:sp>
+        <p:nvSpPr>
+          <p:cNvPr id="19" name="Shape 17"/>
+          <p:cNvSpPr/>
+          <p:nvPr/>
+        </p:nvSpPr>
+        <p:spPr>
+          <a:xfrm>
+            <a:off x="4777740" y="2606040"/>
+            <a:ext cx="27432" cy="274320"/>
+          </a:xfrm>
+          <a:prstGeom prst="rect">
+            <a:avLst/>
+          </a:prstGeom>
+          <a:solidFill>
+            <a:srgbClr val="8A7A80"/>
+          </a:solidFill>
+          <a:ln/>
+        </p:spPr>
+      </p:sp>
+      <p:sp>
+        <p:nvSpPr>
+          <p:cNvPr id="20" name="Text 18"/>
+          <p:cNvSpPr/>
+          <p:nvPr/>
+        </p:nvSpPr>
+        <p:spPr>
+          <a:xfrm>
+            <a:off x="4846320" y="2596896"/>
+            <a:ext cx="365760" cy="256032"/>
+          </a:xfrm>
+          <a:prstGeom prst="rect">
+            <a:avLst/>
+          </a:prstGeom>
+          <a:noFill/>
+          <a:ln/>
+        </p:spPr>
+        <p:txBody>
+          <a:bodyPr wrap="square" rtlCol="0" anchor="ctr"/>
+          <a:lstStyle/>
+          <a:p>
+            <a:pPr indent="0" marL="0">
+              <a:buNone/>
+            </a:pPr>
+            <a:r>
+              <a:rPr lang="en-US" sz="950" dirty="0">
+                <a:solidFill>
+                  <a:srgbClr val="B23A48"/>
+                </a:solidFill>
+                <a:latin typeface="Calibri" pitchFamily="34" charset="0"/>
+                <a:ea typeface="Calibri" pitchFamily="34" charset="-122"/>
+                <a:cs typeface="Calibri" pitchFamily="34" charset="-120"/>
+              </a:rPr>
+              <a:t>No</a:t>
+            </a:r>
+            <a:endParaRPr lang="en-US" sz="950" dirty="0"/>
+          </a:p>
+        </p:txBody>
+      </p:sp>
+      <p:sp>
+        <p:nvSpPr>
+          <p:cNvPr id="21" name="Shape 19"/>
+          <p:cNvSpPr/>
+          <p:nvPr/>
+        </p:nvSpPr>
+        <p:spPr>
+          <a:xfrm>
+            <a:off x="4105656" y="2880360"/>
+            <a:ext cx="1371600" cy="502920"/>
+          </a:xfrm>
+          <a:prstGeom prst="roundRect">
+            <a:avLst>
+              <a:gd name="adj" fmla="val 10909"/>
+            </a:avLst>
           </a:prstGeom>
           <a:solidFill>
             <a:srgbClr val="ECE2D0"/>
@@ -5862,17 +8582,117 @@
       </p:sp>
       <p:sp>
         <p:nvSpPr>
-          <p:cNvPr id="6" name="Shape 4"/>
-          <p:cNvSpPr/>
-          <p:nvPr/>
-        </p:nvSpPr>
-        <p:spPr>
-          <a:xfrm>
-            <a:off x="566928" y="1600200"/>
-            <a:ext cx="3886200" cy="457200"/>
-          </a:xfrm>
-          <a:prstGeom prst="rect">
-            <a:avLst/>
+          <p:cNvPr id="22" name="Text 20"/>
+          <p:cNvSpPr/>
+          <p:nvPr/>
+        </p:nvSpPr>
+        <p:spPr>
+          <a:xfrm>
+            <a:off x="4105656" y="2990088"/>
+            <a:ext cx="1371600" cy="292608"/>
+          </a:xfrm>
+          <a:prstGeom prst="rect">
+            <a:avLst/>
+          </a:prstGeom>
+          <a:noFill/>
+          <a:ln/>
+        </p:spPr>
+        <p:txBody>
+          <a:bodyPr wrap="square" rtlCol="0" anchor="ctr"/>
+          <a:lstStyle/>
+          <a:p>
+            <a:pPr algn="ctr" indent="0" marL="0">
+              <a:buNone/>
+            </a:pPr>
+            <a:r>
+              <a:rPr lang="en-US" sz="1100" dirty="0">
+                <a:solidFill>
+                  <a:srgbClr val="2B1F24"/>
+                </a:solidFill>
+                <a:latin typeface="Calibri" pitchFamily="34" charset="0"/>
+                <a:ea typeface="Calibri" pitchFamily="34" charset="-122"/>
+                <a:cs typeface="Calibri" pitchFamily="34" charset="-120"/>
+              </a:rPr>
+              <a:t>確認を返す</a:t>
+            </a:r>
+            <a:endParaRPr lang="en-US" sz="1100" dirty="0"/>
+          </a:p>
+        </p:txBody>
+      </p:sp>
+      <p:sp>
+        <p:nvSpPr>
+          <p:cNvPr id="23" name="Shape 21"/>
+          <p:cNvSpPr/>
+          <p:nvPr/>
+        </p:nvSpPr>
+        <p:spPr>
+          <a:xfrm>
+            <a:off x="6446520" y="2606040"/>
+            <a:ext cx="27432" cy="274320"/>
+          </a:xfrm>
+          <a:prstGeom prst="rect">
+            <a:avLst/>
+          </a:prstGeom>
+          <a:solidFill>
+            <a:srgbClr val="8A7A80"/>
+          </a:solidFill>
+          <a:ln/>
+        </p:spPr>
+      </p:sp>
+      <p:sp>
+        <p:nvSpPr>
+          <p:cNvPr id="24" name="Text 22"/>
+          <p:cNvSpPr/>
+          <p:nvPr/>
+        </p:nvSpPr>
+        <p:spPr>
+          <a:xfrm>
+            <a:off x="6515100" y="2596896"/>
+            <a:ext cx="365760" cy="256032"/>
+          </a:xfrm>
+          <a:prstGeom prst="rect">
+            <a:avLst/>
+          </a:prstGeom>
+          <a:noFill/>
+          <a:ln/>
+        </p:spPr>
+        <p:txBody>
+          <a:bodyPr wrap="square" rtlCol="0" anchor="ctr"/>
+          <a:lstStyle/>
+          <a:p>
+            <a:pPr indent="0" marL="0">
+              <a:buNone/>
+            </a:pPr>
+            <a:r>
+              <a:rPr lang="en-US" sz="950" dirty="0">
+                <a:solidFill>
+                  <a:srgbClr val="B23A48"/>
+                </a:solidFill>
+                <a:latin typeface="Calibri" pitchFamily="34" charset="0"/>
+                <a:ea typeface="Calibri" pitchFamily="34" charset="-122"/>
+                <a:cs typeface="Calibri" pitchFamily="34" charset="-120"/>
+              </a:rPr>
+              <a:t>No</a:t>
+            </a:r>
+            <a:endParaRPr lang="en-US" sz="950" dirty="0"/>
+          </a:p>
+        </p:txBody>
+      </p:sp>
+      <p:sp>
+        <p:nvSpPr>
+          <p:cNvPr id="25" name="Shape 23"/>
+          <p:cNvSpPr/>
+          <p:nvPr/>
+        </p:nvSpPr>
+        <p:spPr>
+          <a:xfrm>
+            <a:off x="5774436" y="2880360"/>
+            <a:ext cx="1371600" cy="502920"/>
+          </a:xfrm>
+          <a:prstGeom prst="roundRect">
+            <a:avLst>
+              <a:gd name="adj" fmla="val 10909"/>
+            </a:avLst>
           </a:prstGeom>
           <a:solidFill>
             <a:srgbClr val="B23A48"/>
@@ -5882,26 +8702,85 @@
       </p:sp>
       <p:sp>
         <p:nvSpPr>
-          <p:cNvPr id="7" name="Text 5"/>
-          <p:cNvSpPr/>
-          <p:nvPr/>
-        </p:nvSpPr>
-        <p:spPr>
-          <a:xfrm>
-            <a:off x="768096" y="1673352"/>
-            <a:ext cx="3474720" cy="310896"/>
-          </a:xfrm>
-          <a:prstGeom prst="rect">
-            <a:avLst/>
-          </a:prstGeom>
-          <a:noFill/>
-          <a:ln/>
-        </p:spPr>
-        <p:txBody>
-          <a:bodyPr wrap="square" rtlCol="0" anchor="ctr"/>
-          <a:lstStyle/>
-          <a:p>
-            <a:pPr indent="0" marL="0">
+          <p:cNvPr id="26" name="Text 24"/>
+          <p:cNvSpPr/>
+          <p:nvPr/>
+        </p:nvSpPr>
+        <p:spPr>
+          <a:xfrm>
+            <a:off x="5774436" y="2990088"/>
+            <a:ext cx="1371600" cy="292608"/>
+          </a:xfrm>
+          <a:prstGeom prst="rect">
+            <a:avLst/>
+          </a:prstGeom>
+          <a:noFill/>
+          <a:ln/>
+        </p:spPr>
+        <p:txBody>
+          <a:bodyPr wrap="square" rtlCol="0" anchor="ctr"/>
+          <a:lstStyle/>
+          <a:p>
+            <a:pPr algn="ctr" indent="0" marL="0">
+              <a:buNone/>
+            </a:pPr>
+            <a:r>
+              <a:rPr lang="en-US" sz="1100" b="1" dirty="0">
+                <a:solidFill>
+                  <a:srgbClr val="FFFFFF"/>
+                </a:solidFill>
+                <a:latin typeface="Calibri" pitchFamily="34" charset="0"/>
+                <a:ea typeface="Calibri" pitchFamily="34" charset="-122"/>
+                <a:cs typeface="Calibri" pitchFamily="34" charset="-120"/>
+              </a:rPr>
+              <a:t>拒否</a:t>
+            </a:r>
+            <a:endParaRPr lang="en-US" sz="1100" dirty="0"/>
+          </a:p>
+        </p:txBody>
+      </p:sp>
+      <p:sp>
+        <p:nvSpPr>
+          <p:cNvPr id="27" name="Shape 25"/>
+          <p:cNvSpPr/>
+          <p:nvPr/>
+        </p:nvSpPr>
+        <p:spPr>
+          <a:xfrm>
+            <a:off x="566928" y="3703320"/>
+            <a:ext cx="8074152" cy="713232"/>
+          </a:xfrm>
+          <a:prstGeom prst="rect">
+            <a:avLst/>
+          </a:prstGeom>
+          <a:solidFill>
+            <a:srgbClr val="2B1F24"/>
+          </a:solidFill>
+          <a:ln/>
+        </p:spPr>
+      </p:sp>
+      <p:sp>
+        <p:nvSpPr>
+          <p:cNvPr id="28" name="Text 26"/>
+          <p:cNvSpPr/>
+          <p:nvPr/>
+        </p:nvSpPr>
+        <p:spPr>
+          <a:xfrm>
+            <a:off x="566928" y="3886200"/>
+            <a:ext cx="8074152" cy="365760"/>
+          </a:xfrm>
+          <a:prstGeom prst="rect">
+            <a:avLst/>
+          </a:prstGeom>
+          <a:noFill/>
+          <a:ln/>
+        </p:spPr>
+        <p:txBody>
+          <a:bodyPr wrap="square" rtlCol="0" anchor="ctr"/>
+          <a:lstStyle/>
+          <a:p>
+            <a:pPr algn="ctr" indent="0" marL="0">
               <a:buNone/>
             </a:pPr>
             <a:r>
@@ -5913,7 +8792,7 @@
                 <a:ea typeface="Calibri" pitchFamily="34" charset="-122"/>
                 <a:cs typeface="Calibri" pitchFamily="34" charset="-120"/>
               </a:rPr>
-              <a:t>ストーブ つけて</a:t>
+              <a:t>すべての経路が監査ログへ集まる ― 成功も、確認も、拒否も</a:t>
             </a:r>
             <a:endParaRPr lang="en-US" sz="1400" dirty="0"/>
           </a:p>
@@ -5921,350 +8800,7 @@
       </p:sp>
       <p:sp>
         <p:nvSpPr>
-          <p:cNvPr id="8" name="Text 6"/>
-          <p:cNvSpPr/>
-          <p:nvPr/>
-        </p:nvSpPr>
-        <p:spPr>
-          <a:xfrm>
-            <a:off x="768096" y="2194560"/>
-            <a:ext cx="3474720" cy="384048"/>
-          </a:xfrm>
-          <a:prstGeom prst="rect">
-            <a:avLst/>
-          </a:prstGeom>
-          <a:noFill/>
-          <a:ln/>
-        </p:spPr>
-        <p:txBody>
-          <a:bodyPr wrap="square" rtlCol="0" anchor="ctr"/>
-          <a:lstStyle/>
-          <a:p>
-            <a:pPr indent="0" marL="0">
-              <a:buNone/>
-            </a:pPr>
-            <a:r>
-              <a:rPr lang="en-US" sz="2000" b="1" dirty="0">
-                <a:solidFill>
-                  <a:srgbClr val="B23A48"/>
-                </a:solidFill>
-                <a:latin typeface="Georgia" pitchFamily="34" charset="0"/>
-                <a:ea typeface="Georgia" pitchFamily="34" charset="-122"/>
-                <a:cs typeface="Georgia" pitchFamily="34" charset="-120"/>
-              </a:rPr>
-              <a:t>拒否</a:t>
-            </a:r>
-            <a:endParaRPr lang="en-US" sz="2000" dirty="0"/>
-          </a:p>
-        </p:txBody>
-      </p:sp>
-      <p:sp>
-        <p:nvSpPr>
-          <p:cNvPr id="9" name="Text 7"/>
-          <p:cNvSpPr/>
-          <p:nvPr/>
-        </p:nvSpPr>
-        <p:spPr>
-          <a:xfrm>
-            <a:off x="768096" y="2633472"/>
-            <a:ext cx="3520440" cy="566928"/>
-          </a:xfrm>
-          <a:prstGeom prst="rect">
-            <a:avLst/>
-          </a:prstGeom>
-          <a:noFill/>
-          <a:ln/>
-        </p:spPr>
-        <p:txBody>
-          <a:bodyPr wrap="square" rtlCol="0" anchor="ctr"/>
-          <a:lstStyle/>
-          <a:p>
-            <a:pPr indent="0" marL="0">
-              <a:lnSpc>
-                <a:spcPts val="1600"/>
-              </a:lnSpc>
-              <a:buNone/>
-            </a:pPr>
-            <a:r>
-              <a:rPr lang="en-US" sz="1150" dirty="0">
-                <a:solidFill>
-                  <a:srgbClr val="2B1F24"/>
-                </a:solidFill>
-                <a:latin typeface="Calibri" pitchFamily="34" charset="0"/>
-                <a:ea typeface="Calibri" pitchFamily="34" charset="-122"/>
-                <a:cs typeface="Calibri" pitchFamily="34" charset="-120"/>
-              </a:rPr>
-              <a:t>安全のため音声・チャットからの</a:t>
-            </a:r>
-            <a:endParaRPr lang="en-US" sz="1150" dirty="0"/>
-          </a:p>
-          <a:p>
-            <a:pPr indent="0" marL="0">
-              <a:lnSpc>
-                <a:spcPts val="1600"/>
-              </a:lnSpc>
-              <a:buNone/>
-            </a:pPr>
-            <a:r>
-              <a:rPr lang="en-US" sz="1150" dirty="0">
-                <a:solidFill>
-                  <a:srgbClr val="2B1F24"/>
-                </a:solidFill>
-                <a:latin typeface="Calibri" pitchFamily="34" charset="0"/>
-                <a:ea typeface="Calibri" pitchFamily="34" charset="-122"/>
-                <a:cs typeface="Calibri" pitchFamily="34" charset="-120"/>
-              </a:rPr>
-              <a:t>操作を禁止しています。</a:t>
-            </a:r>
-            <a:endParaRPr lang="en-US" sz="1150" dirty="0"/>
-          </a:p>
-        </p:txBody>
-      </p:sp>
-      <p:sp>
-        <p:nvSpPr>
-          <p:cNvPr id="10" name="Shape 8"/>
-          <p:cNvSpPr/>
-          <p:nvPr/>
-        </p:nvSpPr>
-        <p:spPr>
-          <a:xfrm>
-            <a:off x="4773168" y="1600200"/>
-            <a:ext cx="3886200" cy="1691640"/>
-          </a:xfrm>
-          <a:prstGeom prst="rect">
-            <a:avLst/>
-          </a:prstGeom>
-          <a:solidFill>
-            <a:srgbClr val="ECE2D0"/>
-          </a:solidFill>
-          <a:ln/>
-        </p:spPr>
-      </p:sp>
-      <p:sp>
-        <p:nvSpPr>
-          <p:cNvPr id="11" name="Shape 9"/>
-          <p:cNvSpPr/>
-          <p:nvPr/>
-        </p:nvSpPr>
-        <p:spPr>
-          <a:xfrm>
-            <a:off x="4773168" y="1600200"/>
-            <a:ext cx="3886200" cy="457200"/>
-          </a:xfrm>
-          <a:prstGeom prst="rect">
-            <a:avLst/>
-          </a:prstGeom>
-          <a:solidFill>
-            <a:srgbClr val="4F7A5B"/>
-          </a:solidFill>
-          <a:ln/>
-        </p:spPr>
-      </p:sp>
-      <p:sp>
-        <p:nvSpPr>
-          <p:cNvPr id="12" name="Text 10"/>
-          <p:cNvSpPr/>
-          <p:nvPr/>
-        </p:nvSpPr>
-        <p:spPr>
-          <a:xfrm>
-            <a:off x="4974336" y="1673352"/>
-            <a:ext cx="3474720" cy="310896"/>
-          </a:xfrm>
-          <a:prstGeom prst="rect">
-            <a:avLst/>
-          </a:prstGeom>
-          <a:noFill/>
-          <a:ln/>
-        </p:spPr>
-        <p:txBody>
-          <a:bodyPr wrap="square" rtlCol="0" anchor="ctr"/>
-          <a:lstStyle/>
-          <a:p>
-            <a:pPr indent="0" marL="0">
-              <a:buNone/>
-            </a:pPr>
-            <a:r>
-              <a:rPr lang="en-US" sz="1400" b="1" dirty="0">
-                <a:solidFill>
-                  <a:srgbClr val="FFFFFF"/>
-                </a:solidFill>
-                <a:latin typeface="Calibri" pitchFamily="34" charset="0"/>
-                <a:ea typeface="Calibri" pitchFamily="34" charset="-122"/>
-                <a:cs typeface="Calibri" pitchFamily="34" charset="-120"/>
-              </a:rPr>
-              <a:t>ストーブ 消して</a:t>
-            </a:r>
-            <a:endParaRPr lang="en-US" sz="1400" dirty="0"/>
-          </a:p>
-        </p:txBody>
-      </p:sp>
-      <p:sp>
-        <p:nvSpPr>
-          <p:cNvPr id="13" name="Text 11"/>
-          <p:cNvSpPr/>
-          <p:nvPr/>
-        </p:nvSpPr>
-        <p:spPr>
-          <a:xfrm>
-            <a:off x="4974336" y="2194560"/>
-            <a:ext cx="3474720" cy="384048"/>
-          </a:xfrm>
-          <a:prstGeom prst="rect">
-            <a:avLst/>
-          </a:prstGeom>
-          <a:noFill/>
-          <a:ln/>
-        </p:spPr>
-        <p:txBody>
-          <a:bodyPr wrap="square" rtlCol="0" anchor="ctr"/>
-          <a:lstStyle/>
-          <a:p>
-            <a:pPr indent="0" marL="0">
-              <a:buNone/>
-            </a:pPr>
-            <a:r>
-              <a:rPr lang="en-US" sz="2000" b="1" dirty="0">
-                <a:solidFill>
-                  <a:srgbClr val="4F7A5B"/>
-                </a:solidFill>
-                <a:latin typeface="Georgia" pitchFamily="34" charset="0"/>
-                <a:ea typeface="Georgia" pitchFamily="34" charset="-122"/>
-                <a:cs typeface="Georgia" pitchFamily="34" charset="-120"/>
-              </a:rPr>
-              <a:t>受理（確認あり）</a:t>
-            </a:r>
-            <a:endParaRPr lang="en-US" sz="2000" dirty="0"/>
-          </a:p>
-        </p:txBody>
-      </p:sp>
-      <p:sp>
-        <p:nvSpPr>
-          <p:cNvPr id="14" name="Text 12"/>
-          <p:cNvSpPr/>
-          <p:nvPr/>
-        </p:nvSpPr>
-        <p:spPr>
-          <a:xfrm>
-            <a:off x="4974336" y="2633472"/>
-            <a:ext cx="3520440" cy="566928"/>
-          </a:xfrm>
-          <a:prstGeom prst="rect">
-            <a:avLst/>
-          </a:prstGeom>
-          <a:noFill/>
-          <a:ln/>
-        </p:spPr>
-        <p:txBody>
-          <a:bodyPr wrap="square" rtlCol="0" anchor="ctr"/>
-          <a:lstStyle/>
-          <a:p>
-            <a:pPr indent="0" marL="0">
-              <a:lnSpc>
-                <a:spcPts val="1600"/>
-              </a:lnSpc>
-              <a:buNone/>
-            </a:pPr>
-            <a:r>
-              <a:rPr lang="en-US" sz="1150" dirty="0">
-                <a:solidFill>
-                  <a:srgbClr val="2B1F24"/>
-                </a:solidFill>
-                <a:latin typeface="Calibri" pitchFamily="34" charset="0"/>
-                <a:ea typeface="Calibri" pitchFamily="34" charset="-122"/>
-                <a:cs typeface="Calibri" pitchFamily="34" charset="-120"/>
-              </a:rPr>
-              <a:t>消します。よろしいですか？</a:t>
-            </a:r>
-            <a:endParaRPr lang="en-US" sz="1150" dirty="0"/>
-          </a:p>
-          <a:p>
-            <a:pPr indent="0" marL="0">
-              <a:lnSpc>
-                <a:spcPts val="1600"/>
-              </a:lnSpc>
-              <a:buNone/>
-            </a:pPr>
-            <a:r>
-              <a:rPr lang="en-US" sz="1150" dirty="0">
-                <a:solidFill>
-                  <a:srgbClr val="2B1F24"/>
-                </a:solidFill>
-                <a:latin typeface="Calibri" pitchFamily="34" charset="0"/>
-                <a:ea typeface="Calibri" pitchFamily="34" charset="-122"/>
-                <a:cs typeface="Calibri" pitchFamily="34" charset="-120"/>
-              </a:rPr>
-              <a:t>→「はい」で実行</a:t>
-            </a:r>
-            <a:endParaRPr lang="en-US" sz="1150" dirty="0"/>
-          </a:p>
-        </p:txBody>
-      </p:sp>
-      <p:sp>
-        <p:nvSpPr>
-          <p:cNvPr id="15" name="Text 13"/>
-          <p:cNvSpPr/>
-          <p:nvPr/>
-        </p:nvSpPr>
-        <p:spPr>
-          <a:xfrm>
-            <a:off x="566928" y="3520440"/>
-            <a:ext cx="8074152" cy="685800"/>
-          </a:xfrm>
-          <a:prstGeom prst="rect">
-            <a:avLst/>
-          </a:prstGeom>
-          <a:noFill/>
-          <a:ln/>
-        </p:spPr>
-        <p:txBody>
-          <a:bodyPr wrap="square" rtlCol="0" anchor="ctr"/>
-          <a:lstStyle/>
-          <a:p>
-            <a:pPr indent="0" marL="0">
-              <a:lnSpc>
-                <a:spcPts val="2000"/>
-              </a:lnSpc>
-              <a:buNone/>
-            </a:pPr>
-            <a:r>
-              <a:rPr lang="en-US" sz="1250" dirty="0">
-                <a:solidFill>
-                  <a:srgbClr val="2B1F24"/>
-                </a:solidFill>
-                <a:latin typeface="Calibri" pitchFamily="34" charset="0"/>
-                <a:ea typeface="Calibri" pitchFamily="34" charset="-122"/>
-                <a:cs typeface="Calibri" pitchFamily="34" charset="-120"/>
-              </a:rPr>
-              <a:t>拒否の理由が使う人に見えないと、ただの故障に見える。</a:t>
-            </a:r>
-            <a:endParaRPr lang="en-US" sz="1250" dirty="0"/>
-          </a:p>
-          <a:p>
-            <a:pPr indent="0" marL="0">
-              <a:lnSpc>
-                <a:spcPts val="2000"/>
-              </a:lnSpc>
-              <a:buNone/>
-            </a:pPr>
-            <a:r>
-              <a:rPr lang="en-US" sz="1250" dirty="0">
-                <a:solidFill>
-                  <a:srgbClr val="2B1F24"/>
-                </a:solidFill>
-                <a:latin typeface="Calibri" pitchFamily="34" charset="0"/>
-                <a:ea typeface="Calibri" pitchFamily="34" charset="-122"/>
-                <a:cs typeface="Calibri" pitchFamily="34" charset="-120"/>
-              </a:rPr>
-              <a:t>そのため機器カードにも「安全のため、遠隔では消す操作だけできます」と表示している。</a:t>
-            </a:r>
-            <a:endParaRPr lang="en-US" sz="1250" dirty="0"/>
-          </a:p>
-        </p:txBody>
-      </p:sp>
-      <p:sp>
-        <p:nvSpPr>
-          <p:cNvPr id="16" name="Text 14"/>
+          <p:cNvPr id="29" name="Text 27"/>
           <p:cNvSpPr/>
           <p:nvPr/>
         </p:nvSpPr>
@@ -6303,7 +8839,7 @@
       </p:sp>
       <p:sp>
         <p:nvSpPr>
-          <p:cNvPr id="17" name="Text 15"/>
+          <p:cNvPr id="30" name="Text 28"/>
           <p:cNvSpPr/>
           <p:nvPr/>
         </p:nvSpPr>
@@ -6387,7 +8923,7 @@
             <a:avLst/>
           </a:prstGeom>
           <a:solidFill>
-            <a:srgbClr val="6D2E46"/>
+            <a:srgbClr val="B23A48"/>
           </a:solidFill>
           <a:ln/>
         </p:spPr>
@@ -6425,7 +8961,7 @@
                 <a:ea typeface="Georgia" pitchFamily="34" charset="-122"/>
                 <a:cs typeface="Georgia" pitchFamily="34" charset="-120"/>
               </a:rPr>
-              <a:t>構成</a:t>
+              <a:t>「消す」は通す</a:t>
             </a:r>
             <a:endParaRPr lang="en-US" sz="3400" dirty="0"/>
           </a:p>
@@ -6464,7 +9000,7 @@
                 <a:ea typeface="Calibri" pitchFamily="34" charset="-122"/>
                 <a:cs typeface="Calibri" pitchFamily="34" charset="-120"/>
               </a:rPr>
-              <a:t>APIキーがゼロでも、dotnet run だけで全機能が動く</a:t>
+              <a:t>安全性を高める方向の操作まで止めると、使い物にならない</a:t>
             </a:r>
             <a:endParaRPr lang="en-US" sz="1400" dirty="0"/>
           </a:p>
@@ -6478,8 +9014,8 @@
         </p:nvSpPr>
         <p:spPr>
           <a:xfrm>
-            <a:off x="566928" y="1645920"/>
-            <a:ext cx="1700784" cy="1234440"/>
+            <a:off x="566928" y="1600200"/>
+            <a:ext cx="3886200" cy="1691640"/>
           </a:xfrm>
           <a:prstGeom prst="rect">
             <a:avLst/>
@@ -6498,14 +9034,14 @@
         </p:nvSpPr>
         <p:spPr>
           <a:xfrm>
-            <a:off x="566928" y="1645920"/>
-            <a:ext cx="1700784" cy="54864"/>
+            <a:off x="566928" y="1600200"/>
+            <a:ext cx="3886200" cy="457200"/>
           </a:xfrm>
           <a:prstGeom prst="rect">
             <a:avLst/>
           </a:prstGeom>
           <a:solidFill>
-            <a:srgbClr val="A26769"/>
+            <a:srgbClr val="B23A48"/>
           </a:solidFill>
           <a:ln/>
         </p:spPr>
@@ -6518,8 +9054,8 @@
         </p:nvSpPr>
         <p:spPr>
           <a:xfrm>
-            <a:off x="713232" y="1810512"/>
-            <a:ext cx="1463040" cy="274320"/>
+            <a:off x="768096" y="1673352"/>
+            <a:ext cx="3474720" cy="310896"/>
           </a:xfrm>
           <a:prstGeom prst="rect">
             <a:avLst/>
@@ -6537,28 +9073,67 @@
             <a:r>
               <a:rPr lang="en-US" sz="1400" b="1" dirty="0">
                 <a:solidFill>
-                  <a:srgbClr val="A26769"/>
+                  <a:srgbClr val="FFFFFF"/>
+                </a:solidFill>
+                <a:latin typeface="Calibri" pitchFamily="34" charset="0"/>
+                <a:ea typeface="Calibri" pitchFamily="34" charset="-122"/>
+                <a:cs typeface="Calibri" pitchFamily="34" charset="-120"/>
+              </a:rPr>
+              <a:t>ストーブ つけて</a:t>
+            </a:r>
+            <a:endParaRPr lang="en-US" sz="1400" dirty="0"/>
+          </a:p>
+        </p:txBody>
+      </p:sp>
+      <p:sp>
+        <p:nvSpPr>
+          <p:cNvPr id="8" name="Text 6"/>
+          <p:cNvSpPr/>
+          <p:nvPr/>
+        </p:nvSpPr>
+        <p:spPr>
+          <a:xfrm>
+            <a:off x="768096" y="2194560"/>
+            <a:ext cx="3474720" cy="384048"/>
+          </a:xfrm>
+          <a:prstGeom prst="rect">
+            <a:avLst/>
+          </a:prstGeom>
+          <a:noFill/>
+          <a:ln/>
+        </p:spPr>
+        <p:txBody>
+          <a:bodyPr wrap="square" rtlCol="0" anchor="ctr"/>
+          <a:lstStyle/>
+          <a:p>
+            <a:pPr indent="0" marL="0">
+              <a:buNone/>
+            </a:pPr>
+            <a:r>
+              <a:rPr lang="en-US" sz="2000" b="1" dirty="0">
+                <a:solidFill>
+                  <a:srgbClr val="B23A48"/>
                 </a:solidFill>
                 <a:latin typeface="Georgia" pitchFamily="34" charset="0"/>
                 <a:ea typeface="Georgia" pitchFamily="34" charset="-122"/>
                 <a:cs typeface="Georgia" pitchFamily="34" charset="-120"/>
               </a:rPr>
-              <a:t>入力</a:t>
-            </a:r>
-            <a:endParaRPr lang="en-US" sz="1400" dirty="0"/>
-          </a:p>
-        </p:txBody>
-      </p:sp>
-      <p:sp>
-        <p:nvSpPr>
-          <p:cNvPr id="8" name="Text 6"/>
-          <p:cNvSpPr/>
-          <p:nvPr/>
-        </p:nvSpPr>
-        <p:spPr>
-          <a:xfrm>
-            <a:off x="713232" y="2121408"/>
-            <a:ext cx="1481328" cy="658368"/>
+              <a:t>拒否</a:t>
+            </a:r>
+            <a:endParaRPr lang="en-US" sz="2000" dirty="0"/>
+          </a:p>
+        </p:txBody>
+      </p:sp>
+      <p:sp>
+        <p:nvSpPr>
+          <p:cNvPr id="9" name="Text 7"/>
+          <p:cNvSpPr/>
+          <p:nvPr/>
+        </p:nvSpPr>
+        <p:spPr>
+          <a:xfrm>
+            <a:off x="768096" y="2633472"/>
+            <a:ext cx="3520440" cy="566928"/>
           </a:xfrm>
           <a:prstGeom prst="rect">
             <a:avLst/>
@@ -6572,12 +9147,12 @@
           <a:p>
             <a:pPr indent="0" marL="0">
               <a:lnSpc>
-                <a:spcPts val="1500"/>
+                <a:spcPts val="1600"/>
               </a:lnSpc>
               <a:buNone/>
             </a:pPr>
             <a:r>
-              <a:rPr lang="en-US" sz="1050" dirty="0">
+              <a:rPr lang="en-US" sz="1150" dirty="0">
                 <a:solidFill>
                   <a:srgbClr val="2B1F24"/>
                 </a:solidFill>
@@ -6585,19 +9160,19 @@
                 <a:ea typeface="Calibri" pitchFamily="34" charset="-122"/>
                 <a:cs typeface="Calibri" pitchFamily="34" charset="-120"/>
               </a:rPr>
-              <a:t>SwitchBot Plug Mini</a:t>
-            </a:r>
-            <a:endParaRPr lang="en-US" sz="1050" dirty="0"/>
+              <a:t>安全のため音声・チャットからの</a:t>
+            </a:r>
+            <a:endParaRPr lang="en-US" sz="1150" dirty="0"/>
           </a:p>
           <a:p>
             <a:pPr indent="0" marL="0">
               <a:lnSpc>
-                <a:spcPts val="1500"/>
+                <a:spcPts val="1600"/>
               </a:lnSpc>
               <a:buNone/>
             </a:pPr>
             <a:r>
-              <a:rPr lang="en-US" sz="1050" dirty="0">
+              <a:rPr lang="en-US" sz="1150" dirty="0">
                 <a:solidFill>
                   <a:srgbClr val="2B1F24"/>
                 </a:solidFill>
@@ -6605,48 +9180,9 @@
                 <a:ea typeface="Calibri" pitchFamily="34" charset="-122"/>
                 <a:cs typeface="Calibri" pitchFamily="34" charset="-120"/>
               </a:rPr>
-              <a:t>LINE Messaging API</a:t>
-            </a:r>
-            <a:endParaRPr lang="en-US" sz="1050" dirty="0"/>
-          </a:p>
-        </p:txBody>
-      </p:sp>
-      <p:sp>
-        <p:nvSpPr>
-          <p:cNvPr id="9" name="Text 7"/>
-          <p:cNvSpPr/>
-          <p:nvPr/>
-        </p:nvSpPr>
-        <p:spPr>
-          <a:xfrm>
-            <a:off x="2304288" y="2121408"/>
-            <a:ext cx="292608" cy="274320"/>
-          </a:xfrm>
-          <a:prstGeom prst="rect">
-            <a:avLst/>
-          </a:prstGeom>
-          <a:noFill/>
-          <a:ln/>
-        </p:spPr>
-        <p:txBody>
-          <a:bodyPr wrap="square" rtlCol="0" anchor="ctr"/>
-          <a:lstStyle/>
-          <a:p>
-            <a:pPr algn="ctr" indent="0" marL="0">
-              <a:buNone/>
-            </a:pPr>
-            <a:r>
-              <a:rPr lang="en-US" sz="1100" dirty="0">
-                <a:solidFill>
-                  <a:srgbClr val="8A7A80"/>
-                </a:solidFill>
-                <a:latin typeface="Calibri" pitchFamily="34" charset="0"/>
-                <a:ea typeface="Calibri" pitchFamily="34" charset="-122"/>
-                <a:cs typeface="Calibri" pitchFamily="34" charset="-120"/>
-              </a:rPr>
-              <a:t>▶</a:t>
-            </a:r>
-            <a:endParaRPr lang="en-US" sz="1100" dirty="0"/>
+              <a:t>操作を禁止しています。</a:t>
+            </a:r>
+            <a:endParaRPr lang="en-US" sz="1150" dirty="0"/>
           </a:p>
         </p:txBody>
       </p:sp>
@@ -6658,8 +9194,8 @@
         </p:nvSpPr>
         <p:spPr>
           <a:xfrm>
-            <a:off x="2633472" y="1645920"/>
-            <a:ext cx="1700784" cy="1234440"/>
+            <a:off x="4773168" y="1600200"/>
+            <a:ext cx="3886200" cy="1691640"/>
           </a:xfrm>
           <a:prstGeom prst="rect">
             <a:avLst/>
@@ -6678,14 +9214,14 @@
         </p:nvSpPr>
         <p:spPr>
           <a:xfrm>
-            <a:off x="2633472" y="1645920"/>
-            <a:ext cx="1700784" cy="54864"/>
+            <a:off x="4773168" y="1600200"/>
+            <a:ext cx="3886200" cy="457200"/>
           </a:xfrm>
           <a:prstGeom prst="rect">
             <a:avLst/>
           </a:prstGeom>
           <a:solidFill>
-            <a:srgbClr val="6D2E46"/>
+            <a:srgbClr val="4F7A5B"/>
           </a:solidFill>
           <a:ln/>
         </p:spPr>
@@ -6698,8 +9234,8 @@
         </p:nvSpPr>
         <p:spPr>
           <a:xfrm>
-            <a:off x="2779776" y="1810512"/>
-            <a:ext cx="1463040" cy="274320"/>
+            <a:off x="4974336" y="1673352"/>
+            <a:ext cx="3474720" cy="310896"/>
           </a:xfrm>
           <a:prstGeom prst="rect">
             <a:avLst/>
@@ -6717,77 +9253,54 @@
             <a:r>
               <a:rPr lang="en-US" sz="1400" b="1" dirty="0">
                 <a:solidFill>
-                  <a:srgbClr val="6D2E46"/>
+                  <a:srgbClr val="FFFFFF"/>
+                </a:solidFill>
+                <a:latin typeface="Calibri" pitchFamily="34" charset="0"/>
+                <a:ea typeface="Calibri" pitchFamily="34" charset="-122"/>
+                <a:cs typeface="Calibri" pitchFamily="34" charset="-120"/>
+              </a:rPr>
+              <a:t>ストーブ 消して</a:t>
+            </a:r>
+            <a:endParaRPr lang="en-US" sz="1400" dirty="0"/>
+          </a:p>
+        </p:txBody>
+      </p:sp>
+      <p:sp>
+        <p:nvSpPr>
+          <p:cNvPr id="13" name="Text 11"/>
+          <p:cNvSpPr/>
+          <p:nvPr/>
+        </p:nvSpPr>
+        <p:spPr>
+          <a:xfrm>
+            <a:off x="4974336" y="2194560"/>
+            <a:ext cx="3474720" cy="384048"/>
+          </a:xfrm>
+          <a:prstGeom prst="rect">
+            <a:avLst/>
+          </a:prstGeom>
+          <a:noFill/>
+          <a:ln/>
+        </p:spPr>
+        <p:txBody>
+          <a:bodyPr wrap="square" rtlCol="0" anchor="ctr"/>
+          <a:lstStyle/>
+          <a:p>
+            <a:pPr indent="0" marL="0">
+              <a:buNone/>
+            </a:pPr>
+            <a:r>
+              <a:rPr lang="en-US" sz="2000" b="1" dirty="0">
+                <a:solidFill>
+                  <a:srgbClr val="4F7A5B"/>
                 </a:solidFill>
                 <a:latin typeface="Georgia" pitchFamily="34" charset="0"/>
                 <a:ea typeface="Georgia" pitchFamily="34" charset="-122"/>
                 <a:cs typeface="Georgia" pitchFamily="34" charset="-120"/>
               </a:rPr>
-              <a:t>アプリ</a:t>
-            </a:r>
-            <a:endParaRPr lang="en-US" sz="1400" dirty="0"/>
-          </a:p>
-        </p:txBody>
-      </p:sp>
-      <p:sp>
-        <p:nvSpPr>
-          <p:cNvPr id="13" name="Text 11"/>
-          <p:cNvSpPr/>
-          <p:nvPr/>
-        </p:nvSpPr>
-        <p:spPr>
-          <a:xfrm>
-            <a:off x="2779776" y="2121408"/>
-            <a:ext cx="1481328" cy="658368"/>
-          </a:xfrm>
-          <a:prstGeom prst="rect">
-            <a:avLst/>
-          </a:prstGeom>
-          <a:noFill/>
-          <a:ln/>
-        </p:spPr>
-        <p:txBody>
-          <a:bodyPr wrap="square" rtlCol="0" anchor="ctr"/>
-          <a:lstStyle/>
-          <a:p>
-            <a:pPr indent="0" marL="0">
-              <a:lnSpc>
-                <a:spcPts val="1500"/>
-              </a:lnSpc>
-              <a:buNone/>
-            </a:pPr>
-            <a:r>
-              <a:rPr lang="en-US" sz="1050" dirty="0">
-                <a:solidFill>
-                  <a:srgbClr val="2B1F24"/>
-                </a:solidFill>
-                <a:latin typeface="Calibri" pitchFamily="34" charset="0"/>
-                <a:ea typeface="Calibri" pitchFamily="34" charset="-122"/>
-                <a:cs typeface="Calibri" pitchFamily="34" charset="-120"/>
-              </a:rPr>
-              <a:t>.NET 10 Blazor</a:t>
-            </a:r>
-            <a:endParaRPr lang="en-US" sz="1050" dirty="0"/>
-          </a:p>
-          <a:p>
-            <a:pPr indent="0" marL="0">
-              <a:lnSpc>
-                <a:spcPts val="1500"/>
-              </a:lnSpc>
-              <a:buNone/>
-            </a:pPr>
-            <a:r>
-              <a:rPr lang="en-US" sz="1050" dirty="0">
-                <a:solidFill>
-                  <a:srgbClr val="2B1F24"/>
-                </a:solidFill>
-                <a:latin typeface="Calibri" pitchFamily="34" charset="0"/>
-                <a:ea typeface="Calibri" pitchFamily="34" charset="-122"/>
-                <a:cs typeface="Calibri" pitchFamily="34" charset="-120"/>
-              </a:rPr>
-              <a:t>App Service</a:t>
-            </a:r>
-            <a:endParaRPr lang="en-US" sz="1050" dirty="0"/>
+              <a:t>受理（確認あり）</a:t>
+            </a:r>
+            <a:endParaRPr lang="en-US" sz="2000" dirty="0"/>
           </a:p>
         </p:txBody>
       </p:sp>
@@ -6799,427 +9312,8 @@
         </p:nvSpPr>
         <p:spPr>
           <a:xfrm>
-            <a:off x="4370832" y="2121408"/>
-            <a:ext cx="292608" cy="274320"/>
-          </a:xfrm>
-          <a:prstGeom prst="rect">
-            <a:avLst/>
-          </a:prstGeom>
-          <a:noFill/>
-          <a:ln/>
-        </p:spPr>
-        <p:txBody>
-          <a:bodyPr wrap="square" rtlCol="0" anchor="ctr"/>
-          <a:lstStyle/>
-          <a:p>
-            <a:pPr algn="ctr" indent="0" marL="0">
-              <a:buNone/>
-            </a:pPr>
-            <a:r>
-              <a:rPr lang="en-US" sz="1100" dirty="0">
-                <a:solidFill>
-                  <a:srgbClr val="8A7A80"/>
-                </a:solidFill>
-                <a:latin typeface="Calibri" pitchFamily="34" charset="0"/>
-                <a:ea typeface="Calibri" pitchFamily="34" charset="-122"/>
-                <a:cs typeface="Calibri" pitchFamily="34" charset="-120"/>
-              </a:rPr>
-              <a:t>▶</a:t>
-            </a:r>
-            <a:endParaRPr lang="en-US" sz="1100" dirty="0"/>
-          </a:p>
-        </p:txBody>
-      </p:sp>
-      <p:sp>
-        <p:nvSpPr>
-          <p:cNvPr id="15" name="Shape 13"/>
-          <p:cNvSpPr/>
-          <p:nvPr/>
-        </p:nvSpPr>
-        <p:spPr>
-          <a:xfrm>
-            <a:off x="4700016" y="1645920"/>
-            <a:ext cx="1700784" cy="1234440"/>
-          </a:xfrm>
-          <a:prstGeom prst="rect">
-            <a:avLst/>
-          </a:prstGeom>
-          <a:solidFill>
-            <a:srgbClr val="ECE2D0"/>
-          </a:solidFill>
-          <a:ln/>
-        </p:spPr>
-      </p:sp>
-      <p:sp>
-        <p:nvSpPr>
-          <p:cNvPr id="16" name="Shape 14"/>
-          <p:cNvSpPr/>
-          <p:nvPr/>
-        </p:nvSpPr>
-        <p:spPr>
-          <a:xfrm>
-            <a:off x="4700016" y="1645920"/>
-            <a:ext cx="1700784" cy="54864"/>
-          </a:xfrm>
-          <a:prstGeom prst="rect">
-            <a:avLst/>
-          </a:prstGeom>
-          <a:solidFill>
-            <a:srgbClr val="6D2E46"/>
-          </a:solidFill>
-          <a:ln/>
-        </p:spPr>
-      </p:sp>
-      <p:sp>
-        <p:nvSpPr>
-          <p:cNvPr id="17" name="Text 15"/>
-          <p:cNvSpPr/>
-          <p:nvPr/>
-        </p:nvSpPr>
-        <p:spPr>
-          <a:xfrm>
-            <a:off x="4846320" y="1810512"/>
-            <a:ext cx="1463040" cy="274320"/>
-          </a:xfrm>
-          <a:prstGeom prst="rect">
-            <a:avLst/>
-          </a:prstGeom>
-          <a:noFill/>
-          <a:ln/>
-        </p:spPr>
-        <p:txBody>
-          <a:bodyPr wrap="square" rtlCol="0" anchor="ctr"/>
-          <a:lstStyle/>
-          <a:p>
-            <a:pPr indent="0" marL="0">
-              <a:buNone/>
-            </a:pPr>
-            <a:r>
-              <a:rPr lang="en-US" sz="1400" b="1" dirty="0">
-                <a:solidFill>
-                  <a:srgbClr val="6D2E46"/>
-                </a:solidFill>
-                <a:latin typeface="Georgia" pitchFamily="34" charset="0"/>
-                <a:ea typeface="Georgia" pitchFamily="34" charset="-122"/>
-                <a:cs typeface="Georgia" pitchFamily="34" charset="-120"/>
-              </a:rPr>
-              <a:t>蓄積</a:t>
-            </a:r>
-            <a:endParaRPr lang="en-US" sz="1400" dirty="0"/>
-          </a:p>
-        </p:txBody>
-      </p:sp>
-      <p:sp>
-        <p:nvSpPr>
-          <p:cNvPr id="18" name="Text 16"/>
-          <p:cNvSpPr/>
-          <p:nvPr/>
-        </p:nvSpPr>
-        <p:spPr>
-          <a:xfrm>
-            <a:off x="4846320" y="2121408"/>
-            <a:ext cx="1481328" cy="658368"/>
-          </a:xfrm>
-          <a:prstGeom prst="rect">
-            <a:avLst/>
-          </a:prstGeom>
-          <a:noFill/>
-          <a:ln/>
-        </p:spPr>
-        <p:txBody>
-          <a:bodyPr wrap="square" rtlCol="0" anchor="ctr"/>
-          <a:lstStyle/>
-          <a:p>
-            <a:pPr indent="0" marL="0">
-              <a:lnSpc>
-                <a:spcPts val="1500"/>
-              </a:lnSpc>
-              <a:buNone/>
-            </a:pPr>
-            <a:r>
-              <a:rPr lang="en-US" sz="1050" dirty="0">
-                <a:solidFill>
-                  <a:srgbClr val="2B1F24"/>
-                </a:solidFill>
-                <a:latin typeface="Calibri" pitchFamily="34" charset="0"/>
-                <a:ea typeface="Calibri" pitchFamily="34" charset="-122"/>
-                <a:cs typeface="Calibri" pitchFamily="34" charset="-120"/>
-              </a:rPr>
-              <a:t>Azure SQL</a:t>
-            </a:r>
-            <a:endParaRPr lang="en-US" sz="1050" dirty="0"/>
-          </a:p>
-          <a:p>
-            <a:pPr indent="0" marL="0">
-              <a:lnSpc>
-                <a:spcPts val="1500"/>
-              </a:lnSpc>
-              <a:buNone/>
-            </a:pPr>
-            <a:r>
-              <a:rPr lang="en-US" sz="1050" dirty="0">
-                <a:solidFill>
-                  <a:srgbClr val="2B1F24"/>
-                </a:solidFill>
-                <a:latin typeface="Calibri" pitchFamily="34" charset="0"/>
-                <a:ea typeface="Calibri" pitchFamily="34" charset="-122"/>
-                <a:cs typeface="Calibri" pitchFamily="34" charset="-120"/>
-              </a:rPr>
-              <a:t>Fabric Eventhouse</a:t>
-            </a:r>
-            <a:endParaRPr lang="en-US" sz="1050" dirty="0"/>
-          </a:p>
-        </p:txBody>
-      </p:sp>
-      <p:sp>
-        <p:nvSpPr>
-          <p:cNvPr id="19" name="Text 17"/>
-          <p:cNvSpPr/>
-          <p:nvPr/>
-        </p:nvSpPr>
-        <p:spPr>
-          <a:xfrm>
-            <a:off x="6437376" y="2121408"/>
-            <a:ext cx="292608" cy="274320"/>
-          </a:xfrm>
-          <a:prstGeom prst="rect">
-            <a:avLst/>
-          </a:prstGeom>
-          <a:noFill/>
-          <a:ln/>
-        </p:spPr>
-        <p:txBody>
-          <a:bodyPr wrap="square" rtlCol="0" anchor="ctr"/>
-          <a:lstStyle/>
-          <a:p>
-            <a:pPr algn="ctr" indent="0" marL="0">
-              <a:buNone/>
-            </a:pPr>
-            <a:r>
-              <a:rPr lang="en-US" sz="1100" dirty="0">
-                <a:solidFill>
-                  <a:srgbClr val="8A7A80"/>
-                </a:solidFill>
-                <a:latin typeface="Calibri" pitchFamily="34" charset="0"/>
-                <a:ea typeface="Calibri" pitchFamily="34" charset="-122"/>
-                <a:cs typeface="Calibri" pitchFamily="34" charset="-120"/>
-              </a:rPr>
-              <a:t>▶</a:t>
-            </a:r>
-            <a:endParaRPr lang="en-US" sz="1100" dirty="0"/>
-          </a:p>
-        </p:txBody>
-      </p:sp>
-      <p:sp>
-        <p:nvSpPr>
-          <p:cNvPr id="20" name="Shape 18"/>
-          <p:cNvSpPr/>
-          <p:nvPr/>
-        </p:nvSpPr>
-        <p:spPr>
-          <a:xfrm>
-            <a:off x="6766560" y="1645920"/>
-            <a:ext cx="1700784" cy="1234440"/>
-          </a:xfrm>
-          <a:prstGeom prst="rect">
-            <a:avLst/>
-          </a:prstGeom>
-          <a:solidFill>
-            <a:srgbClr val="ECE2D0"/>
-          </a:solidFill>
-          <a:ln/>
-        </p:spPr>
-      </p:sp>
-      <p:sp>
-        <p:nvSpPr>
-          <p:cNvPr id="21" name="Shape 19"/>
-          <p:cNvSpPr/>
-          <p:nvPr/>
-        </p:nvSpPr>
-        <p:spPr>
-          <a:xfrm>
-            <a:off x="6766560" y="1645920"/>
-            <a:ext cx="1700784" cy="54864"/>
-          </a:xfrm>
-          <a:prstGeom prst="rect">
-            <a:avLst/>
-          </a:prstGeom>
-          <a:solidFill>
-            <a:srgbClr val="A26769"/>
-          </a:solidFill>
-          <a:ln/>
-        </p:spPr>
-      </p:sp>
-      <p:sp>
-        <p:nvSpPr>
-          <p:cNvPr id="22" name="Text 20"/>
-          <p:cNvSpPr/>
-          <p:nvPr/>
-        </p:nvSpPr>
-        <p:spPr>
-          <a:xfrm>
-            <a:off x="6912864" y="1810512"/>
-            <a:ext cx="1463040" cy="274320"/>
-          </a:xfrm>
-          <a:prstGeom prst="rect">
-            <a:avLst/>
-          </a:prstGeom>
-          <a:noFill/>
-          <a:ln/>
-        </p:spPr>
-        <p:txBody>
-          <a:bodyPr wrap="square" rtlCol="0" anchor="ctr"/>
-          <a:lstStyle/>
-          <a:p>
-            <a:pPr indent="0" marL="0">
-              <a:buNone/>
-            </a:pPr>
-            <a:r>
-              <a:rPr lang="en-US" sz="1400" b="1" dirty="0">
-                <a:solidFill>
-                  <a:srgbClr val="A26769"/>
-                </a:solidFill>
-                <a:latin typeface="Georgia" pitchFamily="34" charset="0"/>
-                <a:ea typeface="Georgia" pitchFamily="34" charset="-122"/>
-                <a:cs typeface="Georgia" pitchFamily="34" charset="-120"/>
-              </a:rPr>
-              <a:t>分析</a:t>
-            </a:r>
-            <a:endParaRPr lang="en-US" sz="1400" dirty="0"/>
-          </a:p>
-        </p:txBody>
-      </p:sp>
-      <p:sp>
-        <p:nvSpPr>
-          <p:cNvPr id="23" name="Text 21"/>
-          <p:cNvSpPr/>
-          <p:nvPr/>
-        </p:nvSpPr>
-        <p:spPr>
-          <a:xfrm>
-            <a:off x="6912864" y="2121408"/>
-            <a:ext cx="1481328" cy="658368"/>
-          </a:xfrm>
-          <a:prstGeom prst="rect">
-            <a:avLst/>
-          </a:prstGeom>
-          <a:noFill/>
-          <a:ln/>
-        </p:spPr>
-        <p:txBody>
-          <a:bodyPr wrap="square" rtlCol="0" anchor="ctr"/>
-          <a:lstStyle/>
-          <a:p>
-            <a:pPr indent="0" marL="0">
-              <a:lnSpc>
-                <a:spcPts val="1500"/>
-              </a:lnSpc>
-              <a:buNone/>
-            </a:pPr>
-            <a:r>
-              <a:rPr lang="en-US" sz="1050" dirty="0">
-                <a:solidFill>
-                  <a:srgbClr val="2B1F24"/>
-                </a:solidFill>
-                <a:latin typeface="Calibri" pitchFamily="34" charset="0"/>
-                <a:ea typeface="Calibri" pitchFamily="34" charset="-122"/>
-                <a:cs typeface="Calibri" pitchFamily="34" charset="-120"/>
-              </a:rPr>
-              <a:t>Fabric Data Agent</a:t>
-            </a:r>
-            <a:endParaRPr lang="en-US" sz="1050" dirty="0"/>
-          </a:p>
-          <a:p>
-            <a:pPr indent="0" marL="0">
-              <a:lnSpc>
-                <a:spcPts val="1500"/>
-              </a:lnSpc>
-              <a:buNone/>
-            </a:pPr>
-            <a:r>
-              <a:rPr lang="en-US" sz="1050" dirty="0">
-                <a:solidFill>
-                  <a:srgbClr val="2B1F24"/>
-                </a:solidFill>
-                <a:latin typeface="Calibri" pitchFamily="34" charset="0"/>
-                <a:ea typeface="Calibri" pitchFamily="34" charset="-122"/>
-                <a:cs typeface="Calibri" pitchFamily="34" charset="-120"/>
-              </a:rPr>
-              <a:t>OrcaRouter (LLM)</a:t>
-            </a:r>
-            <a:endParaRPr lang="en-US" sz="1050" dirty="0"/>
-          </a:p>
-        </p:txBody>
-      </p:sp>
-      <p:sp>
-        <p:nvSpPr>
-          <p:cNvPr id="24" name="Shape 22"/>
-          <p:cNvSpPr/>
-          <p:nvPr/>
-        </p:nvSpPr>
-        <p:spPr>
-          <a:xfrm>
-            <a:off x="566928" y="3127248"/>
-            <a:ext cx="8074152" cy="914400"/>
-          </a:xfrm>
-          <a:prstGeom prst="rect">
-            <a:avLst/>
-          </a:prstGeom>
-          <a:solidFill>
-            <a:srgbClr val="2B1F24"/>
-          </a:solidFill>
-          <a:ln/>
-        </p:spPr>
-      </p:sp>
-      <p:sp>
-        <p:nvSpPr>
-          <p:cNvPr id="25" name="Text 23"/>
-          <p:cNvSpPr/>
-          <p:nvPr/>
-        </p:nvSpPr>
-        <p:spPr>
-          <a:xfrm>
-            <a:off x="841248" y="3246120"/>
-            <a:ext cx="3657600" cy="292608"/>
-          </a:xfrm>
-          <a:prstGeom prst="rect">
-            <a:avLst/>
-          </a:prstGeom>
-          <a:noFill/>
-          <a:ln/>
-        </p:spPr>
-        <p:txBody>
-          <a:bodyPr wrap="square" rtlCol="0" anchor="ctr"/>
-          <a:lstStyle/>
-          <a:p>
-            <a:pPr indent="0" marL="0">
-              <a:buNone/>
-            </a:pPr>
-            <a:r>
-              <a:rPr lang="en-US" sz="1500" b="1" dirty="0">
-                <a:solidFill>
-                  <a:srgbClr val="FFFFFF"/>
-                </a:solidFill>
-                <a:latin typeface="Georgia" pitchFamily="34" charset="0"/>
-                <a:ea typeface="Georgia" pitchFamily="34" charset="-122"/>
-                <a:cs typeface="Georgia" pitchFamily="34" charset="-120"/>
-              </a:rPr>
-              <a:t>データを2系統に分けた</a:t>
-            </a:r>
-            <a:endParaRPr lang="en-US" sz="1500" dirty="0"/>
-          </a:p>
-        </p:txBody>
-      </p:sp>
-      <p:sp>
-        <p:nvSpPr>
-          <p:cNvPr id="26" name="Text 24"/>
-          <p:cNvSpPr/>
-          <p:nvPr/>
-        </p:nvSpPr>
-        <p:spPr>
-          <a:xfrm>
-            <a:off x="841248" y="3538728"/>
-            <a:ext cx="7498080" cy="457200"/>
+            <a:off x="4974336" y="2633472"/>
+            <a:ext cx="3520440" cy="566928"/>
           </a:xfrm>
           <a:prstGeom prst="rect">
             <a:avLst/>
@@ -7240,13 +9334,13 @@
             <a:r>
               <a:rPr lang="en-US" sz="1150" dirty="0">
                 <a:solidFill>
-                  <a:srgbClr val="ECE2D0"/>
-                </a:solidFill>
-                <a:latin typeface="Calibri" pitchFamily="34" charset="0"/>
-                <a:ea typeface="Calibri" pitchFamily="34" charset="-122"/>
-                <a:cs typeface="Calibri" pitchFamily="34" charset="-120"/>
-              </a:rPr>
-              <a:t>DeviceEvents（状態変化）と SwitchBotPlugReadings（電力テレメトリ）は</a:t>
+                  <a:srgbClr val="2B1F24"/>
+                </a:solidFill>
+                <a:latin typeface="Calibri" pitchFamily="34" charset="0"/>
+                <a:ea typeface="Calibri" pitchFamily="34" charset="-122"/>
+                <a:cs typeface="Calibri" pitchFamily="34" charset="-120"/>
+              </a:rPr>
+              <a:t>消します。よろしいですか？</a:t>
             </a:r>
             <a:endParaRPr lang="en-US" sz="1150" dirty="0"/>
           </a:p>
@@ -7260,13 +9354,13 @@
             <a:r>
               <a:rPr lang="en-US" sz="1150" dirty="0">
                 <a:solidFill>
-                  <a:srgbClr val="ECE2D0"/>
-                </a:solidFill>
-                <a:latin typeface="Calibri" pitchFamily="34" charset="0"/>
-                <a:ea typeface="Calibri" pitchFamily="34" charset="-122"/>
-                <a:cs typeface="Calibri" pitchFamily="34" charset="-120"/>
-              </a:rPr>
-              <a:t>コードを共有していない。片方の障害がもう片方を巻き込まないため。</a:t>
+                  <a:srgbClr val="2B1F24"/>
+                </a:solidFill>
+                <a:latin typeface="Calibri" pitchFamily="34" charset="0"/>
+                <a:ea typeface="Calibri" pitchFamily="34" charset="-122"/>
+                <a:cs typeface="Calibri" pitchFamily="34" charset="-120"/>
+              </a:rPr>
+              <a:t>→「はい」で実行</a:t>
             </a:r>
             <a:endParaRPr lang="en-US" sz="1150" dirty="0"/>
           </a:p>
@@ -7274,7 +9368,69 @@
       </p:sp>
       <p:sp>
         <p:nvSpPr>
-          <p:cNvPr id="27" name="Text 25"/>
+          <p:cNvPr id="15" name="Text 13"/>
+          <p:cNvSpPr/>
+          <p:nvPr/>
+        </p:nvSpPr>
+        <p:spPr>
+          <a:xfrm>
+            <a:off x="566928" y="3520440"/>
+            <a:ext cx="8074152" cy="685800"/>
+          </a:xfrm>
+          <a:prstGeom prst="rect">
+            <a:avLst/>
+          </a:prstGeom>
+          <a:noFill/>
+          <a:ln/>
+        </p:spPr>
+        <p:txBody>
+          <a:bodyPr wrap="square" rtlCol="0" anchor="ctr"/>
+          <a:lstStyle/>
+          <a:p>
+            <a:pPr indent="0" marL="0">
+              <a:lnSpc>
+                <a:spcPts val="2000"/>
+              </a:lnSpc>
+              <a:buNone/>
+            </a:pPr>
+            <a:r>
+              <a:rPr lang="en-US" sz="1250" dirty="0">
+                <a:solidFill>
+                  <a:srgbClr val="2B1F24"/>
+                </a:solidFill>
+                <a:latin typeface="Calibri" pitchFamily="34" charset="0"/>
+                <a:ea typeface="Calibri" pitchFamily="34" charset="-122"/>
+                <a:cs typeface="Calibri" pitchFamily="34" charset="-120"/>
+              </a:rPr>
+              <a:t>拒否の理由が使う人に見えないと、ただの故障に見える。</a:t>
+            </a:r>
+            <a:endParaRPr lang="en-US" sz="1250" dirty="0"/>
+          </a:p>
+          <a:p>
+            <a:pPr indent="0" marL="0">
+              <a:lnSpc>
+                <a:spcPts val="2000"/>
+              </a:lnSpc>
+              <a:buNone/>
+            </a:pPr>
+            <a:r>
+              <a:rPr lang="en-US" sz="1250" dirty="0">
+                <a:solidFill>
+                  <a:srgbClr val="2B1F24"/>
+                </a:solidFill>
+                <a:latin typeface="Calibri" pitchFamily="34" charset="0"/>
+                <a:ea typeface="Calibri" pitchFamily="34" charset="-122"/>
+                <a:cs typeface="Calibri" pitchFamily="34" charset="-120"/>
+              </a:rPr>
+              <a:t>そのため機器カードにも「安全のため、遠隔では消す操作だけできます」と表示している。</a:t>
+            </a:r>
+            <a:endParaRPr lang="en-US" sz="1250" dirty="0"/>
+          </a:p>
+        </p:txBody>
+      </p:sp>
+      <p:sp>
+        <p:nvSpPr>
+          <p:cNvPr id="16" name="Text 14"/>
           <p:cNvSpPr/>
           <p:nvPr/>
         </p:nvSpPr>
@@ -7313,7 +9469,7 @@
       </p:sp>
       <p:sp>
         <p:nvSpPr>
-          <p:cNvPr id="28" name="Text 26"/>
+          <p:cNvPr id="17" name="Text 15"/>
           <p:cNvSpPr/>
           <p:nvPr/>
         </p:nvSpPr>
@@ -7364,7 +9520,7 @@
     <p:bg>
       <p:bgPr>
         <a:solidFill>
-          <a:srgbClr val="2B1F24"/>
+          <a:srgbClr val="FFFFFF"/>
         </a:solidFill>
       </p:bgPr>
     </p:bg>
@@ -7397,7 +9553,7 @@
             <a:avLst/>
           </a:prstGeom>
           <a:solidFill>
-            <a:srgbClr val="B23A48"/>
+            <a:srgbClr val="6D2E46"/>
           </a:solidFill>
           <a:ln/>
         </p:spPr>
@@ -7410,8 +9566,8 @@
         </p:nvSpPr>
         <p:spPr>
           <a:xfrm>
-            <a:off x="566928" y="438912"/>
-            <a:ext cx="8046720" cy="640080"/>
+            <a:off x="566928" y="384048"/>
+            <a:ext cx="7955280" cy="658368"/>
           </a:xfrm>
           <a:prstGeom prst="rect">
             <a:avLst/>
@@ -7429,13 +9585,13 @@
             <a:r>
               <a:rPr lang="en-US" sz="3400" b="1" dirty="0">
                 <a:solidFill>
-                  <a:srgbClr val="FFFFFF"/>
+                  <a:srgbClr val="2B1F24"/>
                 </a:solidFill>
                 <a:latin typeface="Georgia" pitchFamily="34" charset="0"/>
                 <a:ea typeface="Georgia" pitchFamily="34" charset="-122"/>
                 <a:cs typeface="Georgia" pitchFamily="34" charset="-120"/>
               </a:rPr>
-              <a:t>沈黙して壊れた</a:t>
+              <a:t>構成</a:t>
             </a:r>
             <a:endParaRPr lang="en-US" sz="3400" dirty="0"/>
           </a:p>
@@ -7449,8 +9605,8 @@
         </p:nvSpPr>
         <p:spPr>
           <a:xfrm>
-            <a:off x="566928" y="1097280"/>
-            <a:ext cx="8046720" cy="310896"/>
+            <a:off x="566928" y="1042416"/>
+            <a:ext cx="7955280" cy="329184"/>
           </a:xfrm>
           <a:prstGeom prst="rect">
             <a:avLst/>
@@ -7474,7 +9630,7 @@
                 <a:ea typeface="Calibri" pitchFamily="34" charset="-122"/>
                 <a:cs typeface="Calibri" pitchFamily="34" charset="-120"/>
               </a:rPr>
-              <a:t>3件とも、例外は一度も投げていない</a:t>
+              <a:t>APIキーがゼロでも、dotnet run だけで全機能が動く</a:t>
             </a:r>
             <a:endParaRPr lang="en-US" sz="1400" dirty="0"/>
           </a:p>
@@ -7488,14 +9644,14 @@
         </p:nvSpPr>
         <p:spPr>
           <a:xfrm>
-            <a:off x="566928" y="1627632"/>
-            <a:ext cx="8074152" cy="804672"/>
+            <a:off x="566928" y="1645920"/>
+            <a:ext cx="1700784" cy="1234440"/>
           </a:xfrm>
           <a:prstGeom prst="rect">
             <a:avLst/>
           </a:prstGeom>
           <a:solidFill>
-            <a:srgbClr val="3A2C31"/>
+            <a:srgbClr val="ECE2D0"/>
           </a:solidFill>
           <a:ln/>
         </p:spPr>
@@ -7508,14 +9664,14 @@
         </p:nvSpPr>
         <p:spPr>
           <a:xfrm>
-            <a:off x="566928" y="1627632"/>
-            <a:ext cx="64008" cy="804672"/>
+            <a:off x="566928" y="1645920"/>
+            <a:ext cx="1700784" cy="54864"/>
           </a:xfrm>
           <a:prstGeom prst="rect">
             <a:avLst/>
           </a:prstGeom>
           <a:solidFill>
-            <a:srgbClr val="B23A48"/>
+            <a:srgbClr val="A26769"/>
           </a:solidFill>
           <a:ln/>
         </p:spPr>
@@ -7528,8 +9684,8 @@
         </p:nvSpPr>
         <p:spPr>
           <a:xfrm>
-            <a:off x="841248" y="1700784"/>
-            <a:ext cx="7589520" cy="274320"/>
+            <a:off x="713232" y="1810512"/>
+            <a:ext cx="1463040" cy="274320"/>
           </a:xfrm>
           <a:prstGeom prst="rect">
             <a:avLst/>
@@ -7547,13 +9703,13 @@
             <a:r>
               <a:rPr lang="en-US" sz="1400" b="1" dirty="0">
                 <a:solidFill>
-                  <a:srgbClr val="FFFFFF"/>
-                </a:solidFill>
-                <a:latin typeface="Calibri" pitchFamily="34" charset="0"/>
-                <a:ea typeface="Calibri" pitchFamily="34" charset="-122"/>
-                <a:cs typeface="Calibri" pitchFamily="34" charset="-120"/>
-              </a:rPr>
-              <a:t>存在しないテーブルに投げ続けた</a:t>
+                  <a:srgbClr val="A26769"/>
+                </a:solidFill>
+                <a:latin typeface="Georgia" pitchFamily="34" charset="0"/>
+                <a:ea typeface="Georgia" pitchFamily="34" charset="-122"/>
+                <a:cs typeface="Georgia" pitchFamily="34" charset="-120"/>
+              </a:rPr>
+              <a:t>入力</a:t>
             </a:r>
             <a:endParaRPr lang="en-US" sz="1400" dirty="0"/>
           </a:p>
@@ -7567,8 +9723,8 @@
         </p:nvSpPr>
         <p:spPr>
           <a:xfrm>
-            <a:off x="841248" y="1975104"/>
-            <a:ext cx="7589520" cy="420624"/>
+            <a:off x="713232" y="2121408"/>
+            <a:ext cx="1481328" cy="658368"/>
           </a:xfrm>
           <a:prstGeom prst="rect">
             <a:avLst/>
@@ -7587,17 +9743,17 @@
               <a:buNone/>
             </a:pPr>
             <a:r>
-              <a:rPr lang="en-US" sz="1100" dirty="0">
-                <a:solidFill>
-                  <a:srgbClr val="ECE2D0"/>
-                </a:solidFill>
-                <a:latin typeface="Calibri" pitchFamily="34" charset="0"/>
-                <a:ea typeface="Calibri" pitchFamily="34" charset="-122"/>
-                <a:cs typeface="Calibri" pitchFamily="34" charset="-120"/>
-              </a:rPr>
-              <a:t>アプリ側だけ実装し、Eventhouse にテーブルを作っていなかった。</a:t>
-            </a:r>
-            <a:endParaRPr lang="en-US" sz="1100" dirty="0"/>
+              <a:rPr lang="en-US" sz="1050" dirty="0">
+                <a:solidFill>
+                  <a:srgbClr val="2B1F24"/>
+                </a:solidFill>
+                <a:latin typeface="Calibri" pitchFamily="34" charset="0"/>
+                <a:ea typeface="Calibri" pitchFamily="34" charset="-122"/>
+                <a:cs typeface="Calibri" pitchFamily="34" charset="-120"/>
+              </a:rPr>
+              <a:t>SwitchBot Plug Mini</a:t>
+            </a:r>
+            <a:endParaRPr lang="en-US" sz="1050" dirty="0"/>
           </a:p>
           <a:p>
             <a:pPr indent="0" marL="0">
@@ -7607,15 +9763,54 @@
               <a:buNone/>
             </a:pPr>
             <a:r>
+              <a:rPr lang="en-US" sz="1050" dirty="0">
+                <a:solidFill>
+                  <a:srgbClr val="2B1F24"/>
+                </a:solidFill>
+                <a:latin typeface="Calibri" pitchFamily="34" charset="0"/>
+                <a:ea typeface="Calibri" pitchFamily="34" charset="-122"/>
+                <a:cs typeface="Calibri" pitchFamily="34" charset="-120"/>
+              </a:rPr>
+              <a:t>LINE Messaging API</a:t>
+            </a:r>
+            <a:endParaRPr lang="en-US" sz="1050" dirty="0"/>
+          </a:p>
+        </p:txBody>
+      </p:sp>
+      <p:sp>
+        <p:nvSpPr>
+          <p:cNvPr id="9" name="Text 7"/>
+          <p:cNvSpPr/>
+          <p:nvPr/>
+        </p:nvSpPr>
+        <p:spPr>
+          <a:xfrm>
+            <a:off x="2304288" y="2121408"/>
+            <a:ext cx="292608" cy="274320"/>
+          </a:xfrm>
+          <a:prstGeom prst="rect">
+            <a:avLst/>
+          </a:prstGeom>
+          <a:noFill/>
+          <a:ln/>
+        </p:spPr>
+        <p:txBody>
+          <a:bodyPr wrap="square" rtlCol="0" anchor="ctr"/>
+          <a:lstStyle/>
+          <a:p>
+            <a:pPr algn="ctr" indent="0" marL="0">
+              <a:buNone/>
+            </a:pPr>
+            <a:r>
               <a:rPr lang="en-US" sz="1100" dirty="0">
                 <a:solidFill>
-                  <a:srgbClr val="ECE2D0"/>
-                </a:solidFill>
-                <a:latin typeface="Calibri" pitchFamily="34" charset="0"/>
-                <a:ea typeface="Calibri" pitchFamily="34" charset="-122"/>
-                <a:cs typeface="Calibri" pitchFamily="34" charset="-120"/>
-              </a:rPr>
-              <a:t>1日半、400 を返し続けて容量を焼いた。</a:t>
+                  <a:srgbClr val="8A7A80"/>
+                </a:solidFill>
+                <a:latin typeface="Calibri" pitchFamily="34" charset="0"/>
+                <a:ea typeface="Calibri" pitchFamily="34" charset="-122"/>
+                <a:cs typeface="Calibri" pitchFamily="34" charset="-120"/>
+              </a:rPr>
+              <a:t>▶</a:t>
             </a:r>
             <a:endParaRPr lang="en-US" sz="1100" dirty="0"/>
           </a:p>
@@ -7623,54 +9818,54 @@
       </p:sp>
       <p:sp>
         <p:nvSpPr>
-          <p:cNvPr id="9" name="Shape 7"/>
-          <p:cNvSpPr/>
-          <p:nvPr/>
-        </p:nvSpPr>
-        <p:spPr>
-          <a:xfrm>
-            <a:off x="566928" y="2560320"/>
-            <a:ext cx="8074152" cy="804672"/>
+          <p:cNvPr id="10" name="Shape 8"/>
+          <p:cNvSpPr/>
+          <p:nvPr/>
+        </p:nvSpPr>
+        <p:spPr>
+          <a:xfrm>
+            <a:off x="2633472" y="1645920"/>
+            <a:ext cx="1700784" cy="1234440"/>
           </a:xfrm>
           <a:prstGeom prst="rect">
             <a:avLst/>
           </a:prstGeom>
           <a:solidFill>
-            <a:srgbClr val="3A2C31"/>
+            <a:srgbClr val="ECE2D0"/>
           </a:solidFill>
           <a:ln/>
         </p:spPr>
       </p:sp>
       <p:sp>
         <p:nvSpPr>
-          <p:cNvPr id="10" name="Shape 8"/>
-          <p:cNvSpPr/>
-          <p:nvPr/>
-        </p:nvSpPr>
-        <p:spPr>
-          <a:xfrm>
-            <a:off x="566928" y="2560320"/>
-            <a:ext cx="64008" cy="804672"/>
+          <p:cNvPr id="11" name="Shape 9"/>
+          <p:cNvSpPr/>
+          <p:nvPr/>
+        </p:nvSpPr>
+        <p:spPr>
+          <a:xfrm>
+            <a:off x="2633472" y="1645920"/>
+            <a:ext cx="1700784" cy="54864"/>
           </a:xfrm>
           <a:prstGeom prst="rect">
             <a:avLst/>
           </a:prstGeom>
           <a:solidFill>
-            <a:srgbClr val="B23A48"/>
+            <a:srgbClr val="6D2E46"/>
           </a:solidFill>
           <a:ln/>
         </p:spPr>
       </p:sp>
       <p:sp>
         <p:nvSpPr>
-          <p:cNvPr id="11" name="Text 9"/>
-          <p:cNvSpPr/>
-          <p:nvPr/>
-        </p:nvSpPr>
-        <p:spPr>
-          <a:xfrm>
-            <a:off x="841248" y="2633472"/>
-            <a:ext cx="7589520" cy="274320"/>
+          <p:cNvPr id="12" name="Text 10"/>
+          <p:cNvSpPr/>
+          <p:nvPr/>
+        </p:nvSpPr>
+        <p:spPr>
+          <a:xfrm>
+            <a:off x="2779776" y="1810512"/>
+            <a:ext cx="1463040" cy="274320"/>
           </a:xfrm>
           <a:prstGeom prst="rect">
             <a:avLst/>
@@ -7688,13 +9883,13 @@
             <a:r>
               <a:rPr lang="en-US" sz="1400" b="1" dirty="0">
                 <a:solidFill>
-                  <a:srgbClr val="FFFFFF"/>
-                </a:solidFill>
-                <a:latin typeface="Calibri" pitchFamily="34" charset="0"/>
-                <a:ea typeface="Calibri" pitchFamily="34" charset="-122"/>
-                <a:cs typeface="Calibri" pitchFamily="34" charset="-120"/>
-              </a:rPr>
-              <a:t>宛先が Paused のまま、送信は成功していた</a:t>
+                  <a:srgbClr val="6D2E46"/>
+                </a:solidFill>
+                <a:latin typeface="Georgia" pitchFamily="34" charset="0"/>
+                <a:ea typeface="Georgia" pitchFamily="34" charset="-122"/>
+                <a:cs typeface="Georgia" pitchFamily="34" charset="-120"/>
+              </a:rPr>
+              <a:t>アプリ</a:t>
             </a:r>
             <a:endParaRPr lang="en-US" sz="1400" dirty="0"/>
           </a:p>
@@ -7702,14 +9897,14 @@
       </p:sp>
       <p:sp>
         <p:nvSpPr>
-          <p:cNvPr id="12" name="Text 10"/>
-          <p:cNvSpPr/>
-          <p:nvPr/>
-        </p:nvSpPr>
-        <p:spPr>
-          <a:xfrm>
-            <a:off x="841248" y="2907792"/>
-            <a:ext cx="7589520" cy="420624"/>
+          <p:cNvPr id="13" name="Text 11"/>
+          <p:cNvSpPr/>
+          <p:nvPr/>
+        </p:nvSpPr>
+        <p:spPr>
+          <a:xfrm>
+            <a:off x="2779776" y="2121408"/>
+            <a:ext cx="1481328" cy="658368"/>
           </a:xfrm>
           <a:prstGeom prst="rect">
             <a:avLst/>
@@ -7728,17 +9923,17 @@
               <a:buNone/>
             </a:pPr>
             <a:r>
-              <a:rPr lang="en-US" sz="1100" dirty="0">
-                <a:solidFill>
-                  <a:srgbClr val="ECE2D0"/>
-                </a:solidFill>
-                <a:latin typeface="Calibri" pitchFamily="34" charset="0"/>
-                <a:ea typeface="Calibri" pitchFamily="34" charset="-122"/>
-                <a:cs typeface="Calibri" pitchFamily="34" charset="-120"/>
-              </a:rPr>
-              <a:t>Event Hub は正常に受理し、アプリは「送信済み」を記録。</a:t>
-            </a:r>
-            <a:endParaRPr lang="en-US" sz="1100" dirty="0"/>
+              <a:rPr lang="en-US" sz="1050" dirty="0">
+                <a:solidFill>
+                  <a:srgbClr val="2B1F24"/>
+                </a:solidFill>
+                <a:latin typeface="Calibri" pitchFamily="34" charset="0"/>
+                <a:ea typeface="Calibri" pitchFamily="34" charset="-122"/>
+                <a:cs typeface="Calibri" pitchFamily="34" charset="-120"/>
+              </a:rPr>
+              <a:t>.NET 10 Blazor</a:t>
+            </a:r>
+            <a:endParaRPr lang="en-US" sz="1050" dirty="0"/>
           </a:p>
           <a:p>
             <a:pPr indent="0" marL="0">
@@ -7748,15 +9943,54 @@
               <a:buNone/>
             </a:pPr>
             <a:r>
+              <a:rPr lang="en-US" sz="1050" dirty="0">
+                <a:solidFill>
+                  <a:srgbClr val="2B1F24"/>
+                </a:solidFill>
+                <a:latin typeface="Calibri" pitchFamily="34" charset="0"/>
+                <a:ea typeface="Calibri" pitchFamily="34" charset="-122"/>
+                <a:cs typeface="Calibri" pitchFamily="34" charset="-120"/>
+              </a:rPr>
+              <a:t>App Service</a:t>
+            </a:r>
+            <a:endParaRPr lang="en-US" sz="1050" dirty="0"/>
+          </a:p>
+        </p:txBody>
+      </p:sp>
+      <p:sp>
+        <p:nvSpPr>
+          <p:cNvPr id="14" name="Text 12"/>
+          <p:cNvSpPr/>
+          <p:nvPr/>
+        </p:nvSpPr>
+        <p:spPr>
+          <a:xfrm>
+            <a:off x="4370832" y="2121408"/>
+            <a:ext cx="292608" cy="274320"/>
+          </a:xfrm>
+          <a:prstGeom prst="rect">
+            <a:avLst/>
+          </a:prstGeom>
+          <a:noFill/>
+          <a:ln/>
+        </p:spPr>
+        <p:txBody>
+          <a:bodyPr wrap="square" rtlCol="0" anchor="ctr"/>
+          <a:lstStyle/>
+          <a:p>
+            <a:pPr algn="ctr" indent="0" marL="0">
+              <a:buNone/>
+            </a:pPr>
+            <a:r>
               <a:rPr lang="en-US" sz="1100" dirty="0">
                 <a:solidFill>
-                  <a:srgbClr val="ECE2D0"/>
-                </a:solidFill>
-                <a:latin typeface="Calibri" pitchFamily="34" charset="0"/>
-                <a:ea typeface="Calibri" pitchFamily="34" charset="-122"/>
-                <a:cs typeface="Calibri" pitchFamily="34" charset="-120"/>
-              </a:rPr>
-              <a:t>3日分のデータが静かに消えた。</a:t>
+                  <a:srgbClr val="8A7A80"/>
+                </a:solidFill>
+                <a:latin typeface="Calibri" pitchFamily="34" charset="0"/>
+                <a:ea typeface="Calibri" pitchFamily="34" charset="-122"/>
+                <a:cs typeface="Calibri" pitchFamily="34" charset="-120"/>
+              </a:rPr>
+              <a:t>▶</a:t>
             </a:r>
             <a:endParaRPr lang="en-US" sz="1100" dirty="0"/>
           </a:p>
@@ -7764,54 +9998,54 @@
       </p:sp>
       <p:sp>
         <p:nvSpPr>
-          <p:cNvPr id="13" name="Shape 11"/>
-          <p:cNvSpPr/>
-          <p:nvPr/>
-        </p:nvSpPr>
-        <p:spPr>
-          <a:xfrm>
-            <a:off x="566928" y="3493008"/>
-            <a:ext cx="8074152" cy="804672"/>
+          <p:cNvPr id="15" name="Shape 13"/>
+          <p:cNvSpPr/>
+          <p:nvPr/>
+        </p:nvSpPr>
+        <p:spPr>
+          <a:xfrm>
+            <a:off x="4700016" y="1645920"/>
+            <a:ext cx="1700784" cy="1234440"/>
           </a:xfrm>
           <a:prstGeom prst="rect">
             <a:avLst/>
           </a:prstGeom>
           <a:solidFill>
-            <a:srgbClr val="3A2C31"/>
+            <a:srgbClr val="ECE2D0"/>
           </a:solidFill>
           <a:ln/>
         </p:spPr>
       </p:sp>
       <p:sp>
         <p:nvSpPr>
-          <p:cNvPr id="14" name="Shape 12"/>
-          <p:cNvSpPr/>
-          <p:nvPr/>
-        </p:nvSpPr>
-        <p:spPr>
-          <a:xfrm>
-            <a:off x="566928" y="3493008"/>
-            <a:ext cx="64008" cy="804672"/>
+          <p:cNvPr id="16" name="Shape 14"/>
+          <p:cNvSpPr/>
+          <p:nvPr/>
+        </p:nvSpPr>
+        <p:spPr>
+          <a:xfrm>
+            <a:off x="4700016" y="1645920"/>
+            <a:ext cx="1700784" cy="54864"/>
           </a:xfrm>
           <a:prstGeom prst="rect">
             <a:avLst/>
           </a:prstGeom>
           <a:solidFill>
-            <a:srgbClr val="B23A48"/>
+            <a:srgbClr val="6D2E46"/>
           </a:solidFill>
           <a:ln/>
         </p:spPr>
       </p:sp>
       <p:sp>
         <p:nvSpPr>
-          <p:cNvPr id="15" name="Text 13"/>
-          <p:cNvSpPr/>
-          <p:nvPr/>
-        </p:nvSpPr>
-        <p:spPr>
-          <a:xfrm>
-            <a:off x="841248" y="3566160"/>
-            <a:ext cx="7589520" cy="274320"/>
+          <p:cNvPr id="17" name="Text 15"/>
+          <p:cNvSpPr/>
+          <p:nvPr/>
+        </p:nvSpPr>
+        <p:spPr>
+          <a:xfrm>
+            <a:off x="4846320" y="1810512"/>
+            <a:ext cx="1463040" cy="274320"/>
           </a:xfrm>
           <a:prstGeom prst="rect">
             <a:avLst/>
@@ -7829,13 +10063,13 @@
             <a:r>
               <a:rPr lang="en-US" sz="1400" b="1" dirty="0">
                 <a:solidFill>
-                  <a:srgbClr val="FFFFFF"/>
-                </a:solidFill>
-                <a:latin typeface="Calibri" pitchFamily="34" charset="0"/>
-                <a:ea typeface="Calibri" pitchFamily="34" charset="-122"/>
-                <a:cs typeface="Calibri" pitchFamily="34" charset="-120"/>
-              </a:rPr>
-              <a:t>3Dマスコットが一度も起動していなかった</a:t>
+                  <a:srgbClr val="6D2E46"/>
+                </a:solidFill>
+                <a:latin typeface="Georgia" pitchFamily="34" charset="0"/>
+                <a:ea typeface="Georgia" pitchFamily="34" charset="-122"/>
+                <a:cs typeface="Georgia" pitchFamily="34" charset="-120"/>
+              </a:rPr>
+              <a:t>蓄積</a:t>
             </a:r>
             <a:endParaRPr lang="en-US" sz="1400" dirty="0"/>
           </a:p>
@@ -7843,14 +10077,14 @@
       </p:sp>
       <p:sp>
         <p:nvSpPr>
-          <p:cNvPr id="16" name="Text 14"/>
-          <p:cNvSpPr/>
-          <p:nvPr/>
-        </p:nvSpPr>
-        <p:spPr>
-          <a:xfrm>
-            <a:off x="841248" y="3840480"/>
-            <a:ext cx="7589520" cy="420624"/>
+          <p:cNvPr id="18" name="Text 16"/>
+          <p:cNvSpPr/>
+          <p:nvPr/>
+        </p:nvSpPr>
+        <p:spPr>
+          <a:xfrm>
+            <a:off x="4846320" y="2121408"/>
+            <a:ext cx="1481328" cy="658368"/>
           </a:xfrm>
           <a:prstGeom prst="rect">
             <a:avLst/>
@@ -7869,17 +10103,17 @@
               <a:buNone/>
             </a:pPr>
             <a:r>
-              <a:rPr lang="en-US" sz="1100" dirty="0">
-                <a:solidFill>
-                  <a:srgbClr val="ECE2D0"/>
-                </a:solidFill>
-                <a:latin typeface="Calibri" pitchFamily="34" charset="0"/>
-                <a:ea typeface="Calibri" pitchFamily="34" charset="-122"/>
-                <a:cs typeface="Calibri" pitchFamily="34" charset="-120"/>
-              </a:rPr>
-              <a:t>「動いている」と報告したが、実際は初期化されていなかった。</a:t>
-            </a:r>
-            <a:endParaRPr lang="en-US" sz="1100" dirty="0"/>
+              <a:rPr lang="en-US" sz="1050" dirty="0">
+                <a:solidFill>
+                  <a:srgbClr val="2B1F24"/>
+                </a:solidFill>
+                <a:latin typeface="Calibri" pitchFamily="34" charset="0"/>
+                <a:ea typeface="Calibri" pitchFamily="34" charset="-122"/>
+                <a:cs typeface="Calibri" pitchFamily="34" charset="-120"/>
+              </a:rPr>
+              <a:t>Azure SQL</a:t>
+            </a:r>
+            <a:endParaRPr lang="en-US" sz="1050" dirty="0"/>
           </a:p>
           <a:p>
             <a:pPr indent="0" marL="0">
@@ -7889,56 +10123,396 @@
               <a:buNone/>
             </a:pPr>
             <a:r>
+              <a:rPr lang="en-US" sz="1050" dirty="0">
+                <a:solidFill>
+                  <a:srgbClr val="2B1F24"/>
+                </a:solidFill>
+                <a:latin typeface="Calibri" pitchFamily="34" charset="0"/>
+                <a:ea typeface="Calibri" pitchFamily="34" charset="-122"/>
+                <a:cs typeface="Calibri" pitchFamily="34" charset="-120"/>
+              </a:rPr>
+              <a:t>Fabric Eventhouse</a:t>
+            </a:r>
+            <a:endParaRPr lang="en-US" sz="1050" dirty="0"/>
+          </a:p>
+        </p:txBody>
+      </p:sp>
+      <p:sp>
+        <p:nvSpPr>
+          <p:cNvPr id="19" name="Text 17"/>
+          <p:cNvSpPr/>
+          <p:nvPr/>
+        </p:nvSpPr>
+        <p:spPr>
+          <a:xfrm>
+            <a:off x="6437376" y="2121408"/>
+            <a:ext cx="292608" cy="274320"/>
+          </a:xfrm>
+          <a:prstGeom prst="rect">
+            <a:avLst/>
+          </a:prstGeom>
+          <a:noFill/>
+          <a:ln/>
+        </p:spPr>
+        <p:txBody>
+          <a:bodyPr wrap="square" rtlCol="0" anchor="ctr"/>
+          <a:lstStyle/>
+          <a:p>
+            <a:pPr algn="ctr" indent="0" marL="0">
+              <a:buNone/>
+            </a:pPr>
+            <a:r>
               <a:rPr lang="en-US" sz="1100" dirty="0">
                 <a:solidFill>
+                  <a:srgbClr val="8A7A80"/>
+                </a:solidFill>
+                <a:latin typeface="Calibri" pitchFamily="34" charset="0"/>
+                <a:ea typeface="Calibri" pitchFamily="34" charset="-122"/>
+                <a:cs typeface="Calibri" pitchFamily="34" charset="-120"/>
+              </a:rPr>
+              <a:t>▶</a:t>
+            </a:r>
+            <a:endParaRPr lang="en-US" sz="1100" dirty="0"/>
+          </a:p>
+        </p:txBody>
+      </p:sp>
+      <p:sp>
+        <p:nvSpPr>
+          <p:cNvPr id="20" name="Shape 18"/>
+          <p:cNvSpPr/>
+          <p:nvPr/>
+        </p:nvSpPr>
+        <p:spPr>
+          <a:xfrm>
+            <a:off x="6766560" y="1645920"/>
+            <a:ext cx="1700784" cy="1234440"/>
+          </a:xfrm>
+          <a:prstGeom prst="rect">
+            <a:avLst/>
+          </a:prstGeom>
+          <a:solidFill>
+            <a:srgbClr val="ECE2D0"/>
+          </a:solidFill>
+          <a:ln/>
+        </p:spPr>
+      </p:sp>
+      <p:sp>
+        <p:nvSpPr>
+          <p:cNvPr id="21" name="Shape 19"/>
+          <p:cNvSpPr/>
+          <p:nvPr/>
+        </p:nvSpPr>
+        <p:spPr>
+          <a:xfrm>
+            <a:off x="6766560" y="1645920"/>
+            <a:ext cx="1700784" cy="54864"/>
+          </a:xfrm>
+          <a:prstGeom prst="rect">
+            <a:avLst/>
+          </a:prstGeom>
+          <a:solidFill>
+            <a:srgbClr val="A26769"/>
+          </a:solidFill>
+          <a:ln/>
+        </p:spPr>
+      </p:sp>
+      <p:sp>
+        <p:nvSpPr>
+          <p:cNvPr id="22" name="Text 20"/>
+          <p:cNvSpPr/>
+          <p:nvPr/>
+        </p:nvSpPr>
+        <p:spPr>
+          <a:xfrm>
+            <a:off x="6912864" y="1810512"/>
+            <a:ext cx="1463040" cy="274320"/>
+          </a:xfrm>
+          <a:prstGeom prst="rect">
+            <a:avLst/>
+          </a:prstGeom>
+          <a:noFill/>
+          <a:ln/>
+        </p:spPr>
+        <p:txBody>
+          <a:bodyPr wrap="square" rtlCol="0" anchor="ctr"/>
+          <a:lstStyle/>
+          <a:p>
+            <a:pPr indent="0" marL="0">
+              <a:buNone/>
+            </a:pPr>
+            <a:r>
+              <a:rPr lang="en-US" sz="1400" b="1" dirty="0">
+                <a:solidFill>
+                  <a:srgbClr val="A26769"/>
+                </a:solidFill>
+                <a:latin typeface="Georgia" pitchFamily="34" charset="0"/>
+                <a:ea typeface="Georgia" pitchFamily="34" charset="-122"/>
+                <a:cs typeface="Georgia" pitchFamily="34" charset="-120"/>
+              </a:rPr>
+              <a:t>分析</a:t>
+            </a:r>
+            <a:endParaRPr lang="en-US" sz="1400" dirty="0"/>
+          </a:p>
+        </p:txBody>
+      </p:sp>
+      <p:sp>
+        <p:nvSpPr>
+          <p:cNvPr id="23" name="Text 21"/>
+          <p:cNvSpPr/>
+          <p:nvPr/>
+        </p:nvSpPr>
+        <p:spPr>
+          <a:xfrm>
+            <a:off x="6912864" y="2121408"/>
+            <a:ext cx="1481328" cy="658368"/>
+          </a:xfrm>
+          <a:prstGeom prst="rect">
+            <a:avLst/>
+          </a:prstGeom>
+          <a:noFill/>
+          <a:ln/>
+        </p:spPr>
+        <p:txBody>
+          <a:bodyPr wrap="square" rtlCol="0" anchor="ctr"/>
+          <a:lstStyle/>
+          <a:p>
+            <a:pPr indent="0" marL="0">
+              <a:lnSpc>
+                <a:spcPts val="1500"/>
+              </a:lnSpc>
+              <a:buNone/>
+            </a:pPr>
+            <a:r>
+              <a:rPr lang="en-US" sz="1050" dirty="0">
+                <a:solidFill>
+                  <a:srgbClr val="2B1F24"/>
+                </a:solidFill>
+                <a:latin typeface="Calibri" pitchFamily="34" charset="0"/>
+                <a:ea typeface="Calibri" pitchFamily="34" charset="-122"/>
+                <a:cs typeface="Calibri" pitchFamily="34" charset="-120"/>
+              </a:rPr>
+              <a:t>Fabric Data Agent</a:t>
+            </a:r>
+            <a:endParaRPr lang="en-US" sz="1050" dirty="0"/>
+          </a:p>
+          <a:p>
+            <a:pPr indent="0" marL="0">
+              <a:lnSpc>
+                <a:spcPts val="1500"/>
+              </a:lnSpc>
+              <a:buNone/>
+            </a:pPr>
+            <a:r>
+              <a:rPr lang="en-US" sz="1050" dirty="0">
+                <a:solidFill>
+                  <a:srgbClr val="2B1F24"/>
+                </a:solidFill>
+                <a:latin typeface="Calibri" pitchFamily="34" charset="0"/>
+                <a:ea typeface="Calibri" pitchFamily="34" charset="-122"/>
+                <a:cs typeface="Calibri" pitchFamily="34" charset="-120"/>
+              </a:rPr>
+              <a:t>OrcaRouter (LLM)</a:t>
+            </a:r>
+            <a:endParaRPr lang="en-US" sz="1050" dirty="0"/>
+          </a:p>
+        </p:txBody>
+      </p:sp>
+      <p:sp>
+        <p:nvSpPr>
+          <p:cNvPr id="24" name="Shape 22"/>
+          <p:cNvSpPr/>
+          <p:nvPr/>
+        </p:nvSpPr>
+        <p:spPr>
+          <a:xfrm>
+            <a:off x="566928" y="3127248"/>
+            <a:ext cx="8074152" cy="914400"/>
+          </a:xfrm>
+          <a:prstGeom prst="rect">
+            <a:avLst/>
+          </a:prstGeom>
+          <a:solidFill>
+            <a:srgbClr val="2B1F24"/>
+          </a:solidFill>
+          <a:ln/>
+        </p:spPr>
+      </p:sp>
+      <p:sp>
+        <p:nvSpPr>
+          <p:cNvPr id="25" name="Text 23"/>
+          <p:cNvSpPr/>
+          <p:nvPr/>
+        </p:nvSpPr>
+        <p:spPr>
+          <a:xfrm>
+            <a:off x="841248" y="3246120"/>
+            <a:ext cx="3657600" cy="292608"/>
+          </a:xfrm>
+          <a:prstGeom prst="rect">
+            <a:avLst/>
+          </a:prstGeom>
+          <a:noFill/>
+          <a:ln/>
+        </p:spPr>
+        <p:txBody>
+          <a:bodyPr wrap="square" rtlCol="0" anchor="ctr"/>
+          <a:lstStyle/>
+          <a:p>
+            <a:pPr indent="0" marL="0">
+              <a:buNone/>
+            </a:pPr>
+            <a:r>
+              <a:rPr lang="en-US" sz="1500" b="1" dirty="0">
+                <a:solidFill>
+                  <a:srgbClr val="FFFFFF"/>
+                </a:solidFill>
+                <a:latin typeface="Georgia" pitchFamily="34" charset="0"/>
+                <a:ea typeface="Georgia" pitchFamily="34" charset="-122"/>
+                <a:cs typeface="Georgia" pitchFamily="34" charset="-120"/>
+              </a:rPr>
+              <a:t>データを2系統に分けた</a:t>
+            </a:r>
+            <a:endParaRPr lang="en-US" sz="1500" dirty="0"/>
+          </a:p>
+        </p:txBody>
+      </p:sp>
+      <p:sp>
+        <p:nvSpPr>
+          <p:cNvPr id="26" name="Text 24"/>
+          <p:cNvSpPr/>
+          <p:nvPr/>
+        </p:nvSpPr>
+        <p:spPr>
+          <a:xfrm>
+            <a:off x="841248" y="3538728"/>
+            <a:ext cx="7498080" cy="457200"/>
+          </a:xfrm>
+          <a:prstGeom prst="rect">
+            <a:avLst/>
+          </a:prstGeom>
+          <a:noFill/>
+          <a:ln/>
+        </p:spPr>
+        <p:txBody>
+          <a:bodyPr wrap="square" rtlCol="0" anchor="ctr"/>
+          <a:lstStyle/>
+          <a:p>
+            <a:pPr indent="0" marL="0">
+              <a:lnSpc>
+                <a:spcPts val="1600"/>
+              </a:lnSpc>
+              <a:buNone/>
+            </a:pPr>
+            <a:r>
+              <a:rPr lang="en-US" sz="1150" dirty="0">
+                <a:solidFill>
                   <a:srgbClr val="ECE2D0"/>
                 </a:solidFill>
                 <a:latin typeface="Calibri" pitchFamily="34" charset="0"/>
                 <a:ea typeface="Calibri" pitchFamily="34" charset="-122"/>
                 <a:cs typeface="Calibri" pitchFamily="34" charset="-120"/>
               </a:rPr>
-              <a:t>計測方法そのものが間違っていた。</a:t>
-            </a:r>
-            <a:endParaRPr lang="en-US" sz="1100" dirty="0"/>
-          </a:p>
-        </p:txBody>
-      </p:sp>
-      <p:sp>
-        <p:nvSpPr>
-          <p:cNvPr id="17" name="Text 15"/>
-          <p:cNvSpPr/>
-          <p:nvPr/>
-        </p:nvSpPr>
-        <p:spPr>
-          <a:xfrm>
-            <a:off x="566928" y="4462272"/>
-            <a:ext cx="8074152" cy="329184"/>
-          </a:xfrm>
-          <a:prstGeom prst="rect">
-            <a:avLst/>
-          </a:prstGeom>
-          <a:noFill/>
-          <a:ln/>
-        </p:spPr>
-        <p:txBody>
-          <a:bodyPr wrap="square" rtlCol="0" anchor="ctr"/>
-          <a:lstStyle/>
-          <a:p>
-            <a:pPr indent="0" marL="0">
-              <a:buNone/>
-            </a:pPr>
-            <a:r>
-              <a:rPr lang="en-US" sz="1300" b="1" i="1" dirty="0">
-                <a:solidFill>
-                  <a:srgbClr val="A26769"/>
-                </a:solidFill>
-                <a:latin typeface="Calibri" pitchFamily="34" charset="0"/>
-                <a:ea typeface="Calibri" pitchFamily="34" charset="-122"/>
-                <a:cs typeface="Calibri" pitchFamily="34" charset="-120"/>
-              </a:rPr>
-              <a:t>「送信成功」は「到達」ではない。届いた側を見ないと気づけない。</a:t>
-            </a:r>
-            <a:endParaRPr lang="en-US" sz="1300" dirty="0"/>
+              <a:t>DeviceEvents（状態変化）と SwitchBotPlugReadings（電力テレメトリ）は</a:t>
+            </a:r>
+            <a:endParaRPr lang="en-US" sz="1150" dirty="0"/>
+          </a:p>
+          <a:p>
+            <a:pPr indent="0" marL="0">
+              <a:lnSpc>
+                <a:spcPts val="1600"/>
+              </a:lnSpc>
+              <a:buNone/>
+            </a:pPr>
+            <a:r>
+              <a:rPr lang="en-US" sz="1150" dirty="0">
+                <a:solidFill>
+                  <a:srgbClr val="ECE2D0"/>
+                </a:solidFill>
+                <a:latin typeface="Calibri" pitchFamily="34" charset="0"/>
+                <a:ea typeface="Calibri" pitchFamily="34" charset="-122"/>
+                <a:cs typeface="Calibri" pitchFamily="34" charset="-120"/>
+              </a:rPr>
+              <a:t>コードを共有していない。片方の障害がもう片方を巻き込まないため。</a:t>
+            </a:r>
+            <a:endParaRPr lang="en-US" sz="1150" dirty="0"/>
+          </a:p>
+        </p:txBody>
+      </p:sp>
+      <p:sp>
+        <p:nvSpPr>
+          <p:cNvPr id="27" name="Text 25"/>
+          <p:cNvSpPr/>
+          <p:nvPr/>
+        </p:nvSpPr>
+        <p:spPr>
+          <a:xfrm>
+            <a:off x="411480" y="4759452"/>
+            <a:ext cx="3657600" cy="256032"/>
+          </a:xfrm>
+          <a:prstGeom prst="rect">
+            <a:avLst/>
+          </a:prstGeom>
+          <a:noFill/>
+          <a:ln/>
+        </p:spPr>
+        <p:txBody>
+          <a:bodyPr wrap="square" rtlCol="0" anchor="ctr"/>
+          <a:lstStyle/>
+          <a:p>
+            <a:pPr indent="0" marL="0">
+              <a:buNone/>
+            </a:pPr>
+            <a:r>
+              <a:rPr lang="en-US" sz="1000" dirty="0">
+                <a:solidFill>
+                  <a:srgbClr val="8A7A80"/>
+                </a:solidFill>
+                <a:latin typeface="Calibri" pitchFamily="34" charset="0"/>
+                <a:ea typeface="Calibri" pitchFamily="34" charset="-122"/>
+                <a:cs typeface="Calibri" pitchFamily="34" charset="-120"/>
+              </a:rPr>
+              <a:t>見守り隊 / CareRoute AI</a:t>
+            </a:r>
+            <a:endParaRPr lang="en-US" sz="1000" dirty="0"/>
+          </a:p>
+        </p:txBody>
+      </p:sp>
+      <p:sp>
+        <p:nvSpPr>
+          <p:cNvPr id="28" name="Text 26"/>
+          <p:cNvSpPr/>
+          <p:nvPr/>
+        </p:nvSpPr>
+        <p:spPr>
+          <a:xfrm>
+            <a:off x="8366760" y="4759452"/>
+            <a:ext cx="365760" cy="256032"/>
+          </a:xfrm>
+          <a:prstGeom prst="rect">
+            <a:avLst/>
+          </a:prstGeom>
+          <a:noFill/>
+          <a:ln/>
+        </p:spPr>
+        <p:txBody>
+          <a:bodyPr wrap="square" rtlCol="0" anchor="ctr"/>
+          <a:lstStyle/>
+          <a:p>
+            <a:pPr algn="r" indent="0" marL="0">
+              <a:buNone/>
+            </a:pPr>
+            <a:r>
+              <a:rPr lang="en-US" sz="1000" dirty="0">
+                <a:solidFill>
+                  <a:srgbClr val="8A7A80"/>
+                </a:solidFill>
+                <a:latin typeface="Calibri" pitchFamily="34" charset="0"/>
+                <a:ea typeface="Calibri" pitchFamily="34" charset="-122"/>
+                <a:cs typeface="Calibri" pitchFamily="34" charset="-120"/>
+              </a:rPr>
+              <a:t>8</a:t>
+            </a:r>
+            <a:endParaRPr lang="en-US" sz="1000" dirty="0"/>
           </a:p>
         </p:txBody>
       </p:sp>
@@ -8027,7 +10601,7 @@
                 <a:ea typeface="Georgia" pitchFamily="34" charset="-122"/>
                 <a:cs typeface="Georgia" pitchFamily="34" charset="-120"/>
               </a:rPr>
-              <a:t>見る人と、使う人で画面を分ける</a:t>
+              <a:t>LLMコストは、設計で削る</a:t>
             </a:r>
             <a:endParaRPr lang="en-US" sz="3400" dirty="0"/>
           </a:p>
@@ -8066,7 +10640,7 @@
                 <a:ea typeface="Calibri" pitchFamily="34" charset="-122"/>
                 <a:cs typeface="Calibri" pitchFamily="34" charset="-120"/>
               </a:rPr>
-              <a:t>必要な情報がまったく違うため</a:t>
+              <a:t>呼ぶ回数を減らす。これが一番効く</a:t>
             </a:r>
             <a:endParaRPr lang="en-US" sz="1400" dirty="0"/>
           </a:p>
@@ -8080,8 +10654,8 @@
         </p:nvSpPr>
         <p:spPr>
           <a:xfrm>
-            <a:off x="493776" y="1554480"/>
-            <a:ext cx="4078224" cy="2587752"/>
+            <a:off x="566928" y="1517904"/>
+            <a:ext cx="3886200" cy="1627632"/>
           </a:xfrm>
           <a:prstGeom prst="rect">
             <a:avLst/>
@@ -8092,153 +10666,225 @@
           <a:ln/>
         </p:spPr>
       </p:sp>
-      <p:pic>
-        <p:nvPicPr>
-          <p:cNvPr id="6" name="Image 0" descr="C:\Users\msoga\OneDrive - Smart Designer\Projects\見守り隊\docs\images\06-one-touch.png">    </p:cNvPr>
-          <p:cNvPicPr>
-            <a:picLocks noChangeAspect="1"/>
-          </p:cNvPicPr>
-          <p:nvPr/>
-        </p:nvPicPr>
-        <p:blipFill>
-          <a:blip r:embed="rId1"/>
-          <a:stretch>
-            <a:fillRect/>
-          </a:stretch>
-        </p:blipFill>
-        <p:spPr>
-          <a:xfrm>
-            <a:off x="566928" y="1627632"/>
-            <a:ext cx="3931920" cy="2441448"/>
-          </a:xfrm>
-          <a:prstGeom prst="rect">
-            <a:avLst/>
-          </a:prstGeom>
-        </p:spPr>
-      </p:pic>
-      <p:sp>
-        <p:nvSpPr>
-          <p:cNvPr id="7" name="Text 4"/>
-          <p:cNvSpPr/>
-          <p:nvPr/>
-        </p:nvSpPr>
-        <p:spPr>
-          <a:xfrm>
-            <a:off x="493776" y="4187952"/>
-            <a:ext cx="4078224" cy="274320"/>
-          </a:xfrm>
-          <a:prstGeom prst="rect">
-            <a:avLst/>
-          </a:prstGeom>
-          <a:noFill/>
-          <a:ln/>
-        </p:spPr>
-        <p:txBody>
-          <a:bodyPr wrap="square" rtlCol="0" anchor="ctr"/>
-          <a:lstStyle/>
-          <a:p>
-            <a:pPr algn="ctr" indent="0" marL="0">
-              <a:buNone/>
-            </a:pPr>
-            <a:r>
-              <a:rPr lang="en-US" sz="1000" dirty="0">
-                <a:solidFill>
-                  <a:srgbClr val="8A7A80"/>
-                </a:solidFill>
-                <a:latin typeface="Calibri" pitchFamily="34" charset="0"/>
-                <a:ea typeface="Calibri" pitchFamily="34" charset="-122"/>
-                <a:cs typeface="Calibri" pitchFamily="34" charset="-120"/>
-              </a:rPr>
-              <a:t>利用者本人が使う /one-touch 画面</a:t>
-            </a:r>
-            <a:endParaRPr lang="en-US" sz="1000" dirty="0"/>
-          </a:p>
-        </p:txBody>
-      </p:sp>
-      <p:sp>
-        <p:nvSpPr>
-          <p:cNvPr id="8" name="Text 5"/>
-          <p:cNvSpPr/>
-          <p:nvPr/>
-        </p:nvSpPr>
-        <p:spPr>
-          <a:xfrm>
-            <a:off x="4864608" y="1691640"/>
-            <a:ext cx="3794760" cy="2560320"/>
-          </a:xfrm>
-          <a:prstGeom prst="rect">
-            <a:avLst/>
-          </a:prstGeom>
-          <a:noFill/>
-          <a:ln/>
-        </p:spPr>
-        <p:txBody>
-          <a:bodyPr wrap="square" rtlCol="0" anchor="ctr"/>
-          <a:lstStyle/>
-          <a:p>
-            <a:pPr indent="0" marL="0">
-              <a:lnSpc>
-                <a:spcPts val="1900"/>
-              </a:lnSpc>
-              <a:buNone/>
-            </a:pPr>
-            <a:r>
-              <a:rPr lang="en-US" sz="1600" b="1" dirty="0">
-                <a:solidFill>
-                  <a:srgbClr val="6D2E46"/>
+      <p:sp>
+        <p:nvSpPr>
+          <p:cNvPr id="6" name="Shape 4"/>
+          <p:cNvSpPr/>
+          <p:nvPr/>
+        </p:nvSpPr>
+        <p:spPr>
+          <a:xfrm>
+            <a:off x="566928" y="1517904"/>
+            <a:ext cx="3886200" cy="64008"/>
+          </a:xfrm>
+          <a:prstGeom prst="rect">
+            <a:avLst/>
+          </a:prstGeom>
+          <a:solidFill>
+            <a:srgbClr val="4F7A5B"/>
+          </a:solidFill>
+          <a:ln/>
+        </p:spPr>
+      </p:sp>
+      <p:sp>
+        <p:nvSpPr>
+          <p:cNvPr id="7" name="Text 5"/>
+          <p:cNvSpPr/>
+          <p:nvPr/>
+        </p:nvSpPr>
+        <p:spPr>
+          <a:xfrm>
+            <a:off x="786384" y="1645920"/>
+            <a:ext cx="2194560" cy="274320"/>
+          </a:xfrm>
+          <a:prstGeom prst="rect">
+            <a:avLst/>
+          </a:prstGeom>
+          <a:noFill/>
+          <a:ln/>
+        </p:spPr>
+        <p:txBody>
+          <a:bodyPr wrap="square" rtlCol="0" anchor="ctr"/>
+          <a:lstStyle/>
+          <a:p>
+            <a:pPr indent="0" marL="0">
+              <a:buNone/>
+            </a:pPr>
+            <a:r>
+              <a:rPr lang="en-US" sz="1400" b="1" dirty="0">
+                <a:solidFill>
+                  <a:srgbClr val="4F7A5B"/>
                 </a:solidFill>
                 <a:latin typeface="Georgia" pitchFamily="34" charset="0"/>
                 <a:ea typeface="Georgia" pitchFamily="34" charset="-122"/>
                 <a:cs typeface="Georgia" pitchFamily="34" charset="-120"/>
               </a:rPr>
-              <a:t>高齢の利用者本人が使う画面
-</a:t>
-            </a:r>
-            <a:pPr indent="0" marL="0">
-              <a:lnSpc>
-                <a:spcPts val="1900"/>
-              </a:lnSpc>
-              <a:buNone/>
-            </a:pPr>
-            <a:r>
-              <a:rPr lang="en-US" sz="1250" dirty="0">
-                <a:solidFill>
-                  <a:srgbClr val="2B1F24"/>
-                </a:solidFill>
-                <a:latin typeface="Calibri" pitchFamily="34" charset="0"/>
-                <a:ea typeface="Calibri" pitchFamily="34" charset="-122"/>
-                <a:cs typeface="Calibri" pitchFamily="34" charset="-120"/>
-              </a:rPr>
-              <a:t>文字とボタンを大きくした専用画面（/one-touch）を用意。
-見守る側のダッシュボードとは分けている。
-</a:t>
-            </a:r>
-            <a:pPr indent="0" marL="0">
-              <a:lnSpc>
-                <a:spcPts val="1900"/>
-              </a:lnSpc>
-              <a:buNone/>
-            </a:pPr>
-            <a:r>
-              <a:rPr lang="en-US" sz="1600" b="1" dirty="0">
-                <a:solidFill>
-                  <a:srgbClr val="6D2E46"/>
+              <a:t>センサー経路</a:t>
+            </a:r>
+            <a:endParaRPr lang="en-US" sz="1400" dirty="0"/>
+          </a:p>
+        </p:txBody>
+      </p:sp>
+      <p:sp>
+        <p:nvSpPr>
+          <p:cNvPr id="8" name="Text 6"/>
+          <p:cNvSpPr/>
+          <p:nvPr/>
+        </p:nvSpPr>
+        <p:spPr>
+          <a:xfrm>
+            <a:off x="786384" y="1901952"/>
+            <a:ext cx="2286000" cy="237744"/>
+          </a:xfrm>
+          <a:prstGeom prst="rect">
+            <a:avLst/>
+          </a:prstGeom>
+          <a:noFill/>
+          <a:ln/>
+        </p:spPr>
+        <p:txBody>
+          <a:bodyPr wrap="square" rtlCol="0" anchor="ctr"/>
+          <a:lstStyle/>
+          <a:p>
+            <a:pPr indent="0" marL="0">
+              <a:buNone/>
+            </a:pPr>
+            <a:r>
+              <a:rPr lang="en-US" sz="1000" dirty="0">
+                <a:solidFill>
+                  <a:srgbClr val="8A7A80"/>
+                </a:solidFill>
+                <a:latin typeface="Calibri" pitchFamily="34" charset="0"/>
+                <a:ea typeface="Calibri" pitchFamily="34" charset="-122"/>
+                <a:cs typeface="Calibri" pitchFamily="34" charset="-120"/>
+              </a:rPr>
+              <a:t>5分ごとのポーリング</a:t>
+            </a:r>
+            <a:endParaRPr lang="en-US" sz="1000" dirty="0"/>
+          </a:p>
+        </p:txBody>
+      </p:sp>
+      <p:sp>
+        <p:nvSpPr>
+          <p:cNvPr id="9" name="Text 7"/>
+          <p:cNvSpPr/>
+          <p:nvPr/>
+        </p:nvSpPr>
+        <p:spPr>
+          <a:xfrm>
+            <a:off x="2898648" y="1609344"/>
+            <a:ext cx="1371600" cy="566928"/>
+          </a:xfrm>
+          <a:prstGeom prst="rect">
+            <a:avLst/>
+          </a:prstGeom>
+          <a:noFill/>
+          <a:ln/>
+        </p:spPr>
+        <p:txBody>
+          <a:bodyPr wrap="square" lIns="0" tIns="0" rIns="0" bIns="0" rtlCol="0" anchor="ctr"/>
+          <a:lstStyle/>
+          <a:p>
+            <a:pPr algn="r" indent="0" marL="0">
+              <a:buNone/>
+            </a:pPr>
+            <a:r>
+              <a:rPr lang="en-US" sz="4000" b="1" dirty="0">
+                <a:solidFill>
+                  <a:srgbClr val="4F7A5B"/>
                 </a:solidFill>
                 <a:latin typeface="Georgia" pitchFamily="34" charset="0"/>
                 <a:ea typeface="Georgia" pitchFamily="34" charset="-122"/>
                 <a:cs typeface="Georgia" pitchFamily="34" charset="-120"/>
               </a:rPr>
-              <a:t>家族はLINEで聞くだけ
-</a:t>
-            </a:r>
+              <a:t>0</a:t>
+            </a:r>
+            <a:pPr algn="r" indent="0" marL="0">
+              <a:buNone/>
+            </a:pPr>
+            <a:r>
+              <a:rPr lang="en-US" sz="1300" dirty="0">
+                <a:solidFill>
+                  <a:srgbClr val="4F7A5B"/>
+                </a:solidFill>
+                <a:latin typeface="Calibri" pitchFamily="34" charset="0"/>
+                <a:ea typeface="Calibri" pitchFamily="34" charset="-122"/>
+                <a:cs typeface="Calibri" pitchFamily="34" charset="-120"/>
+              </a:rPr>
+              <a:t> 回</a:t>
+            </a:r>
+            <a:endParaRPr lang="en-US" sz="4000" dirty="0"/>
+          </a:p>
+        </p:txBody>
+      </p:sp>
+      <p:sp>
+        <p:nvSpPr>
+          <p:cNvPr id="10" name="Text 8"/>
+          <p:cNvSpPr/>
+          <p:nvPr/>
+        </p:nvSpPr>
+        <p:spPr>
+          <a:xfrm>
+            <a:off x="2898648" y="2157984"/>
+            <a:ext cx="1371600" cy="219456"/>
+          </a:xfrm>
+          <a:prstGeom prst="rect">
+            <a:avLst/>
+          </a:prstGeom>
+          <a:noFill/>
+          <a:ln/>
+        </p:spPr>
+        <p:txBody>
+          <a:bodyPr wrap="square" rtlCol="0" anchor="ctr"/>
+          <a:lstStyle/>
+          <a:p>
+            <a:pPr algn="r" indent="0" marL="0">
+              <a:buNone/>
+            </a:pPr>
+            <a:r>
+              <a:rPr lang="en-US" sz="950" dirty="0">
+                <a:solidFill>
+                  <a:srgbClr val="8A7A80"/>
+                </a:solidFill>
+                <a:latin typeface="Calibri" pitchFamily="34" charset="0"/>
+                <a:ea typeface="Calibri" pitchFamily="34" charset="-122"/>
+                <a:cs typeface="Calibri" pitchFamily="34" charset="-120"/>
+              </a:rPr>
+              <a:t>LLM呼び出し</a:t>
+            </a:r>
+            <a:endParaRPr lang="en-US" sz="950" dirty="0"/>
+          </a:p>
+        </p:txBody>
+      </p:sp>
+      <p:sp>
+        <p:nvSpPr>
+          <p:cNvPr id="11" name="Text 9"/>
+          <p:cNvSpPr/>
+          <p:nvPr/>
+        </p:nvSpPr>
+        <p:spPr>
+          <a:xfrm>
+            <a:off x="786384" y="2432304"/>
+            <a:ext cx="3474720" cy="658368"/>
+          </a:xfrm>
+          <a:prstGeom prst="rect">
+            <a:avLst/>
+          </a:prstGeom>
+          <a:noFill/>
+          <a:ln/>
+        </p:spPr>
+        <p:txBody>
+          <a:bodyPr wrap="square" lIns="0" tIns="0" rIns="0" bIns="0" rtlCol="0" anchor="ctr"/>
+          <a:lstStyle/>
+          <a:p>
             <a:pPr indent="0" marL="0">
               <a:lnSpc>
-                <a:spcPts val="1900"/>
+                <a:spcPts val="1300"/>
               </a:lnSpc>
               <a:buNone/>
             </a:pPr>
             <a:r>
-              <a:rPr lang="en-US" sz="1250" dirty="0">
+              <a:rPr lang="en-US" sz="1000" dirty="0">
                 <a:solidFill>
                   <a:srgbClr val="2B1F24"/>
                 </a:solidFill>
@@ -8246,19 +10892,251 @@
                 <a:ea typeface="Calibri" pitchFamily="34" charset="-122"/>
                 <a:cs typeface="Calibri" pitchFamily="34" charset="-120"/>
               </a:rPr>
-              <a:t>専用アプリのインストールは不要。</a:t>
-            </a:r>
-            <a:endParaRPr lang="en-US" sz="1600" dirty="0"/>
-          </a:p>
+              <a:t>1世帯あたり 288回/日 の取得と判定。すべてルールベースなので、デバイスが増えても LLM 費用は増えない。</a:t>
+            </a:r>
+            <a:endParaRPr lang="en-US" sz="1000" dirty="0"/>
+          </a:p>
+        </p:txBody>
+      </p:sp>
+      <p:sp>
+        <p:nvSpPr>
+          <p:cNvPr id="12" name="Shape 10"/>
+          <p:cNvSpPr/>
+          <p:nvPr/>
+        </p:nvSpPr>
+        <p:spPr>
+          <a:xfrm>
+            <a:off x="4773168" y="1517904"/>
+            <a:ext cx="3886200" cy="1627632"/>
+          </a:xfrm>
+          <a:prstGeom prst="rect">
+            <a:avLst/>
+          </a:prstGeom>
+          <a:solidFill>
+            <a:srgbClr val="ECE2D0"/>
+          </a:solidFill>
+          <a:ln/>
+        </p:spPr>
+      </p:sp>
+      <p:sp>
+        <p:nvSpPr>
+          <p:cNvPr id="13" name="Shape 11"/>
+          <p:cNvSpPr/>
+          <p:nvPr/>
+        </p:nvSpPr>
+        <p:spPr>
+          <a:xfrm>
+            <a:off x="4773168" y="1517904"/>
+            <a:ext cx="3886200" cy="64008"/>
+          </a:xfrm>
+          <a:prstGeom prst="rect">
+            <a:avLst/>
+          </a:prstGeom>
+          <a:solidFill>
+            <a:srgbClr val="A26769"/>
+          </a:solidFill>
+          <a:ln/>
+        </p:spPr>
+      </p:sp>
+      <p:sp>
+        <p:nvSpPr>
+          <p:cNvPr id="14" name="Text 12"/>
+          <p:cNvSpPr/>
+          <p:nvPr/>
+        </p:nvSpPr>
+        <p:spPr>
+          <a:xfrm>
+            <a:off x="4992624" y="1645920"/>
+            <a:ext cx="2194560" cy="274320"/>
+          </a:xfrm>
+          <a:prstGeom prst="rect">
+            <a:avLst/>
+          </a:prstGeom>
+          <a:noFill/>
+          <a:ln/>
+        </p:spPr>
+        <p:txBody>
+          <a:bodyPr wrap="square" rtlCol="0" anchor="ctr"/>
+          <a:lstStyle/>
+          <a:p>
+            <a:pPr indent="0" marL="0">
+              <a:buNone/>
+            </a:pPr>
+            <a:r>
+              <a:rPr lang="en-US" sz="1400" b="1" dirty="0">
+                <a:solidFill>
+                  <a:srgbClr val="A26769"/>
+                </a:solidFill>
+                <a:latin typeface="Georgia" pitchFamily="34" charset="0"/>
+                <a:ea typeface="Georgia" pitchFamily="34" charset="-122"/>
+                <a:cs typeface="Georgia" pitchFamily="34" charset="-120"/>
+              </a:rPr>
+              <a:t>会話経路</a:t>
+            </a:r>
+            <a:endParaRPr lang="en-US" sz="1400" dirty="0"/>
+          </a:p>
+        </p:txBody>
+      </p:sp>
+      <p:sp>
+        <p:nvSpPr>
+          <p:cNvPr id="15" name="Text 13"/>
+          <p:cNvSpPr/>
+          <p:nvPr/>
+        </p:nvSpPr>
+        <p:spPr>
+          <a:xfrm>
+            <a:off x="4992624" y="1901952"/>
+            <a:ext cx="2286000" cy="237744"/>
+          </a:xfrm>
+          <a:prstGeom prst="rect">
+            <a:avLst/>
+          </a:prstGeom>
+          <a:noFill/>
+          <a:ln/>
+        </p:spPr>
+        <p:txBody>
+          <a:bodyPr wrap="square" rtlCol="0" anchor="ctr"/>
+          <a:lstStyle/>
+          <a:p>
+            <a:pPr indent="0" marL="0">
+              <a:buNone/>
+            </a:pPr>
+            <a:r>
+              <a:rPr lang="en-US" sz="1000" dirty="0">
+                <a:solidFill>
+                  <a:srgbClr val="8A7A80"/>
+                </a:solidFill>
+                <a:latin typeface="Calibri" pitchFamily="34" charset="0"/>
+                <a:ea typeface="Calibri" pitchFamily="34" charset="-122"/>
+                <a:cs typeface="Calibri" pitchFamily="34" charset="-120"/>
+              </a:rPr>
+              <a:t>家族が話しかけたときだけ</a:t>
+            </a:r>
+            <a:endParaRPr lang="en-US" sz="1000" dirty="0"/>
+          </a:p>
+        </p:txBody>
+      </p:sp>
+      <p:sp>
+        <p:nvSpPr>
+          <p:cNvPr id="16" name="Text 14"/>
+          <p:cNvSpPr/>
+          <p:nvPr/>
+        </p:nvSpPr>
+        <p:spPr>
+          <a:xfrm>
+            <a:off x="7104888" y="1609344"/>
+            <a:ext cx="1371600" cy="566928"/>
+          </a:xfrm>
+          <a:prstGeom prst="rect">
+            <a:avLst/>
+          </a:prstGeom>
+          <a:noFill/>
+          <a:ln/>
+        </p:spPr>
+        <p:txBody>
+          <a:bodyPr wrap="square" lIns="0" tIns="0" rIns="0" bIns="0" rtlCol="0" anchor="ctr"/>
+          <a:lstStyle/>
+          <a:p>
+            <a:pPr algn="r" indent="0" marL="0">
+              <a:buNone/>
+            </a:pPr>
+            <a:r>
+              <a:rPr lang="en-US" sz="4000" b="1" dirty="0">
+                <a:solidFill>
+                  <a:srgbClr val="A26769"/>
+                </a:solidFill>
+                <a:latin typeface="Georgia" pitchFamily="34" charset="0"/>
+                <a:ea typeface="Georgia" pitchFamily="34" charset="-122"/>
+                <a:cs typeface="Georgia" pitchFamily="34" charset="-120"/>
+              </a:rPr>
+              <a:t>1</a:t>
+            </a:r>
+            <a:pPr algn="r" indent="0" marL="0">
+              <a:buNone/>
+            </a:pPr>
+            <a:r>
+              <a:rPr lang="en-US" sz="1300" dirty="0">
+                <a:solidFill>
+                  <a:srgbClr val="A26769"/>
+                </a:solidFill>
+                <a:latin typeface="Calibri" pitchFamily="34" charset="0"/>
+                <a:ea typeface="Calibri" pitchFamily="34" charset="-122"/>
+                <a:cs typeface="Calibri" pitchFamily="34" charset="-120"/>
+              </a:rPr>
+              <a:t> 回</a:t>
+            </a:r>
+            <a:endParaRPr lang="en-US" sz="4000" dirty="0"/>
+          </a:p>
+        </p:txBody>
+      </p:sp>
+      <p:sp>
+        <p:nvSpPr>
+          <p:cNvPr id="17" name="Text 15"/>
+          <p:cNvSpPr/>
+          <p:nvPr/>
+        </p:nvSpPr>
+        <p:spPr>
+          <a:xfrm>
+            <a:off x="7104888" y="2157984"/>
+            <a:ext cx="1371600" cy="219456"/>
+          </a:xfrm>
+          <a:prstGeom prst="rect">
+            <a:avLst/>
+          </a:prstGeom>
+          <a:noFill/>
+          <a:ln/>
+        </p:spPr>
+        <p:txBody>
+          <a:bodyPr wrap="square" rtlCol="0" anchor="ctr"/>
+          <a:lstStyle/>
+          <a:p>
+            <a:pPr algn="r" indent="0" marL="0">
+              <a:buNone/>
+            </a:pPr>
+            <a:r>
+              <a:rPr lang="en-US" sz="950" dirty="0">
+                <a:solidFill>
+                  <a:srgbClr val="8A7A80"/>
+                </a:solidFill>
+                <a:latin typeface="Calibri" pitchFamily="34" charset="0"/>
+                <a:ea typeface="Calibri" pitchFamily="34" charset="-122"/>
+                <a:cs typeface="Calibri" pitchFamily="34" charset="-120"/>
+              </a:rPr>
+              <a:t>発話あたり</a:t>
+            </a:r>
+            <a:endParaRPr lang="en-US" sz="950" dirty="0"/>
+          </a:p>
+        </p:txBody>
+      </p:sp>
+      <p:sp>
+        <p:nvSpPr>
+          <p:cNvPr id="18" name="Text 16"/>
+          <p:cNvSpPr/>
+          <p:nvPr/>
+        </p:nvSpPr>
+        <p:spPr>
+          <a:xfrm>
+            <a:off x="4992624" y="2432304"/>
+            <a:ext cx="3474720" cy="658368"/>
+          </a:xfrm>
+          <a:prstGeom prst="rect">
+            <a:avLst/>
+          </a:prstGeom>
+          <a:noFill/>
+          <a:ln/>
+        </p:spPr>
+        <p:txBody>
+          <a:bodyPr wrap="square" lIns="0" tIns="0" rIns="0" bIns="0" rtlCol="0" anchor="ctr"/>
+          <a:lstStyle/>
           <a:p>
             <a:pPr indent="0" marL="0">
               <a:lnSpc>
-                <a:spcPts val="1900"/>
+                <a:spcPts val="1300"/>
               </a:lnSpc>
               <a:buNone/>
             </a:pPr>
             <a:r>
-              <a:rPr lang="en-US" sz="1250" dirty="0">
+              <a:rPr lang="en-US" sz="1000" dirty="0">
                 <a:solidFill>
                   <a:srgbClr val="2B1F24"/>
                 </a:solidFill>
@@ -8266,35 +11144,200 @@
                 <a:ea typeface="Calibri" pitchFamily="34" charset="-122"/>
                 <a:cs typeface="Calibri" pitchFamily="34" charset="-120"/>
               </a:rPr>
-              <a:t>「今日のお母さんどう？」と聞けば、</a:t>
-            </a:r>
-            <a:endParaRPr lang="en-US" sz="1600" dirty="0"/>
-          </a:p>
+              <a:t>意図解析・要約・通知文の生成のみ。費用は「世帯数」ではなく「会話した回数」に比例する。</a:t>
+            </a:r>
+            <a:endParaRPr lang="en-US" sz="1000" dirty="0"/>
+          </a:p>
+        </p:txBody>
+      </p:sp>
+      <p:sp>
+        <p:nvSpPr>
+          <p:cNvPr id="19" name="Shape 17"/>
+          <p:cNvSpPr/>
+          <p:nvPr/>
+        </p:nvSpPr>
+        <p:spPr>
+          <a:xfrm>
+            <a:off x="566928" y="3218688"/>
+            <a:ext cx="8074152" cy="841248"/>
+          </a:xfrm>
+          <a:prstGeom prst="rect">
+            <a:avLst/>
+          </a:prstGeom>
+          <a:solidFill>
+            <a:srgbClr val="FFFFFF"/>
+          </a:solidFill>
+          <a:ln w="19050">
+            <a:solidFill>
+              <a:srgbClr val="ECE2D0"/>
+            </a:solidFill>
+            <a:prstDash val="solid"/>
+          </a:ln>
+        </p:spPr>
+      </p:sp>
+      <p:sp>
+        <p:nvSpPr>
+          <p:cNvPr id="20" name="Text 18"/>
+          <p:cNvSpPr/>
+          <p:nvPr/>
+        </p:nvSpPr>
+        <p:spPr>
+          <a:xfrm>
+            <a:off x="786384" y="3310128"/>
+            <a:ext cx="4937760" cy="256032"/>
+          </a:xfrm>
+          <a:prstGeom prst="rect">
+            <a:avLst/>
+          </a:prstGeom>
+          <a:noFill/>
+          <a:ln/>
+        </p:spPr>
+        <p:txBody>
+          <a:bodyPr wrap="square" rtlCol="0" anchor="ctr"/>
+          <a:lstStyle/>
+          <a:p>
+            <a:pPr indent="0" marL="0">
+              <a:buNone/>
+            </a:pPr>
+            <a:r>
+              <a:rPr lang="en-US" sz="1250" b="1" dirty="0">
+                <a:solidFill>
+                  <a:srgbClr val="2B1F24"/>
+                </a:solidFill>
+                <a:latin typeface="Georgia" pitchFamily="34" charset="0"/>
+                <a:ea typeface="Georgia" pitchFamily="34" charset="-122"/>
+                <a:cs typeface="Georgia" pitchFamily="34" charset="-120"/>
+              </a:rPr>
+              <a:t>締切のある経路だけ、安いモデルに固定する</a:t>
+            </a:r>
+            <a:endParaRPr lang="en-US" sz="1250" dirty="0"/>
+          </a:p>
+        </p:txBody>
+      </p:sp>
+      <p:sp>
+        <p:nvSpPr>
+          <p:cNvPr id="21" name="Text 19"/>
+          <p:cNvSpPr/>
+          <p:nvPr/>
+        </p:nvSpPr>
+        <p:spPr>
+          <a:xfrm>
+            <a:off x="786384" y="3566160"/>
+            <a:ext cx="7635240" cy="420624"/>
+          </a:xfrm>
+          <a:prstGeom prst="rect">
+            <a:avLst/>
+          </a:prstGeom>
+          <a:noFill/>
+          <a:ln/>
+        </p:spPr>
+        <p:txBody>
+          <a:bodyPr wrap="square" rtlCol="0" anchor="ctr"/>
+          <a:lstStyle/>
           <a:p>
             <a:pPr indent="0" marL="0">
               <a:lnSpc>
-                <a:spcPts val="1900"/>
+                <a:spcPts val="1300"/>
               </a:lnSpc>
               <a:buNone/>
             </a:pPr>
             <a:r>
-              <a:rPr lang="en-US" sz="1250" dirty="0">
-                <a:solidFill>
-                  <a:srgbClr val="2B1F24"/>
-                </a:solidFill>
-                <a:latin typeface="Calibri" pitchFamily="34" charset="0"/>
-                <a:ea typeface="Calibri" pitchFamily="34" charset="-122"/>
-                <a:cs typeface="Calibri" pitchFamily="34" charset="-120"/>
-              </a:rPr>
-              <a:t>蓄積された生活データから答える</a:t>
-            </a:r>
-            <a:endParaRPr lang="en-US" sz="1600" dirty="0"/>
-          </a:p>
-        </p:txBody>
-      </p:sp>
-      <p:sp>
-        <p:nvSpPr>
-          <p:cNvPr id="9" name="Text 6"/>
+              <a:rPr lang="en-US" sz="1050" dirty="0">
+                <a:solidFill>
+                  <a:srgbClr val="8A7A80"/>
+                </a:solidFill>
+                <a:latin typeface="Calibri" pitchFamily="34" charset="0"/>
+                <a:ea typeface="Calibri" pitchFamily="34" charset="-122"/>
+                <a:cs typeface="Calibri" pitchFamily="34" charset="-120"/>
+              </a:rPr>
+              <a:t>LINE の webhook は 8 秒で打ち切られる。自動ルータは同じプロンプトで 5.6〜51 秒とばらついたため、</a:t>
+            </a:r>
+            <a:endParaRPr lang="en-US" sz="1050" dirty="0"/>
+          </a:p>
+          <a:p>
+            <a:pPr indent="0" marL="0">
+              <a:lnSpc>
+                <a:spcPts val="1300"/>
+              </a:lnSpc>
+              <a:buNone/>
+            </a:pPr>
+            <a:r>
+              <a:rPr lang="en-US" sz="1050" dirty="0">
+                <a:solidFill>
+                  <a:srgbClr val="8A7A80"/>
+                </a:solidFill>
+                <a:latin typeface="Calibri" pitchFamily="34" charset="0"/>
+                <a:ea typeface="Calibri" pitchFamily="34" charset="-122"/>
+                <a:cs typeface="Calibri" pitchFamily="34" charset="-120"/>
+              </a:rPr>
+              <a:t>この経路だけ gpt-4.1-mini に固定（実測 3〜5 秒）。他の画面は自動ルータのまま＝速さと費用を両取りする。</a:t>
+            </a:r>
+            <a:endParaRPr lang="en-US" sz="1050" dirty="0"/>
+          </a:p>
+        </p:txBody>
+      </p:sp>
+      <p:sp>
+        <p:nvSpPr>
+          <p:cNvPr id="22" name="Shape 20"/>
+          <p:cNvSpPr/>
+          <p:nvPr/>
+        </p:nvSpPr>
+        <p:spPr>
+          <a:xfrm>
+            <a:off x="566928" y="4206240"/>
+            <a:ext cx="8074152" cy="548640"/>
+          </a:xfrm>
+          <a:prstGeom prst="rect">
+            <a:avLst/>
+          </a:prstGeom>
+          <a:solidFill>
+            <a:srgbClr val="2B1F24"/>
+          </a:solidFill>
+          <a:ln/>
+        </p:spPr>
+      </p:sp>
+      <p:sp>
+        <p:nvSpPr>
+          <p:cNvPr id="23" name="Text 21"/>
+          <p:cNvSpPr/>
+          <p:nvPr/>
+        </p:nvSpPr>
+        <p:spPr>
+          <a:xfrm>
+            <a:off x="566928" y="4325112"/>
+            <a:ext cx="8074152" cy="310896"/>
+          </a:xfrm>
+          <a:prstGeom prst="rect">
+            <a:avLst/>
+          </a:prstGeom>
+          <a:noFill/>
+          <a:ln/>
+        </p:spPr>
+        <p:txBody>
+          <a:bodyPr wrap="square" rtlCol="0" anchor="ctr"/>
+          <a:lstStyle/>
+          <a:p>
+            <a:pPr algn="ctr" indent="0" marL="0">
+              <a:buNone/>
+            </a:pPr>
+            <a:r>
+              <a:rPr lang="en-US" sz="1250" b="1" dirty="0">
+                <a:solidFill>
+                  <a:srgbClr val="FFFFFF"/>
+                </a:solidFill>
+                <a:latin typeface="Calibri" pitchFamily="34" charset="0"/>
+                <a:ea typeface="Calibri" pitchFamily="34" charset="-122"/>
+                <a:cs typeface="Calibri" pitchFamily="34" charset="-120"/>
+              </a:rPr>
+              <a:t>APIキー0本でも全機能が動く ― 審査でも運用でも、課金せずに試せる状態を既定にした</a:t>
+            </a:r>
+            <a:endParaRPr lang="en-US" sz="1250" dirty="0"/>
+          </a:p>
+        </p:txBody>
+      </p:sp>
+      <p:sp>
+        <p:nvSpPr>
+          <p:cNvPr id="24" name="Text 22"/>
           <p:cNvSpPr/>
           <p:nvPr/>
         </p:nvSpPr>
@@ -8333,7 +11376,7 @@
       </p:sp>
       <p:sp>
         <p:nvSpPr>
-          <p:cNvPr id="10" name="Text 7"/>
+          <p:cNvPr id="25" name="Text 23"/>
           <p:cNvSpPr/>
           <p:nvPr/>
         </p:nvSpPr>

--- a/docs/mimamoritai-deck.pptx
+++ b/docs/mimamoritai-deck.pptx
@@ -18,9 +18,10 @@
     <p:sldId id="266" r:id="rId12"/>
     <p:sldId id="267" r:id="rId13"/>
     <p:sldId id="268" r:id="rId14"/>
+    <p:sldId id="269" r:id="rId15"/>
   </p:sldIdLst>
   <p:notesMasterIdLst>
-    <p:notesMasterId r:id="rId15"/>
+    <p:notesMasterId r:id="rId16"/>
   </p:notesMasterIdLst>
   <p:sldSz cx="12191695" cy="6858000"/>
   <p:notesSz cx="6858000" cy="12191695"/>
@@ -890,6 +891,94 @@
             <a:fld id="{F7021451-1387-4CA6-816F-3879F97B5CBC}" type="slidenum">
               <a:rPr lang="en-US"/>
               <a:t>13</a:t>
+            </a:fld>
+            <a:endParaRPr lang="en-US"/>
+          </a:p>
+        </p:txBody>
+      </p:sp>
+    </p:spTree>
+    <p:extLst>
+      <p:ext uri="{BB962C8B-B14F-4D97-AF65-F5344CB8AC3E}">
+        <p14:creationId xmlns:p14="http://schemas.microsoft.com/office/powerpoint/2010/main" val="1024086991"/>
+      </p:ext>
+    </p:extLst>
+  </p:cSld>
+  <p:clrMapOvr>
+    <a:masterClrMapping/>
+  </p:clrMapOvr>
+</p:notes>
+</file>
+
+<file path=ppt/notesSlides/notesSlide14.xml><?xml version="1.0" encoding="utf-8"?>
+<p:notes xmlns:a="http://schemas.openxmlformats.org/drawingml/2006/main" xmlns:r="http://schemas.openxmlformats.org/officeDocument/2006/relationships" xmlns:p="http://schemas.openxmlformats.org/presentationml/2006/main">
+  <p:cSld>
+    <p:spTree>
+      <p:nvGrpSpPr>
+        <p:cNvPr id="1" name=""/>
+        <p:cNvGrpSpPr/>
+        <p:nvPr/>
+      </p:nvGrpSpPr>
+      <p:grpSpPr>
+        <a:xfrm>
+          <a:off x="0" y="0"/>
+          <a:ext cx="0" cy="0"/>
+          <a:chOff x="0" y="0"/>
+          <a:chExt cx="0" cy="0"/>
+        </a:xfrm>
+      </p:grpSpPr>
+      <p:sp>
+        <p:nvSpPr>
+          <p:cNvPr id="2" name="Slide Image Placeholder 1"/>
+          <p:cNvSpPr>
+            <a:spLocks noGrp="1" noRot="1" noChangeAspect="1"/>
+          </p:cNvSpPr>
+          <p:nvPr>
+            <p:ph type="sldImg"/>
+          </p:nvPr>
+        </p:nvSpPr>
+        <p:spPr/>
+      </p:sp>
+      <p:sp>
+        <p:nvSpPr>
+          <p:cNvPr id="3" name="Notes Placeholder 2"/>
+          <p:cNvSpPr>
+            <a:spLocks noGrp="1"/>
+          </p:cNvSpPr>
+          <p:nvPr>
+            <p:ph type="body" idx="1"/>
+          </p:nvPr>
+        </p:nvSpPr>
+        <p:spPr/>
+        <p:txBody>
+          <a:bodyPr/>
+          <a:lstStyle/>
+          <a:p>
+            <a:r>
+              <a:rPr lang="en-US" dirty="0"/>
+              <a:t/>
+            </a:r>
+            <a:endParaRPr lang="en-US" dirty="0"/>
+          </a:p>
+        </p:txBody>
+      </p:sp>
+      <p:sp>
+        <p:nvSpPr>
+          <p:cNvPr id="4" name="Slide Number Placeholder 3"/>
+          <p:cNvSpPr>
+            <a:spLocks noGrp="1"/>
+          </p:cNvSpPr>
+          <p:nvPr>
+            <p:ph type="sldNum" sz="quarter" idx="10"/>
+          </p:nvPr>
+        </p:nvSpPr>
+        <p:spPr/>
+        <p:txBody>
+          <a:bodyPr/>
+          <a:lstStyle/>
+          <a:p>
+            <a:fld id="{F7021451-1387-4CA6-816F-3879F97B5CBC}" type="slidenum">
+              <a:rPr lang="en-US"/>
+              <a:t>14</a:t>
             </a:fld>
             <a:endParaRPr lang="en-US"/>
           </a:p>
@@ -2094,7 +2183,7 @@
                 <a:ea typeface="Meiryo" pitchFamily="34" charset="-122"/>
                 <a:cs typeface="Meiryo" pitchFamily="34" charset="-120"/>
               </a:rPr>
-              <a:t>AIに家電を任せない、見守りサービス</a:t>
+              <a:t>見守りサービス</a:t>
             </a:r>
             <a:endParaRPr lang="en-US" sz="1900" dirty="0"/>
           </a:p>
@@ -2133,7 +2222,7 @@
                 <a:ea typeface="Meiryo" pitchFamily="34" charset="-122"/>
                 <a:cs typeface="Meiryo" pitchFamily="34" charset="-120"/>
               </a:rPr>
-              <a:t>カメラを使わず、家電の電源だけで生活リズムを見る</a:t>
+              <a:t>家電の電源で生活リズムを見る</a:t>
             </a:r>
             <a:endParaRPr lang="en-US" sz="1350" dirty="0"/>
           </a:p>
@@ -2289,7 +2378,7 @@
                 <a:ea typeface="Georgia" pitchFamily="34" charset="-122"/>
                 <a:cs typeface="Georgia" pitchFamily="34" charset="-120"/>
               </a:rPr>
-              <a:t>沈黙して壊れた</a:t>
+              <a:t>LLM コストは、設計で削る</a:t>
             </a:r>
             <a:endParaRPr lang="en-US" sz="3100" dirty="0"/>
           </a:p>
@@ -2328,7 +2417,7 @@
                 <a:ea typeface="Meiryo" pitchFamily="34" charset="-122"/>
                 <a:cs typeface="Meiryo" pitchFamily="34" charset="-120"/>
               </a:rPr>
-              <a:t>3件とも、例外は一度も投げていない</a:t>
+              <a:t>呼ぶ回数を減らす。これが一番効く</a:t>
             </a:r>
             <a:endParaRPr lang="en-US" sz="1350" dirty="0"/>
           </a:p>
@@ -2342,56 +2431,42 @@
         </p:nvSpPr>
         <p:spPr>
           <a:xfrm>
-            <a:off x="777240" y="1874520"/>
-            <a:ext cx="45720" cy="868680"/>
+            <a:off x="777240" y="1847088"/>
+            <a:ext cx="5090008" cy="1847088"/>
           </a:xfrm>
           <a:prstGeom prst="rect">
             <a:avLst/>
           </a:prstGeom>
           <a:solidFill>
-            <a:srgbClr val="9E2A2B"/>
+            <a:srgbClr val="FFFFFF"/>
           </a:solidFill>
-          <a:ln/>
-        </p:spPr>
-      </p:sp>
-      <p:sp>
-        <p:nvSpPr>
-          <p:cNvPr id="5" name="Text 3"/>
-          <p:cNvSpPr/>
-          <p:nvPr/>
-        </p:nvSpPr>
-        <p:spPr>
-          <a:xfrm>
-            <a:off x="1069848" y="1874520"/>
-            <a:ext cx="10344607" cy="329184"/>
-          </a:xfrm>
-          <a:prstGeom prst="rect">
-            <a:avLst/>
-          </a:prstGeom>
-          <a:noFill/>
-          <a:ln/>
-        </p:spPr>
-        <p:txBody>
-          <a:bodyPr wrap="square" lIns="0" tIns="0" rIns="0" bIns="0" rtlCol="0" anchor="ctr"/>
-          <a:lstStyle/>
-          <a:p>
-            <a:pPr indent="0" marL="0">
-              <a:buNone/>
-            </a:pPr>
-            <a:r>
-              <a:rPr lang="en-US" sz="1450" b="1" dirty="0">
-                <a:solidFill>
-                  <a:srgbClr val="2B2B2B"/>
-                </a:solidFill>
-                <a:latin typeface="Meiryo" pitchFamily="34" charset="0"/>
-                <a:ea typeface="Meiryo" pitchFamily="34" charset="-122"/>
-                <a:cs typeface="Meiryo" pitchFamily="34" charset="-120"/>
-              </a:rPr>
-              <a:t>存在しないテーブルに投げ続けた</a:t>
-            </a:r>
-            <a:endParaRPr lang="en-US" sz="1450" dirty="0"/>
-          </a:p>
-        </p:txBody>
+          <a:ln w="15875">
+            <a:solidFill>
+              <a:srgbClr val="E4DEDA"/>
+            </a:solidFill>
+            <a:prstDash val="solid"/>
+          </a:ln>
+        </p:spPr>
+      </p:sp>
+      <p:sp>
+        <p:nvSpPr>
+          <p:cNvPr id="5" name="Shape 3"/>
+          <p:cNvSpPr/>
+          <p:nvPr/>
+        </p:nvSpPr>
+        <p:spPr>
+          <a:xfrm>
+            <a:off x="777240" y="1847088"/>
+            <a:ext cx="5090008" cy="45720"/>
+          </a:xfrm>
+          <a:prstGeom prst="rect">
+            <a:avLst/>
+          </a:prstGeom>
+          <a:solidFill>
+            <a:srgbClr val="2C5F2D"/>
+          </a:solidFill>
+          <a:ln/>
+        </p:spPr>
       </p:sp>
       <p:sp>
         <p:nvSpPr>
@@ -2401,8 +2476,178 @@
         </p:nvSpPr>
         <p:spPr>
           <a:xfrm>
-            <a:off x="1069848" y="2203704"/>
-            <a:ext cx="10344607" cy="548640"/>
+            <a:off x="1161288" y="2066544"/>
+            <a:ext cx="3078328" cy="347472"/>
+          </a:xfrm>
+          <a:prstGeom prst="rect">
+            <a:avLst/>
+          </a:prstGeom>
+          <a:noFill/>
+          <a:ln/>
+        </p:spPr>
+        <p:txBody>
+          <a:bodyPr wrap="square" lIns="0" tIns="0" rIns="0" bIns="0" rtlCol="0" anchor="ctr"/>
+          <a:lstStyle/>
+          <a:p>
+            <a:pPr indent="0" marL="0">
+              <a:buNone/>
+            </a:pPr>
+            <a:r>
+              <a:rPr lang="en-US" sz="1500" b="1" dirty="0">
+                <a:solidFill>
+                  <a:srgbClr val="2C5F2D"/>
+                </a:solidFill>
+                <a:latin typeface="Meiryo" pitchFamily="34" charset="0"/>
+                <a:ea typeface="Meiryo" pitchFamily="34" charset="-122"/>
+                <a:cs typeface="Meiryo" pitchFamily="34" charset="-120"/>
+              </a:rPr>
+              <a:t>センサー経路</a:t>
+            </a:r>
+            <a:endParaRPr lang="en-US" sz="1500" dirty="0"/>
+          </a:p>
+        </p:txBody>
+      </p:sp>
+      <p:sp>
+        <p:nvSpPr>
+          <p:cNvPr id="7" name="Text 5"/>
+          <p:cNvSpPr/>
+          <p:nvPr/>
+        </p:nvSpPr>
+        <p:spPr>
+          <a:xfrm>
+            <a:off x="1161288" y="2404872"/>
+            <a:ext cx="3078328" cy="274320"/>
+          </a:xfrm>
+          <a:prstGeom prst="rect">
+            <a:avLst/>
+          </a:prstGeom>
+          <a:noFill/>
+          <a:ln/>
+        </p:spPr>
+        <p:txBody>
+          <a:bodyPr wrap="square" lIns="0" tIns="0" rIns="0" bIns="0" rtlCol="0" anchor="ctr"/>
+          <a:lstStyle/>
+          <a:p>
+            <a:pPr indent="0" marL="0">
+              <a:buNone/>
+            </a:pPr>
+            <a:r>
+              <a:rPr lang="en-US" sz="1100" dirty="0">
+                <a:solidFill>
+                  <a:srgbClr val="7A7A7A"/>
+                </a:solidFill>
+                <a:latin typeface="Meiryo" pitchFamily="34" charset="0"/>
+                <a:ea typeface="Meiryo" pitchFamily="34" charset="-122"/>
+                <a:cs typeface="Meiryo" pitchFamily="34" charset="-120"/>
+              </a:rPr>
+              <a:t>5分ごとのポーリング</a:t>
+            </a:r>
+            <a:endParaRPr lang="en-US" sz="1100" dirty="0"/>
+          </a:p>
+        </p:txBody>
+      </p:sp>
+      <p:sp>
+        <p:nvSpPr>
+          <p:cNvPr id="8" name="Text 6"/>
+          <p:cNvSpPr/>
+          <p:nvPr/>
+        </p:nvSpPr>
+        <p:spPr>
+          <a:xfrm>
+            <a:off x="3992728" y="2029968"/>
+            <a:ext cx="1508760" cy="685800"/>
+          </a:xfrm>
+          <a:prstGeom prst="rect">
+            <a:avLst/>
+          </a:prstGeom>
+          <a:noFill/>
+          <a:ln/>
+        </p:spPr>
+        <p:txBody>
+          <a:bodyPr wrap="square" lIns="0" tIns="0" rIns="0" bIns="0" rtlCol="0" anchor="ctr"/>
+          <a:lstStyle/>
+          <a:p>
+            <a:pPr algn="r" indent="0" marL="0">
+              <a:buNone/>
+            </a:pPr>
+            <a:r>
+              <a:rPr lang="en-US" sz="4400" b="1" dirty="0">
+                <a:solidFill>
+                  <a:srgbClr val="2C5F2D"/>
+                </a:solidFill>
+                <a:latin typeface="Georgia" pitchFamily="34" charset="0"/>
+                <a:ea typeface="Georgia" pitchFamily="34" charset="-122"/>
+                <a:cs typeface="Georgia" pitchFamily="34" charset="-120"/>
+              </a:rPr>
+              <a:t>0</a:t>
+            </a:r>
+            <a:pPr algn="r" indent="0" marL="0">
+              <a:buNone/>
+            </a:pPr>
+            <a:r>
+              <a:rPr lang="en-US" sz="1300" dirty="0">
+                <a:solidFill>
+                  <a:srgbClr val="2C5F2D"/>
+                </a:solidFill>
+                <a:latin typeface="Meiryo" pitchFamily="34" charset="0"/>
+                <a:ea typeface="Meiryo" pitchFamily="34" charset="-122"/>
+                <a:cs typeface="Meiryo" pitchFamily="34" charset="-120"/>
+              </a:rPr>
+              <a:t> 回</a:t>
+            </a:r>
+            <a:endParaRPr lang="en-US" sz="4400" dirty="0"/>
+          </a:p>
+        </p:txBody>
+      </p:sp>
+      <p:sp>
+        <p:nvSpPr>
+          <p:cNvPr id="9" name="Text 7"/>
+          <p:cNvSpPr/>
+          <p:nvPr/>
+        </p:nvSpPr>
+        <p:spPr>
+          <a:xfrm>
+            <a:off x="3992728" y="2697480"/>
+            <a:ext cx="1508760" cy="237744"/>
+          </a:xfrm>
+          <a:prstGeom prst="rect">
+            <a:avLst/>
+          </a:prstGeom>
+          <a:noFill/>
+          <a:ln/>
+        </p:spPr>
+        <p:txBody>
+          <a:bodyPr wrap="square" lIns="0" tIns="0" rIns="0" bIns="0" rtlCol="0" anchor="ctr"/>
+          <a:lstStyle/>
+          <a:p>
+            <a:pPr algn="r" indent="0" marL="0">
+              <a:buNone/>
+            </a:pPr>
+            <a:r>
+              <a:rPr lang="en-US" sz="1000" dirty="0">
+                <a:solidFill>
+                  <a:srgbClr val="7A7A7A"/>
+                </a:solidFill>
+                <a:latin typeface="Meiryo" pitchFamily="34" charset="0"/>
+                <a:ea typeface="Meiryo" pitchFamily="34" charset="-122"/>
+                <a:cs typeface="Meiryo" pitchFamily="34" charset="-120"/>
+              </a:rPr>
+              <a:t>LLM 呼び出し</a:t>
+            </a:r>
+            <a:endParaRPr lang="en-US" sz="1000" dirty="0"/>
+          </a:p>
+        </p:txBody>
+      </p:sp>
+      <p:sp>
+        <p:nvSpPr>
+          <p:cNvPr id="10" name="Text 8"/>
+          <p:cNvSpPr/>
+          <p:nvPr/>
+        </p:nvSpPr>
+        <p:spPr>
+          <a:xfrm>
+            <a:off x="1161288" y="3017520"/>
+            <a:ext cx="4321912" cy="658368"/>
           </a:xfrm>
           <a:prstGeom prst="rect">
             <a:avLst/>
@@ -2421,7 +2666,130 @@
               <a:buNone/>
             </a:pPr>
             <a:r>
-              <a:rPr lang="en-US" sz="1200" dirty="0">
+              <a:rPr lang="en-US" sz="1150" dirty="0">
+                <a:solidFill>
+                  <a:srgbClr val="2B2B2B"/>
+                </a:solidFill>
+                <a:latin typeface="Meiryo" pitchFamily="34" charset="0"/>
+                <a:ea typeface="Meiryo" pitchFamily="34" charset="-122"/>
+                <a:cs typeface="Meiryo" pitchFamily="34" charset="-120"/>
+              </a:rPr>
+              <a:t>1世帯あたり 288回/日 の取得と判定。すべてルールベースなので、デバイスが増えても LLM 費用は増えない。</a:t>
+            </a:r>
+            <a:endParaRPr lang="en-US" sz="1150" dirty="0"/>
+          </a:p>
+        </p:txBody>
+      </p:sp>
+      <p:sp>
+        <p:nvSpPr>
+          <p:cNvPr id="11" name="Shape 9"/>
+          <p:cNvSpPr/>
+          <p:nvPr/>
+        </p:nvSpPr>
+        <p:spPr>
+          <a:xfrm>
+            <a:off x="6324448" y="1847088"/>
+            <a:ext cx="5090008" cy="1847088"/>
+          </a:xfrm>
+          <a:prstGeom prst="rect">
+            <a:avLst/>
+          </a:prstGeom>
+          <a:solidFill>
+            <a:srgbClr val="FFFFFF"/>
+          </a:solidFill>
+          <a:ln w="15875">
+            <a:solidFill>
+              <a:srgbClr val="E4DEDA"/>
+            </a:solidFill>
+            <a:prstDash val="solid"/>
+          </a:ln>
+        </p:spPr>
+      </p:sp>
+      <p:sp>
+        <p:nvSpPr>
+          <p:cNvPr id="12" name="Shape 10"/>
+          <p:cNvSpPr/>
+          <p:nvPr/>
+        </p:nvSpPr>
+        <p:spPr>
+          <a:xfrm>
+            <a:off x="6324448" y="1847088"/>
+            <a:ext cx="5090008" cy="45720"/>
+          </a:xfrm>
+          <a:prstGeom prst="rect">
+            <a:avLst/>
+          </a:prstGeom>
+          <a:solidFill>
+            <a:srgbClr val="6D2E46"/>
+          </a:solidFill>
+          <a:ln/>
+        </p:spPr>
+      </p:sp>
+      <p:sp>
+        <p:nvSpPr>
+          <p:cNvPr id="13" name="Text 11"/>
+          <p:cNvSpPr/>
+          <p:nvPr/>
+        </p:nvSpPr>
+        <p:spPr>
+          <a:xfrm>
+            <a:off x="6708496" y="2066544"/>
+            <a:ext cx="3078328" cy="347472"/>
+          </a:xfrm>
+          <a:prstGeom prst="rect">
+            <a:avLst/>
+          </a:prstGeom>
+          <a:noFill/>
+          <a:ln/>
+        </p:spPr>
+        <p:txBody>
+          <a:bodyPr wrap="square" lIns="0" tIns="0" rIns="0" bIns="0" rtlCol="0" anchor="ctr"/>
+          <a:lstStyle/>
+          <a:p>
+            <a:pPr indent="0" marL="0">
+              <a:buNone/>
+            </a:pPr>
+            <a:r>
+              <a:rPr lang="en-US" sz="1500" b="1" dirty="0">
+                <a:solidFill>
+                  <a:srgbClr val="6D2E46"/>
+                </a:solidFill>
+                <a:latin typeface="Meiryo" pitchFamily="34" charset="0"/>
+                <a:ea typeface="Meiryo" pitchFamily="34" charset="-122"/>
+                <a:cs typeface="Meiryo" pitchFamily="34" charset="-120"/>
+              </a:rPr>
+              <a:t>会話経路</a:t>
+            </a:r>
+            <a:endParaRPr lang="en-US" sz="1500" dirty="0"/>
+          </a:p>
+        </p:txBody>
+      </p:sp>
+      <p:sp>
+        <p:nvSpPr>
+          <p:cNvPr id="14" name="Text 12"/>
+          <p:cNvSpPr/>
+          <p:nvPr/>
+        </p:nvSpPr>
+        <p:spPr>
+          <a:xfrm>
+            <a:off x="6708496" y="2404872"/>
+            <a:ext cx="3078328" cy="274320"/>
+          </a:xfrm>
+          <a:prstGeom prst="rect">
+            <a:avLst/>
+          </a:prstGeom>
+          <a:noFill/>
+          <a:ln/>
+        </p:spPr>
+        <p:txBody>
+          <a:bodyPr wrap="square" lIns="0" tIns="0" rIns="0" bIns="0" rtlCol="0" anchor="ctr"/>
+          <a:lstStyle/>
+          <a:p>
+            <a:pPr indent="0" marL="0">
+              <a:buNone/>
+            </a:pPr>
+            <a:r>
+              <a:rPr lang="en-US" sz="1100" dirty="0">
                 <a:solidFill>
                   <a:srgbClr val="7A7A7A"/>
                 </a:solidFill>
@@ -2429,10 +2797,124 @@
                 <a:ea typeface="Meiryo" pitchFamily="34" charset="-122"/>
                 <a:cs typeface="Meiryo" pitchFamily="34" charset="-120"/>
               </a:rPr>
-              <a:t>アプリ側だけ実装し、Eventhouse にテーブルを作っていなかった。</a:t>
-            </a:r>
-            <a:endParaRPr lang="en-US" sz="1200" dirty="0"/>
-          </a:p>
+              <a:t>家族が話しかけたときだけ</a:t>
+            </a:r>
+            <a:endParaRPr lang="en-US" sz="1100" dirty="0"/>
+          </a:p>
+        </p:txBody>
+      </p:sp>
+      <p:sp>
+        <p:nvSpPr>
+          <p:cNvPr id="15" name="Text 13"/>
+          <p:cNvSpPr/>
+          <p:nvPr/>
+        </p:nvSpPr>
+        <p:spPr>
+          <a:xfrm>
+            <a:off x="9539935" y="2029968"/>
+            <a:ext cx="1508760" cy="685800"/>
+          </a:xfrm>
+          <a:prstGeom prst="rect">
+            <a:avLst/>
+          </a:prstGeom>
+          <a:noFill/>
+          <a:ln/>
+        </p:spPr>
+        <p:txBody>
+          <a:bodyPr wrap="square" lIns="0" tIns="0" rIns="0" bIns="0" rtlCol="0" anchor="ctr"/>
+          <a:lstStyle/>
+          <a:p>
+            <a:pPr algn="r" indent="0" marL="0">
+              <a:buNone/>
+            </a:pPr>
+            <a:r>
+              <a:rPr lang="en-US" sz="4400" b="1" dirty="0">
+                <a:solidFill>
+                  <a:srgbClr val="6D2E46"/>
+                </a:solidFill>
+                <a:latin typeface="Georgia" pitchFamily="34" charset="0"/>
+                <a:ea typeface="Georgia" pitchFamily="34" charset="-122"/>
+                <a:cs typeface="Georgia" pitchFamily="34" charset="-120"/>
+              </a:rPr>
+              <a:t>1</a:t>
+            </a:r>
+            <a:pPr algn="r" indent="0" marL="0">
+              <a:buNone/>
+            </a:pPr>
+            <a:r>
+              <a:rPr lang="en-US" sz="1300" dirty="0">
+                <a:solidFill>
+                  <a:srgbClr val="6D2E46"/>
+                </a:solidFill>
+                <a:latin typeface="Meiryo" pitchFamily="34" charset="0"/>
+                <a:ea typeface="Meiryo" pitchFamily="34" charset="-122"/>
+                <a:cs typeface="Meiryo" pitchFamily="34" charset="-120"/>
+              </a:rPr>
+              <a:t> 回</a:t>
+            </a:r>
+            <a:endParaRPr lang="en-US" sz="4400" dirty="0"/>
+          </a:p>
+        </p:txBody>
+      </p:sp>
+      <p:sp>
+        <p:nvSpPr>
+          <p:cNvPr id="16" name="Text 14"/>
+          <p:cNvSpPr/>
+          <p:nvPr/>
+        </p:nvSpPr>
+        <p:spPr>
+          <a:xfrm>
+            <a:off x="9539935" y="2697480"/>
+            <a:ext cx="1508760" cy="237744"/>
+          </a:xfrm>
+          <a:prstGeom prst="rect">
+            <a:avLst/>
+          </a:prstGeom>
+          <a:noFill/>
+          <a:ln/>
+        </p:spPr>
+        <p:txBody>
+          <a:bodyPr wrap="square" lIns="0" tIns="0" rIns="0" bIns="0" rtlCol="0" anchor="ctr"/>
+          <a:lstStyle/>
+          <a:p>
+            <a:pPr algn="r" indent="0" marL="0">
+              <a:buNone/>
+            </a:pPr>
+            <a:r>
+              <a:rPr lang="en-US" sz="1000" dirty="0">
+                <a:solidFill>
+                  <a:srgbClr val="7A7A7A"/>
+                </a:solidFill>
+                <a:latin typeface="Meiryo" pitchFamily="34" charset="0"/>
+                <a:ea typeface="Meiryo" pitchFamily="34" charset="-122"/>
+                <a:cs typeface="Meiryo" pitchFamily="34" charset="-120"/>
+              </a:rPr>
+              <a:t>LLM 呼び出し</a:t>
+            </a:r>
+            <a:endParaRPr lang="en-US" sz="1000" dirty="0"/>
+          </a:p>
+        </p:txBody>
+      </p:sp>
+      <p:sp>
+        <p:nvSpPr>
+          <p:cNvPr id="17" name="Text 15"/>
+          <p:cNvSpPr/>
+          <p:nvPr/>
+        </p:nvSpPr>
+        <p:spPr>
+          <a:xfrm>
+            <a:off x="6708496" y="3017520"/>
+            <a:ext cx="4321912" cy="658368"/>
+          </a:xfrm>
+          <a:prstGeom prst="rect">
+            <a:avLst/>
+          </a:prstGeom>
+          <a:noFill/>
+          <a:ln/>
+        </p:spPr>
+        <p:txBody>
+          <a:bodyPr wrap="square" lIns="0" tIns="0" rIns="0" bIns="0" rtlCol="0" anchor="t"/>
+          <a:lstStyle/>
           <a:p>
             <a:pPr indent="0" marL="0">
               <a:lnSpc>
@@ -2441,7 +2923,113 @@
               <a:buNone/>
             </a:pPr>
             <a:r>
-              <a:rPr lang="en-US" sz="1200" dirty="0">
+              <a:rPr lang="en-US" sz="1150" dirty="0">
+                <a:solidFill>
+                  <a:srgbClr val="2B2B2B"/>
+                </a:solidFill>
+                <a:latin typeface="Meiryo" pitchFamily="34" charset="0"/>
+                <a:ea typeface="Meiryo" pitchFamily="34" charset="-122"/>
+                <a:cs typeface="Meiryo" pitchFamily="34" charset="-120"/>
+              </a:rPr>
+              <a:t>意図解析・要約・通知文の生成のみ。費用は「世帯数」ではなく「会話した回数」に比例する。</a:t>
+            </a:r>
+            <a:endParaRPr lang="en-US" sz="1150" dirty="0"/>
+          </a:p>
+        </p:txBody>
+      </p:sp>
+      <p:sp>
+        <p:nvSpPr>
+          <p:cNvPr id="18" name="Shape 16"/>
+          <p:cNvSpPr/>
+          <p:nvPr/>
+        </p:nvSpPr>
+        <p:spPr>
+          <a:xfrm>
+            <a:off x="777240" y="3968496"/>
+            <a:ext cx="10637215" cy="1060704"/>
+          </a:xfrm>
+          <a:prstGeom prst="rect">
+            <a:avLst/>
+          </a:prstGeom>
+          <a:solidFill>
+            <a:srgbClr val="FFFFFF"/>
+          </a:solidFill>
+          <a:ln w="15875">
+            <a:solidFill>
+              <a:srgbClr val="E4DEDA"/>
+            </a:solidFill>
+            <a:prstDash val="solid"/>
+          </a:ln>
+        </p:spPr>
+      </p:sp>
+      <p:sp>
+        <p:nvSpPr>
+          <p:cNvPr id="19" name="Text 17"/>
+          <p:cNvSpPr/>
+          <p:nvPr/>
+        </p:nvSpPr>
+        <p:spPr>
+          <a:xfrm>
+            <a:off x="1161288" y="4059936"/>
+            <a:ext cx="9869119" cy="292608"/>
+          </a:xfrm>
+          <a:prstGeom prst="rect">
+            <a:avLst/>
+          </a:prstGeom>
+          <a:noFill/>
+          <a:ln/>
+        </p:spPr>
+        <p:txBody>
+          <a:bodyPr wrap="square" lIns="0" tIns="0" rIns="0" bIns="0" rtlCol="0" anchor="ctr"/>
+          <a:lstStyle/>
+          <a:p>
+            <a:pPr indent="0" marL="0">
+              <a:buNone/>
+            </a:pPr>
+            <a:r>
+              <a:rPr lang="en-US" sz="1350" b="1" dirty="0">
+                <a:solidFill>
+                  <a:srgbClr val="2B2B2B"/>
+                </a:solidFill>
+                <a:latin typeface="Meiryo" pitchFamily="34" charset="0"/>
+                <a:ea typeface="Meiryo" pitchFamily="34" charset="-122"/>
+                <a:cs typeface="Meiryo" pitchFamily="34" charset="-120"/>
+              </a:rPr>
+              <a:t>OrcaRouter に選ばせる。締切のある経路だけ固定する</a:t>
+            </a:r>
+            <a:endParaRPr lang="en-US" sz="1350" dirty="0"/>
+          </a:p>
+        </p:txBody>
+      </p:sp>
+      <p:sp>
+        <p:nvSpPr>
+          <p:cNvPr id="20" name="Text 18"/>
+          <p:cNvSpPr/>
+          <p:nvPr/>
+        </p:nvSpPr>
+        <p:spPr>
+          <a:xfrm>
+            <a:off x="1161288" y="4352544"/>
+            <a:ext cx="9869119" cy="603504"/>
+          </a:xfrm>
+          <a:prstGeom prst="rect">
+            <a:avLst/>
+          </a:prstGeom>
+          <a:noFill/>
+          <a:ln/>
+        </p:spPr>
+        <p:txBody>
+          <a:bodyPr wrap="square" lIns="0" tIns="0" rIns="0" bIns="0" rtlCol="0" anchor="t"/>
+          <a:lstStyle/>
+          <a:p>
+            <a:pPr indent="0" marL="0">
+              <a:lnSpc>
+                <a:spcPct val="132000"/>
+              </a:lnSpc>
+              <a:buNone/>
+            </a:pPr>
+            <a:r>
+              <a:rPr lang="en-US" sz="1000" dirty="0">
                 <a:solidFill>
                   <a:srgbClr val="7A7A7A"/>
                 </a:solidFill>
@@ -2449,21 +3037,140 @@
                 <a:ea typeface="Meiryo" pitchFamily="34" charset="-122"/>
                 <a:cs typeface="Meiryo" pitchFamily="34" charset="-120"/>
               </a:rPr>
-              <a:t>1日半、400 を返し続けて容量を焼いた。</a:t>
-            </a:r>
-            <a:endParaRPr lang="en-US" sz="1200" dirty="0"/>
-          </a:p>
-        </p:txBody>
-      </p:sp>
-      <p:sp>
-        <p:nvSpPr>
-          <p:cNvPr id="7" name="Shape 5"/>
-          <p:cNvSpPr/>
-          <p:nvPr/>
-        </p:nvSpPr>
-        <p:spPr>
-          <a:xfrm>
-            <a:off x="777240" y="2825496"/>
+              <a:t>既定は orcarouter/auto。1回のキーで複数プロバイダを使い分け、選ばれたモデル名を画面に出す。</a:t>
+            </a:r>
+            <a:endParaRPr lang="en-US" sz="1000" dirty="0"/>
+          </a:p>
+          <a:p>
+            <a:pPr indent="0" marL="0">
+              <a:lnSpc>
+                <a:spcPct val="132000"/>
+              </a:lnSpc>
+              <a:buNone/>
+            </a:pPr>
+            <a:r>
+              <a:rPr lang="en-US" sz="1000" dirty="0">
+                <a:solidFill>
+                  <a:srgbClr val="7A7A7A"/>
+                </a:solidFill>
+                <a:latin typeface="Meiryo" pitchFamily="34" charset="0"/>
+                <a:ea typeface="Meiryo" pitchFamily="34" charset="-122"/>
+                <a:cs typeface="Meiryo" pitchFamily="34" charset="-120"/>
+              </a:rPr>
+              <a:t>LINE は 8 秒で打ち切られ、auto は同じ問いで 5.6〜51 秒とばらつくため、この経路だけ gpt-4.1-mini に固定（3〜5 秒）。</a:t>
+            </a:r>
+            <a:endParaRPr lang="en-US" sz="1000" dirty="0"/>
+          </a:p>
+          <a:p>
+            <a:pPr indent="0" marL="0">
+              <a:lnSpc>
+                <a:spcPct val="132000"/>
+              </a:lnSpc>
+              <a:buNone/>
+            </a:pPr>
+            <a:r>
+              <a:rPr lang="en-US" sz="1000" dirty="0">
+                <a:solidFill>
+                  <a:srgbClr val="7A7A7A"/>
+                </a:solidFill>
+                <a:latin typeface="Meiryo" pitchFamily="34" charset="0"/>
+                <a:ea typeface="Meiryo" pitchFamily="34" charset="-122"/>
+                <a:cs typeface="Meiryo" pitchFamily="34" charset="-120"/>
+              </a:rPr>
+              <a:t>画面側も auto がタイムアウトしたら固定モデルへ退避する（本番実測 2.3 秒）＝速さと費用を両取りする。</a:t>
+            </a:r>
+            <a:endParaRPr lang="en-US" sz="1000" dirty="0"/>
+          </a:p>
+        </p:txBody>
+      </p:sp>
+      <p:sp>
+        <p:nvSpPr>
+          <p:cNvPr id="21" name="Shape 19"/>
+          <p:cNvSpPr/>
+          <p:nvPr/>
+        </p:nvSpPr>
+        <p:spPr>
+          <a:xfrm>
+            <a:off x="777240" y="5230368"/>
+            <a:ext cx="10637215" cy="658368"/>
+          </a:xfrm>
+          <a:prstGeom prst="rect">
+            <a:avLst/>
+          </a:prstGeom>
+          <a:solidFill>
+            <a:srgbClr val="F7F4F2"/>
+          </a:solidFill>
+          <a:ln/>
+        </p:spPr>
+      </p:sp>
+      <p:sp>
+        <p:nvSpPr>
+          <p:cNvPr id="22" name="Shape 20"/>
+          <p:cNvSpPr/>
+          <p:nvPr/>
+        </p:nvSpPr>
+        <p:spPr>
+          <a:xfrm>
+            <a:off x="777240" y="5230368"/>
+            <a:ext cx="50292" cy="658368"/>
+          </a:xfrm>
+          <a:prstGeom prst="rect">
+            <a:avLst/>
+          </a:prstGeom>
+          <a:solidFill>
+            <a:srgbClr val="6D2E46"/>
+          </a:solidFill>
+          <a:ln/>
+        </p:spPr>
+      </p:sp>
+      <p:sp>
+        <p:nvSpPr>
+          <p:cNvPr id="23" name="Text 21"/>
+          <p:cNvSpPr/>
+          <p:nvPr/>
+        </p:nvSpPr>
+        <p:spPr>
+          <a:xfrm>
+            <a:off x="1051560" y="5230368"/>
+            <a:ext cx="10134295" cy="658368"/>
+          </a:xfrm>
+          <a:prstGeom prst="rect">
+            <a:avLst/>
+          </a:prstGeom>
+          <a:noFill/>
+          <a:ln/>
+        </p:spPr>
+        <p:txBody>
+          <a:bodyPr wrap="square" lIns="0" tIns="0" rIns="0" bIns="0" rtlCol="0" anchor="ctr"/>
+          <a:lstStyle/>
+          <a:p>
+            <a:pPr indent="0" marL="0">
+              <a:buNone/>
+            </a:pPr>
+            <a:r>
+              <a:rPr lang="en-US" sz="1450" b="1" dirty="0">
+                <a:solidFill>
+                  <a:srgbClr val="6D2E46"/>
+                </a:solidFill>
+                <a:latin typeface="Meiryo" pitchFamily="34" charset="0"/>
+                <a:ea typeface="Meiryo" pitchFamily="34" charset="-122"/>
+                <a:cs typeface="Meiryo" pitchFamily="34" charset="-120"/>
+              </a:rPr>
+              <a:t>API キー0本でも全機能が動く — 審査でも運用でも、課金せずに試せる状態を既定にした</a:t>
+            </a:r>
+            <a:endParaRPr lang="en-US" sz="1450" dirty="0"/>
+          </a:p>
+        </p:txBody>
+      </p:sp>
+      <p:sp>
+        <p:nvSpPr>
+          <p:cNvPr id="24" name="Shape 22"/>
+          <p:cNvSpPr/>
+          <p:nvPr/>
+        </p:nvSpPr>
+        <p:spPr>
+          <a:xfrm>
+            <a:off x="777240" y="6236208"/>
             <a:ext cx="10637215" cy="0"/>
           </a:xfrm>
           <a:prstGeom prst="line">
@@ -2480,374 +3187,7 @@
       </p:sp>
       <p:sp>
         <p:nvSpPr>
-          <p:cNvPr id="8" name="Shape 6"/>
-          <p:cNvSpPr/>
-          <p:nvPr/>
-        </p:nvSpPr>
-        <p:spPr>
-          <a:xfrm>
-            <a:off x="777240" y="2898648"/>
-            <a:ext cx="45720" cy="868680"/>
-          </a:xfrm>
-          <a:prstGeom prst="rect">
-            <a:avLst/>
-          </a:prstGeom>
-          <a:solidFill>
-            <a:srgbClr val="9E2A2B"/>
-          </a:solidFill>
-          <a:ln/>
-        </p:spPr>
-      </p:sp>
-      <p:sp>
-        <p:nvSpPr>
-          <p:cNvPr id="9" name="Text 7"/>
-          <p:cNvSpPr/>
-          <p:nvPr/>
-        </p:nvSpPr>
-        <p:spPr>
-          <a:xfrm>
-            <a:off x="1069848" y="2898648"/>
-            <a:ext cx="10344607" cy="329184"/>
-          </a:xfrm>
-          <a:prstGeom prst="rect">
-            <a:avLst/>
-          </a:prstGeom>
-          <a:noFill/>
-          <a:ln/>
-        </p:spPr>
-        <p:txBody>
-          <a:bodyPr wrap="square" lIns="0" tIns="0" rIns="0" bIns="0" rtlCol="0" anchor="ctr"/>
-          <a:lstStyle/>
-          <a:p>
-            <a:pPr indent="0" marL="0">
-              <a:buNone/>
-            </a:pPr>
-            <a:r>
-              <a:rPr lang="en-US" sz="1450" b="1" dirty="0">
-                <a:solidFill>
-                  <a:srgbClr val="2B2B2B"/>
-                </a:solidFill>
-                <a:latin typeface="Meiryo" pitchFamily="34" charset="0"/>
-                <a:ea typeface="Meiryo" pitchFamily="34" charset="-122"/>
-                <a:cs typeface="Meiryo" pitchFamily="34" charset="-120"/>
-              </a:rPr>
-              <a:t>宛先が Paused のまま、送信は成功していた</a:t>
-            </a:r>
-            <a:endParaRPr lang="en-US" sz="1450" dirty="0"/>
-          </a:p>
-        </p:txBody>
-      </p:sp>
-      <p:sp>
-        <p:nvSpPr>
-          <p:cNvPr id="10" name="Text 8"/>
-          <p:cNvSpPr/>
-          <p:nvPr/>
-        </p:nvSpPr>
-        <p:spPr>
-          <a:xfrm>
-            <a:off x="1069848" y="3227832"/>
-            <a:ext cx="10344607" cy="548640"/>
-          </a:xfrm>
-          <a:prstGeom prst="rect">
-            <a:avLst/>
-          </a:prstGeom>
-          <a:noFill/>
-          <a:ln/>
-        </p:spPr>
-        <p:txBody>
-          <a:bodyPr wrap="square" lIns="0" tIns="0" rIns="0" bIns="0" rtlCol="0" anchor="t"/>
-          <a:lstStyle/>
-          <a:p>
-            <a:pPr indent="0" marL="0">
-              <a:lnSpc>
-                <a:spcPct val="140000"/>
-              </a:lnSpc>
-              <a:buNone/>
-            </a:pPr>
-            <a:r>
-              <a:rPr lang="en-US" sz="1200" dirty="0">
-                <a:solidFill>
-                  <a:srgbClr val="7A7A7A"/>
-                </a:solidFill>
-                <a:latin typeface="Meiryo" pitchFamily="34" charset="0"/>
-                <a:ea typeface="Meiryo" pitchFamily="34" charset="-122"/>
-                <a:cs typeface="Meiryo" pitchFamily="34" charset="-120"/>
-              </a:rPr>
-              <a:t>Event Hub は正常に受理し、アプリは「送信済み」を記録。</a:t>
-            </a:r>
-            <a:endParaRPr lang="en-US" sz="1200" dirty="0"/>
-          </a:p>
-          <a:p>
-            <a:pPr indent="0" marL="0">
-              <a:lnSpc>
-                <a:spcPct val="140000"/>
-              </a:lnSpc>
-              <a:buNone/>
-            </a:pPr>
-            <a:r>
-              <a:rPr lang="en-US" sz="1200" dirty="0">
-                <a:solidFill>
-                  <a:srgbClr val="7A7A7A"/>
-                </a:solidFill>
-                <a:latin typeface="Meiryo" pitchFamily="34" charset="0"/>
-                <a:ea typeface="Meiryo" pitchFamily="34" charset="-122"/>
-                <a:cs typeface="Meiryo" pitchFamily="34" charset="-120"/>
-              </a:rPr>
-              <a:t>3日分のデータが静かに消えた。</a:t>
-            </a:r>
-            <a:endParaRPr lang="en-US" sz="1200" dirty="0"/>
-          </a:p>
-        </p:txBody>
-      </p:sp>
-      <p:sp>
-        <p:nvSpPr>
-          <p:cNvPr id="11" name="Shape 9"/>
-          <p:cNvSpPr/>
-          <p:nvPr/>
-        </p:nvSpPr>
-        <p:spPr>
-          <a:xfrm>
-            <a:off x="777240" y="3849624"/>
-            <a:ext cx="10637215" cy="0"/>
-          </a:xfrm>
-          <a:prstGeom prst="line">
-            <a:avLst/>
-          </a:prstGeom>
-          <a:noFill/>
-          <a:ln w="9525">
-            <a:solidFill>
-              <a:srgbClr val="E4DEDA"/>
-            </a:solidFill>
-            <a:prstDash val="solid"/>
-          </a:ln>
-        </p:spPr>
-      </p:sp>
-      <p:sp>
-        <p:nvSpPr>
-          <p:cNvPr id="12" name="Shape 10"/>
-          <p:cNvSpPr/>
-          <p:nvPr/>
-        </p:nvSpPr>
-        <p:spPr>
-          <a:xfrm>
-            <a:off x="777240" y="3922776"/>
-            <a:ext cx="45720" cy="868680"/>
-          </a:xfrm>
-          <a:prstGeom prst="rect">
-            <a:avLst/>
-          </a:prstGeom>
-          <a:solidFill>
-            <a:srgbClr val="9E2A2B"/>
-          </a:solidFill>
-          <a:ln/>
-        </p:spPr>
-      </p:sp>
-      <p:sp>
-        <p:nvSpPr>
-          <p:cNvPr id="13" name="Text 11"/>
-          <p:cNvSpPr/>
-          <p:nvPr/>
-        </p:nvSpPr>
-        <p:spPr>
-          <a:xfrm>
-            <a:off x="1069848" y="3922776"/>
-            <a:ext cx="10344607" cy="329184"/>
-          </a:xfrm>
-          <a:prstGeom prst="rect">
-            <a:avLst/>
-          </a:prstGeom>
-          <a:noFill/>
-          <a:ln/>
-        </p:spPr>
-        <p:txBody>
-          <a:bodyPr wrap="square" lIns="0" tIns="0" rIns="0" bIns="0" rtlCol="0" anchor="ctr"/>
-          <a:lstStyle/>
-          <a:p>
-            <a:pPr indent="0" marL="0">
-              <a:buNone/>
-            </a:pPr>
-            <a:r>
-              <a:rPr lang="en-US" sz="1450" b="1" dirty="0">
-                <a:solidFill>
-                  <a:srgbClr val="2B2B2B"/>
-                </a:solidFill>
-                <a:latin typeface="Meiryo" pitchFamily="34" charset="0"/>
-                <a:ea typeface="Meiryo" pitchFamily="34" charset="-122"/>
-                <a:cs typeface="Meiryo" pitchFamily="34" charset="-120"/>
-              </a:rPr>
-              <a:t>3Dマスコットが一度も起動していなかった</a:t>
-            </a:r>
-            <a:endParaRPr lang="en-US" sz="1450" dirty="0"/>
-          </a:p>
-        </p:txBody>
-      </p:sp>
-      <p:sp>
-        <p:nvSpPr>
-          <p:cNvPr id="14" name="Text 12"/>
-          <p:cNvSpPr/>
-          <p:nvPr/>
-        </p:nvSpPr>
-        <p:spPr>
-          <a:xfrm>
-            <a:off x="1069848" y="4251960"/>
-            <a:ext cx="10344607" cy="548640"/>
-          </a:xfrm>
-          <a:prstGeom prst="rect">
-            <a:avLst/>
-          </a:prstGeom>
-          <a:noFill/>
-          <a:ln/>
-        </p:spPr>
-        <p:txBody>
-          <a:bodyPr wrap="square" lIns="0" tIns="0" rIns="0" bIns="0" rtlCol="0" anchor="t"/>
-          <a:lstStyle/>
-          <a:p>
-            <a:pPr indent="0" marL="0">
-              <a:lnSpc>
-                <a:spcPct val="140000"/>
-              </a:lnSpc>
-              <a:buNone/>
-            </a:pPr>
-            <a:r>
-              <a:rPr lang="en-US" sz="1200" dirty="0">
-                <a:solidFill>
-                  <a:srgbClr val="7A7A7A"/>
-                </a:solidFill>
-                <a:latin typeface="Meiryo" pitchFamily="34" charset="0"/>
-                <a:ea typeface="Meiryo" pitchFamily="34" charset="-122"/>
-                <a:cs typeface="Meiryo" pitchFamily="34" charset="-120"/>
-              </a:rPr>
-              <a:t>「動いている」と報告したが、実際は初期化されていなかった。</a:t>
-            </a:r>
-            <a:endParaRPr lang="en-US" sz="1200" dirty="0"/>
-          </a:p>
-          <a:p>
-            <a:pPr indent="0" marL="0">
-              <a:lnSpc>
-                <a:spcPct val="140000"/>
-              </a:lnSpc>
-              <a:buNone/>
-            </a:pPr>
-            <a:r>
-              <a:rPr lang="en-US" sz="1200" dirty="0">
-                <a:solidFill>
-                  <a:srgbClr val="7A7A7A"/>
-                </a:solidFill>
-                <a:latin typeface="Meiryo" pitchFamily="34" charset="0"/>
-                <a:ea typeface="Meiryo" pitchFamily="34" charset="-122"/>
-                <a:cs typeface="Meiryo" pitchFamily="34" charset="-120"/>
-              </a:rPr>
-              <a:t>計測方法そのものが間違っていた。</a:t>
-            </a:r>
-            <a:endParaRPr lang="en-US" sz="1200" dirty="0"/>
-          </a:p>
-        </p:txBody>
-      </p:sp>
-      <p:sp>
-        <p:nvSpPr>
-          <p:cNvPr id="15" name="Shape 13"/>
-          <p:cNvSpPr/>
-          <p:nvPr/>
-        </p:nvSpPr>
-        <p:spPr>
-          <a:xfrm>
-            <a:off x="777240" y="5230368"/>
-            <a:ext cx="10637215" cy="658368"/>
-          </a:xfrm>
-          <a:prstGeom prst="rect">
-            <a:avLst/>
-          </a:prstGeom>
-          <a:solidFill>
-            <a:srgbClr val="F7F4F2"/>
-          </a:solidFill>
-          <a:ln/>
-        </p:spPr>
-      </p:sp>
-      <p:sp>
-        <p:nvSpPr>
-          <p:cNvPr id="16" name="Shape 14"/>
-          <p:cNvSpPr/>
-          <p:nvPr/>
-        </p:nvSpPr>
-        <p:spPr>
-          <a:xfrm>
-            <a:off x="777240" y="5230368"/>
-            <a:ext cx="50292" cy="658368"/>
-          </a:xfrm>
-          <a:prstGeom prst="rect">
-            <a:avLst/>
-          </a:prstGeom>
-          <a:solidFill>
-            <a:srgbClr val="6D2E46"/>
-          </a:solidFill>
-          <a:ln/>
-        </p:spPr>
-      </p:sp>
-      <p:sp>
-        <p:nvSpPr>
-          <p:cNvPr id="17" name="Text 15"/>
-          <p:cNvSpPr/>
-          <p:nvPr/>
-        </p:nvSpPr>
-        <p:spPr>
-          <a:xfrm>
-            <a:off x="1051560" y="5230368"/>
-            <a:ext cx="10134295" cy="658368"/>
-          </a:xfrm>
-          <a:prstGeom prst="rect">
-            <a:avLst/>
-          </a:prstGeom>
-          <a:noFill/>
-          <a:ln/>
-        </p:spPr>
-        <p:txBody>
-          <a:bodyPr wrap="square" lIns="0" tIns="0" rIns="0" bIns="0" rtlCol="0" anchor="ctr"/>
-          <a:lstStyle/>
-          <a:p>
-            <a:pPr indent="0" marL="0">
-              <a:buNone/>
-            </a:pPr>
-            <a:r>
-              <a:rPr lang="en-US" sz="1450" b="1" dirty="0">
-                <a:solidFill>
-                  <a:srgbClr val="6D2E46"/>
-                </a:solidFill>
-                <a:latin typeface="Meiryo" pitchFamily="34" charset="0"/>
-                <a:ea typeface="Meiryo" pitchFamily="34" charset="-122"/>
-                <a:cs typeface="Meiryo" pitchFamily="34" charset="-120"/>
-              </a:rPr>
-              <a:t>「送信成功」は「到達」ではない。届いた側を見ないと気づけない</a:t>
-            </a:r>
-            <a:endParaRPr lang="en-US" sz="1450" dirty="0"/>
-          </a:p>
-        </p:txBody>
-      </p:sp>
-      <p:sp>
-        <p:nvSpPr>
-          <p:cNvPr id="18" name="Shape 16"/>
-          <p:cNvSpPr/>
-          <p:nvPr/>
-        </p:nvSpPr>
-        <p:spPr>
-          <a:xfrm>
-            <a:off x="777240" y="6236208"/>
-            <a:ext cx="10637215" cy="0"/>
-          </a:xfrm>
-          <a:prstGeom prst="line">
-            <a:avLst/>
-          </a:prstGeom>
-          <a:noFill/>
-          <a:ln w="9525">
-            <a:solidFill>
-              <a:srgbClr val="E4DEDA"/>
-            </a:solidFill>
-            <a:prstDash val="solid"/>
-          </a:ln>
-        </p:spPr>
-      </p:sp>
-      <p:sp>
-        <p:nvSpPr>
-          <p:cNvPr id="19" name="Text 17"/>
+          <p:cNvPr id="25" name="Text 23"/>
           <p:cNvSpPr/>
           <p:nvPr/>
         </p:nvSpPr>
@@ -2886,7 +3226,7 @@
       </p:sp>
       <p:sp>
         <p:nvSpPr>
-          <p:cNvPr id="20" name="Text 18"/>
+          <p:cNvPr id="26" name="Text 24"/>
           <p:cNvSpPr/>
           <p:nvPr/>
         </p:nvSpPr>
@@ -2988,7 +3328,7 @@
                 <a:ea typeface="Georgia" pitchFamily="34" charset="-122"/>
                 <a:cs typeface="Georgia" pitchFamily="34" charset="-120"/>
               </a:rPr>
-              <a:t>見る人と、使う人で画面を分ける</a:t>
+              <a:t>沈黙して壊れた</a:t>
             </a:r>
             <a:endParaRPr lang="en-US" sz="3100" dirty="0"/>
           </a:p>
@@ -3027,68 +3367,81 @@
                 <a:ea typeface="Meiryo" pitchFamily="34" charset="-122"/>
                 <a:cs typeface="Meiryo" pitchFamily="34" charset="-120"/>
               </a:rPr>
-              <a:t>必要な情報がまったく違うため</a:t>
+              <a:t>3件とも、例外は一度も投げていない</a:t>
             </a:r>
             <a:endParaRPr lang="en-US" sz="1350" dirty="0"/>
           </a:p>
         </p:txBody>
       </p:sp>
-      <p:pic>
-        <p:nvPicPr>
-          <p:cNvPr id="4" name="Image 0" descr="C:\Users\msoga\OneDrive - Smart Designer\Projects\見守り隊\docs\images\06-one-touch.png">    </p:cNvPr>
-          <p:cNvPicPr>
-            <a:picLocks noChangeAspect="1"/>
-          </p:cNvPicPr>
-          <p:nvPr/>
-        </p:nvPicPr>
-        <p:blipFill>
-          <a:blip r:embed="rId1"/>
-          <a:stretch>
-            <a:fillRect/>
-          </a:stretch>
-        </p:blipFill>
-        <p:spPr>
-          <a:xfrm>
-            <a:off x="777240" y="1810512"/>
-            <a:ext cx="4389120" cy="2926080"/>
-          </a:xfrm>
-          <a:prstGeom prst="rect">
-            <a:avLst/>
-          </a:prstGeom>
-        </p:spPr>
-      </p:pic>
-      <p:sp>
-        <p:nvSpPr>
-          <p:cNvPr id="5" name="Shape 2"/>
-          <p:cNvSpPr/>
-          <p:nvPr/>
-        </p:nvSpPr>
-        <p:spPr>
-          <a:xfrm>
-            <a:off x="777240" y="1810512"/>
-            <a:ext cx="4389120" cy="2926080"/>
-          </a:xfrm>
-          <a:prstGeom prst="rect">
-            <a:avLst/>
-          </a:prstGeom>
-          <a:ln w="12700">
-            <a:solidFill>
-              <a:srgbClr val="E4DEDA"/>
-            </a:solidFill>
-            <a:prstDash val="solid"/>
-          </a:ln>
-        </p:spPr>
-      </p:sp>
-      <p:sp>
-        <p:nvSpPr>
-          <p:cNvPr id="6" name="Text 3"/>
-          <p:cNvSpPr/>
-          <p:nvPr/>
-        </p:nvSpPr>
-        <p:spPr>
-          <a:xfrm>
-            <a:off x="777240" y="4828032"/>
-            <a:ext cx="4389120" cy="256032"/>
+      <p:sp>
+        <p:nvSpPr>
+          <p:cNvPr id="4" name="Shape 2"/>
+          <p:cNvSpPr/>
+          <p:nvPr/>
+        </p:nvSpPr>
+        <p:spPr>
+          <a:xfrm>
+            <a:off x="777240" y="1874520"/>
+            <a:ext cx="45720" cy="868680"/>
+          </a:xfrm>
+          <a:prstGeom prst="rect">
+            <a:avLst/>
+          </a:prstGeom>
+          <a:solidFill>
+            <a:srgbClr val="9E2A2B"/>
+          </a:solidFill>
+          <a:ln/>
+        </p:spPr>
+      </p:sp>
+      <p:sp>
+        <p:nvSpPr>
+          <p:cNvPr id="5" name="Text 3"/>
+          <p:cNvSpPr/>
+          <p:nvPr/>
+        </p:nvSpPr>
+        <p:spPr>
+          <a:xfrm>
+            <a:off x="1069848" y="1874520"/>
+            <a:ext cx="10344607" cy="329184"/>
+          </a:xfrm>
+          <a:prstGeom prst="rect">
+            <a:avLst/>
+          </a:prstGeom>
+          <a:noFill/>
+          <a:ln/>
+        </p:spPr>
+        <p:txBody>
+          <a:bodyPr wrap="square" lIns="0" tIns="0" rIns="0" bIns="0" rtlCol="0" anchor="ctr"/>
+          <a:lstStyle/>
+          <a:p>
+            <a:pPr indent="0" marL="0">
+              <a:buNone/>
+            </a:pPr>
+            <a:r>
+              <a:rPr lang="en-US" sz="1450" b="1" dirty="0">
+                <a:solidFill>
+                  <a:srgbClr val="2B2B2B"/>
+                </a:solidFill>
+                <a:latin typeface="Meiryo" pitchFamily="34" charset="0"/>
+                <a:ea typeface="Meiryo" pitchFamily="34" charset="-122"/>
+                <a:cs typeface="Meiryo" pitchFamily="34" charset="-120"/>
+              </a:rPr>
+              <a:t>存在しないテーブルに投げ続けた</a:t>
+            </a:r>
+            <a:endParaRPr lang="en-US" sz="1450" dirty="0"/>
+          </a:p>
+        </p:txBody>
+      </p:sp>
+      <p:sp>
+        <p:nvSpPr>
+          <p:cNvPr id="6" name="Text 4"/>
+          <p:cNvSpPr/>
+          <p:nvPr/>
+        </p:nvSpPr>
+        <p:spPr>
+          <a:xfrm>
+            <a:off x="1069848" y="2203704"/>
+            <a:ext cx="10344607" cy="548640"/>
           </a:xfrm>
           <a:prstGeom prst="rect">
             <a:avLst/>
@@ -3100,11 +3453,14 @@
           <a:bodyPr wrap="square" lIns="0" tIns="0" rIns="0" bIns="0" rtlCol="0" anchor="t"/>
           <a:lstStyle/>
           <a:p>
-            <a:pPr algn="ctr" indent="0" marL="0">
-              <a:buNone/>
-            </a:pPr>
-            <a:r>
-              <a:rPr lang="en-US" sz="1000" dirty="0">
+            <a:pPr indent="0" marL="0">
+              <a:lnSpc>
+                <a:spcPct val="140000"/>
+              </a:lnSpc>
+              <a:buNone/>
+            </a:pPr>
+            <a:r>
+              <a:rPr lang="en-US" sz="1200" dirty="0">
                 <a:solidFill>
                   <a:srgbClr val="7A7A7A"/>
                 </a:solidFill>
@@ -3112,342 +3468,41 @@
                 <a:ea typeface="Meiryo" pitchFamily="34" charset="-122"/>
                 <a:cs typeface="Meiryo" pitchFamily="34" charset="-120"/>
               </a:rPr>
-              <a:t>利用者本人が使う /one-touch 画面</a:t>
-            </a:r>
-            <a:endParaRPr lang="en-US" sz="1000" dirty="0"/>
-          </a:p>
-        </p:txBody>
-      </p:sp>
-      <p:sp>
-        <p:nvSpPr>
-          <p:cNvPr id="7" name="Text 4"/>
-          <p:cNvSpPr/>
-          <p:nvPr/>
-        </p:nvSpPr>
-        <p:spPr>
-          <a:xfrm>
-            <a:off x="5760720" y="1810512"/>
-            <a:ext cx="5653735" cy="365760"/>
-          </a:xfrm>
-          <a:prstGeom prst="rect">
-            <a:avLst/>
-          </a:prstGeom>
-          <a:noFill/>
-          <a:ln/>
-        </p:spPr>
-        <p:txBody>
-          <a:bodyPr wrap="square" lIns="0" tIns="0" rIns="0" bIns="0" rtlCol="0" anchor="ctr"/>
-          <a:lstStyle/>
-          <a:p>
-            <a:pPr indent="0" marL="0">
-              <a:buNone/>
-            </a:pPr>
-            <a:r>
-              <a:rPr lang="en-US" sz="1500" b="1" dirty="0">
-                <a:solidFill>
-                  <a:srgbClr val="6D2E46"/>
-                </a:solidFill>
-                <a:latin typeface="Meiryo" pitchFamily="34" charset="0"/>
-                <a:ea typeface="Meiryo" pitchFamily="34" charset="-122"/>
-                <a:cs typeface="Meiryo" pitchFamily="34" charset="-120"/>
-              </a:rPr>
-              <a:t>高齢の利用者本人が使う画面</a:t>
-            </a:r>
-            <a:endParaRPr lang="en-US" sz="1500" dirty="0"/>
-          </a:p>
-        </p:txBody>
-      </p:sp>
-      <p:sp>
-        <p:nvSpPr>
-          <p:cNvPr id="8" name="Shape 5"/>
-          <p:cNvSpPr/>
-          <p:nvPr/>
-        </p:nvSpPr>
-        <p:spPr>
-          <a:xfrm>
-            <a:off x="5760720" y="2212848"/>
-            <a:ext cx="1005840" cy="25603"/>
-          </a:xfrm>
-          <a:prstGeom prst="rect">
-            <a:avLst/>
-          </a:prstGeom>
-          <a:solidFill>
-            <a:srgbClr val="A26769"/>
-          </a:solidFill>
-          <a:ln/>
-        </p:spPr>
-      </p:sp>
-      <p:sp>
-        <p:nvSpPr>
-          <p:cNvPr id="9" name="Text 6"/>
-          <p:cNvSpPr/>
-          <p:nvPr/>
-        </p:nvSpPr>
-        <p:spPr>
-          <a:xfrm>
-            <a:off x="5760720" y="2359152"/>
-            <a:ext cx="5653735" cy="777240"/>
-          </a:xfrm>
-          <a:prstGeom prst="rect">
-            <a:avLst/>
-          </a:prstGeom>
-          <a:noFill/>
-          <a:ln/>
-        </p:spPr>
-        <p:txBody>
-          <a:bodyPr wrap="square" lIns="0" tIns="0" rIns="0" bIns="0" rtlCol="0" anchor="t"/>
-          <a:lstStyle/>
+              <a:t>アプリ側だけ実装し、Eventhouse にテーブルを作っていなかった。</a:t>
+            </a:r>
+            <a:endParaRPr lang="en-US" sz="1200" dirty="0"/>
+          </a:p>
           <a:p>
             <a:pPr indent="0" marL="0">
               <a:lnSpc>
-                <a:spcPct val="150000"/>
+                <a:spcPct val="140000"/>
               </a:lnSpc>
               <a:buNone/>
             </a:pPr>
             <a:r>
-              <a:rPr lang="en-US" sz="1250" dirty="0">
-                <a:solidFill>
-                  <a:srgbClr val="2B2B2B"/>
-                </a:solidFill>
-                <a:latin typeface="Meiryo" pitchFamily="34" charset="0"/>
-                <a:ea typeface="Meiryo" pitchFamily="34" charset="-122"/>
-                <a:cs typeface="Meiryo" pitchFamily="34" charset="-120"/>
-              </a:rPr>
-              <a:t>文字とボタンを大きくした専用画面（/one-touch）を用意。</a:t>
-            </a:r>
-            <a:endParaRPr lang="en-US" sz="1250" dirty="0"/>
-          </a:p>
-          <a:p>
-            <a:pPr indent="0" marL="0">
-              <a:lnSpc>
-                <a:spcPct val="150000"/>
-              </a:lnSpc>
-              <a:buNone/>
-            </a:pPr>
-            <a:r>
-              <a:rPr lang="en-US" sz="1250" dirty="0">
-                <a:solidFill>
-                  <a:srgbClr val="2B2B2B"/>
-                </a:solidFill>
-                <a:latin typeface="Meiryo" pitchFamily="34" charset="0"/>
-                <a:ea typeface="Meiryo" pitchFamily="34" charset="-122"/>
-                <a:cs typeface="Meiryo" pitchFamily="34" charset="-120"/>
-              </a:rPr>
-              <a:t>見守る側のダッシュボードとは分けている。</a:t>
-            </a:r>
-            <a:endParaRPr lang="en-US" sz="1250" dirty="0"/>
-          </a:p>
-        </p:txBody>
-      </p:sp>
-      <p:sp>
-        <p:nvSpPr>
-          <p:cNvPr id="10" name="Text 7"/>
-          <p:cNvSpPr/>
-          <p:nvPr/>
-        </p:nvSpPr>
-        <p:spPr>
-          <a:xfrm>
-            <a:off x="5760720" y="3291840"/>
-            <a:ext cx="5653735" cy="365760"/>
-          </a:xfrm>
-          <a:prstGeom prst="rect">
-            <a:avLst/>
-          </a:prstGeom>
-          <a:noFill/>
-          <a:ln/>
-        </p:spPr>
-        <p:txBody>
-          <a:bodyPr wrap="square" lIns="0" tIns="0" rIns="0" bIns="0" rtlCol="0" anchor="ctr"/>
-          <a:lstStyle/>
-          <a:p>
-            <a:pPr indent="0" marL="0">
-              <a:buNone/>
-            </a:pPr>
-            <a:r>
-              <a:rPr lang="en-US" sz="1500" b="1" dirty="0">
-                <a:solidFill>
-                  <a:srgbClr val="6D2E46"/>
-                </a:solidFill>
-                <a:latin typeface="Meiryo" pitchFamily="34" charset="0"/>
-                <a:ea typeface="Meiryo" pitchFamily="34" charset="-122"/>
-                <a:cs typeface="Meiryo" pitchFamily="34" charset="-120"/>
-              </a:rPr>
-              <a:t>家族は LINE で聞くだけ</a:t>
-            </a:r>
-            <a:endParaRPr lang="en-US" sz="1500" dirty="0"/>
-          </a:p>
-        </p:txBody>
-      </p:sp>
-      <p:sp>
-        <p:nvSpPr>
-          <p:cNvPr id="11" name="Shape 8"/>
-          <p:cNvSpPr/>
-          <p:nvPr/>
-        </p:nvSpPr>
-        <p:spPr>
-          <a:xfrm>
-            <a:off x="5760720" y="3694176"/>
-            <a:ext cx="1005840" cy="25603"/>
-          </a:xfrm>
-          <a:prstGeom prst="rect">
-            <a:avLst/>
-          </a:prstGeom>
-          <a:solidFill>
-            <a:srgbClr val="A26769"/>
-          </a:solidFill>
-          <a:ln/>
-        </p:spPr>
-      </p:sp>
-      <p:sp>
-        <p:nvSpPr>
-          <p:cNvPr id="12" name="Text 9"/>
-          <p:cNvSpPr/>
-          <p:nvPr/>
-        </p:nvSpPr>
-        <p:spPr>
-          <a:xfrm>
-            <a:off x="5760720" y="3840480"/>
-            <a:ext cx="5653735" cy="777240"/>
-          </a:xfrm>
-          <a:prstGeom prst="rect">
-            <a:avLst/>
-          </a:prstGeom>
-          <a:noFill/>
-          <a:ln/>
-        </p:spPr>
-        <p:txBody>
-          <a:bodyPr wrap="square" lIns="0" tIns="0" rIns="0" bIns="0" rtlCol="0" anchor="t"/>
-          <a:lstStyle/>
-          <a:p>
-            <a:pPr indent="0" marL="0">
-              <a:lnSpc>
-                <a:spcPct val="150000"/>
-              </a:lnSpc>
-              <a:buNone/>
-            </a:pPr>
-            <a:r>
-              <a:rPr lang="en-US" sz="1250" dirty="0">
-                <a:solidFill>
-                  <a:srgbClr val="2B2B2B"/>
-                </a:solidFill>
-                <a:latin typeface="Meiryo" pitchFamily="34" charset="0"/>
-                <a:ea typeface="Meiryo" pitchFamily="34" charset="-122"/>
-                <a:cs typeface="Meiryo" pitchFamily="34" charset="-120"/>
-              </a:rPr>
-              <a:t>専用アプリのインストールは不要。</a:t>
-            </a:r>
-            <a:endParaRPr lang="en-US" sz="1250" dirty="0"/>
-          </a:p>
-          <a:p>
-            <a:pPr indent="0" marL="0">
-              <a:lnSpc>
-                <a:spcPct val="150000"/>
-              </a:lnSpc>
-              <a:buNone/>
-            </a:pPr>
-            <a:r>
-              <a:rPr lang="en-US" sz="1250" dirty="0">
-                <a:solidFill>
-                  <a:srgbClr val="2B2B2B"/>
-                </a:solidFill>
-                <a:latin typeface="Meiryo" pitchFamily="34" charset="0"/>
-                <a:ea typeface="Meiryo" pitchFamily="34" charset="-122"/>
-                <a:cs typeface="Meiryo" pitchFamily="34" charset="-120"/>
-              </a:rPr>
-              <a:t>「今日のお母さんどう？」と聞けば、蓄積された生活データから答える。</a:t>
-            </a:r>
-            <a:endParaRPr lang="en-US" sz="1250" dirty="0"/>
-          </a:p>
-        </p:txBody>
-      </p:sp>
-      <p:sp>
-        <p:nvSpPr>
-          <p:cNvPr id="13" name="Shape 10"/>
-          <p:cNvSpPr/>
-          <p:nvPr/>
-        </p:nvSpPr>
-        <p:spPr>
-          <a:xfrm>
-            <a:off x="777240" y="5230368"/>
-            <a:ext cx="10637215" cy="658368"/>
-          </a:xfrm>
-          <a:prstGeom prst="rect">
-            <a:avLst/>
-          </a:prstGeom>
-          <a:solidFill>
-            <a:srgbClr val="F7F4F2"/>
-          </a:solidFill>
-          <a:ln/>
-        </p:spPr>
-      </p:sp>
-      <p:sp>
-        <p:nvSpPr>
-          <p:cNvPr id="14" name="Shape 11"/>
-          <p:cNvSpPr/>
-          <p:nvPr/>
-        </p:nvSpPr>
-        <p:spPr>
-          <a:xfrm>
-            <a:off x="777240" y="5230368"/>
-            <a:ext cx="50292" cy="658368"/>
-          </a:xfrm>
-          <a:prstGeom prst="rect">
-            <a:avLst/>
-          </a:prstGeom>
-          <a:solidFill>
-            <a:srgbClr val="6D2E46"/>
-          </a:solidFill>
-          <a:ln/>
-        </p:spPr>
-      </p:sp>
-      <p:sp>
-        <p:nvSpPr>
-          <p:cNvPr id="15" name="Text 12"/>
-          <p:cNvSpPr/>
-          <p:nvPr/>
-        </p:nvSpPr>
-        <p:spPr>
-          <a:xfrm>
-            <a:off x="1051560" y="5230368"/>
-            <a:ext cx="10134295" cy="658368"/>
-          </a:xfrm>
-          <a:prstGeom prst="rect">
-            <a:avLst/>
-          </a:prstGeom>
-          <a:noFill/>
-          <a:ln/>
-        </p:spPr>
-        <p:txBody>
-          <a:bodyPr wrap="square" lIns="0" tIns="0" rIns="0" bIns="0" rtlCol="0" anchor="ctr"/>
-          <a:lstStyle/>
-          <a:p>
-            <a:pPr indent="0" marL="0">
-              <a:buNone/>
-            </a:pPr>
-            <a:r>
-              <a:rPr lang="en-US" sz="1450" b="1" dirty="0">
-                <a:solidFill>
-                  <a:srgbClr val="6D2E46"/>
-                </a:solidFill>
-                <a:latin typeface="Meiryo" pitchFamily="34" charset="0"/>
-                <a:ea typeface="Meiryo" pitchFamily="34" charset="-122"/>
-                <a:cs typeface="Meiryo" pitchFamily="34" charset="-120"/>
-              </a:rPr>
-              <a:t>見る側と使う側に、同じ画面を出さない</a:t>
-            </a:r>
-            <a:endParaRPr lang="en-US" sz="1450" dirty="0"/>
-          </a:p>
-        </p:txBody>
-      </p:sp>
-      <p:sp>
-        <p:nvSpPr>
-          <p:cNvPr id="16" name="Shape 13"/>
-          <p:cNvSpPr/>
-          <p:nvPr/>
-        </p:nvSpPr>
-        <p:spPr>
-          <a:xfrm>
-            <a:off x="777240" y="6236208"/>
+              <a:rPr lang="en-US" sz="1200" dirty="0">
+                <a:solidFill>
+                  <a:srgbClr val="7A7A7A"/>
+                </a:solidFill>
+                <a:latin typeface="Meiryo" pitchFamily="34" charset="0"/>
+                <a:ea typeface="Meiryo" pitchFamily="34" charset="-122"/>
+                <a:cs typeface="Meiryo" pitchFamily="34" charset="-120"/>
+              </a:rPr>
+              <a:t>1日半、400 を返し続けて容量を焼いた。</a:t>
+            </a:r>
+            <a:endParaRPr lang="en-US" sz="1200" dirty="0"/>
+          </a:p>
+        </p:txBody>
+      </p:sp>
+      <p:sp>
+        <p:nvSpPr>
+          <p:cNvPr id="7" name="Shape 5"/>
+          <p:cNvSpPr/>
+          <p:nvPr/>
+        </p:nvSpPr>
+        <p:spPr>
+          <a:xfrm>
+            <a:off x="777240" y="2825496"/>
             <a:ext cx="10637215" cy="0"/>
           </a:xfrm>
           <a:prstGeom prst="line">
@@ -3464,7 +3519,374 @@
       </p:sp>
       <p:sp>
         <p:nvSpPr>
-          <p:cNvPr id="17" name="Text 14"/>
+          <p:cNvPr id="8" name="Shape 6"/>
+          <p:cNvSpPr/>
+          <p:nvPr/>
+        </p:nvSpPr>
+        <p:spPr>
+          <a:xfrm>
+            <a:off x="777240" y="2898648"/>
+            <a:ext cx="45720" cy="868680"/>
+          </a:xfrm>
+          <a:prstGeom prst="rect">
+            <a:avLst/>
+          </a:prstGeom>
+          <a:solidFill>
+            <a:srgbClr val="9E2A2B"/>
+          </a:solidFill>
+          <a:ln/>
+        </p:spPr>
+      </p:sp>
+      <p:sp>
+        <p:nvSpPr>
+          <p:cNvPr id="9" name="Text 7"/>
+          <p:cNvSpPr/>
+          <p:nvPr/>
+        </p:nvSpPr>
+        <p:spPr>
+          <a:xfrm>
+            <a:off x="1069848" y="2898648"/>
+            <a:ext cx="10344607" cy="329184"/>
+          </a:xfrm>
+          <a:prstGeom prst="rect">
+            <a:avLst/>
+          </a:prstGeom>
+          <a:noFill/>
+          <a:ln/>
+        </p:spPr>
+        <p:txBody>
+          <a:bodyPr wrap="square" lIns="0" tIns="0" rIns="0" bIns="0" rtlCol="0" anchor="ctr"/>
+          <a:lstStyle/>
+          <a:p>
+            <a:pPr indent="0" marL="0">
+              <a:buNone/>
+            </a:pPr>
+            <a:r>
+              <a:rPr lang="en-US" sz="1450" b="1" dirty="0">
+                <a:solidFill>
+                  <a:srgbClr val="2B2B2B"/>
+                </a:solidFill>
+                <a:latin typeface="Meiryo" pitchFamily="34" charset="0"/>
+                <a:ea typeface="Meiryo" pitchFamily="34" charset="-122"/>
+                <a:cs typeface="Meiryo" pitchFamily="34" charset="-120"/>
+              </a:rPr>
+              <a:t>宛先が Paused のまま、送信は成功していた</a:t>
+            </a:r>
+            <a:endParaRPr lang="en-US" sz="1450" dirty="0"/>
+          </a:p>
+        </p:txBody>
+      </p:sp>
+      <p:sp>
+        <p:nvSpPr>
+          <p:cNvPr id="10" name="Text 8"/>
+          <p:cNvSpPr/>
+          <p:nvPr/>
+        </p:nvSpPr>
+        <p:spPr>
+          <a:xfrm>
+            <a:off x="1069848" y="3227832"/>
+            <a:ext cx="10344607" cy="548640"/>
+          </a:xfrm>
+          <a:prstGeom prst="rect">
+            <a:avLst/>
+          </a:prstGeom>
+          <a:noFill/>
+          <a:ln/>
+        </p:spPr>
+        <p:txBody>
+          <a:bodyPr wrap="square" lIns="0" tIns="0" rIns="0" bIns="0" rtlCol="0" anchor="t"/>
+          <a:lstStyle/>
+          <a:p>
+            <a:pPr indent="0" marL="0">
+              <a:lnSpc>
+                <a:spcPct val="140000"/>
+              </a:lnSpc>
+              <a:buNone/>
+            </a:pPr>
+            <a:r>
+              <a:rPr lang="en-US" sz="1200" dirty="0">
+                <a:solidFill>
+                  <a:srgbClr val="7A7A7A"/>
+                </a:solidFill>
+                <a:latin typeface="Meiryo" pitchFamily="34" charset="0"/>
+                <a:ea typeface="Meiryo" pitchFamily="34" charset="-122"/>
+                <a:cs typeface="Meiryo" pitchFamily="34" charset="-120"/>
+              </a:rPr>
+              <a:t>Event Hub は正常に受理し、アプリは「送信済み」を記録。</a:t>
+            </a:r>
+            <a:endParaRPr lang="en-US" sz="1200" dirty="0"/>
+          </a:p>
+          <a:p>
+            <a:pPr indent="0" marL="0">
+              <a:lnSpc>
+                <a:spcPct val="140000"/>
+              </a:lnSpc>
+              <a:buNone/>
+            </a:pPr>
+            <a:r>
+              <a:rPr lang="en-US" sz="1200" dirty="0">
+                <a:solidFill>
+                  <a:srgbClr val="7A7A7A"/>
+                </a:solidFill>
+                <a:latin typeface="Meiryo" pitchFamily="34" charset="0"/>
+                <a:ea typeface="Meiryo" pitchFamily="34" charset="-122"/>
+                <a:cs typeface="Meiryo" pitchFamily="34" charset="-120"/>
+              </a:rPr>
+              <a:t>3日分のデータが静かに消えた。</a:t>
+            </a:r>
+            <a:endParaRPr lang="en-US" sz="1200" dirty="0"/>
+          </a:p>
+        </p:txBody>
+      </p:sp>
+      <p:sp>
+        <p:nvSpPr>
+          <p:cNvPr id="11" name="Shape 9"/>
+          <p:cNvSpPr/>
+          <p:nvPr/>
+        </p:nvSpPr>
+        <p:spPr>
+          <a:xfrm>
+            <a:off x="777240" y="3849624"/>
+            <a:ext cx="10637215" cy="0"/>
+          </a:xfrm>
+          <a:prstGeom prst="line">
+            <a:avLst/>
+          </a:prstGeom>
+          <a:noFill/>
+          <a:ln w="9525">
+            <a:solidFill>
+              <a:srgbClr val="E4DEDA"/>
+            </a:solidFill>
+            <a:prstDash val="solid"/>
+          </a:ln>
+        </p:spPr>
+      </p:sp>
+      <p:sp>
+        <p:nvSpPr>
+          <p:cNvPr id="12" name="Shape 10"/>
+          <p:cNvSpPr/>
+          <p:nvPr/>
+        </p:nvSpPr>
+        <p:spPr>
+          <a:xfrm>
+            <a:off x="777240" y="3922776"/>
+            <a:ext cx="45720" cy="868680"/>
+          </a:xfrm>
+          <a:prstGeom prst="rect">
+            <a:avLst/>
+          </a:prstGeom>
+          <a:solidFill>
+            <a:srgbClr val="9E2A2B"/>
+          </a:solidFill>
+          <a:ln/>
+        </p:spPr>
+      </p:sp>
+      <p:sp>
+        <p:nvSpPr>
+          <p:cNvPr id="13" name="Text 11"/>
+          <p:cNvSpPr/>
+          <p:nvPr/>
+        </p:nvSpPr>
+        <p:spPr>
+          <a:xfrm>
+            <a:off x="1069848" y="3922776"/>
+            <a:ext cx="10344607" cy="329184"/>
+          </a:xfrm>
+          <a:prstGeom prst="rect">
+            <a:avLst/>
+          </a:prstGeom>
+          <a:noFill/>
+          <a:ln/>
+        </p:spPr>
+        <p:txBody>
+          <a:bodyPr wrap="square" lIns="0" tIns="0" rIns="0" bIns="0" rtlCol="0" anchor="ctr"/>
+          <a:lstStyle/>
+          <a:p>
+            <a:pPr indent="0" marL="0">
+              <a:buNone/>
+            </a:pPr>
+            <a:r>
+              <a:rPr lang="en-US" sz="1450" b="1" dirty="0">
+                <a:solidFill>
+                  <a:srgbClr val="2B2B2B"/>
+                </a:solidFill>
+                <a:latin typeface="Meiryo" pitchFamily="34" charset="0"/>
+                <a:ea typeface="Meiryo" pitchFamily="34" charset="-122"/>
+                <a:cs typeface="Meiryo" pitchFamily="34" charset="-120"/>
+              </a:rPr>
+              <a:t>3Dマスコットが一度も起動していなかった</a:t>
+            </a:r>
+            <a:endParaRPr lang="en-US" sz="1450" dirty="0"/>
+          </a:p>
+        </p:txBody>
+      </p:sp>
+      <p:sp>
+        <p:nvSpPr>
+          <p:cNvPr id="14" name="Text 12"/>
+          <p:cNvSpPr/>
+          <p:nvPr/>
+        </p:nvSpPr>
+        <p:spPr>
+          <a:xfrm>
+            <a:off x="1069848" y="4251960"/>
+            <a:ext cx="10344607" cy="548640"/>
+          </a:xfrm>
+          <a:prstGeom prst="rect">
+            <a:avLst/>
+          </a:prstGeom>
+          <a:noFill/>
+          <a:ln/>
+        </p:spPr>
+        <p:txBody>
+          <a:bodyPr wrap="square" lIns="0" tIns="0" rIns="0" bIns="0" rtlCol="0" anchor="t"/>
+          <a:lstStyle/>
+          <a:p>
+            <a:pPr indent="0" marL="0">
+              <a:lnSpc>
+                <a:spcPct val="140000"/>
+              </a:lnSpc>
+              <a:buNone/>
+            </a:pPr>
+            <a:r>
+              <a:rPr lang="en-US" sz="1200" dirty="0">
+                <a:solidFill>
+                  <a:srgbClr val="7A7A7A"/>
+                </a:solidFill>
+                <a:latin typeface="Meiryo" pitchFamily="34" charset="0"/>
+                <a:ea typeface="Meiryo" pitchFamily="34" charset="-122"/>
+                <a:cs typeface="Meiryo" pitchFamily="34" charset="-120"/>
+              </a:rPr>
+              <a:t>「動いている」と報告したが、実際は初期化されていなかった。</a:t>
+            </a:r>
+            <a:endParaRPr lang="en-US" sz="1200" dirty="0"/>
+          </a:p>
+          <a:p>
+            <a:pPr indent="0" marL="0">
+              <a:lnSpc>
+                <a:spcPct val="140000"/>
+              </a:lnSpc>
+              <a:buNone/>
+            </a:pPr>
+            <a:r>
+              <a:rPr lang="en-US" sz="1200" dirty="0">
+                <a:solidFill>
+                  <a:srgbClr val="7A7A7A"/>
+                </a:solidFill>
+                <a:latin typeface="Meiryo" pitchFamily="34" charset="0"/>
+                <a:ea typeface="Meiryo" pitchFamily="34" charset="-122"/>
+                <a:cs typeface="Meiryo" pitchFamily="34" charset="-120"/>
+              </a:rPr>
+              <a:t>計測方法そのものが間違っていた。</a:t>
+            </a:r>
+            <a:endParaRPr lang="en-US" sz="1200" dirty="0"/>
+          </a:p>
+        </p:txBody>
+      </p:sp>
+      <p:sp>
+        <p:nvSpPr>
+          <p:cNvPr id="15" name="Shape 13"/>
+          <p:cNvSpPr/>
+          <p:nvPr/>
+        </p:nvSpPr>
+        <p:spPr>
+          <a:xfrm>
+            <a:off x="777240" y="5230368"/>
+            <a:ext cx="10637215" cy="658368"/>
+          </a:xfrm>
+          <a:prstGeom prst="rect">
+            <a:avLst/>
+          </a:prstGeom>
+          <a:solidFill>
+            <a:srgbClr val="F7F4F2"/>
+          </a:solidFill>
+          <a:ln/>
+        </p:spPr>
+      </p:sp>
+      <p:sp>
+        <p:nvSpPr>
+          <p:cNvPr id="16" name="Shape 14"/>
+          <p:cNvSpPr/>
+          <p:nvPr/>
+        </p:nvSpPr>
+        <p:spPr>
+          <a:xfrm>
+            <a:off x="777240" y="5230368"/>
+            <a:ext cx="50292" cy="658368"/>
+          </a:xfrm>
+          <a:prstGeom prst="rect">
+            <a:avLst/>
+          </a:prstGeom>
+          <a:solidFill>
+            <a:srgbClr val="6D2E46"/>
+          </a:solidFill>
+          <a:ln/>
+        </p:spPr>
+      </p:sp>
+      <p:sp>
+        <p:nvSpPr>
+          <p:cNvPr id="17" name="Text 15"/>
+          <p:cNvSpPr/>
+          <p:nvPr/>
+        </p:nvSpPr>
+        <p:spPr>
+          <a:xfrm>
+            <a:off x="1051560" y="5230368"/>
+            <a:ext cx="10134295" cy="658368"/>
+          </a:xfrm>
+          <a:prstGeom prst="rect">
+            <a:avLst/>
+          </a:prstGeom>
+          <a:noFill/>
+          <a:ln/>
+        </p:spPr>
+        <p:txBody>
+          <a:bodyPr wrap="square" lIns="0" tIns="0" rIns="0" bIns="0" rtlCol="0" anchor="ctr"/>
+          <a:lstStyle/>
+          <a:p>
+            <a:pPr indent="0" marL="0">
+              <a:buNone/>
+            </a:pPr>
+            <a:r>
+              <a:rPr lang="en-US" sz="1450" b="1" dirty="0">
+                <a:solidFill>
+                  <a:srgbClr val="6D2E46"/>
+                </a:solidFill>
+                <a:latin typeface="Meiryo" pitchFamily="34" charset="0"/>
+                <a:ea typeface="Meiryo" pitchFamily="34" charset="-122"/>
+                <a:cs typeface="Meiryo" pitchFamily="34" charset="-120"/>
+              </a:rPr>
+              <a:t>「送信成功」は「到達」ではない。届いた側を見ないと気づけない</a:t>
+            </a:r>
+            <a:endParaRPr lang="en-US" sz="1450" dirty="0"/>
+          </a:p>
+        </p:txBody>
+      </p:sp>
+      <p:sp>
+        <p:nvSpPr>
+          <p:cNvPr id="18" name="Shape 16"/>
+          <p:cNvSpPr/>
+          <p:nvPr/>
+        </p:nvSpPr>
+        <p:spPr>
+          <a:xfrm>
+            <a:off x="777240" y="6236208"/>
+            <a:ext cx="10637215" cy="0"/>
+          </a:xfrm>
+          <a:prstGeom prst="line">
+            <a:avLst/>
+          </a:prstGeom>
+          <a:noFill/>
+          <a:ln w="9525">
+            <a:solidFill>
+              <a:srgbClr val="E4DEDA"/>
+            </a:solidFill>
+            <a:prstDash val="solid"/>
+          </a:ln>
+        </p:spPr>
+      </p:sp>
+      <p:sp>
+        <p:nvSpPr>
+          <p:cNvPr id="19" name="Text 17"/>
           <p:cNvSpPr/>
           <p:nvPr/>
         </p:nvSpPr>
@@ -3503,7 +3925,7 @@
       </p:sp>
       <p:sp>
         <p:nvSpPr>
-          <p:cNvPr id="18" name="Text 15"/>
+          <p:cNvPr id="20" name="Text 18"/>
           <p:cNvSpPr/>
           <p:nvPr/>
         </p:nvSpPr>
@@ -3605,7 +4027,7 @@
                 <a:ea typeface="Georgia" pitchFamily="34" charset="-122"/>
                 <a:cs typeface="Georgia" pitchFamily="34" charset="-120"/>
               </a:rPr>
-              <a:t>誰が、いくら払うのか</a:t>
+              <a:t>見る人と、使う人で画面を分ける</a:t>
             </a:r>
             <a:endParaRPr lang="en-US" sz="3100" dirty="0"/>
           </a:p>
@@ -3644,22 +4066,349 @@
                 <a:ea typeface="Meiryo" pitchFamily="34" charset="-122"/>
                 <a:cs typeface="Meiryo" pitchFamily="34" charset="-120"/>
               </a:rPr>
-              <a:t>カメラを置けなかった家庭が、そのまま顧客になる</a:t>
+              <a:t>必要な情報がまったく違うため</a:t>
             </a:r>
             <a:endParaRPr lang="en-US" sz="1350" dirty="0"/>
           </a:p>
         </p:txBody>
       </p:sp>
-      <p:sp>
-        <p:nvSpPr>
-          <p:cNvPr id="4" name="Shape 2"/>
-          <p:cNvSpPr/>
-          <p:nvPr/>
-        </p:nvSpPr>
-        <p:spPr>
-          <a:xfrm>
-            <a:off x="777240" y="1828800"/>
-            <a:ext cx="3240938" cy="1508760"/>
+      <p:pic>
+        <p:nvPicPr>
+          <p:cNvPr id="4" name="Image 0" descr="C:\Users\msoga\OneDrive - Smart Designer\Projects\見守り隊\docs\images\06-one-touch.png">    </p:cNvPr>
+          <p:cNvPicPr>
+            <a:picLocks noChangeAspect="1"/>
+          </p:cNvPicPr>
+          <p:nvPr/>
+        </p:nvPicPr>
+        <p:blipFill>
+          <a:blip r:embed="rId1"/>
+          <a:stretch>
+            <a:fillRect/>
+          </a:stretch>
+        </p:blipFill>
+        <p:spPr>
+          <a:xfrm>
+            <a:off x="777240" y="1810512"/>
+            <a:ext cx="4389120" cy="2926080"/>
+          </a:xfrm>
+          <a:prstGeom prst="rect">
+            <a:avLst/>
+          </a:prstGeom>
+        </p:spPr>
+      </p:pic>
+      <p:sp>
+        <p:nvSpPr>
+          <p:cNvPr id="5" name="Shape 2"/>
+          <p:cNvSpPr/>
+          <p:nvPr/>
+        </p:nvSpPr>
+        <p:spPr>
+          <a:xfrm>
+            <a:off x="777240" y="1810512"/>
+            <a:ext cx="4389120" cy="2926080"/>
+          </a:xfrm>
+          <a:prstGeom prst="rect">
+            <a:avLst/>
+          </a:prstGeom>
+          <a:ln w="12700">
+            <a:solidFill>
+              <a:srgbClr val="E4DEDA"/>
+            </a:solidFill>
+            <a:prstDash val="solid"/>
+          </a:ln>
+        </p:spPr>
+      </p:sp>
+      <p:sp>
+        <p:nvSpPr>
+          <p:cNvPr id="6" name="Text 3"/>
+          <p:cNvSpPr/>
+          <p:nvPr/>
+        </p:nvSpPr>
+        <p:spPr>
+          <a:xfrm>
+            <a:off x="777240" y="4828032"/>
+            <a:ext cx="4389120" cy="256032"/>
+          </a:xfrm>
+          <a:prstGeom prst="rect">
+            <a:avLst/>
+          </a:prstGeom>
+          <a:noFill/>
+          <a:ln/>
+        </p:spPr>
+        <p:txBody>
+          <a:bodyPr wrap="square" lIns="0" tIns="0" rIns="0" bIns="0" rtlCol="0" anchor="t"/>
+          <a:lstStyle/>
+          <a:p>
+            <a:pPr algn="ctr" indent="0" marL="0">
+              <a:buNone/>
+            </a:pPr>
+            <a:r>
+              <a:rPr lang="en-US" sz="1000" dirty="0">
+                <a:solidFill>
+                  <a:srgbClr val="7A7A7A"/>
+                </a:solidFill>
+                <a:latin typeface="Meiryo" pitchFamily="34" charset="0"/>
+                <a:ea typeface="Meiryo" pitchFamily="34" charset="-122"/>
+                <a:cs typeface="Meiryo" pitchFamily="34" charset="-120"/>
+              </a:rPr>
+              <a:t>利用者本人が使う /one-touch 画面</a:t>
+            </a:r>
+            <a:endParaRPr lang="en-US" sz="1000" dirty="0"/>
+          </a:p>
+        </p:txBody>
+      </p:sp>
+      <p:sp>
+        <p:nvSpPr>
+          <p:cNvPr id="7" name="Text 4"/>
+          <p:cNvSpPr/>
+          <p:nvPr/>
+        </p:nvSpPr>
+        <p:spPr>
+          <a:xfrm>
+            <a:off x="5760720" y="1810512"/>
+            <a:ext cx="5653735" cy="365760"/>
+          </a:xfrm>
+          <a:prstGeom prst="rect">
+            <a:avLst/>
+          </a:prstGeom>
+          <a:noFill/>
+          <a:ln/>
+        </p:spPr>
+        <p:txBody>
+          <a:bodyPr wrap="square" lIns="0" tIns="0" rIns="0" bIns="0" rtlCol="0" anchor="ctr"/>
+          <a:lstStyle/>
+          <a:p>
+            <a:pPr indent="0" marL="0">
+              <a:buNone/>
+            </a:pPr>
+            <a:r>
+              <a:rPr lang="en-US" sz="1500" b="1" dirty="0">
+                <a:solidFill>
+                  <a:srgbClr val="6D2E46"/>
+                </a:solidFill>
+                <a:latin typeface="Meiryo" pitchFamily="34" charset="0"/>
+                <a:ea typeface="Meiryo" pitchFamily="34" charset="-122"/>
+                <a:cs typeface="Meiryo" pitchFamily="34" charset="-120"/>
+              </a:rPr>
+              <a:t>高齢の利用者本人が使う画面</a:t>
+            </a:r>
+            <a:endParaRPr lang="en-US" sz="1500" dirty="0"/>
+          </a:p>
+        </p:txBody>
+      </p:sp>
+      <p:sp>
+        <p:nvSpPr>
+          <p:cNvPr id="8" name="Shape 5"/>
+          <p:cNvSpPr/>
+          <p:nvPr/>
+        </p:nvSpPr>
+        <p:spPr>
+          <a:xfrm>
+            <a:off x="5760720" y="2212848"/>
+            <a:ext cx="1005840" cy="25603"/>
+          </a:xfrm>
+          <a:prstGeom prst="rect">
+            <a:avLst/>
+          </a:prstGeom>
+          <a:solidFill>
+            <a:srgbClr val="A26769"/>
+          </a:solidFill>
+          <a:ln/>
+        </p:spPr>
+      </p:sp>
+      <p:sp>
+        <p:nvSpPr>
+          <p:cNvPr id="9" name="Text 6"/>
+          <p:cNvSpPr/>
+          <p:nvPr/>
+        </p:nvSpPr>
+        <p:spPr>
+          <a:xfrm>
+            <a:off x="5760720" y="2359152"/>
+            <a:ext cx="5653735" cy="777240"/>
+          </a:xfrm>
+          <a:prstGeom prst="rect">
+            <a:avLst/>
+          </a:prstGeom>
+          <a:noFill/>
+          <a:ln/>
+        </p:spPr>
+        <p:txBody>
+          <a:bodyPr wrap="square" lIns="0" tIns="0" rIns="0" bIns="0" rtlCol="0" anchor="t"/>
+          <a:lstStyle/>
+          <a:p>
+            <a:pPr indent="0" marL="0">
+              <a:lnSpc>
+                <a:spcPct val="150000"/>
+              </a:lnSpc>
+              <a:buNone/>
+            </a:pPr>
+            <a:r>
+              <a:rPr lang="en-US" sz="1250" dirty="0">
+                <a:solidFill>
+                  <a:srgbClr val="2B2B2B"/>
+                </a:solidFill>
+                <a:latin typeface="Meiryo" pitchFamily="34" charset="0"/>
+                <a:ea typeface="Meiryo" pitchFamily="34" charset="-122"/>
+                <a:cs typeface="Meiryo" pitchFamily="34" charset="-120"/>
+              </a:rPr>
+              <a:t>文字とボタンを大きくした専用画面（/one-touch）を用意。</a:t>
+            </a:r>
+            <a:endParaRPr lang="en-US" sz="1250" dirty="0"/>
+          </a:p>
+          <a:p>
+            <a:pPr indent="0" marL="0">
+              <a:lnSpc>
+                <a:spcPct val="150000"/>
+              </a:lnSpc>
+              <a:buNone/>
+            </a:pPr>
+            <a:r>
+              <a:rPr lang="en-US" sz="1250" dirty="0">
+                <a:solidFill>
+                  <a:srgbClr val="2B2B2B"/>
+                </a:solidFill>
+                <a:latin typeface="Meiryo" pitchFamily="34" charset="0"/>
+                <a:ea typeface="Meiryo" pitchFamily="34" charset="-122"/>
+                <a:cs typeface="Meiryo" pitchFamily="34" charset="-120"/>
+              </a:rPr>
+              <a:t>見守る側のダッシュボードとは分けている。</a:t>
+            </a:r>
+            <a:endParaRPr lang="en-US" sz="1250" dirty="0"/>
+          </a:p>
+        </p:txBody>
+      </p:sp>
+      <p:sp>
+        <p:nvSpPr>
+          <p:cNvPr id="10" name="Text 7"/>
+          <p:cNvSpPr/>
+          <p:nvPr/>
+        </p:nvSpPr>
+        <p:spPr>
+          <a:xfrm>
+            <a:off x="5760720" y="3291840"/>
+            <a:ext cx="5653735" cy="365760"/>
+          </a:xfrm>
+          <a:prstGeom prst="rect">
+            <a:avLst/>
+          </a:prstGeom>
+          <a:noFill/>
+          <a:ln/>
+        </p:spPr>
+        <p:txBody>
+          <a:bodyPr wrap="square" lIns="0" tIns="0" rIns="0" bIns="0" rtlCol="0" anchor="ctr"/>
+          <a:lstStyle/>
+          <a:p>
+            <a:pPr indent="0" marL="0">
+              <a:buNone/>
+            </a:pPr>
+            <a:r>
+              <a:rPr lang="en-US" sz="1500" b="1" dirty="0">
+                <a:solidFill>
+                  <a:srgbClr val="6D2E46"/>
+                </a:solidFill>
+                <a:latin typeface="Meiryo" pitchFamily="34" charset="0"/>
+                <a:ea typeface="Meiryo" pitchFamily="34" charset="-122"/>
+                <a:cs typeface="Meiryo" pitchFamily="34" charset="-120"/>
+              </a:rPr>
+              <a:t>家族は LINE で聞くだけ</a:t>
+            </a:r>
+            <a:endParaRPr lang="en-US" sz="1500" dirty="0"/>
+          </a:p>
+        </p:txBody>
+      </p:sp>
+      <p:sp>
+        <p:nvSpPr>
+          <p:cNvPr id="11" name="Shape 8"/>
+          <p:cNvSpPr/>
+          <p:nvPr/>
+        </p:nvSpPr>
+        <p:spPr>
+          <a:xfrm>
+            <a:off x="5760720" y="3694176"/>
+            <a:ext cx="1005840" cy="25603"/>
+          </a:xfrm>
+          <a:prstGeom prst="rect">
+            <a:avLst/>
+          </a:prstGeom>
+          <a:solidFill>
+            <a:srgbClr val="A26769"/>
+          </a:solidFill>
+          <a:ln/>
+        </p:spPr>
+      </p:sp>
+      <p:sp>
+        <p:nvSpPr>
+          <p:cNvPr id="12" name="Text 9"/>
+          <p:cNvSpPr/>
+          <p:nvPr/>
+        </p:nvSpPr>
+        <p:spPr>
+          <a:xfrm>
+            <a:off x="5760720" y="3840480"/>
+            <a:ext cx="5653735" cy="777240"/>
+          </a:xfrm>
+          <a:prstGeom prst="rect">
+            <a:avLst/>
+          </a:prstGeom>
+          <a:noFill/>
+          <a:ln/>
+        </p:spPr>
+        <p:txBody>
+          <a:bodyPr wrap="square" lIns="0" tIns="0" rIns="0" bIns="0" rtlCol="0" anchor="t"/>
+          <a:lstStyle/>
+          <a:p>
+            <a:pPr indent="0" marL="0">
+              <a:lnSpc>
+                <a:spcPct val="150000"/>
+              </a:lnSpc>
+              <a:buNone/>
+            </a:pPr>
+            <a:r>
+              <a:rPr lang="en-US" sz="1250" dirty="0">
+                <a:solidFill>
+                  <a:srgbClr val="2B2B2B"/>
+                </a:solidFill>
+                <a:latin typeface="Meiryo" pitchFamily="34" charset="0"/>
+                <a:ea typeface="Meiryo" pitchFamily="34" charset="-122"/>
+                <a:cs typeface="Meiryo" pitchFamily="34" charset="-120"/>
+              </a:rPr>
+              <a:t>専用アプリのインストールは不要。</a:t>
+            </a:r>
+            <a:endParaRPr lang="en-US" sz="1250" dirty="0"/>
+          </a:p>
+          <a:p>
+            <a:pPr indent="0" marL="0">
+              <a:lnSpc>
+                <a:spcPct val="150000"/>
+              </a:lnSpc>
+              <a:buNone/>
+            </a:pPr>
+            <a:r>
+              <a:rPr lang="en-US" sz="1250" dirty="0">
+                <a:solidFill>
+                  <a:srgbClr val="2B2B2B"/>
+                </a:solidFill>
+                <a:latin typeface="Meiryo" pitchFamily="34" charset="0"/>
+                <a:ea typeface="Meiryo" pitchFamily="34" charset="-122"/>
+                <a:cs typeface="Meiryo" pitchFamily="34" charset="-120"/>
+              </a:rPr>
+              <a:t>「今日のお母さんどう？」と聞けば、蓄積された生活データから答える。</a:t>
+            </a:r>
+            <a:endParaRPr lang="en-US" sz="1250" dirty="0"/>
+          </a:p>
+        </p:txBody>
+      </p:sp>
+      <p:sp>
+        <p:nvSpPr>
+          <p:cNvPr id="13" name="Shape 10"/>
+          <p:cNvSpPr/>
+          <p:nvPr/>
+        </p:nvSpPr>
+        <p:spPr>
+          <a:xfrm>
+            <a:off x="777240" y="5230368"/>
+            <a:ext cx="10637215" cy="658368"/>
           </a:xfrm>
           <a:prstGeom prst="rect">
             <a:avLst/>
@@ -3672,869 +4421,66 @@
       </p:sp>
       <p:sp>
         <p:nvSpPr>
-          <p:cNvPr id="5" name="Text 3"/>
-          <p:cNvSpPr/>
-          <p:nvPr/>
-        </p:nvSpPr>
-        <p:spPr>
-          <a:xfrm>
-            <a:off x="850392" y="1975104"/>
-            <a:ext cx="3094634" cy="548640"/>
-          </a:xfrm>
-          <a:prstGeom prst="rect">
-            <a:avLst/>
-          </a:prstGeom>
-          <a:noFill/>
-          <a:ln/>
-        </p:spPr>
-        <p:txBody>
-          <a:bodyPr wrap="square" lIns="0" tIns="0" rIns="0" bIns="0" rtlCol="0" anchor="ctr"/>
-          <a:lstStyle/>
-          <a:p>
-            <a:pPr algn="ctr" indent="0" marL="0">
-              <a:buNone/>
-            </a:pPr>
-            <a:r>
-              <a:rPr lang="en-US" sz="2800" b="1" dirty="0">
+          <p:cNvPr id="14" name="Shape 11"/>
+          <p:cNvSpPr/>
+          <p:nvPr/>
+        </p:nvSpPr>
+        <p:spPr>
+          <a:xfrm>
+            <a:off x="777240" y="5230368"/>
+            <a:ext cx="50292" cy="658368"/>
+          </a:xfrm>
+          <a:prstGeom prst="rect">
+            <a:avLst/>
+          </a:prstGeom>
+          <a:solidFill>
+            <a:srgbClr val="6D2E46"/>
+          </a:solidFill>
+          <a:ln/>
+        </p:spPr>
+      </p:sp>
+      <p:sp>
+        <p:nvSpPr>
+          <p:cNvPr id="15" name="Text 12"/>
+          <p:cNvSpPr/>
+          <p:nvPr/>
+        </p:nvSpPr>
+        <p:spPr>
+          <a:xfrm>
+            <a:off x="1051560" y="5230368"/>
+            <a:ext cx="10134295" cy="658368"/>
+          </a:xfrm>
+          <a:prstGeom prst="rect">
+            <a:avLst/>
+          </a:prstGeom>
+          <a:noFill/>
+          <a:ln/>
+        </p:spPr>
+        <p:txBody>
+          <a:bodyPr wrap="square" lIns="0" tIns="0" rIns="0" bIns="0" rtlCol="0" anchor="ctr"/>
+          <a:lstStyle/>
+          <a:p>
+            <a:pPr indent="0" marL="0">
+              <a:buNone/>
+            </a:pPr>
+            <a:r>
+              <a:rPr lang="en-US" sz="1450" b="1" dirty="0">
                 <a:solidFill>
                   <a:srgbClr val="6D2E46"/>
                 </a:solidFill>
-                <a:latin typeface="Georgia" pitchFamily="34" charset="0"/>
-                <a:ea typeface="Georgia" pitchFamily="34" charset="-122"/>
-                <a:cs typeface="Georgia" pitchFamily="34" charset="-120"/>
-              </a:rPr>
-              <a:t>約700万</a:t>
-            </a:r>
-            <a:endParaRPr lang="en-US" sz="2800" dirty="0"/>
-          </a:p>
-        </p:txBody>
-      </p:sp>
-      <p:sp>
-        <p:nvSpPr>
-          <p:cNvPr id="6" name="Text 4"/>
-          <p:cNvSpPr/>
-          <p:nvPr/>
-        </p:nvSpPr>
-        <p:spPr>
-          <a:xfrm>
-            <a:off x="914400" y="2523744"/>
-            <a:ext cx="2966618" cy="256032"/>
-          </a:xfrm>
-          <a:prstGeom prst="rect">
-            <a:avLst/>
-          </a:prstGeom>
-          <a:noFill/>
-          <a:ln/>
-        </p:spPr>
-        <p:txBody>
-          <a:bodyPr wrap="square" lIns="0" tIns="0" rIns="0" bIns="0" rtlCol="0" anchor="ctr"/>
-          <a:lstStyle/>
-          <a:p>
-            <a:pPr algn="ctr" indent="0" marL="0">
-              <a:buNone/>
-            </a:pPr>
-            <a:r>
-              <a:rPr lang="en-US" sz="1200" dirty="0">
-                <a:solidFill>
-                  <a:srgbClr val="A26769"/>
-                </a:solidFill>
-                <a:latin typeface="Meiryo" pitchFamily="34" charset="0"/>
-                <a:ea typeface="Meiryo" pitchFamily="34" charset="-122"/>
-                <a:cs typeface="Meiryo" pitchFamily="34" charset="-120"/>
-              </a:rPr>
-              <a:t>世帯</a:t>
-            </a:r>
-            <a:endParaRPr lang="en-US" sz="1200" dirty="0"/>
-          </a:p>
-        </p:txBody>
-      </p:sp>
-      <p:sp>
-        <p:nvSpPr>
-          <p:cNvPr id="7" name="Text 5"/>
-          <p:cNvSpPr/>
-          <p:nvPr/>
-        </p:nvSpPr>
-        <p:spPr>
-          <a:xfrm>
-            <a:off x="914400" y="2798064"/>
-            <a:ext cx="2966618" cy="475488"/>
-          </a:xfrm>
-          <a:prstGeom prst="rect">
-            <a:avLst/>
-          </a:prstGeom>
-          <a:noFill/>
-          <a:ln/>
-        </p:spPr>
-        <p:txBody>
-          <a:bodyPr wrap="square" lIns="0" tIns="0" rIns="0" bIns="0" rtlCol="0" anchor="t"/>
-          <a:lstStyle/>
-          <a:p>
-            <a:pPr algn="ctr" indent="0" marL="0">
-              <a:lnSpc>
-                <a:spcPct val="135000"/>
-              </a:lnSpc>
-              <a:buNone/>
-            </a:pPr>
-            <a:r>
-              <a:rPr lang="en-US" sz="1050" dirty="0">
-                <a:solidFill>
-                  <a:srgbClr val="7A7A7A"/>
-                </a:solidFill>
-                <a:latin typeface="Meiryo" pitchFamily="34" charset="0"/>
-                <a:ea typeface="Meiryo" pitchFamily="34" charset="-122"/>
-                <a:cs typeface="Meiryo" pitchFamily="34" charset="-120"/>
-              </a:rPr>
-              <a:t>65歳以上の一人暮らし</a:t>
-            </a:r>
-            <a:endParaRPr lang="en-US" sz="1050" dirty="0"/>
-          </a:p>
-          <a:p>
-            <a:pPr algn="ctr" indent="0" marL="0">
-              <a:lnSpc>
-                <a:spcPct val="135000"/>
-              </a:lnSpc>
-              <a:buNone/>
-            </a:pPr>
-            <a:r>
-              <a:rPr lang="en-US" sz="1050" dirty="0">
-                <a:solidFill>
-                  <a:srgbClr val="7A7A7A"/>
-                </a:solidFill>
-                <a:latin typeface="Meiryo" pitchFamily="34" charset="0"/>
-                <a:ea typeface="Meiryo" pitchFamily="34" charset="-122"/>
-                <a:cs typeface="Meiryo" pitchFamily="34" charset="-120"/>
-              </a:rPr>
-              <a:t>（内閣府 高齢社会白書）</a:t>
-            </a:r>
-            <a:endParaRPr lang="en-US" sz="1050" dirty="0"/>
-          </a:p>
-        </p:txBody>
-      </p:sp>
-      <p:sp>
-        <p:nvSpPr>
-          <p:cNvPr id="8" name="Shape 6"/>
-          <p:cNvSpPr/>
-          <p:nvPr/>
-        </p:nvSpPr>
-        <p:spPr>
-          <a:xfrm>
-            <a:off x="4475378" y="1828800"/>
-            <a:ext cx="3240938" cy="1508760"/>
-          </a:xfrm>
-          <a:prstGeom prst="rect">
-            <a:avLst/>
-          </a:prstGeom>
-          <a:solidFill>
-            <a:srgbClr val="F7F4F2"/>
-          </a:solidFill>
-          <a:ln/>
-        </p:spPr>
-      </p:sp>
-      <p:sp>
-        <p:nvSpPr>
-          <p:cNvPr id="9" name="Text 7"/>
-          <p:cNvSpPr/>
-          <p:nvPr/>
-        </p:nvSpPr>
-        <p:spPr>
-          <a:xfrm>
-            <a:off x="4548530" y="1975104"/>
-            <a:ext cx="3094634" cy="548640"/>
-          </a:xfrm>
-          <a:prstGeom prst="rect">
-            <a:avLst/>
-          </a:prstGeom>
-          <a:noFill/>
-          <a:ln/>
-        </p:spPr>
-        <p:txBody>
-          <a:bodyPr wrap="square" lIns="0" tIns="0" rIns="0" bIns="0" rtlCol="0" anchor="ctr"/>
-          <a:lstStyle/>
-          <a:p>
-            <a:pPr algn="ctr" indent="0" marL="0">
-              <a:buNone/>
-            </a:pPr>
-            <a:r>
-              <a:rPr lang="en-US" sz="2800" b="1" dirty="0">
-                <a:solidFill>
-                  <a:srgbClr val="6D2E46"/>
-                </a:solidFill>
-                <a:latin typeface="Georgia" pitchFamily="34" charset="0"/>
-                <a:ea typeface="Georgia" pitchFamily="34" charset="-122"/>
-                <a:cs typeface="Georgia" pitchFamily="34" charset="-120"/>
-              </a:rPr>
-              <a:t>3,000〜5,000</a:t>
-            </a:r>
-            <a:endParaRPr lang="en-US" sz="2800" dirty="0"/>
-          </a:p>
-        </p:txBody>
-      </p:sp>
-      <p:sp>
-        <p:nvSpPr>
-          <p:cNvPr id="10" name="Text 8"/>
-          <p:cNvSpPr/>
-          <p:nvPr/>
-        </p:nvSpPr>
-        <p:spPr>
-          <a:xfrm>
-            <a:off x="4612538" y="2523744"/>
-            <a:ext cx="2966618" cy="256032"/>
-          </a:xfrm>
-          <a:prstGeom prst="rect">
-            <a:avLst/>
-          </a:prstGeom>
-          <a:noFill/>
-          <a:ln/>
-        </p:spPr>
-        <p:txBody>
-          <a:bodyPr wrap="square" lIns="0" tIns="0" rIns="0" bIns="0" rtlCol="0" anchor="ctr"/>
-          <a:lstStyle/>
-          <a:p>
-            <a:pPr algn="ctr" indent="0" marL="0">
-              <a:buNone/>
-            </a:pPr>
-            <a:r>
-              <a:rPr lang="en-US" sz="1200" dirty="0">
-                <a:solidFill>
-                  <a:srgbClr val="A26769"/>
-                </a:solidFill>
-                <a:latin typeface="Meiryo" pitchFamily="34" charset="0"/>
-                <a:ea typeface="Meiryo" pitchFamily="34" charset="-122"/>
-                <a:cs typeface="Meiryo" pitchFamily="34" charset="-120"/>
-              </a:rPr>
-              <a:t>円 / 月</a:t>
-            </a:r>
-            <a:endParaRPr lang="en-US" sz="1200" dirty="0"/>
-          </a:p>
-        </p:txBody>
-      </p:sp>
-      <p:sp>
-        <p:nvSpPr>
-          <p:cNvPr id="11" name="Text 9"/>
-          <p:cNvSpPr/>
-          <p:nvPr/>
-        </p:nvSpPr>
-        <p:spPr>
-          <a:xfrm>
-            <a:off x="4612538" y="2798064"/>
-            <a:ext cx="2966618" cy="475488"/>
-          </a:xfrm>
-          <a:prstGeom prst="rect">
-            <a:avLst/>
-          </a:prstGeom>
-          <a:noFill/>
-          <a:ln/>
-        </p:spPr>
-        <p:txBody>
-          <a:bodyPr wrap="square" lIns="0" tIns="0" rIns="0" bIns="0" rtlCol="0" anchor="t"/>
-          <a:lstStyle/>
-          <a:p>
-            <a:pPr algn="ctr" indent="0" marL="0">
-              <a:lnSpc>
-                <a:spcPct val="135000"/>
-              </a:lnSpc>
-              <a:buNone/>
-            </a:pPr>
-            <a:r>
-              <a:rPr lang="en-US" sz="1050" dirty="0">
-                <a:solidFill>
-                  <a:srgbClr val="7A7A7A"/>
-                </a:solidFill>
-                <a:latin typeface="Meiryo" pitchFamily="34" charset="0"/>
-                <a:ea typeface="Meiryo" pitchFamily="34" charset="-122"/>
-                <a:cs typeface="Meiryo" pitchFamily="34" charset="-120"/>
-              </a:rPr>
-              <a:t>既存のセンサー型</a:t>
-            </a:r>
-            <a:endParaRPr lang="en-US" sz="1050" dirty="0"/>
-          </a:p>
-          <a:p>
-            <a:pPr algn="ctr" indent="0" marL="0">
-              <a:lnSpc>
-                <a:spcPct val="135000"/>
-              </a:lnSpc>
-              <a:buNone/>
-            </a:pPr>
-            <a:r>
-              <a:rPr lang="en-US" sz="1050" dirty="0">
-                <a:solidFill>
-                  <a:srgbClr val="7A7A7A"/>
-                </a:solidFill>
-                <a:latin typeface="Meiryo" pitchFamily="34" charset="0"/>
-                <a:ea typeface="Meiryo" pitchFamily="34" charset="-122"/>
-                <a:cs typeface="Meiryo" pitchFamily="34" charset="-120"/>
-              </a:rPr>
-              <a:t>見守りサービスの相場</a:t>
-            </a:r>
-            <a:endParaRPr lang="en-US" sz="1050" dirty="0"/>
-          </a:p>
-        </p:txBody>
-      </p:sp>
-      <p:sp>
-        <p:nvSpPr>
-          <p:cNvPr id="12" name="Shape 10"/>
-          <p:cNvSpPr/>
-          <p:nvPr/>
-        </p:nvSpPr>
-        <p:spPr>
-          <a:xfrm>
-            <a:off x="8173517" y="1828800"/>
-            <a:ext cx="3240938" cy="1508760"/>
-          </a:xfrm>
-          <a:prstGeom prst="rect">
-            <a:avLst/>
-          </a:prstGeom>
-          <a:solidFill>
-            <a:srgbClr val="F7F4F2"/>
-          </a:solidFill>
-          <a:ln/>
-        </p:spPr>
-      </p:sp>
-      <p:sp>
-        <p:nvSpPr>
-          <p:cNvPr id="13" name="Text 11"/>
-          <p:cNvSpPr/>
-          <p:nvPr/>
-        </p:nvSpPr>
-        <p:spPr>
-          <a:xfrm>
-            <a:off x="8246669" y="1975104"/>
-            <a:ext cx="3094634" cy="548640"/>
-          </a:xfrm>
-          <a:prstGeom prst="rect">
-            <a:avLst/>
-          </a:prstGeom>
-          <a:noFill/>
-          <a:ln/>
-        </p:spPr>
-        <p:txBody>
-          <a:bodyPr wrap="square" lIns="0" tIns="0" rIns="0" bIns="0" rtlCol="0" anchor="ctr"/>
-          <a:lstStyle/>
-          <a:p>
-            <a:pPr algn="ctr" indent="0" marL="0">
-              <a:buNone/>
-            </a:pPr>
-            <a:r>
-              <a:rPr lang="en-US" sz="2800" b="1" dirty="0">
-                <a:solidFill>
-                  <a:srgbClr val="6D2E46"/>
-                </a:solidFill>
-                <a:latin typeface="Georgia" pitchFamily="34" charset="0"/>
-                <a:ea typeface="Georgia" pitchFamily="34" charset="-122"/>
-                <a:cs typeface="Georgia" pitchFamily="34" charset="-120"/>
-              </a:rPr>
-              <a:t>0</a:t>
-            </a:r>
-            <a:endParaRPr lang="en-US" sz="2800" dirty="0"/>
-          </a:p>
-        </p:txBody>
-      </p:sp>
-      <p:sp>
-        <p:nvSpPr>
-          <p:cNvPr id="14" name="Text 12"/>
-          <p:cNvSpPr/>
-          <p:nvPr/>
-        </p:nvSpPr>
-        <p:spPr>
-          <a:xfrm>
-            <a:off x="8310677" y="2523744"/>
-            <a:ext cx="2966618" cy="256032"/>
-          </a:xfrm>
-          <a:prstGeom prst="rect">
-            <a:avLst/>
-          </a:prstGeom>
-          <a:noFill/>
-          <a:ln/>
-        </p:spPr>
-        <p:txBody>
-          <a:bodyPr wrap="square" lIns="0" tIns="0" rIns="0" bIns="0" rtlCol="0" anchor="ctr"/>
-          <a:lstStyle/>
-          <a:p>
-            <a:pPr algn="ctr" indent="0" marL="0">
-              <a:buNone/>
-            </a:pPr>
-            <a:r>
-              <a:rPr lang="en-US" sz="1200" dirty="0">
-                <a:solidFill>
-                  <a:srgbClr val="A26769"/>
-                </a:solidFill>
-                <a:latin typeface="Meiryo" pitchFamily="34" charset="0"/>
-                <a:ea typeface="Meiryo" pitchFamily="34" charset="-122"/>
-                <a:cs typeface="Meiryo" pitchFamily="34" charset="-120"/>
-              </a:rPr>
-              <a:t>円</a:t>
-            </a:r>
-            <a:endParaRPr lang="en-US" sz="1200" dirty="0"/>
-          </a:p>
-        </p:txBody>
-      </p:sp>
-      <p:sp>
-        <p:nvSpPr>
-          <p:cNvPr id="15" name="Text 13"/>
-          <p:cNvSpPr/>
-          <p:nvPr/>
-        </p:nvSpPr>
-        <p:spPr>
-          <a:xfrm>
-            <a:off x="8310677" y="2798064"/>
-            <a:ext cx="2966618" cy="475488"/>
-          </a:xfrm>
-          <a:prstGeom prst="rect">
-            <a:avLst/>
-          </a:prstGeom>
-          <a:noFill/>
-          <a:ln/>
-        </p:spPr>
-        <p:txBody>
-          <a:bodyPr wrap="square" lIns="0" tIns="0" rIns="0" bIns="0" rtlCol="0" anchor="t"/>
-          <a:lstStyle/>
-          <a:p>
-            <a:pPr algn="ctr" indent="0" marL="0">
-              <a:lnSpc>
-                <a:spcPct val="135000"/>
-              </a:lnSpc>
-              <a:buNone/>
-            </a:pPr>
-            <a:r>
-              <a:rPr lang="en-US" sz="1050" dirty="0">
-                <a:solidFill>
-                  <a:srgbClr val="7A7A7A"/>
-                </a:solidFill>
-                <a:latin typeface="Meiryo" pitchFamily="34" charset="0"/>
-                <a:ea typeface="Meiryo" pitchFamily="34" charset="-122"/>
-                <a:cs typeface="Meiryo" pitchFamily="34" charset="-120"/>
-              </a:rPr>
-              <a:t>新規の見守り機器</a:t>
-            </a:r>
-            <a:endParaRPr lang="en-US" sz="1050" dirty="0"/>
-          </a:p>
-          <a:p>
-            <a:pPr algn="ctr" indent="0" marL="0">
-              <a:lnSpc>
-                <a:spcPct val="135000"/>
-              </a:lnSpc>
-              <a:buNone/>
-            </a:pPr>
-            <a:r>
-              <a:rPr lang="en-US" sz="1050" dirty="0">
-                <a:solidFill>
-                  <a:srgbClr val="7A7A7A"/>
-                </a:solidFill>
-                <a:latin typeface="Meiryo" pitchFamily="34" charset="0"/>
-                <a:ea typeface="Meiryo" pitchFamily="34" charset="-122"/>
-                <a:cs typeface="Meiryo" pitchFamily="34" charset="-120"/>
-              </a:rPr>
-              <a:t>（家電はすでにある）</a:t>
-            </a:r>
-            <a:endParaRPr lang="en-US" sz="1050" dirty="0"/>
-          </a:p>
-        </p:txBody>
-      </p:sp>
-      <p:sp>
-        <p:nvSpPr>
-          <p:cNvPr id="16" name="Text 14"/>
-          <p:cNvSpPr/>
-          <p:nvPr/>
-        </p:nvSpPr>
-        <p:spPr>
-          <a:xfrm>
-            <a:off x="777240" y="3520440"/>
-            <a:ext cx="10637215" cy="411480"/>
-          </a:xfrm>
-          <a:prstGeom prst="rect">
-            <a:avLst/>
-          </a:prstGeom>
-          <a:noFill/>
-          <a:ln/>
-        </p:spPr>
-        <p:txBody>
-          <a:bodyPr wrap="square" lIns="0" tIns="0" rIns="0" bIns="0" rtlCol="0" anchor="ctr"/>
-          <a:lstStyle/>
-          <a:p>
-            <a:pPr indent="0" marL="0">
-              <a:buNone/>
-            </a:pPr>
-            <a:r>
-              <a:rPr lang="en-US" sz="2000" b="1" dirty="0">
-                <a:solidFill>
-                  <a:srgbClr val="2B2B2B"/>
-                </a:solidFill>
-                <a:latin typeface="Georgia" pitchFamily="34" charset="0"/>
-                <a:ea typeface="Georgia" pitchFamily="34" charset="-122"/>
-                <a:cs typeface="Georgia" pitchFamily="34" charset="-120"/>
-              </a:rPr>
-              <a:t>成立の条件は「安いこと」ではなく、「置けること」</a:t>
-            </a:r>
-            <a:endParaRPr lang="en-US" sz="2000" dirty="0"/>
-          </a:p>
-        </p:txBody>
-      </p:sp>
-      <p:sp>
-        <p:nvSpPr>
-          <p:cNvPr id="17" name="Shape 15"/>
-          <p:cNvSpPr/>
-          <p:nvPr/>
-        </p:nvSpPr>
-        <p:spPr>
-          <a:xfrm>
-            <a:off x="777240" y="4142232"/>
-            <a:ext cx="36576" cy="310896"/>
-          </a:xfrm>
-          <a:prstGeom prst="rect">
-            <a:avLst/>
-          </a:prstGeom>
-          <a:solidFill>
-            <a:srgbClr val="A26769"/>
-          </a:solidFill>
-          <a:ln/>
-        </p:spPr>
-      </p:sp>
-      <p:sp>
-        <p:nvSpPr>
-          <p:cNvPr id="18" name="Text 16"/>
-          <p:cNvSpPr/>
-          <p:nvPr/>
-        </p:nvSpPr>
-        <p:spPr>
-          <a:xfrm>
-            <a:off x="978408" y="4023360"/>
-            <a:ext cx="2286000" cy="548640"/>
-          </a:xfrm>
-          <a:prstGeom prst="rect">
-            <a:avLst/>
-          </a:prstGeom>
-          <a:noFill/>
-          <a:ln/>
-        </p:spPr>
-        <p:txBody>
-          <a:bodyPr wrap="square" lIns="0" tIns="0" rIns="0" bIns="0" rtlCol="0" anchor="ctr"/>
-          <a:lstStyle/>
-          <a:p>
-            <a:pPr indent="0" marL="0">
-              <a:buNone/>
-            </a:pPr>
-            <a:r>
-              <a:rPr lang="en-US" sz="1250" b="1" dirty="0">
-                <a:solidFill>
-                  <a:srgbClr val="6D2E46"/>
-                </a:solidFill>
-                <a:latin typeface="Meiryo" pitchFamily="34" charset="0"/>
-                <a:ea typeface="Meiryo" pitchFamily="34" charset="-122"/>
-                <a:cs typeface="Meiryo" pitchFamily="34" charset="-120"/>
-              </a:rPr>
-              <a:t>導入の障壁を外した</a:t>
-            </a:r>
-            <a:endParaRPr lang="en-US" sz="1250" dirty="0"/>
-          </a:p>
-        </p:txBody>
-      </p:sp>
-      <p:sp>
-        <p:nvSpPr>
-          <p:cNvPr id="19" name="Text 17"/>
-          <p:cNvSpPr/>
-          <p:nvPr/>
-        </p:nvSpPr>
-        <p:spPr>
-          <a:xfrm>
-            <a:off x="3383280" y="4023360"/>
-            <a:ext cx="8031175" cy="548640"/>
-          </a:xfrm>
-          <a:prstGeom prst="rect">
-            <a:avLst/>
-          </a:prstGeom>
-          <a:noFill/>
-          <a:ln/>
-        </p:spPr>
-        <p:txBody>
-          <a:bodyPr wrap="square" lIns="0" tIns="0" rIns="0" bIns="0" rtlCol="0" anchor="ctr"/>
-          <a:lstStyle/>
-          <a:p>
-            <a:pPr indent="0" marL="0">
-              <a:lnSpc>
-                <a:spcPct val="140000"/>
-              </a:lnSpc>
-              <a:buNone/>
-            </a:pPr>
-            <a:r>
-              <a:rPr lang="en-US" sz="1150" dirty="0">
-                <a:solidFill>
-                  <a:srgbClr val="2B2B2B"/>
-                </a:solidFill>
-                <a:latin typeface="Meiryo" pitchFamily="34" charset="0"/>
-                <a:ea typeface="Meiryo" pitchFamily="34" charset="-122"/>
-                <a:cs typeface="Meiryo" pitchFamily="34" charset="-120"/>
-              </a:rPr>
-              <a:t>カメラもマットも要らない。スマートプラグを既存の家電に挿すだけ。</a:t>
-            </a:r>
-            <a:endParaRPr lang="en-US" sz="1150" dirty="0"/>
-          </a:p>
-          <a:p>
-            <a:pPr indent="0" marL="0">
-              <a:lnSpc>
-                <a:spcPct val="140000"/>
-              </a:lnSpc>
-              <a:buNone/>
-            </a:pPr>
-            <a:r>
-              <a:rPr lang="en-US" sz="1150" dirty="0">
-                <a:solidFill>
-                  <a:srgbClr val="2B2B2B"/>
-                </a:solidFill>
-                <a:latin typeface="Meiryo" pitchFamily="34" charset="0"/>
-                <a:ea typeface="Meiryo" pitchFamily="34" charset="-122"/>
-                <a:cs typeface="Meiryo" pitchFamily="34" charset="-120"/>
-              </a:rPr>
-              <a:t>「見張られる」と感じさせないから、本人が拒まない。</a:t>
-            </a:r>
-            <a:endParaRPr lang="en-US" sz="1150" dirty="0"/>
-          </a:p>
-        </p:txBody>
-      </p:sp>
-      <p:sp>
-        <p:nvSpPr>
-          <p:cNvPr id="20" name="Shape 18"/>
-          <p:cNvSpPr/>
-          <p:nvPr/>
-        </p:nvSpPr>
-        <p:spPr>
-          <a:xfrm>
-            <a:off x="777240" y="4800600"/>
-            <a:ext cx="36576" cy="310896"/>
-          </a:xfrm>
-          <a:prstGeom prst="rect">
-            <a:avLst/>
-          </a:prstGeom>
-          <a:solidFill>
-            <a:srgbClr val="A26769"/>
-          </a:solidFill>
-          <a:ln/>
-        </p:spPr>
-      </p:sp>
-      <p:sp>
-        <p:nvSpPr>
-          <p:cNvPr id="21" name="Text 19"/>
-          <p:cNvSpPr/>
-          <p:nvPr/>
-        </p:nvSpPr>
-        <p:spPr>
-          <a:xfrm>
-            <a:off x="978408" y="4681728"/>
-            <a:ext cx="2286000" cy="548640"/>
-          </a:xfrm>
-          <a:prstGeom prst="rect">
-            <a:avLst/>
-          </a:prstGeom>
-          <a:noFill/>
-          <a:ln/>
-        </p:spPr>
-        <p:txBody>
-          <a:bodyPr wrap="square" lIns="0" tIns="0" rIns="0" bIns="0" rtlCol="0" anchor="ctr"/>
-          <a:lstStyle/>
-          <a:p>
-            <a:pPr indent="0" marL="0">
-              <a:buNone/>
-            </a:pPr>
-            <a:r>
-              <a:rPr lang="en-US" sz="1250" b="1" dirty="0">
-                <a:solidFill>
-                  <a:srgbClr val="6D2E46"/>
-                </a:solidFill>
-                <a:latin typeface="Meiryo" pitchFamily="34" charset="0"/>
-                <a:ea typeface="Meiryo" pitchFamily="34" charset="-122"/>
-                <a:cs typeface="Meiryo" pitchFamily="34" charset="-120"/>
-              </a:rPr>
-              <a:t>受け手の負担も外した</a:t>
-            </a:r>
-            <a:endParaRPr lang="en-US" sz="1250" dirty="0"/>
-          </a:p>
-        </p:txBody>
-      </p:sp>
-      <p:sp>
-        <p:nvSpPr>
-          <p:cNvPr id="22" name="Text 20"/>
-          <p:cNvSpPr/>
-          <p:nvPr/>
-        </p:nvSpPr>
-        <p:spPr>
-          <a:xfrm>
-            <a:off x="3383280" y="4681728"/>
-            <a:ext cx="8031175" cy="548640"/>
-          </a:xfrm>
-          <a:prstGeom prst="rect">
-            <a:avLst/>
-          </a:prstGeom>
-          <a:noFill/>
-          <a:ln/>
-        </p:spPr>
-        <p:txBody>
-          <a:bodyPr wrap="square" lIns="0" tIns="0" rIns="0" bIns="0" rtlCol="0" anchor="ctr"/>
-          <a:lstStyle/>
-          <a:p>
-            <a:pPr indent="0" marL="0">
-              <a:lnSpc>
-                <a:spcPct val="140000"/>
-              </a:lnSpc>
-              <a:buNone/>
-            </a:pPr>
-            <a:r>
-              <a:rPr lang="en-US" sz="1150" dirty="0">
-                <a:solidFill>
-                  <a:srgbClr val="2B2B2B"/>
-                </a:solidFill>
-                <a:latin typeface="Meiryo" pitchFamily="34" charset="0"/>
-                <a:ea typeface="Meiryo" pitchFamily="34" charset="-122"/>
-                <a:cs typeface="Meiryo" pitchFamily="34" charset="-120"/>
-              </a:rPr>
-              <a:t>専用アプリを入れさせない。通知も操作も LINE の中で完結する。</a:t>
-            </a:r>
-            <a:endParaRPr lang="en-US" sz="1150" dirty="0"/>
-          </a:p>
-          <a:p>
-            <a:pPr indent="0" marL="0">
-              <a:lnSpc>
-                <a:spcPct val="140000"/>
-              </a:lnSpc>
-              <a:buNone/>
-            </a:pPr>
-            <a:r>
-              <a:rPr lang="en-US" sz="1150" dirty="0">
-                <a:solidFill>
-                  <a:srgbClr val="2B2B2B"/>
-                </a:solidFill>
-                <a:latin typeface="Meiryo" pitchFamily="34" charset="0"/>
-                <a:ea typeface="Meiryo" pitchFamily="34" charset="-122"/>
-                <a:cs typeface="Meiryo" pitchFamily="34" charset="-120"/>
-              </a:rPr>
-              <a:t>インストール率という最大の離脱要因が、そもそも発生しない。</a:t>
-            </a:r>
-            <a:endParaRPr lang="en-US" sz="1150" dirty="0"/>
-          </a:p>
-        </p:txBody>
-      </p:sp>
-      <p:sp>
-        <p:nvSpPr>
-          <p:cNvPr id="23" name="Shape 21"/>
-          <p:cNvSpPr/>
-          <p:nvPr/>
-        </p:nvSpPr>
-        <p:spPr>
-          <a:xfrm>
-            <a:off x="777240" y="5458968"/>
-            <a:ext cx="36576" cy="310896"/>
-          </a:xfrm>
-          <a:prstGeom prst="rect">
-            <a:avLst/>
-          </a:prstGeom>
-          <a:solidFill>
-            <a:srgbClr val="A26769"/>
-          </a:solidFill>
-          <a:ln/>
-        </p:spPr>
-      </p:sp>
-      <p:sp>
-        <p:nvSpPr>
-          <p:cNvPr id="24" name="Text 22"/>
-          <p:cNvSpPr/>
-          <p:nvPr/>
-        </p:nvSpPr>
-        <p:spPr>
-          <a:xfrm>
-            <a:off x="978408" y="5340096"/>
-            <a:ext cx="2286000" cy="548640"/>
-          </a:xfrm>
-          <a:prstGeom prst="rect">
-            <a:avLst/>
-          </a:prstGeom>
-          <a:noFill/>
-          <a:ln/>
-        </p:spPr>
-        <p:txBody>
-          <a:bodyPr wrap="square" lIns="0" tIns="0" rIns="0" bIns="0" rtlCol="0" anchor="ctr"/>
-          <a:lstStyle/>
-          <a:p>
-            <a:pPr indent="0" marL="0">
-              <a:buNone/>
-            </a:pPr>
-            <a:r>
-              <a:rPr lang="en-US" sz="1250" b="1" dirty="0">
-                <a:solidFill>
-                  <a:srgbClr val="6D2E46"/>
-                </a:solidFill>
-                <a:latin typeface="Meiryo" pitchFamily="34" charset="0"/>
-                <a:ea typeface="Meiryo" pitchFamily="34" charset="-122"/>
-                <a:cs typeface="Meiryo" pitchFamily="34" charset="-120"/>
-              </a:rPr>
-              <a:t>原価が積み上がらない</a:t>
-            </a:r>
-            <a:endParaRPr lang="en-US" sz="1250" dirty="0"/>
-          </a:p>
-        </p:txBody>
-      </p:sp>
-      <p:sp>
-        <p:nvSpPr>
-          <p:cNvPr id="25" name="Text 23"/>
-          <p:cNvSpPr/>
-          <p:nvPr/>
-        </p:nvSpPr>
-        <p:spPr>
-          <a:xfrm>
-            <a:off x="3383280" y="5340096"/>
-            <a:ext cx="8031175" cy="548640"/>
-          </a:xfrm>
-          <a:prstGeom prst="rect">
-            <a:avLst/>
-          </a:prstGeom>
-          <a:noFill/>
-          <a:ln/>
-        </p:spPr>
-        <p:txBody>
-          <a:bodyPr wrap="square" lIns="0" tIns="0" rIns="0" bIns="0" rtlCol="0" anchor="ctr"/>
-          <a:lstStyle/>
-          <a:p>
-            <a:pPr indent="0" marL="0">
-              <a:lnSpc>
-                <a:spcPct val="140000"/>
-              </a:lnSpc>
-              <a:buNone/>
-            </a:pPr>
-            <a:r>
-              <a:rPr lang="en-US" sz="1150" dirty="0">
-                <a:solidFill>
-                  <a:srgbClr val="2B2B2B"/>
-                </a:solidFill>
-                <a:latin typeface="Meiryo" pitchFamily="34" charset="0"/>
-                <a:ea typeface="Meiryo" pitchFamily="34" charset="-122"/>
-                <a:cs typeface="Meiryo" pitchFamily="34" charset="-120"/>
-              </a:rPr>
-              <a:t>判定はルールベース、LLM は会話時のみ。</a:t>
-            </a:r>
-            <a:endParaRPr lang="en-US" sz="1150" dirty="0"/>
-          </a:p>
-          <a:p>
-            <a:pPr indent="0" marL="0">
-              <a:lnSpc>
-                <a:spcPct val="140000"/>
-              </a:lnSpc>
-              <a:buNone/>
-            </a:pPr>
-            <a:r>
-              <a:rPr lang="en-US" sz="1150" dirty="0">
-                <a:solidFill>
-                  <a:srgbClr val="2B2B2B"/>
-                </a:solidFill>
-                <a:latin typeface="Meiryo" pitchFamily="34" charset="0"/>
-                <a:ea typeface="Meiryo" pitchFamily="34" charset="-122"/>
-                <a:cs typeface="Meiryo" pitchFamily="34" charset="-120"/>
-              </a:rPr>
-              <a:t>1世帯あたりの固定費が小さく、月額数百円台でも粗利が残る。</a:t>
-            </a:r>
-            <a:endParaRPr lang="en-US" sz="1150" dirty="0"/>
-          </a:p>
-        </p:txBody>
-      </p:sp>
-      <p:sp>
-        <p:nvSpPr>
-          <p:cNvPr id="26" name="Shape 24"/>
+                <a:latin typeface="Meiryo" pitchFamily="34" charset="0"/>
+                <a:ea typeface="Meiryo" pitchFamily="34" charset="-122"/>
+                <a:cs typeface="Meiryo" pitchFamily="34" charset="-120"/>
+              </a:rPr>
+              <a:t>見る側と使う側に、同じ画面を出さない</a:t>
+            </a:r>
+            <a:endParaRPr lang="en-US" sz="1450" dirty="0"/>
+          </a:p>
+        </p:txBody>
+      </p:sp>
+      <p:sp>
+        <p:nvSpPr>
+          <p:cNvPr id="16" name="Shape 13"/>
           <p:cNvSpPr/>
           <p:nvPr/>
         </p:nvSpPr>
@@ -4557,7 +4503,7 @@
       </p:sp>
       <p:sp>
         <p:nvSpPr>
-          <p:cNvPr id="27" name="Text 25"/>
+          <p:cNvPr id="17" name="Text 14"/>
           <p:cNvSpPr/>
           <p:nvPr/>
         </p:nvSpPr>
@@ -4596,7 +4542,7 @@
       </p:sp>
       <p:sp>
         <p:nvSpPr>
-          <p:cNvPr id="28" name="Text 26"/>
+          <p:cNvPr id="18" name="Text 15"/>
           <p:cNvSpPr/>
           <p:nvPr/>
         </p:nvSpPr>
@@ -4667,50 +4613,30 @@
       </p:grpSpPr>
       <p:sp>
         <p:nvSpPr>
-          <p:cNvPr id="2" name="Shape 0"/>
-          <p:cNvSpPr/>
-          <p:nvPr/>
-        </p:nvSpPr>
-        <p:spPr>
-          <a:xfrm>
-            <a:off x="0" y="0"/>
-            <a:ext cx="82296" cy="6858000"/>
-          </a:xfrm>
-          <a:prstGeom prst="rect">
-            <a:avLst/>
-          </a:prstGeom>
-          <a:solidFill>
-            <a:srgbClr val="6D2E46"/>
-          </a:solidFill>
-          <a:ln/>
-        </p:spPr>
-      </p:sp>
-      <p:sp>
-        <p:nvSpPr>
-          <p:cNvPr id="3" name="Text 1"/>
-          <p:cNvSpPr/>
-          <p:nvPr/>
-        </p:nvSpPr>
-        <p:spPr>
-          <a:xfrm>
-            <a:off x="1005840" y="685800"/>
-            <a:ext cx="10408615" cy="731520"/>
-          </a:xfrm>
-          <a:prstGeom prst="rect">
-            <a:avLst/>
-          </a:prstGeom>
-          <a:noFill/>
-          <a:ln/>
-        </p:spPr>
-        <p:txBody>
-          <a:bodyPr wrap="square" lIns="0" tIns="0" rIns="0" bIns="0" rtlCol="0" anchor="ctr"/>
-          <a:lstStyle/>
-          <a:p>
-            <a:pPr indent="0" marL="0">
-              <a:buNone/>
-            </a:pPr>
-            <a:r>
-              <a:rPr lang="en-US" sz="3400" b="1" dirty="0">
+          <p:cNvPr id="2" name="Text 0"/>
+          <p:cNvSpPr/>
+          <p:nvPr/>
+        </p:nvSpPr>
+        <p:spPr>
+          <a:xfrm>
+            <a:off x="777240" y="420624"/>
+            <a:ext cx="10637215" cy="658368"/>
+          </a:xfrm>
+          <a:prstGeom prst="rect">
+            <a:avLst/>
+          </a:prstGeom>
+          <a:noFill/>
+          <a:ln/>
+        </p:spPr>
+        <p:txBody>
+          <a:bodyPr wrap="square" lIns="0" tIns="0" rIns="0" bIns="0" rtlCol="0" anchor="ctr"/>
+          <a:lstStyle/>
+          <a:p>
+            <a:pPr algn="l" indent="0" marL="0">
+              <a:buNone/>
+            </a:pPr>
+            <a:r>
+              <a:rPr lang="en-US" sz="3100" b="1" dirty="0">
                 <a:solidFill>
                   <a:srgbClr val="2B2B2B"/>
                 </a:solidFill>
@@ -4718,38 +4644,38 @@
                 <a:ea typeface="Georgia" pitchFamily="34" charset="-122"/>
                 <a:cs typeface="Georgia" pitchFamily="34" charset="-120"/>
               </a:rPr>
-              <a:t>AI は会話に使い、判断には使わない</a:t>
-            </a:r>
-            <a:endParaRPr lang="en-US" sz="3400" dirty="0"/>
-          </a:p>
-        </p:txBody>
-      </p:sp>
-      <p:sp>
-        <p:nvSpPr>
-          <p:cNvPr id="4" name="Text 2"/>
-          <p:cNvSpPr/>
-          <p:nvPr/>
-        </p:nvSpPr>
-        <p:spPr>
-          <a:xfrm>
-            <a:off x="1005840" y="1417320"/>
-            <a:ext cx="10408615" cy="347472"/>
-          </a:xfrm>
-          <a:prstGeom prst="rect">
-            <a:avLst/>
-          </a:prstGeom>
-          <a:noFill/>
-          <a:ln/>
-        </p:spPr>
-        <p:txBody>
-          <a:bodyPr wrap="square" lIns="0" tIns="0" rIns="0" bIns="0" rtlCol="0" anchor="ctr"/>
-          <a:lstStyle/>
-          <a:p>
-            <a:pPr indent="0" marL="0">
-              <a:buNone/>
-            </a:pPr>
-            <a:r>
-              <a:rPr lang="en-US" sz="1400" dirty="0">
+              <a:t>誰が、いくら払うのか</a:t>
+            </a:r>
+            <a:endParaRPr lang="en-US" sz="3100" dirty="0"/>
+          </a:p>
+        </p:txBody>
+      </p:sp>
+      <p:sp>
+        <p:nvSpPr>
+          <p:cNvPr id="3" name="Text 1"/>
+          <p:cNvSpPr/>
+          <p:nvPr/>
+        </p:nvSpPr>
+        <p:spPr>
+          <a:xfrm>
+            <a:off x="777240" y="1078992"/>
+            <a:ext cx="10637215" cy="310896"/>
+          </a:xfrm>
+          <a:prstGeom prst="rect">
+            <a:avLst/>
+          </a:prstGeom>
+          <a:noFill/>
+          <a:ln/>
+        </p:spPr>
+        <p:txBody>
+          <a:bodyPr wrap="square" lIns="0" tIns="0" rIns="0" bIns="0" rtlCol="0" anchor="ctr"/>
+          <a:lstStyle/>
+          <a:p>
+            <a:pPr algn="l" indent="0" marL="0">
+              <a:buNone/>
+            </a:pPr>
+            <a:r>
+              <a:rPr lang="en-US" sz="1350" dirty="0">
                 <a:solidFill>
                   <a:srgbClr val="A26769"/>
                 </a:solidFill>
@@ -4757,11 +4683,31 @@
                 <a:ea typeface="Meiryo" pitchFamily="34" charset="-122"/>
                 <a:cs typeface="Meiryo" pitchFamily="34" charset="-120"/>
               </a:rPr>
-              <a:t>家電を任せるほど信頼していないから、任せない設計にした</a:t>
-            </a:r>
-            <a:endParaRPr lang="en-US" sz="1400" dirty="0"/>
-          </a:p>
-        </p:txBody>
+              <a:t>カメラを置けなかった家庭が、そのまま顧客になる</a:t>
+            </a:r>
+            <a:endParaRPr lang="en-US" sz="1350" dirty="0"/>
+          </a:p>
+        </p:txBody>
+      </p:sp>
+      <p:sp>
+        <p:nvSpPr>
+          <p:cNvPr id="4" name="Shape 2"/>
+          <p:cNvSpPr/>
+          <p:nvPr/>
+        </p:nvSpPr>
+        <p:spPr>
+          <a:xfrm>
+            <a:off x="777240" y="1828800"/>
+            <a:ext cx="3240938" cy="1508760"/>
+          </a:xfrm>
+          <a:prstGeom prst="rect">
+            <a:avLst/>
+          </a:prstGeom>
+          <a:solidFill>
+            <a:srgbClr val="F7F4F2"/>
+          </a:solidFill>
+          <a:ln/>
+        </p:spPr>
       </p:sp>
       <p:sp>
         <p:nvSpPr>
@@ -4771,24 +4717,24 @@
         </p:nvSpPr>
         <p:spPr>
           <a:xfrm>
-            <a:off x="1005840" y="2148840"/>
-            <a:ext cx="3164738" cy="822960"/>
-          </a:xfrm>
-          <a:prstGeom prst="rect">
-            <a:avLst/>
-          </a:prstGeom>
-          <a:noFill/>
-          <a:ln/>
-        </p:spPr>
-        <p:txBody>
-          <a:bodyPr wrap="square" lIns="0" tIns="0" rIns="0" bIns="0" rtlCol="0" anchor="ctr"/>
-          <a:lstStyle/>
-          <a:p>
-            <a:pPr indent="0" marL="0">
-              <a:buNone/>
-            </a:pPr>
-            <a:r>
-              <a:rPr lang="en-US" sz="4600" b="1" dirty="0">
+            <a:off x="850392" y="1975104"/>
+            <a:ext cx="3094634" cy="548640"/>
+          </a:xfrm>
+          <a:prstGeom prst="rect">
+            <a:avLst/>
+          </a:prstGeom>
+          <a:noFill/>
+          <a:ln/>
+        </p:spPr>
+        <p:txBody>
+          <a:bodyPr wrap="square" lIns="0" tIns="0" rIns="0" bIns="0" rtlCol="0" anchor="ctr"/>
+          <a:lstStyle/>
+          <a:p>
+            <a:pPr algn="ctr" indent="0" marL="0">
+              <a:buNone/>
+            </a:pPr>
+            <a:r>
+              <a:rPr lang="en-US" sz="2800" b="1" dirty="0">
                 <a:solidFill>
                   <a:srgbClr val="6D2E46"/>
                 </a:solidFill>
@@ -4796,22 +4742,482 @@
                 <a:ea typeface="Georgia" pitchFamily="34" charset="-122"/>
                 <a:cs typeface="Georgia" pitchFamily="34" charset="-120"/>
               </a:rPr>
-              <a:t>681</a:t>
-            </a:r>
-            <a:endParaRPr lang="en-US" sz="4600" dirty="0"/>
-          </a:p>
-        </p:txBody>
-      </p:sp>
-      <p:sp>
-        <p:nvSpPr>
-          <p:cNvPr id="6" name="Shape 4"/>
-          <p:cNvSpPr/>
-          <p:nvPr/>
-        </p:nvSpPr>
-        <p:spPr>
-          <a:xfrm>
-            <a:off x="1005840" y="2999232"/>
-            <a:ext cx="822960" cy="27432"/>
+              <a:t>約700万</a:t>
+            </a:r>
+            <a:endParaRPr lang="en-US" sz="2800" dirty="0"/>
+          </a:p>
+        </p:txBody>
+      </p:sp>
+      <p:sp>
+        <p:nvSpPr>
+          <p:cNvPr id="6" name="Text 4"/>
+          <p:cNvSpPr/>
+          <p:nvPr/>
+        </p:nvSpPr>
+        <p:spPr>
+          <a:xfrm>
+            <a:off x="914400" y="2523744"/>
+            <a:ext cx="2966618" cy="256032"/>
+          </a:xfrm>
+          <a:prstGeom prst="rect">
+            <a:avLst/>
+          </a:prstGeom>
+          <a:noFill/>
+          <a:ln/>
+        </p:spPr>
+        <p:txBody>
+          <a:bodyPr wrap="square" lIns="0" tIns="0" rIns="0" bIns="0" rtlCol="0" anchor="ctr"/>
+          <a:lstStyle/>
+          <a:p>
+            <a:pPr algn="ctr" indent="0" marL="0">
+              <a:buNone/>
+            </a:pPr>
+            <a:r>
+              <a:rPr lang="en-US" sz="1200" dirty="0">
+                <a:solidFill>
+                  <a:srgbClr val="A26769"/>
+                </a:solidFill>
+                <a:latin typeface="Meiryo" pitchFamily="34" charset="0"/>
+                <a:ea typeface="Meiryo" pitchFamily="34" charset="-122"/>
+                <a:cs typeface="Meiryo" pitchFamily="34" charset="-120"/>
+              </a:rPr>
+              <a:t>世帯</a:t>
+            </a:r>
+            <a:endParaRPr lang="en-US" sz="1200" dirty="0"/>
+          </a:p>
+        </p:txBody>
+      </p:sp>
+      <p:sp>
+        <p:nvSpPr>
+          <p:cNvPr id="7" name="Text 5"/>
+          <p:cNvSpPr/>
+          <p:nvPr/>
+        </p:nvSpPr>
+        <p:spPr>
+          <a:xfrm>
+            <a:off x="914400" y="2798064"/>
+            <a:ext cx="2966618" cy="475488"/>
+          </a:xfrm>
+          <a:prstGeom prst="rect">
+            <a:avLst/>
+          </a:prstGeom>
+          <a:noFill/>
+          <a:ln/>
+        </p:spPr>
+        <p:txBody>
+          <a:bodyPr wrap="square" lIns="0" tIns="0" rIns="0" bIns="0" rtlCol="0" anchor="t"/>
+          <a:lstStyle/>
+          <a:p>
+            <a:pPr algn="ctr" indent="0" marL="0">
+              <a:lnSpc>
+                <a:spcPct val="135000"/>
+              </a:lnSpc>
+              <a:buNone/>
+            </a:pPr>
+            <a:r>
+              <a:rPr lang="en-US" sz="1050" dirty="0">
+                <a:solidFill>
+                  <a:srgbClr val="7A7A7A"/>
+                </a:solidFill>
+                <a:latin typeface="Meiryo" pitchFamily="34" charset="0"/>
+                <a:ea typeface="Meiryo" pitchFamily="34" charset="-122"/>
+                <a:cs typeface="Meiryo" pitchFamily="34" charset="-120"/>
+              </a:rPr>
+              <a:t>65歳以上の一人暮らし</a:t>
+            </a:r>
+            <a:endParaRPr lang="en-US" sz="1050" dirty="0"/>
+          </a:p>
+          <a:p>
+            <a:pPr algn="ctr" indent="0" marL="0">
+              <a:lnSpc>
+                <a:spcPct val="135000"/>
+              </a:lnSpc>
+              <a:buNone/>
+            </a:pPr>
+            <a:r>
+              <a:rPr lang="en-US" sz="1050" dirty="0">
+                <a:solidFill>
+                  <a:srgbClr val="7A7A7A"/>
+                </a:solidFill>
+                <a:latin typeface="Meiryo" pitchFamily="34" charset="0"/>
+                <a:ea typeface="Meiryo" pitchFamily="34" charset="-122"/>
+                <a:cs typeface="Meiryo" pitchFamily="34" charset="-120"/>
+              </a:rPr>
+              <a:t>（内閣府 高齢社会白書）</a:t>
+            </a:r>
+            <a:endParaRPr lang="en-US" sz="1050" dirty="0"/>
+          </a:p>
+        </p:txBody>
+      </p:sp>
+      <p:sp>
+        <p:nvSpPr>
+          <p:cNvPr id="8" name="Shape 6"/>
+          <p:cNvSpPr/>
+          <p:nvPr/>
+        </p:nvSpPr>
+        <p:spPr>
+          <a:xfrm>
+            <a:off x="4475378" y="1828800"/>
+            <a:ext cx="3240938" cy="1508760"/>
+          </a:xfrm>
+          <a:prstGeom prst="rect">
+            <a:avLst/>
+          </a:prstGeom>
+          <a:solidFill>
+            <a:srgbClr val="F7F4F2"/>
+          </a:solidFill>
+          <a:ln/>
+        </p:spPr>
+      </p:sp>
+      <p:sp>
+        <p:nvSpPr>
+          <p:cNvPr id="9" name="Text 7"/>
+          <p:cNvSpPr/>
+          <p:nvPr/>
+        </p:nvSpPr>
+        <p:spPr>
+          <a:xfrm>
+            <a:off x="4548530" y="1975104"/>
+            <a:ext cx="3094634" cy="548640"/>
+          </a:xfrm>
+          <a:prstGeom prst="rect">
+            <a:avLst/>
+          </a:prstGeom>
+          <a:noFill/>
+          <a:ln/>
+        </p:spPr>
+        <p:txBody>
+          <a:bodyPr wrap="square" lIns="0" tIns="0" rIns="0" bIns="0" rtlCol="0" anchor="ctr"/>
+          <a:lstStyle/>
+          <a:p>
+            <a:pPr algn="ctr" indent="0" marL="0">
+              <a:buNone/>
+            </a:pPr>
+            <a:r>
+              <a:rPr lang="en-US" sz="2800" b="1" dirty="0">
+                <a:solidFill>
+                  <a:srgbClr val="6D2E46"/>
+                </a:solidFill>
+                <a:latin typeface="Georgia" pitchFamily="34" charset="0"/>
+                <a:ea typeface="Georgia" pitchFamily="34" charset="-122"/>
+                <a:cs typeface="Georgia" pitchFamily="34" charset="-120"/>
+              </a:rPr>
+              <a:t>3,000〜5,000</a:t>
+            </a:r>
+            <a:endParaRPr lang="en-US" sz="2800" dirty="0"/>
+          </a:p>
+        </p:txBody>
+      </p:sp>
+      <p:sp>
+        <p:nvSpPr>
+          <p:cNvPr id="10" name="Text 8"/>
+          <p:cNvSpPr/>
+          <p:nvPr/>
+        </p:nvSpPr>
+        <p:spPr>
+          <a:xfrm>
+            <a:off x="4612538" y="2523744"/>
+            <a:ext cx="2966618" cy="256032"/>
+          </a:xfrm>
+          <a:prstGeom prst="rect">
+            <a:avLst/>
+          </a:prstGeom>
+          <a:noFill/>
+          <a:ln/>
+        </p:spPr>
+        <p:txBody>
+          <a:bodyPr wrap="square" lIns="0" tIns="0" rIns="0" bIns="0" rtlCol="0" anchor="ctr"/>
+          <a:lstStyle/>
+          <a:p>
+            <a:pPr algn="ctr" indent="0" marL="0">
+              <a:buNone/>
+            </a:pPr>
+            <a:r>
+              <a:rPr lang="en-US" sz="1200" dirty="0">
+                <a:solidFill>
+                  <a:srgbClr val="A26769"/>
+                </a:solidFill>
+                <a:latin typeface="Meiryo" pitchFamily="34" charset="0"/>
+                <a:ea typeface="Meiryo" pitchFamily="34" charset="-122"/>
+                <a:cs typeface="Meiryo" pitchFamily="34" charset="-120"/>
+              </a:rPr>
+              <a:t>円 / 月</a:t>
+            </a:r>
+            <a:endParaRPr lang="en-US" sz="1200" dirty="0"/>
+          </a:p>
+        </p:txBody>
+      </p:sp>
+      <p:sp>
+        <p:nvSpPr>
+          <p:cNvPr id="11" name="Text 9"/>
+          <p:cNvSpPr/>
+          <p:nvPr/>
+        </p:nvSpPr>
+        <p:spPr>
+          <a:xfrm>
+            <a:off x="4612538" y="2798064"/>
+            <a:ext cx="2966618" cy="475488"/>
+          </a:xfrm>
+          <a:prstGeom prst="rect">
+            <a:avLst/>
+          </a:prstGeom>
+          <a:noFill/>
+          <a:ln/>
+        </p:spPr>
+        <p:txBody>
+          <a:bodyPr wrap="square" lIns="0" tIns="0" rIns="0" bIns="0" rtlCol="0" anchor="t"/>
+          <a:lstStyle/>
+          <a:p>
+            <a:pPr algn="ctr" indent="0" marL="0">
+              <a:lnSpc>
+                <a:spcPct val="135000"/>
+              </a:lnSpc>
+              <a:buNone/>
+            </a:pPr>
+            <a:r>
+              <a:rPr lang="en-US" sz="1050" dirty="0">
+                <a:solidFill>
+                  <a:srgbClr val="7A7A7A"/>
+                </a:solidFill>
+                <a:latin typeface="Meiryo" pitchFamily="34" charset="0"/>
+                <a:ea typeface="Meiryo" pitchFamily="34" charset="-122"/>
+                <a:cs typeface="Meiryo" pitchFamily="34" charset="-120"/>
+              </a:rPr>
+              <a:t>既存のセンサー型</a:t>
+            </a:r>
+            <a:endParaRPr lang="en-US" sz="1050" dirty="0"/>
+          </a:p>
+          <a:p>
+            <a:pPr algn="ctr" indent="0" marL="0">
+              <a:lnSpc>
+                <a:spcPct val="135000"/>
+              </a:lnSpc>
+              <a:buNone/>
+            </a:pPr>
+            <a:r>
+              <a:rPr lang="en-US" sz="1050" dirty="0">
+                <a:solidFill>
+                  <a:srgbClr val="7A7A7A"/>
+                </a:solidFill>
+                <a:latin typeface="Meiryo" pitchFamily="34" charset="0"/>
+                <a:ea typeface="Meiryo" pitchFamily="34" charset="-122"/>
+                <a:cs typeface="Meiryo" pitchFamily="34" charset="-120"/>
+              </a:rPr>
+              <a:t>見守りサービスの相場</a:t>
+            </a:r>
+            <a:endParaRPr lang="en-US" sz="1050" dirty="0"/>
+          </a:p>
+        </p:txBody>
+      </p:sp>
+      <p:sp>
+        <p:nvSpPr>
+          <p:cNvPr id="12" name="Shape 10"/>
+          <p:cNvSpPr/>
+          <p:nvPr/>
+        </p:nvSpPr>
+        <p:spPr>
+          <a:xfrm>
+            <a:off x="8173517" y="1828800"/>
+            <a:ext cx="3240938" cy="1508760"/>
+          </a:xfrm>
+          <a:prstGeom prst="rect">
+            <a:avLst/>
+          </a:prstGeom>
+          <a:solidFill>
+            <a:srgbClr val="F7F4F2"/>
+          </a:solidFill>
+          <a:ln/>
+        </p:spPr>
+      </p:sp>
+      <p:sp>
+        <p:nvSpPr>
+          <p:cNvPr id="13" name="Text 11"/>
+          <p:cNvSpPr/>
+          <p:nvPr/>
+        </p:nvSpPr>
+        <p:spPr>
+          <a:xfrm>
+            <a:off x="8246669" y="1975104"/>
+            <a:ext cx="3094634" cy="548640"/>
+          </a:xfrm>
+          <a:prstGeom prst="rect">
+            <a:avLst/>
+          </a:prstGeom>
+          <a:noFill/>
+          <a:ln/>
+        </p:spPr>
+        <p:txBody>
+          <a:bodyPr wrap="square" lIns="0" tIns="0" rIns="0" bIns="0" rtlCol="0" anchor="ctr"/>
+          <a:lstStyle/>
+          <a:p>
+            <a:pPr algn="ctr" indent="0" marL="0">
+              <a:buNone/>
+            </a:pPr>
+            <a:r>
+              <a:rPr lang="en-US" sz="2800" b="1" dirty="0">
+                <a:solidFill>
+                  <a:srgbClr val="6D2E46"/>
+                </a:solidFill>
+                <a:latin typeface="Georgia" pitchFamily="34" charset="0"/>
+                <a:ea typeface="Georgia" pitchFamily="34" charset="-122"/>
+                <a:cs typeface="Georgia" pitchFamily="34" charset="-120"/>
+              </a:rPr>
+              <a:t>0</a:t>
+            </a:r>
+            <a:endParaRPr lang="en-US" sz="2800" dirty="0"/>
+          </a:p>
+        </p:txBody>
+      </p:sp>
+      <p:sp>
+        <p:nvSpPr>
+          <p:cNvPr id="14" name="Text 12"/>
+          <p:cNvSpPr/>
+          <p:nvPr/>
+        </p:nvSpPr>
+        <p:spPr>
+          <a:xfrm>
+            <a:off x="8310677" y="2523744"/>
+            <a:ext cx="2966618" cy="256032"/>
+          </a:xfrm>
+          <a:prstGeom prst="rect">
+            <a:avLst/>
+          </a:prstGeom>
+          <a:noFill/>
+          <a:ln/>
+        </p:spPr>
+        <p:txBody>
+          <a:bodyPr wrap="square" lIns="0" tIns="0" rIns="0" bIns="0" rtlCol="0" anchor="ctr"/>
+          <a:lstStyle/>
+          <a:p>
+            <a:pPr algn="ctr" indent="0" marL="0">
+              <a:buNone/>
+            </a:pPr>
+            <a:r>
+              <a:rPr lang="en-US" sz="1200" dirty="0">
+                <a:solidFill>
+                  <a:srgbClr val="A26769"/>
+                </a:solidFill>
+                <a:latin typeface="Meiryo" pitchFamily="34" charset="0"/>
+                <a:ea typeface="Meiryo" pitchFamily="34" charset="-122"/>
+                <a:cs typeface="Meiryo" pitchFamily="34" charset="-120"/>
+              </a:rPr>
+              <a:t>円</a:t>
+            </a:r>
+            <a:endParaRPr lang="en-US" sz="1200" dirty="0"/>
+          </a:p>
+        </p:txBody>
+      </p:sp>
+      <p:sp>
+        <p:nvSpPr>
+          <p:cNvPr id="15" name="Text 13"/>
+          <p:cNvSpPr/>
+          <p:nvPr/>
+        </p:nvSpPr>
+        <p:spPr>
+          <a:xfrm>
+            <a:off x="8310677" y="2798064"/>
+            <a:ext cx="2966618" cy="475488"/>
+          </a:xfrm>
+          <a:prstGeom prst="rect">
+            <a:avLst/>
+          </a:prstGeom>
+          <a:noFill/>
+          <a:ln/>
+        </p:spPr>
+        <p:txBody>
+          <a:bodyPr wrap="square" lIns="0" tIns="0" rIns="0" bIns="0" rtlCol="0" anchor="t"/>
+          <a:lstStyle/>
+          <a:p>
+            <a:pPr algn="ctr" indent="0" marL="0">
+              <a:lnSpc>
+                <a:spcPct val="135000"/>
+              </a:lnSpc>
+              <a:buNone/>
+            </a:pPr>
+            <a:r>
+              <a:rPr lang="en-US" sz="1050" dirty="0">
+                <a:solidFill>
+                  <a:srgbClr val="7A7A7A"/>
+                </a:solidFill>
+                <a:latin typeface="Meiryo" pitchFamily="34" charset="0"/>
+                <a:ea typeface="Meiryo" pitchFamily="34" charset="-122"/>
+                <a:cs typeface="Meiryo" pitchFamily="34" charset="-120"/>
+              </a:rPr>
+              <a:t>新規の見守り機器</a:t>
+            </a:r>
+            <a:endParaRPr lang="en-US" sz="1050" dirty="0"/>
+          </a:p>
+          <a:p>
+            <a:pPr algn="ctr" indent="0" marL="0">
+              <a:lnSpc>
+                <a:spcPct val="135000"/>
+              </a:lnSpc>
+              <a:buNone/>
+            </a:pPr>
+            <a:r>
+              <a:rPr lang="en-US" sz="1050" dirty="0">
+                <a:solidFill>
+                  <a:srgbClr val="7A7A7A"/>
+                </a:solidFill>
+                <a:latin typeface="Meiryo" pitchFamily="34" charset="0"/>
+                <a:ea typeface="Meiryo" pitchFamily="34" charset="-122"/>
+                <a:cs typeface="Meiryo" pitchFamily="34" charset="-120"/>
+              </a:rPr>
+              <a:t>（家電はすでにある）</a:t>
+            </a:r>
+            <a:endParaRPr lang="en-US" sz="1050" dirty="0"/>
+          </a:p>
+        </p:txBody>
+      </p:sp>
+      <p:sp>
+        <p:nvSpPr>
+          <p:cNvPr id="16" name="Text 14"/>
+          <p:cNvSpPr/>
+          <p:nvPr/>
+        </p:nvSpPr>
+        <p:spPr>
+          <a:xfrm>
+            <a:off x="777240" y="3520440"/>
+            <a:ext cx="10637215" cy="411480"/>
+          </a:xfrm>
+          <a:prstGeom prst="rect">
+            <a:avLst/>
+          </a:prstGeom>
+          <a:noFill/>
+          <a:ln/>
+        </p:spPr>
+        <p:txBody>
+          <a:bodyPr wrap="square" lIns="0" tIns="0" rIns="0" bIns="0" rtlCol="0" anchor="ctr"/>
+          <a:lstStyle/>
+          <a:p>
+            <a:pPr indent="0" marL="0">
+              <a:buNone/>
+            </a:pPr>
+            <a:r>
+              <a:rPr lang="en-US" sz="2000" b="1" dirty="0">
+                <a:solidFill>
+                  <a:srgbClr val="2B2B2B"/>
+                </a:solidFill>
+                <a:latin typeface="Georgia" pitchFamily="34" charset="0"/>
+                <a:ea typeface="Georgia" pitchFamily="34" charset="-122"/>
+                <a:cs typeface="Georgia" pitchFamily="34" charset="-120"/>
+              </a:rPr>
+              <a:t>成立の条件は「安いこと」ではなく、「置けること」</a:t>
+            </a:r>
+            <a:endParaRPr lang="en-US" sz="2000" dirty="0"/>
+          </a:p>
+        </p:txBody>
+      </p:sp>
+      <p:sp>
+        <p:nvSpPr>
+          <p:cNvPr id="17" name="Shape 15"/>
+          <p:cNvSpPr/>
+          <p:nvPr/>
+        </p:nvSpPr>
+        <p:spPr>
+          <a:xfrm>
+            <a:off x="777240" y="4142232"/>
+            <a:ext cx="36576" cy="310896"/>
           </a:xfrm>
           <a:prstGeom prst="rect">
             <a:avLst/>
@@ -4824,92 +5230,115 @@
       </p:sp>
       <p:sp>
         <p:nvSpPr>
-          <p:cNvPr id="7" name="Text 5"/>
-          <p:cNvSpPr/>
-          <p:nvPr/>
-        </p:nvSpPr>
-        <p:spPr>
-          <a:xfrm>
-            <a:off x="1005840" y="3108960"/>
-            <a:ext cx="3164738" cy="292608"/>
-          </a:xfrm>
-          <a:prstGeom prst="rect">
-            <a:avLst/>
-          </a:prstGeom>
-          <a:noFill/>
-          <a:ln/>
-        </p:spPr>
-        <p:txBody>
-          <a:bodyPr wrap="square" lIns="0" tIns="0" rIns="0" bIns="0" rtlCol="0" anchor="ctr"/>
-          <a:lstStyle/>
-          <a:p>
-            <a:pPr indent="0" marL="0">
-              <a:buNone/>
-            </a:pPr>
-            <a:r>
-              <a:rPr lang="en-US" sz="1200" dirty="0">
-                <a:solidFill>
-                  <a:srgbClr val="7A7A7A"/>
-                </a:solidFill>
-                <a:latin typeface="Meiryo" pitchFamily="34" charset="0"/>
-                <a:ea typeface="Meiryo" pitchFamily="34" charset="-122"/>
-                <a:cs typeface="Meiryo" pitchFamily="34" charset="-120"/>
-              </a:rPr>
-              <a:t>テスト（全合格）</a:t>
-            </a:r>
-            <a:endParaRPr lang="en-US" sz="1200" dirty="0"/>
-          </a:p>
-        </p:txBody>
-      </p:sp>
-      <p:sp>
-        <p:nvSpPr>
-          <p:cNvPr id="8" name="Text 6"/>
-          <p:cNvSpPr/>
-          <p:nvPr/>
-        </p:nvSpPr>
-        <p:spPr>
-          <a:xfrm>
-            <a:off x="4627778" y="2148840"/>
-            <a:ext cx="3164738" cy="822960"/>
-          </a:xfrm>
-          <a:prstGeom prst="rect">
-            <a:avLst/>
-          </a:prstGeom>
-          <a:noFill/>
-          <a:ln/>
-        </p:spPr>
-        <p:txBody>
-          <a:bodyPr wrap="square" lIns="0" tIns="0" rIns="0" bIns="0" rtlCol="0" anchor="ctr"/>
-          <a:lstStyle/>
-          <a:p>
-            <a:pPr indent="0" marL="0">
-              <a:buNone/>
-            </a:pPr>
-            <a:r>
-              <a:rPr lang="en-US" sz="4600" b="1" dirty="0">
+          <p:cNvPr id="18" name="Text 16"/>
+          <p:cNvSpPr/>
+          <p:nvPr/>
+        </p:nvSpPr>
+        <p:spPr>
+          <a:xfrm>
+            <a:off x="978408" y="4023360"/>
+            <a:ext cx="2286000" cy="548640"/>
+          </a:xfrm>
+          <a:prstGeom prst="rect">
+            <a:avLst/>
+          </a:prstGeom>
+          <a:noFill/>
+          <a:ln/>
+        </p:spPr>
+        <p:txBody>
+          <a:bodyPr wrap="square" lIns="0" tIns="0" rIns="0" bIns="0" rtlCol="0" anchor="ctr"/>
+          <a:lstStyle/>
+          <a:p>
+            <a:pPr indent="0" marL="0">
+              <a:buNone/>
+            </a:pPr>
+            <a:r>
+              <a:rPr lang="en-US" sz="1250" b="1" dirty="0">
                 <a:solidFill>
                   <a:srgbClr val="6D2E46"/>
                 </a:solidFill>
-                <a:latin typeface="Georgia" pitchFamily="34" charset="0"/>
-                <a:ea typeface="Georgia" pitchFamily="34" charset="-122"/>
-                <a:cs typeface="Georgia" pitchFamily="34" charset="-120"/>
-              </a:rPr>
-              <a:t>0</a:t>
-            </a:r>
-            <a:endParaRPr lang="en-US" sz="4600" dirty="0"/>
-          </a:p>
-        </p:txBody>
-      </p:sp>
-      <p:sp>
-        <p:nvSpPr>
-          <p:cNvPr id="9" name="Shape 7"/>
-          <p:cNvSpPr/>
-          <p:nvPr/>
-        </p:nvSpPr>
-        <p:spPr>
-          <a:xfrm>
-            <a:off x="4627778" y="2999232"/>
-            <a:ext cx="822960" cy="27432"/>
+                <a:latin typeface="Meiryo" pitchFamily="34" charset="0"/>
+                <a:ea typeface="Meiryo" pitchFamily="34" charset="-122"/>
+                <a:cs typeface="Meiryo" pitchFamily="34" charset="-120"/>
+              </a:rPr>
+              <a:t>導入の障壁を外した</a:t>
+            </a:r>
+            <a:endParaRPr lang="en-US" sz="1250" dirty="0"/>
+          </a:p>
+        </p:txBody>
+      </p:sp>
+      <p:sp>
+        <p:nvSpPr>
+          <p:cNvPr id="19" name="Text 17"/>
+          <p:cNvSpPr/>
+          <p:nvPr/>
+        </p:nvSpPr>
+        <p:spPr>
+          <a:xfrm>
+            <a:off x="3383280" y="4023360"/>
+            <a:ext cx="8031175" cy="548640"/>
+          </a:xfrm>
+          <a:prstGeom prst="rect">
+            <a:avLst/>
+          </a:prstGeom>
+          <a:noFill/>
+          <a:ln/>
+        </p:spPr>
+        <p:txBody>
+          <a:bodyPr wrap="square" lIns="0" tIns="0" rIns="0" bIns="0" rtlCol="0" anchor="ctr"/>
+          <a:lstStyle/>
+          <a:p>
+            <a:pPr indent="0" marL="0">
+              <a:lnSpc>
+                <a:spcPct val="140000"/>
+              </a:lnSpc>
+              <a:buNone/>
+            </a:pPr>
+            <a:r>
+              <a:rPr lang="en-US" sz="1150" dirty="0">
+                <a:solidFill>
+                  <a:srgbClr val="2B2B2B"/>
+                </a:solidFill>
+                <a:latin typeface="Meiryo" pitchFamily="34" charset="0"/>
+                <a:ea typeface="Meiryo" pitchFamily="34" charset="-122"/>
+                <a:cs typeface="Meiryo" pitchFamily="34" charset="-120"/>
+              </a:rPr>
+              <a:t>カメラもマットも要らない。スマートプラグを既存の家電に挿すだけ。</a:t>
+            </a:r>
+            <a:endParaRPr lang="en-US" sz="1150" dirty="0"/>
+          </a:p>
+          <a:p>
+            <a:pPr indent="0" marL="0">
+              <a:lnSpc>
+                <a:spcPct val="140000"/>
+              </a:lnSpc>
+              <a:buNone/>
+            </a:pPr>
+            <a:r>
+              <a:rPr lang="en-US" sz="1150" dirty="0">
+                <a:solidFill>
+                  <a:srgbClr val="2B2B2B"/>
+                </a:solidFill>
+                <a:latin typeface="Meiryo" pitchFamily="34" charset="0"/>
+                <a:ea typeface="Meiryo" pitchFamily="34" charset="-122"/>
+                <a:cs typeface="Meiryo" pitchFamily="34" charset="-120"/>
+              </a:rPr>
+              <a:t>「見張られる」と感じさせないから、本人が拒まない。</a:t>
+            </a:r>
+            <a:endParaRPr lang="en-US" sz="1150" dirty="0"/>
+          </a:p>
+        </p:txBody>
+      </p:sp>
+      <p:sp>
+        <p:nvSpPr>
+          <p:cNvPr id="20" name="Shape 18"/>
+          <p:cNvSpPr/>
+          <p:nvPr/>
+        </p:nvSpPr>
+        <p:spPr>
+          <a:xfrm>
+            <a:off x="777240" y="4800600"/>
+            <a:ext cx="36576" cy="310896"/>
           </a:xfrm>
           <a:prstGeom prst="rect">
             <a:avLst/>
@@ -4922,92 +5351,115 @@
       </p:sp>
       <p:sp>
         <p:nvSpPr>
-          <p:cNvPr id="10" name="Text 8"/>
-          <p:cNvSpPr/>
-          <p:nvPr/>
-        </p:nvSpPr>
-        <p:spPr>
-          <a:xfrm>
-            <a:off x="4627778" y="3108960"/>
-            <a:ext cx="3164738" cy="292608"/>
-          </a:xfrm>
-          <a:prstGeom prst="rect">
-            <a:avLst/>
-          </a:prstGeom>
-          <a:noFill/>
-          <a:ln/>
-        </p:spPr>
-        <p:txBody>
-          <a:bodyPr wrap="square" lIns="0" tIns="0" rIns="0" bIns="0" rtlCol="0" anchor="ctr"/>
-          <a:lstStyle/>
-          <a:p>
-            <a:pPr indent="0" marL="0">
-              <a:buNone/>
-            </a:pPr>
-            <a:r>
-              <a:rPr lang="en-US" sz="1200" dirty="0">
-                <a:solidFill>
-                  <a:srgbClr val="7A7A7A"/>
-                </a:solidFill>
-                <a:latin typeface="Meiryo" pitchFamily="34" charset="0"/>
-                <a:ea typeface="Meiryo" pitchFamily="34" charset="-122"/>
-                <a:cs typeface="Meiryo" pitchFamily="34" charset="-120"/>
-              </a:rPr>
-              <a:t>必要な API キー（デモ実行時）</a:t>
-            </a:r>
-            <a:endParaRPr lang="en-US" sz="1200" dirty="0"/>
-          </a:p>
-        </p:txBody>
-      </p:sp>
-      <p:sp>
-        <p:nvSpPr>
-          <p:cNvPr id="11" name="Text 9"/>
-          <p:cNvSpPr/>
-          <p:nvPr/>
-        </p:nvSpPr>
-        <p:spPr>
-          <a:xfrm>
-            <a:off x="8249717" y="2148840"/>
-            <a:ext cx="3164738" cy="822960"/>
-          </a:xfrm>
-          <a:prstGeom prst="rect">
-            <a:avLst/>
-          </a:prstGeom>
-          <a:noFill/>
-          <a:ln/>
-        </p:spPr>
-        <p:txBody>
-          <a:bodyPr wrap="square" lIns="0" tIns="0" rIns="0" bIns="0" rtlCol="0" anchor="ctr"/>
-          <a:lstStyle/>
-          <a:p>
-            <a:pPr indent="0" marL="0">
-              <a:buNone/>
-            </a:pPr>
-            <a:r>
-              <a:rPr lang="en-US" sz="4600" b="1" dirty="0">
+          <p:cNvPr id="21" name="Text 19"/>
+          <p:cNvSpPr/>
+          <p:nvPr/>
+        </p:nvSpPr>
+        <p:spPr>
+          <a:xfrm>
+            <a:off x="978408" y="4681728"/>
+            <a:ext cx="2286000" cy="548640"/>
+          </a:xfrm>
+          <a:prstGeom prst="rect">
+            <a:avLst/>
+          </a:prstGeom>
+          <a:noFill/>
+          <a:ln/>
+        </p:spPr>
+        <p:txBody>
+          <a:bodyPr wrap="square" lIns="0" tIns="0" rIns="0" bIns="0" rtlCol="0" anchor="ctr"/>
+          <a:lstStyle/>
+          <a:p>
+            <a:pPr indent="0" marL="0">
+              <a:buNone/>
+            </a:pPr>
+            <a:r>
+              <a:rPr lang="en-US" sz="1250" b="1" dirty="0">
                 <a:solidFill>
                   <a:srgbClr val="6D2E46"/>
                 </a:solidFill>
-                <a:latin typeface="Georgia" pitchFamily="34" charset="0"/>
-                <a:ea typeface="Georgia" pitchFamily="34" charset="-122"/>
-                <a:cs typeface="Georgia" pitchFamily="34" charset="-120"/>
-              </a:rPr>
-              <a:t>3</a:t>
-            </a:r>
-            <a:endParaRPr lang="en-US" sz="4600" dirty="0"/>
-          </a:p>
-        </p:txBody>
-      </p:sp>
-      <p:sp>
-        <p:nvSpPr>
-          <p:cNvPr id="12" name="Shape 10"/>
-          <p:cNvSpPr/>
-          <p:nvPr/>
-        </p:nvSpPr>
-        <p:spPr>
-          <a:xfrm>
-            <a:off x="8249717" y="2999232"/>
-            <a:ext cx="822960" cy="27432"/>
+                <a:latin typeface="Meiryo" pitchFamily="34" charset="0"/>
+                <a:ea typeface="Meiryo" pitchFamily="34" charset="-122"/>
+                <a:cs typeface="Meiryo" pitchFamily="34" charset="-120"/>
+              </a:rPr>
+              <a:t>受け手の負担も外した</a:t>
+            </a:r>
+            <a:endParaRPr lang="en-US" sz="1250" dirty="0"/>
+          </a:p>
+        </p:txBody>
+      </p:sp>
+      <p:sp>
+        <p:nvSpPr>
+          <p:cNvPr id="22" name="Text 20"/>
+          <p:cNvSpPr/>
+          <p:nvPr/>
+        </p:nvSpPr>
+        <p:spPr>
+          <a:xfrm>
+            <a:off x="3383280" y="4681728"/>
+            <a:ext cx="8031175" cy="548640"/>
+          </a:xfrm>
+          <a:prstGeom prst="rect">
+            <a:avLst/>
+          </a:prstGeom>
+          <a:noFill/>
+          <a:ln/>
+        </p:spPr>
+        <p:txBody>
+          <a:bodyPr wrap="square" lIns="0" tIns="0" rIns="0" bIns="0" rtlCol="0" anchor="ctr"/>
+          <a:lstStyle/>
+          <a:p>
+            <a:pPr indent="0" marL="0">
+              <a:lnSpc>
+                <a:spcPct val="140000"/>
+              </a:lnSpc>
+              <a:buNone/>
+            </a:pPr>
+            <a:r>
+              <a:rPr lang="en-US" sz="1150" dirty="0">
+                <a:solidFill>
+                  <a:srgbClr val="2B2B2B"/>
+                </a:solidFill>
+                <a:latin typeface="Meiryo" pitchFamily="34" charset="0"/>
+                <a:ea typeface="Meiryo" pitchFamily="34" charset="-122"/>
+                <a:cs typeface="Meiryo" pitchFamily="34" charset="-120"/>
+              </a:rPr>
+              <a:t>専用アプリを入れさせない。通知も操作も LINE の中で完結する。</a:t>
+            </a:r>
+            <a:endParaRPr lang="en-US" sz="1150" dirty="0"/>
+          </a:p>
+          <a:p>
+            <a:pPr indent="0" marL="0">
+              <a:lnSpc>
+                <a:spcPct val="140000"/>
+              </a:lnSpc>
+              <a:buNone/>
+            </a:pPr>
+            <a:r>
+              <a:rPr lang="en-US" sz="1150" dirty="0">
+                <a:solidFill>
+                  <a:srgbClr val="2B2B2B"/>
+                </a:solidFill>
+                <a:latin typeface="Meiryo" pitchFamily="34" charset="0"/>
+                <a:ea typeface="Meiryo" pitchFamily="34" charset="-122"/>
+                <a:cs typeface="Meiryo" pitchFamily="34" charset="-120"/>
+              </a:rPr>
+              <a:t>インストール率という最大の離脱要因が、そもそも発生しない。</a:t>
+            </a:r>
+            <a:endParaRPr lang="en-US" sz="1150" dirty="0"/>
+          </a:p>
+        </p:txBody>
+      </p:sp>
+      <p:sp>
+        <p:nvSpPr>
+          <p:cNvPr id="23" name="Shape 21"/>
+          <p:cNvSpPr/>
+          <p:nvPr/>
+        </p:nvSpPr>
+        <p:spPr>
+          <a:xfrm>
+            <a:off x="777240" y="5458968"/>
+            <a:ext cx="36576" cy="310896"/>
           </a:xfrm>
           <a:prstGeom prst="rect">
             <a:avLst/>
@@ -5020,128 +5472,92 @@
       </p:sp>
       <p:sp>
         <p:nvSpPr>
-          <p:cNvPr id="13" name="Text 11"/>
-          <p:cNvSpPr/>
-          <p:nvPr/>
-        </p:nvSpPr>
-        <p:spPr>
-          <a:xfrm>
-            <a:off x="8249717" y="3108960"/>
-            <a:ext cx="3164738" cy="292608"/>
-          </a:xfrm>
-          <a:prstGeom prst="rect">
-            <a:avLst/>
-          </a:prstGeom>
-          <a:noFill/>
-          <a:ln/>
-        </p:spPr>
-        <p:txBody>
-          <a:bodyPr wrap="square" lIns="0" tIns="0" rIns="0" bIns="0" rtlCol="0" anchor="ctr"/>
-          <a:lstStyle/>
-          <a:p>
-            <a:pPr indent="0" marL="0">
-              <a:buNone/>
-            </a:pPr>
-            <a:r>
-              <a:rPr lang="en-US" sz="1200" dirty="0">
-                <a:solidFill>
-                  <a:srgbClr val="7A7A7A"/>
-                </a:solidFill>
-                <a:latin typeface="Meiryo" pitchFamily="34" charset="0"/>
-                <a:ea typeface="Meiryo" pitchFamily="34" charset="-122"/>
-                <a:cs typeface="Meiryo" pitchFamily="34" charset="-120"/>
-              </a:rPr>
-              <a:t>記録した「沈黙した障害」</a:t>
-            </a:r>
-            <a:endParaRPr lang="en-US" sz="1200" dirty="0"/>
-          </a:p>
-        </p:txBody>
-      </p:sp>
-      <p:sp>
-        <p:nvSpPr>
-          <p:cNvPr id="14" name="Shape 12"/>
-          <p:cNvSpPr/>
-          <p:nvPr/>
-        </p:nvSpPr>
-        <p:spPr>
-          <a:xfrm>
-            <a:off x="1005840" y="3794760"/>
-            <a:ext cx="10408615" cy="1371600"/>
-          </a:xfrm>
-          <a:prstGeom prst="rect">
-            <a:avLst/>
-          </a:prstGeom>
-          <a:solidFill>
-            <a:srgbClr val="F7F4F2"/>
-          </a:solidFill>
-          <a:ln/>
-        </p:spPr>
-      </p:sp>
-      <p:sp>
-        <p:nvSpPr>
-          <p:cNvPr id="15" name="Text 13"/>
-          <p:cNvSpPr/>
-          <p:nvPr/>
-        </p:nvSpPr>
-        <p:spPr>
-          <a:xfrm>
-            <a:off x="1280160" y="3968496"/>
-            <a:ext cx="1188720" cy="310896"/>
-          </a:xfrm>
-          <a:prstGeom prst="rect">
-            <a:avLst/>
-          </a:prstGeom>
-          <a:noFill/>
-          <a:ln/>
-        </p:spPr>
-        <p:txBody>
-          <a:bodyPr wrap="square" lIns="0" tIns="0" rIns="0" bIns="0" rtlCol="0" anchor="ctr"/>
-          <a:lstStyle/>
-          <a:p>
-            <a:pPr indent="0" marL="0">
+          <p:cNvPr id="24" name="Text 22"/>
+          <p:cNvSpPr/>
+          <p:nvPr/>
+        </p:nvSpPr>
+        <p:spPr>
+          <a:xfrm>
+            <a:off x="978408" y="5340096"/>
+            <a:ext cx="2286000" cy="548640"/>
+          </a:xfrm>
+          <a:prstGeom prst="rect">
+            <a:avLst/>
+          </a:prstGeom>
+          <a:noFill/>
+          <a:ln/>
+        </p:spPr>
+        <p:txBody>
+          <a:bodyPr wrap="square" lIns="0" tIns="0" rIns="0" bIns="0" rtlCol="0" anchor="ctr"/>
+          <a:lstStyle/>
+          <a:p>
+            <a:pPr indent="0" marL="0">
+              <a:buNone/>
+            </a:pPr>
+            <a:r>
+              <a:rPr lang="en-US" sz="1250" b="1" dirty="0">
+                <a:solidFill>
+                  <a:srgbClr val="6D2E46"/>
+                </a:solidFill>
+                <a:latin typeface="Meiryo" pitchFamily="34" charset="0"/>
+                <a:ea typeface="Meiryo" pitchFamily="34" charset="-122"/>
+                <a:cs typeface="Meiryo" pitchFamily="34" charset="-120"/>
+              </a:rPr>
+              <a:t>原価が積み上がらない</a:t>
+            </a:r>
+            <a:endParaRPr lang="en-US" sz="1250" dirty="0"/>
+          </a:p>
+        </p:txBody>
+      </p:sp>
+      <p:sp>
+        <p:nvSpPr>
+          <p:cNvPr id="25" name="Text 23"/>
+          <p:cNvSpPr/>
+          <p:nvPr/>
+        </p:nvSpPr>
+        <p:spPr>
+          <a:xfrm>
+            <a:off x="3383280" y="5340096"/>
+            <a:ext cx="8031175" cy="548640"/>
+          </a:xfrm>
+          <a:prstGeom prst="rect">
+            <a:avLst/>
+          </a:prstGeom>
+          <a:noFill/>
+          <a:ln/>
+        </p:spPr>
+        <p:txBody>
+          <a:bodyPr wrap="square" lIns="0" tIns="0" rIns="0" bIns="0" rtlCol="0" anchor="ctr"/>
+          <a:lstStyle/>
+          <a:p>
+            <a:pPr indent="0" marL="0">
+              <a:lnSpc>
+                <a:spcPct val="140000"/>
+              </a:lnSpc>
               <a:buNone/>
             </a:pPr>
             <a:r>
               <a:rPr lang="en-US" sz="1150" dirty="0">
                 <a:solidFill>
-                  <a:srgbClr val="A26769"/>
-                </a:solidFill>
-                <a:latin typeface="Meiryo" pitchFamily="34" charset="0"/>
-                <a:ea typeface="Meiryo" pitchFamily="34" charset="-122"/>
-                <a:cs typeface="Meiryo" pitchFamily="34" charset="-120"/>
-              </a:rPr>
-              <a:t>コード</a:t>
+                  <a:srgbClr val="2B2B2B"/>
+                </a:solidFill>
+                <a:latin typeface="Meiryo" pitchFamily="34" charset="0"/>
+                <a:ea typeface="Meiryo" pitchFamily="34" charset="-122"/>
+                <a:cs typeface="Meiryo" pitchFamily="34" charset="-120"/>
+              </a:rPr>
+              <a:t>判定はルールベース、LLM は会話時のみ。</a:t>
             </a:r>
             <a:endParaRPr lang="en-US" sz="1150" dirty="0"/>
           </a:p>
-        </p:txBody>
-      </p:sp>
-      <p:sp>
-        <p:nvSpPr>
-          <p:cNvPr id="16" name="Text 14"/>
-          <p:cNvSpPr/>
-          <p:nvPr/>
-        </p:nvSpPr>
-        <p:spPr>
-          <a:xfrm>
-            <a:off x="2560320" y="3968496"/>
-            <a:ext cx="8351215" cy="310896"/>
-          </a:xfrm>
-          <a:prstGeom prst="rect">
-            <a:avLst/>
-          </a:prstGeom>
-          <a:noFill/>
-          <a:ln/>
-        </p:spPr>
-        <p:txBody>
-          <a:bodyPr wrap="square" lIns="0" tIns="0" rIns="0" bIns="0" rtlCol="0" anchor="ctr"/>
-          <a:lstStyle/>
-          <a:p>
-            <a:pPr indent="0" marL="0">
-              <a:buNone/>
-            </a:pPr>
-            <a:r>
-              <a:rPr lang="en-US" sz="1200" dirty="0">
+          <a:p>
+            <a:pPr indent="0" marL="0">
+              <a:lnSpc>
+                <a:spcPct val="140000"/>
+              </a:lnSpc>
+              <a:buNone/>
+            </a:pPr>
+            <a:r>
+              <a:rPr lang="en-US" sz="1150" dirty="0">
                 <a:solidFill>
                   <a:srgbClr val="2B2B2B"/>
                 </a:solidFill>
@@ -5149,46 +5565,7 @@
                 <a:ea typeface="Meiryo" pitchFamily="34" charset="-122"/>
                 <a:cs typeface="Meiryo" pitchFamily="34" charset="-120"/>
               </a:rPr>
-              <a:t>https://github.com/monoqlo78/mimamoritai-careroute-ai</a:t>
-            </a:r>
-            <a:endParaRPr lang="en-US" sz="1200" dirty="0"/>
-          </a:p>
-        </p:txBody>
-      </p:sp>
-      <p:sp>
-        <p:nvSpPr>
-          <p:cNvPr id="17" name="Text 15"/>
-          <p:cNvSpPr/>
-          <p:nvPr/>
-        </p:nvSpPr>
-        <p:spPr>
-          <a:xfrm>
-            <a:off x="1280160" y="4352544"/>
-            <a:ext cx="1188720" cy="310896"/>
-          </a:xfrm>
-          <a:prstGeom prst="rect">
-            <a:avLst/>
-          </a:prstGeom>
-          <a:noFill/>
-          <a:ln/>
-        </p:spPr>
-        <p:txBody>
-          <a:bodyPr wrap="square" lIns="0" tIns="0" rIns="0" bIns="0" rtlCol="0" anchor="ctr"/>
-          <a:lstStyle/>
-          <a:p>
-            <a:pPr indent="0" marL="0">
-              <a:buNone/>
-            </a:pPr>
-            <a:r>
-              <a:rPr lang="en-US" sz="1150" dirty="0">
-                <a:solidFill>
-                  <a:srgbClr val="A26769"/>
-                </a:solidFill>
-                <a:latin typeface="Meiryo" pitchFamily="34" charset="0"/>
-                <a:ea typeface="Meiryo" pitchFamily="34" charset="-122"/>
-                <a:cs typeface="Meiryo" pitchFamily="34" charset="-120"/>
-              </a:rPr>
-              <a:t>デモ動画</a:t>
+              <a:t>1世帯あたりの固定費が小さく、月額数百円台でも粗利が残る。</a:t>
             </a:r>
             <a:endParaRPr lang="en-US" sz="1150" dirty="0"/>
           </a:p>
@@ -5196,163 +5573,7 @@
       </p:sp>
       <p:sp>
         <p:nvSpPr>
-          <p:cNvPr id="18" name="Text 16"/>
-          <p:cNvSpPr/>
-          <p:nvPr/>
-        </p:nvSpPr>
-        <p:spPr>
-          <a:xfrm>
-            <a:off x="2560320" y="4352544"/>
-            <a:ext cx="8351215" cy="310896"/>
-          </a:xfrm>
-          <a:prstGeom prst="rect">
-            <a:avLst/>
-          </a:prstGeom>
-          <a:noFill/>
-          <a:ln/>
-        </p:spPr>
-        <p:txBody>
-          <a:bodyPr wrap="square" lIns="0" tIns="0" rIns="0" bIns="0" rtlCol="0" anchor="ctr"/>
-          <a:lstStyle/>
-          <a:p>
-            <a:pPr indent="0" marL="0">
-              <a:buNone/>
-            </a:pPr>
-            <a:r>
-              <a:rPr lang="en-US" sz="1200" dirty="0">
-                <a:solidFill>
-                  <a:srgbClr val="2B2B2B"/>
-                </a:solidFill>
-                <a:latin typeface="Meiryo" pitchFamily="34" charset="0"/>
-                <a:ea typeface="Meiryo" pitchFamily="34" charset="-122"/>
-                <a:cs typeface="Meiryo" pitchFamily="34" charset="-120"/>
-              </a:rPr>
-              <a:t>docs/demo/mimamoritai-demo.mp4（字幕・ナレーション入り / 3分11秒）</a:t>
-            </a:r>
-            <a:endParaRPr lang="en-US" sz="1200" dirty="0"/>
-          </a:p>
-        </p:txBody>
-      </p:sp>
-      <p:sp>
-        <p:nvSpPr>
-          <p:cNvPr id="19" name="Text 17"/>
-          <p:cNvSpPr/>
-          <p:nvPr/>
-        </p:nvSpPr>
-        <p:spPr>
-          <a:xfrm>
-            <a:off x="1280160" y="4736592"/>
-            <a:ext cx="1188720" cy="310896"/>
-          </a:xfrm>
-          <a:prstGeom prst="rect">
-            <a:avLst/>
-          </a:prstGeom>
-          <a:noFill/>
-          <a:ln/>
-        </p:spPr>
-        <p:txBody>
-          <a:bodyPr wrap="square" lIns="0" tIns="0" rIns="0" bIns="0" rtlCol="0" anchor="ctr"/>
-          <a:lstStyle/>
-          <a:p>
-            <a:pPr indent="0" marL="0">
-              <a:buNone/>
-            </a:pPr>
-            <a:r>
-              <a:rPr lang="en-US" sz="1150" dirty="0">
-                <a:solidFill>
-                  <a:srgbClr val="A26769"/>
-                </a:solidFill>
-                <a:latin typeface="Meiryo" pitchFamily="34" charset="0"/>
-                <a:ea typeface="Meiryo" pitchFamily="34" charset="-122"/>
-                <a:cs typeface="Meiryo" pitchFamily="34" charset="-120"/>
-              </a:rPr>
-              <a:t>解説記事</a:t>
-            </a:r>
-            <a:endParaRPr lang="en-US" sz="1150" dirty="0"/>
-          </a:p>
-        </p:txBody>
-      </p:sp>
-      <p:sp>
-        <p:nvSpPr>
-          <p:cNvPr id="20" name="Text 18"/>
-          <p:cNvSpPr/>
-          <p:nvPr/>
-        </p:nvSpPr>
-        <p:spPr>
-          <a:xfrm>
-            <a:off x="2560320" y="4736592"/>
-            <a:ext cx="8351215" cy="310896"/>
-          </a:xfrm>
-          <a:prstGeom prst="rect">
-            <a:avLst/>
-          </a:prstGeom>
-          <a:noFill/>
-          <a:ln/>
-        </p:spPr>
-        <p:txBody>
-          <a:bodyPr wrap="square" lIns="0" tIns="0" rIns="0" bIns="0" rtlCol="0" anchor="ctr"/>
-          <a:lstStyle/>
-          <a:p>
-            <a:pPr indent="0" marL="0">
-              <a:buNone/>
-            </a:pPr>
-            <a:r>
-              <a:rPr lang="en-US" sz="1200" dirty="0">
-                <a:solidFill>
-                  <a:srgbClr val="2B2B2B"/>
-                </a:solidFill>
-                <a:latin typeface="Meiryo" pitchFamily="34" charset="0"/>
-                <a:ea typeface="Meiryo" pitchFamily="34" charset="-122"/>
-                <a:cs typeface="Meiryo" pitchFamily="34" charset="-120"/>
-              </a:rPr>
-              <a:t>https://qiita.com/monoqlo78/items/dcac9e0ee6c1d0bfe07d</a:t>
-            </a:r>
-            <a:endParaRPr lang="en-US" sz="1200" dirty="0"/>
-          </a:p>
-        </p:txBody>
-      </p:sp>
-      <p:sp>
-        <p:nvSpPr>
-          <p:cNvPr id="21" name="Text 19"/>
-          <p:cNvSpPr/>
-          <p:nvPr/>
-        </p:nvSpPr>
-        <p:spPr>
-          <a:xfrm>
-            <a:off x="1005840" y="5440680"/>
-            <a:ext cx="10408615" cy="365760"/>
-          </a:xfrm>
-          <a:prstGeom prst="rect">
-            <a:avLst/>
-          </a:prstGeom>
-          <a:noFill/>
-          <a:ln/>
-        </p:spPr>
-        <p:txBody>
-          <a:bodyPr wrap="square" lIns="0" tIns="0" rIns="0" bIns="0" rtlCol="0" anchor="ctr"/>
-          <a:lstStyle/>
-          <a:p>
-            <a:pPr indent="0" marL="0">
-              <a:buNone/>
-            </a:pPr>
-            <a:r>
-              <a:rPr lang="en-US" sz="1300" i="1" dirty="0">
-                <a:solidFill>
-                  <a:srgbClr val="6D2E46"/>
-                </a:solidFill>
-                <a:latin typeface="Meiryo" pitchFamily="34" charset="0"/>
-                <a:ea typeface="Meiryo" pitchFamily="34" charset="-122"/>
-                <a:cs typeface="Meiryo" pitchFamily="34" charset="-120"/>
-              </a:rPr>
-              <a:t>安全判定を LLM の外側に置いたか、内側でお願いしたか。そこが一番の分岐点だった。</a:t>
-            </a:r>
-            <a:endParaRPr lang="en-US" sz="1300" dirty="0"/>
-          </a:p>
-        </p:txBody>
-      </p:sp>
-      <p:sp>
-        <p:nvSpPr>
-          <p:cNvPr id="22" name="Shape 20"/>
+          <p:cNvPr id="26" name="Shape 24"/>
           <p:cNvSpPr/>
           <p:nvPr/>
         </p:nvSpPr>
@@ -5375,7 +5596,7 @@
       </p:sp>
       <p:sp>
         <p:nvSpPr>
-          <p:cNvPr id="23" name="Text 21"/>
+          <p:cNvPr id="27" name="Text 25"/>
           <p:cNvSpPr/>
           <p:nvPr/>
         </p:nvSpPr>
@@ -5414,7 +5635,7 @@
       </p:sp>
       <p:sp>
         <p:nvSpPr>
-          <p:cNvPr id="24" name="Text 22"/>
+          <p:cNvPr id="28" name="Text 26"/>
           <p:cNvSpPr/>
           <p:nvPr/>
         </p:nvSpPr>
@@ -5446,6 +5667,824 @@
                 <a:cs typeface="Meiryo" pitchFamily="34" charset="-120"/>
               </a:rPr>
               <a:t>13</a:t>
+            </a:r>
+            <a:endParaRPr lang="en-US" sz="950" dirty="0"/>
+          </a:p>
+        </p:txBody>
+      </p:sp>
+    </p:spTree>
+  </p:cSld>
+  <p:clrMapOvr>
+    <a:masterClrMapping/>
+  </p:clrMapOvr>
+</p:sld>
+</file>
+
+<file path=ppt/slides/slide14.xml><?xml version="1.0" encoding="utf-8"?>
+<p:sld xmlns:a="http://schemas.openxmlformats.org/drawingml/2006/main" xmlns:r="http://schemas.openxmlformats.org/officeDocument/2006/relationships" xmlns:p="http://schemas.openxmlformats.org/presentationml/2006/main">
+  <p:cSld name="Slide 14">
+    <p:bg>
+      <p:bgPr>
+        <a:solidFill>
+          <a:srgbClr val="FFFFFF"/>
+        </a:solidFill>
+      </p:bgPr>
+    </p:bg>
+    <p:spTree>
+      <p:nvGrpSpPr>
+        <p:cNvPr id="1" name=""/>
+        <p:cNvGrpSpPr/>
+        <p:nvPr/>
+      </p:nvGrpSpPr>
+      <p:grpSpPr>
+        <a:xfrm>
+          <a:off x="0" y="0"/>
+          <a:ext cx="0" cy="0"/>
+          <a:chOff x="0" y="0"/>
+          <a:chExt cx="0" cy="0"/>
+        </a:xfrm>
+      </p:grpSpPr>
+      <p:sp>
+        <p:nvSpPr>
+          <p:cNvPr id="2" name="Shape 0"/>
+          <p:cNvSpPr/>
+          <p:nvPr/>
+        </p:nvSpPr>
+        <p:spPr>
+          <a:xfrm>
+            <a:off x="0" y="0"/>
+            <a:ext cx="82296" cy="6858000"/>
+          </a:xfrm>
+          <a:prstGeom prst="rect">
+            <a:avLst/>
+          </a:prstGeom>
+          <a:solidFill>
+            <a:srgbClr val="6D2E46"/>
+          </a:solidFill>
+          <a:ln/>
+        </p:spPr>
+      </p:sp>
+      <p:sp>
+        <p:nvSpPr>
+          <p:cNvPr id="3" name="Text 1"/>
+          <p:cNvSpPr/>
+          <p:nvPr/>
+        </p:nvSpPr>
+        <p:spPr>
+          <a:xfrm>
+            <a:off x="1005840" y="685800"/>
+            <a:ext cx="10408615" cy="731520"/>
+          </a:xfrm>
+          <a:prstGeom prst="rect">
+            <a:avLst/>
+          </a:prstGeom>
+          <a:noFill/>
+          <a:ln/>
+        </p:spPr>
+        <p:txBody>
+          <a:bodyPr wrap="square" lIns="0" tIns="0" rIns="0" bIns="0" rtlCol="0" anchor="ctr"/>
+          <a:lstStyle/>
+          <a:p>
+            <a:pPr indent="0" marL="0">
+              <a:buNone/>
+            </a:pPr>
+            <a:r>
+              <a:rPr lang="en-US" sz="3400" b="1" dirty="0">
+                <a:solidFill>
+                  <a:srgbClr val="2B2B2B"/>
+                </a:solidFill>
+                <a:latin typeface="Georgia" pitchFamily="34" charset="0"/>
+                <a:ea typeface="Georgia" pitchFamily="34" charset="-122"/>
+                <a:cs typeface="Georgia" pitchFamily="34" charset="-120"/>
+              </a:rPr>
+              <a:t>AI は会話に使い、判断には使わない</a:t>
+            </a:r>
+            <a:endParaRPr lang="en-US" sz="3400" dirty="0"/>
+          </a:p>
+        </p:txBody>
+      </p:sp>
+      <p:sp>
+        <p:nvSpPr>
+          <p:cNvPr id="4" name="Text 2"/>
+          <p:cNvSpPr/>
+          <p:nvPr/>
+        </p:nvSpPr>
+        <p:spPr>
+          <a:xfrm>
+            <a:off x="1005840" y="1417320"/>
+            <a:ext cx="10408615" cy="347472"/>
+          </a:xfrm>
+          <a:prstGeom prst="rect">
+            <a:avLst/>
+          </a:prstGeom>
+          <a:noFill/>
+          <a:ln/>
+        </p:spPr>
+        <p:txBody>
+          <a:bodyPr wrap="square" lIns="0" tIns="0" rIns="0" bIns="0" rtlCol="0" anchor="ctr"/>
+          <a:lstStyle/>
+          <a:p>
+            <a:pPr indent="0" marL="0">
+              <a:buNone/>
+            </a:pPr>
+            <a:r>
+              <a:rPr lang="en-US" sz="1400" dirty="0">
+                <a:solidFill>
+                  <a:srgbClr val="A26769"/>
+                </a:solidFill>
+                <a:latin typeface="Meiryo" pitchFamily="34" charset="0"/>
+                <a:ea typeface="Meiryo" pitchFamily="34" charset="-122"/>
+                <a:cs typeface="Meiryo" pitchFamily="34" charset="-120"/>
+              </a:rPr>
+              <a:t>家電を任せるほど信頼していないから、任せない設計にした</a:t>
+            </a:r>
+            <a:endParaRPr lang="en-US" sz="1400" dirty="0"/>
+          </a:p>
+        </p:txBody>
+      </p:sp>
+      <p:sp>
+        <p:nvSpPr>
+          <p:cNvPr id="5" name="Text 3"/>
+          <p:cNvSpPr/>
+          <p:nvPr/>
+        </p:nvSpPr>
+        <p:spPr>
+          <a:xfrm>
+            <a:off x="1005840" y="2148840"/>
+            <a:ext cx="3164738" cy="822960"/>
+          </a:xfrm>
+          <a:prstGeom prst="rect">
+            <a:avLst/>
+          </a:prstGeom>
+          <a:noFill/>
+          <a:ln/>
+        </p:spPr>
+        <p:txBody>
+          <a:bodyPr wrap="square" lIns="0" tIns="0" rIns="0" bIns="0" rtlCol="0" anchor="ctr"/>
+          <a:lstStyle/>
+          <a:p>
+            <a:pPr indent="0" marL="0">
+              <a:buNone/>
+            </a:pPr>
+            <a:r>
+              <a:rPr lang="en-US" sz="4600" b="1" dirty="0">
+                <a:solidFill>
+                  <a:srgbClr val="6D2E46"/>
+                </a:solidFill>
+                <a:latin typeface="Georgia" pitchFamily="34" charset="0"/>
+                <a:ea typeface="Georgia" pitchFamily="34" charset="-122"/>
+                <a:cs typeface="Georgia" pitchFamily="34" charset="-120"/>
+              </a:rPr>
+              <a:t>684</a:t>
+            </a:r>
+            <a:endParaRPr lang="en-US" sz="4600" dirty="0"/>
+          </a:p>
+        </p:txBody>
+      </p:sp>
+      <p:sp>
+        <p:nvSpPr>
+          <p:cNvPr id="6" name="Shape 4"/>
+          <p:cNvSpPr/>
+          <p:nvPr/>
+        </p:nvSpPr>
+        <p:spPr>
+          <a:xfrm>
+            <a:off x="1005840" y="2999232"/>
+            <a:ext cx="822960" cy="27432"/>
+          </a:xfrm>
+          <a:prstGeom prst="rect">
+            <a:avLst/>
+          </a:prstGeom>
+          <a:solidFill>
+            <a:srgbClr val="A26769"/>
+          </a:solidFill>
+          <a:ln/>
+        </p:spPr>
+      </p:sp>
+      <p:sp>
+        <p:nvSpPr>
+          <p:cNvPr id="7" name="Text 5"/>
+          <p:cNvSpPr/>
+          <p:nvPr/>
+        </p:nvSpPr>
+        <p:spPr>
+          <a:xfrm>
+            <a:off x="1005840" y="3108960"/>
+            <a:ext cx="3164738" cy="292608"/>
+          </a:xfrm>
+          <a:prstGeom prst="rect">
+            <a:avLst/>
+          </a:prstGeom>
+          <a:noFill/>
+          <a:ln/>
+        </p:spPr>
+        <p:txBody>
+          <a:bodyPr wrap="square" lIns="0" tIns="0" rIns="0" bIns="0" rtlCol="0" anchor="ctr"/>
+          <a:lstStyle/>
+          <a:p>
+            <a:pPr indent="0" marL="0">
+              <a:buNone/>
+            </a:pPr>
+            <a:r>
+              <a:rPr lang="en-US" sz="1200" dirty="0">
+                <a:solidFill>
+                  <a:srgbClr val="7A7A7A"/>
+                </a:solidFill>
+                <a:latin typeface="Meiryo" pitchFamily="34" charset="0"/>
+                <a:ea typeface="Meiryo" pitchFamily="34" charset="-122"/>
+                <a:cs typeface="Meiryo" pitchFamily="34" charset="-120"/>
+              </a:rPr>
+              <a:t>テスト（全合格）</a:t>
+            </a:r>
+            <a:endParaRPr lang="en-US" sz="1200" dirty="0"/>
+          </a:p>
+        </p:txBody>
+      </p:sp>
+      <p:sp>
+        <p:nvSpPr>
+          <p:cNvPr id="8" name="Text 6"/>
+          <p:cNvSpPr/>
+          <p:nvPr/>
+        </p:nvSpPr>
+        <p:spPr>
+          <a:xfrm>
+            <a:off x="4627778" y="2148840"/>
+            <a:ext cx="3164738" cy="822960"/>
+          </a:xfrm>
+          <a:prstGeom prst="rect">
+            <a:avLst/>
+          </a:prstGeom>
+          <a:noFill/>
+          <a:ln/>
+        </p:spPr>
+        <p:txBody>
+          <a:bodyPr wrap="square" lIns="0" tIns="0" rIns="0" bIns="0" rtlCol="0" anchor="ctr"/>
+          <a:lstStyle/>
+          <a:p>
+            <a:pPr indent="0" marL="0">
+              <a:buNone/>
+            </a:pPr>
+            <a:r>
+              <a:rPr lang="en-US" sz="4600" b="1" dirty="0">
+                <a:solidFill>
+                  <a:srgbClr val="6D2E46"/>
+                </a:solidFill>
+                <a:latin typeface="Georgia" pitchFamily="34" charset="0"/>
+                <a:ea typeface="Georgia" pitchFamily="34" charset="-122"/>
+                <a:cs typeface="Georgia" pitchFamily="34" charset="-120"/>
+              </a:rPr>
+              <a:t>0</a:t>
+            </a:r>
+            <a:endParaRPr lang="en-US" sz="4600" dirty="0"/>
+          </a:p>
+        </p:txBody>
+      </p:sp>
+      <p:sp>
+        <p:nvSpPr>
+          <p:cNvPr id="9" name="Shape 7"/>
+          <p:cNvSpPr/>
+          <p:nvPr/>
+        </p:nvSpPr>
+        <p:spPr>
+          <a:xfrm>
+            <a:off x="4627778" y="2999232"/>
+            <a:ext cx="822960" cy="27432"/>
+          </a:xfrm>
+          <a:prstGeom prst="rect">
+            <a:avLst/>
+          </a:prstGeom>
+          <a:solidFill>
+            <a:srgbClr val="A26769"/>
+          </a:solidFill>
+          <a:ln/>
+        </p:spPr>
+      </p:sp>
+      <p:sp>
+        <p:nvSpPr>
+          <p:cNvPr id="10" name="Text 8"/>
+          <p:cNvSpPr/>
+          <p:nvPr/>
+        </p:nvSpPr>
+        <p:spPr>
+          <a:xfrm>
+            <a:off x="4627778" y="3108960"/>
+            <a:ext cx="3164738" cy="292608"/>
+          </a:xfrm>
+          <a:prstGeom prst="rect">
+            <a:avLst/>
+          </a:prstGeom>
+          <a:noFill/>
+          <a:ln/>
+        </p:spPr>
+        <p:txBody>
+          <a:bodyPr wrap="square" lIns="0" tIns="0" rIns="0" bIns="0" rtlCol="0" anchor="ctr"/>
+          <a:lstStyle/>
+          <a:p>
+            <a:pPr indent="0" marL="0">
+              <a:buNone/>
+            </a:pPr>
+            <a:r>
+              <a:rPr lang="en-US" sz="1200" dirty="0">
+                <a:solidFill>
+                  <a:srgbClr val="7A7A7A"/>
+                </a:solidFill>
+                <a:latin typeface="Meiryo" pitchFamily="34" charset="0"/>
+                <a:ea typeface="Meiryo" pitchFamily="34" charset="-122"/>
+                <a:cs typeface="Meiryo" pitchFamily="34" charset="-120"/>
+              </a:rPr>
+              <a:t>必要な API キー（デモ実行時）</a:t>
+            </a:r>
+            <a:endParaRPr lang="en-US" sz="1200" dirty="0"/>
+          </a:p>
+        </p:txBody>
+      </p:sp>
+      <p:sp>
+        <p:nvSpPr>
+          <p:cNvPr id="11" name="Text 9"/>
+          <p:cNvSpPr/>
+          <p:nvPr/>
+        </p:nvSpPr>
+        <p:spPr>
+          <a:xfrm>
+            <a:off x="8249717" y="2148840"/>
+            <a:ext cx="3164738" cy="822960"/>
+          </a:xfrm>
+          <a:prstGeom prst="rect">
+            <a:avLst/>
+          </a:prstGeom>
+          <a:noFill/>
+          <a:ln/>
+        </p:spPr>
+        <p:txBody>
+          <a:bodyPr wrap="square" lIns="0" tIns="0" rIns="0" bIns="0" rtlCol="0" anchor="ctr"/>
+          <a:lstStyle/>
+          <a:p>
+            <a:pPr indent="0" marL="0">
+              <a:buNone/>
+            </a:pPr>
+            <a:r>
+              <a:rPr lang="en-US" sz="4600" b="1" dirty="0">
+                <a:solidFill>
+                  <a:srgbClr val="6D2E46"/>
+                </a:solidFill>
+                <a:latin typeface="Georgia" pitchFamily="34" charset="0"/>
+                <a:ea typeface="Georgia" pitchFamily="34" charset="-122"/>
+                <a:cs typeface="Georgia" pitchFamily="34" charset="-120"/>
+              </a:rPr>
+              <a:t>3</a:t>
+            </a:r>
+            <a:endParaRPr lang="en-US" sz="4600" dirty="0"/>
+          </a:p>
+        </p:txBody>
+      </p:sp>
+      <p:sp>
+        <p:nvSpPr>
+          <p:cNvPr id="12" name="Shape 10"/>
+          <p:cNvSpPr/>
+          <p:nvPr/>
+        </p:nvSpPr>
+        <p:spPr>
+          <a:xfrm>
+            <a:off x="8249717" y="2999232"/>
+            <a:ext cx="822960" cy="27432"/>
+          </a:xfrm>
+          <a:prstGeom prst="rect">
+            <a:avLst/>
+          </a:prstGeom>
+          <a:solidFill>
+            <a:srgbClr val="A26769"/>
+          </a:solidFill>
+          <a:ln/>
+        </p:spPr>
+      </p:sp>
+      <p:sp>
+        <p:nvSpPr>
+          <p:cNvPr id="13" name="Text 11"/>
+          <p:cNvSpPr/>
+          <p:nvPr/>
+        </p:nvSpPr>
+        <p:spPr>
+          <a:xfrm>
+            <a:off x="8249717" y="3108960"/>
+            <a:ext cx="3164738" cy="292608"/>
+          </a:xfrm>
+          <a:prstGeom prst="rect">
+            <a:avLst/>
+          </a:prstGeom>
+          <a:noFill/>
+          <a:ln/>
+        </p:spPr>
+        <p:txBody>
+          <a:bodyPr wrap="square" lIns="0" tIns="0" rIns="0" bIns="0" rtlCol="0" anchor="ctr"/>
+          <a:lstStyle/>
+          <a:p>
+            <a:pPr indent="0" marL="0">
+              <a:buNone/>
+            </a:pPr>
+            <a:r>
+              <a:rPr lang="en-US" sz="1200" dirty="0">
+                <a:solidFill>
+                  <a:srgbClr val="7A7A7A"/>
+                </a:solidFill>
+                <a:latin typeface="Meiryo" pitchFamily="34" charset="0"/>
+                <a:ea typeface="Meiryo" pitchFamily="34" charset="-122"/>
+                <a:cs typeface="Meiryo" pitchFamily="34" charset="-120"/>
+              </a:rPr>
+              <a:t>記録した「沈黙した障害」</a:t>
+            </a:r>
+            <a:endParaRPr lang="en-US" sz="1200" dirty="0"/>
+          </a:p>
+        </p:txBody>
+      </p:sp>
+      <p:sp>
+        <p:nvSpPr>
+          <p:cNvPr id="14" name="Shape 12"/>
+          <p:cNvSpPr/>
+          <p:nvPr/>
+        </p:nvSpPr>
+        <p:spPr>
+          <a:xfrm>
+            <a:off x="1005840" y="3794760"/>
+            <a:ext cx="10408615" cy="1371600"/>
+          </a:xfrm>
+          <a:prstGeom prst="rect">
+            <a:avLst/>
+          </a:prstGeom>
+          <a:solidFill>
+            <a:srgbClr val="F7F4F2"/>
+          </a:solidFill>
+          <a:ln/>
+        </p:spPr>
+      </p:sp>
+      <p:sp>
+        <p:nvSpPr>
+          <p:cNvPr id="15" name="Text 13"/>
+          <p:cNvSpPr/>
+          <p:nvPr/>
+        </p:nvSpPr>
+        <p:spPr>
+          <a:xfrm>
+            <a:off x="1280160" y="3968496"/>
+            <a:ext cx="1188720" cy="310896"/>
+          </a:xfrm>
+          <a:prstGeom prst="rect">
+            <a:avLst/>
+          </a:prstGeom>
+          <a:noFill/>
+          <a:ln/>
+        </p:spPr>
+        <p:txBody>
+          <a:bodyPr wrap="square" lIns="0" tIns="0" rIns="0" bIns="0" rtlCol="0" anchor="ctr"/>
+          <a:lstStyle/>
+          <a:p>
+            <a:pPr indent="0" marL="0">
+              <a:buNone/>
+            </a:pPr>
+            <a:r>
+              <a:rPr lang="en-US" sz="1150" dirty="0">
+                <a:solidFill>
+                  <a:srgbClr val="A26769"/>
+                </a:solidFill>
+                <a:latin typeface="Meiryo" pitchFamily="34" charset="0"/>
+                <a:ea typeface="Meiryo" pitchFamily="34" charset="-122"/>
+                <a:cs typeface="Meiryo" pitchFamily="34" charset="-120"/>
+              </a:rPr>
+              <a:t>コード</a:t>
+            </a:r>
+            <a:endParaRPr lang="en-US" sz="1150" dirty="0"/>
+          </a:p>
+        </p:txBody>
+      </p:sp>
+      <p:sp>
+        <p:nvSpPr>
+          <p:cNvPr id="16" name="Text 14"/>
+          <p:cNvSpPr/>
+          <p:nvPr/>
+        </p:nvSpPr>
+        <p:spPr>
+          <a:xfrm>
+            <a:off x="2560320" y="3968496"/>
+            <a:ext cx="8351215" cy="310896"/>
+          </a:xfrm>
+          <a:prstGeom prst="rect">
+            <a:avLst/>
+          </a:prstGeom>
+          <a:noFill/>
+          <a:ln/>
+        </p:spPr>
+        <p:txBody>
+          <a:bodyPr wrap="square" lIns="0" tIns="0" rIns="0" bIns="0" rtlCol="0" anchor="ctr"/>
+          <a:lstStyle/>
+          <a:p>
+            <a:pPr indent="0" marL="0">
+              <a:buNone/>
+            </a:pPr>
+            <a:r>
+              <a:rPr lang="en-US" sz="1200" dirty="0">
+                <a:solidFill>
+                  <a:srgbClr val="2B2B2B"/>
+                </a:solidFill>
+                <a:latin typeface="Meiryo" pitchFamily="34" charset="0"/>
+                <a:ea typeface="Meiryo" pitchFamily="34" charset="-122"/>
+                <a:cs typeface="Meiryo" pitchFamily="34" charset="-120"/>
+              </a:rPr>
+              <a:t>https://github.com/monoqlo78/mimamoritai-careroute-ai</a:t>
+            </a:r>
+            <a:endParaRPr lang="en-US" sz="1200" dirty="0"/>
+          </a:p>
+        </p:txBody>
+      </p:sp>
+      <p:sp>
+        <p:nvSpPr>
+          <p:cNvPr id="17" name="Text 15"/>
+          <p:cNvSpPr/>
+          <p:nvPr/>
+        </p:nvSpPr>
+        <p:spPr>
+          <a:xfrm>
+            <a:off x="1280160" y="4352544"/>
+            <a:ext cx="1188720" cy="310896"/>
+          </a:xfrm>
+          <a:prstGeom prst="rect">
+            <a:avLst/>
+          </a:prstGeom>
+          <a:noFill/>
+          <a:ln/>
+        </p:spPr>
+        <p:txBody>
+          <a:bodyPr wrap="square" lIns="0" tIns="0" rIns="0" bIns="0" rtlCol="0" anchor="ctr"/>
+          <a:lstStyle/>
+          <a:p>
+            <a:pPr indent="0" marL="0">
+              <a:buNone/>
+            </a:pPr>
+            <a:r>
+              <a:rPr lang="en-US" sz="1150" dirty="0">
+                <a:solidFill>
+                  <a:srgbClr val="A26769"/>
+                </a:solidFill>
+                <a:latin typeface="Meiryo" pitchFamily="34" charset="0"/>
+                <a:ea typeface="Meiryo" pitchFamily="34" charset="-122"/>
+                <a:cs typeface="Meiryo" pitchFamily="34" charset="-120"/>
+              </a:rPr>
+              <a:t>デモ動画</a:t>
+            </a:r>
+            <a:endParaRPr lang="en-US" sz="1150" dirty="0"/>
+          </a:p>
+        </p:txBody>
+      </p:sp>
+      <p:sp>
+        <p:nvSpPr>
+          <p:cNvPr id="18" name="Text 16"/>
+          <p:cNvSpPr/>
+          <p:nvPr/>
+        </p:nvSpPr>
+        <p:spPr>
+          <a:xfrm>
+            <a:off x="2560320" y="4352544"/>
+            <a:ext cx="8351215" cy="310896"/>
+          </a:xfrm>
+          <a:prstGeom prst="rect">
+            <a:avLst/>
+          </a:prstGeom>
+          <a:noFill/>
+          <a:ln/>
+        </p:spPr>
+        <p:txBody>
+          <a:bodyPr wrap="square" lIns="0" tIns="0" rIns="0" bIns="0" rtlCol="0" anchor="ctr"/>
+          <a:lstStyle/>
+          <a:p>
+            <a:pPr indent="0" marL="0">
+              <a:buNone/>
+            </a:pPr>
+            <a:r>
+              <a:rPr lang="en-US" sz="1200" dirty="0">
+                <a:solidFill>
+                  <a:srgbClr val="2B2B2B"/>
+                </a:solidFill>
+                <a:latin typeface="Meiryo" pitchFamily="34" charset="0"/>
+                <a:ea typeface="Meiryo" pitchFamily="34" charset="-122"/>
+                <a:cs typeface="Meiryo" pitchFamily="34" charset="-120"/>
+              </a:rPr>
+              <a:t>docs/demo/mimamoritai-demo.mp4（字幕・ナレーション入り / 3分11秒）</a:t>
+            </a:r>
+            <a:endParaRPr lang="en-US" sz="1200" dirty="0"/>
+          </a:p>
+        </p:txBody>
+      </p:sp>
+      <p:sp>
+        <p:nvSpPr>
+          <p:cNvPr id="19" name="Text 17"/>
+          <p:cNvSpPr/>
+          <p:nvPr/>
+        </p:nvSpPr>
+        <p:spPr>
+          <a:xfrm>
+            <a:off x="1280160" y="4736592"/>
+            <a:ext cx="1188720" cy="310896"/>
+          </a:xfrm>
+          <a:prstGeom prst="rect">
+            <a:avLst/>
+          </a:prstGeom>
+          <a:noFill/>
+          <a:ln/>
+        </p:spPr>
+        <p:txBody>
+          <a:bodyPr wrap="square" lIns="0" tIns="0" rIns="0" bIns="0" rtlCol="0" anchor="ctr"/>
+          <a:lstStyle/>
+          <a:p>
+            <a:pPr indent="0" marL="0">
+              <a:buNone/>
+            </a:pPr>
+            <a:r>
+              <a:rPr lang="en-US" sz="1150" dirty="0">
+                <a:solidFill>
+                  <a:srgbClr val="A26769"/>
+                </a:solidFill>
+                <a:latin typeface="Meiryo" pitchFamily="34" charset="0"/>
+                <a:ea typeface="Meiryo" pitchFamily="34" charset="-122"/>
+                <a:cs typeface="Meiryo" pitchFamily="34" charset="-120"/>
+              </a:rPr>
+              <a:t>解説記事</a:t>
+            </a:r>
+            <a:endParaRPr lang="en-US" sz="1150" dirty="0"/>
+          </a:p>
+        </p:txBody>
+      </p:sp>
+      <p:sp>
+        <p:nvSpPr>
+          <p:cNvPr id="20" name="Text 18"/>
+          <p:cNvSpPr/>
+          <p:nvPr/>
+        </p:nvSpPr>
+        <p:spPr>
+          <a:xfrm>
+            <a:off x="2560320" y="4736592"/>
+            <a:ext cx="8351215" cy="310896"/>
+          </a:xfrm>
+          <a:prstGeom prst="rect">
+            <a:avLst/>
+          </a:prstGeom>
+          <a:noFill/>
+          <a:ln/>
+        </p:spPr>
+        <p:txBody>
+          <a:bodyPr wrap="square" lIns="0" tIns="0" rIns="0" bIns="0" rtlCol="0" anchor="ctr"/>
+          <a:lstStyle/>
+          <a:p>
+            <a:pPr indent="0" marL="0">
+              <a:buNone/>
+            </a:pPr>
+            <a:r>
+              <a:rPr lang="en-US" sz="1200" dirty="0">
+                <a:solidFill>
+                  <a:srgbClr val="2B2B2B"/>
+                </a:solidFill>
+                <a:latin typeface="Meiryo" pitchFamily="34" charset="0"/>
+                <a:ea typeface="Meiryo" pitchFamily="34" charset="-122"/>
+                <a:cs typeface="Meiryo" pitchFamily="34" charset="-120"/>
+              </a:rPr>
+              <a:t>https://qiita.com/monoqlo78/items/dcac9e0ee6c1d0bfe07d</a:t>
+            </a:r>
+            <a:endParaRPr lang="en-US" sz="1200" dirty="0"/>
+          </a:p>
+        </p:txBody>
+      </p:sp>
+      <p:sp>
+        <p:nvSpPr>
+          <p:cNvPr id="21" name="Text 19"/>
+          <p:cNvSpPr/>
+          <p:nvPr/>
+        </p:nvSpPr>
+        <p:spPr>
+          <a:xfrm>
+            <a:off x="1005840" y="5440680"/>
+            <a:ext cx="10408615" cy="365760"/>
+          </a:xfrm>
+          <a:prstGeom prst="rect">
+            <a:avLst/>
+          </a:prstGeom>
+          <a:noFill/>
+          <a:ln/>
+        </p:spPr>
+        <p:txBody>
+          <a:bodyPr wrap="square" lIns="0" tIns="0" rIns="0" bIns="0" rtlCol="0" anchor="ctr"/>
+          <a:lstStyle/>
+          <a:p>
+            <a:pPr indent="0" marL="0">
+              <a:buNone/>
+            </a:pPr>
+            <a:r>
+              <a:rPr lang="en-US" sz="1300" i="1" dirty="0">
+                <a:solidFill>
+                  <a:srgbClr val="6D2E46"/>
+                </a:solidFill>
+                <a:latin typeface="Meiryo" pitchFamily="34" charset="0"/>
+                <a:ea typeface="Meiryo" pitchFamily="34" charset="-122"/>
+                <a:cs typeface="Meiryo" pitchFamily="34" charset="-120"/>
+              </a:rPr>
+              <a:t>安全判定を LLM の外側に置いたか、内側でお願いしたか。そこが一番の分岐点だった。</a:t>
+            </a:r>
+            <a:endParaRPr lang="en-US" sz="1300" dirty="0"/>
+          </a:p>
+        </p:txBody>
+      </p:sp>
+      <p:sp>
+        <p:nvSpPr>
+          <p:cNvPr id="22" name="Shape 20"/>
+          <p:cNvSpPr/>
+          <p:nvPr/>
+        </p:nvSpPr>
+        <p:spPr>
+          <a:xfrm>
+            <a:off x="777240" y="6236208"/>
+            <a:ext cx="10637215" cy="0"/>
+          </a:xfrm>
+          <a:prstGeom prst="line">
+            <a:avLst/>
+          </a:prstGeom>
+          <a:noFill/>
+          <a:ln w="9525">
+            <a:solidFill>
+              <a:srgbClr val="E4DEDA"/>
+            </a:solidFill>
+            <a:prstDash val="solid"/>
+          </a:ln>
+        </p:spPr>
+      </p:sp>
+      <p:sp>
+        <p:nvSpPr>
+          <p:cNvPr id="23" name="Text 21"/>
+          <p:cNvSpPr/>
+          <p:nvPr/>
+        </p:nvSpPr>
+        <p:spPr>
+          <a:xfrm>
+            <a:off x="777240" y="6327648"/>
+            <a:ext cx="3657600" cy="274320"/>
+          </a:xfrm>
+          <a:prstGeom prst="rect">
+            <a:avLst/>
+          </a:prstGeom>
+          <a:noFill/>
+          <a:ln/>
+        </p:spPr>
+        <p:txBody>
+          <a:bodyPr wrap="square" lIns="0" tIns="0" rIns="0" bIns="0" rtlCol="0" anchor="ctr"/>
+          <a:lstStyle/>
+          <a:p>
+            <a:pPr indent="0" marL="0">
+              <a:buNone/>
+            </a:pPr>
+            <a:r>
+              <a:rPr lang="en-US" sz="950" dirty="0">
+                <a:solidFill>
+                  <a:srgbClr val="B9B9B9"/>
+                </a:solidFill>
+                <a:latin typeface="Meiryo" pitchFamily="34" charset="0"/>
+                <a:ea typeface="Meiryo" pitchFamily="34" charset="-122"/>
+                <a:cs typeface="Meiryo" pitchFamily="34" charset="-120"/>
+              </a:rPr>
+              <a:t>見守り隊 / CareRoute AI</a:t>
+            </a:r>
+            <a:endParaRPr lang="en-US" sz="950" dirty="0"/>
+          </a:p>
+        </p:txBody>
+      </p:sp>
+      <p:sp>
+        <p:nvSpPr>
+          <p:cNvPr id="24" name="Text 22"/>
+          <p:cNvSpPr/>
+          <p:nvPr/>
+        </p:nvSpPr>
+        <p:spPr>
+          <a:xfrm>
+            <a:off x="10500055" y="6327648"/>
+            <a:ext cx="914400" cy="274320"/>
+          </a:xfrm>
+          <a:prstGeom prst="rect">
+            <a:avLst/>
+          </a:prstGeom>
+          <a:noFill/>
+          <a:ln/>
+        </p:spPr>
+        <p:txBody>
+          <a:bodyPr wrap="square" lIns="0" tIns="0" rIns="0" bIns="0" rtlCol="0" anchor="ctr"/>
+          <a:lstStyle/>
+          <a:p>
+            <a:pPr algn="r" indent="0" marL="0">
+              <a:buNone/>
+            </a:pPr>
+            <a:r>
+              <a:rPr lang="en-US" sz="950" dirty="0">
+                <a:solidFill>
+                  <a:srgbClr val="B9B9B9"/>
+                </a:solidFill>
+                <a:latin typeface="Meiryo" pitchFamily="34" charset="0"/>
+                <a:ea typeface="Meiryo" pitchFamily="34" charset="-122"/>
+                <a:cs typeface="Meiryo" pitchFamily="34" charset="-120"/>
+              </a:rPr>
+              <a:t>14</a:t>
             </a:r>
             <a:endParaRPr lang="en-US" sz="950" dirty="0"/>
           </a:p>
@@ -10632,7 +11671,7 @@
                 <a:ea typeface="Meiryo" pitchFamily="34" charset="-122"/>
                 <a:cs typeface="Meiryo" pitchFamily="34" charset="-120"/>
               </a:rPr>
-              <a:t>API キーがゼロでも、dotnet run だけで全機能が動く</a:t>
+              <a:t>dotnetだけで全機能が動く</a:t>
             </a:r>
             <a:endParaRPr lang="en-US" sz="1350" dirty="0"/>
           </a:p>
@@ -11640,7 +12679,7 @@
                 <a:ea typeface="Georgia" pitchFamily="34" charset="-122"/>
                 <a:cs typeface="Georgia" pitchFamily="34" charset="-120"/>
               </a:rPr>
-              <a:t>LLM コストは、設計で削る</a:t>
+              <a:t>秘密を、コードにもアプリ設定にも置かない</a:t>
             </a:r>
             <a:endParaRPr lang="en-US" sz="3100" dirty="0"/>
           </a:p>
@@ -11679,7 +12718,7 @@
                 <a:ea typeface="Meiryo" pitchFamily="34" charset="-122"/>
                 <a:cs typeface="Meiryo" pitchFamily="34" charset="-120"/>
               </a:rPr>
-              <a:t>呼ぶ回数を減らす。これが一番効く</a:t>
+              <a:t>持たない・渡さない・見せない、の3つで分けた</a:t>
             </a:r>
             <a:endParaRPr lang="en-US" sz="1350" dirty="0"/>
           </a:p>
@@ -11693,33 +12732,8 @@
         </p:nvSpPr>
         <p:spPr>
           <a:xfrm>
-            <a:off x="777240" y="1847088"/>
-            <a:ext cx="5090008" cy="1847088"/>
-          </a:xfrm>
-          <a:prstGeom prst="rect">
-            <a:avLst/>
-          </a:prstGeom>
-          <a:solidFill>
-            <a:srgbClr val="FFFFFF"/>
-          </a:solidFill>
-          <a:ln w="15875">
-            <a:solidFill>
-              <a:srgbClr val="E4DEDA"/>
-            </a:solidFill>
-            <a:prstDash val="solid"/>
-          </a:ln>
-        </p:spPr>
-      </p:sp>
-      <p:sp>
-        <p:nvSpPr>
-          <p:cNvPr id="5" name="Shape 3"/>
-          <p:cNvSpPr/>
-          <p:nvPr/>
-        </p:nvSpPr>
-        <p:spPr>
-          <a:xfrm>
-            <a:off x="777240" y="1847088"/>
-            <a:ext cx="5090008" cy="45720"/>
+            <a:off x="777240" y="1792224"/>
+            <a:ext cx="45720" cy="859536"/>
           </a:xfrm>
           <a:prstGeom prst="rect">
             <a:avLst/>
@@ -11732,40 +12746,79 @@
       </p:sp>
       <p:sp>
         <p:nvSpPr>
+          <p:cNvPr id="5" name="Text 3"/>
+          <p:cNvSpPr/>
+          <p:nvPr/>
+        </p:nvSpPr>
+        <p:spPr>
+          <a:xfrm>
+            <a:off x="1051560" y="1792224"/>
+            <a:ext cx="1371600" cy="329184"/>
+          </a:xfrm>
+          <a:prstGeom prst="rect">
+            <a:avLst/>
+          </a:prstGeom>
+          <a:noFill/>
+          <a:ln/>
+        </p:spPr>
+        <p:txBody>
+          <a:bodyPr wrap="square" lIns="0" tIns="0" rIns="0" bIns="0" rtlCol="0" anchor="ctr"/>
+          <a:lstStyle/>
+          <a:p>
+            <a:pPr indent="0" marL="0">
+              <a:buNone/>
+            </a:pPr>
+            <a:r>
+              <a:rPr lang="en-US" sz="1450" b="1" dirty="0">
+                <a:solidFill>
+                  <a:srgbClr val="2C5F2D"/>
+                </a:solidFill>
+                <a:latin typeface="Meiryo" pitchFamily="34" charset="0"/>
+                <a:ea typeface="Meiryo" pitchFamily="34" charset="-122"/>
+                <a:cs typeface="Meiryo" pitchFamily="34" charset="-120"/>
+              </a:rPr>
+              <a:t>持たない</a:t>
+            </a:r>
+            <a:endParaRPr lang="en-US" sz="1450" dirty="0"/>
+          </a:p>
+        </p:txBody>
+      </p:sp>
+      <p:sp>
+        <p:nvSpPr>
           <p:cNvPr id="6" name="Text 4"/>
           <p:cNvSpPr/>
           <p:nvPr/>
         </p:nvSpPr>
         <p:spPr>
           <a:xfrm>
-            <a:off x="1161288" y="2066544"/>
-            <a:ext cx="3078328" cy="347472"/>
-          </a:xfrm>
-          <a:prstGeom prst="rect">
-            <a:avLst/>
-          </a:prstGeom>
-          <a:noFill/>
-          <a:ln/>
-        </p:spPr>
-        <p:txBody>
-          <a:bodyPr wrap="square" lIns="0" tIns="0" rIns="0" bIns="0" rtlCol="0" anchor="ctr"/>
-          <a:lstStyle/>
-          <a:p>
-            <a:pPr indent="0" marL="0">
-              <a:buNone/>
-            </a:pPr>
-            <a:r>
-              <a:rPr lang="en-US" sz="1500" b="1" dirty="0">
-                <a:solidFill>
-                  <a:srgbClr val="2C5F2D"/>
-                </a:solidFill>
-                <a:latin typeface="Meiryo" pitchFamily="34" charset="0"/>
-                <a:ea typeface="Meiryo" pitchFamily="34" charset="-122"/>
-                <a:cs typeface="Meiryo" pitchFamily="34" charset="-120"/>
-              </a:rPr>
-              <a:t>センサー経路</a:t>
-            </a:r>
-            <a:endParaRPr lang="en-US" sz="1500" dirty="0"/>
+            <a:off x="2468880" y="1792224"/>
+            <a:ext cx="8945575" cy="329184"/>
+          </a:xfrm>
+          <a:prstGeom prst="rect">
+            <a:avLst/>
+          </a:prstGeom>
+          <a:noFill/>
+          <a:ln/>
+        </p:spPr>
+        <p:txBody>
+          <a:bodyPr wrap="square" lIns="0" tIns="0" rIns="0" bIns="0" rtlCol="0" anchor="ctr"/>
+          <a:lstStyle/>
+          <a:p>
+            <a:pPr indent="0" marL="0">
+              <a:buNone/>
+            </a:pPr>
+            <a:r>
+              <a:rPr lang="en-US" sz="1450" b="1" dirty="0">
+                <a:solidFill>
+                  <a:srgbClr val="2B2B2B"/>
+                </a:solidFill>
+                <a:latin typeface="Meiryo" pitchFamily="34" charset="0"/>
+                <a:ea typeface="Meiryo" pitchFamily="34" charset="-122"/>
+                <a:cs typeface="Meiryo" pitchFamily="34" charset="-120"/>
+              </a:rPr>
+              <a:t>Key Vault ＋ マネージドID</a:t>
+            </a:r>
+            <a:endParaRPr lang="en-US" sz="1450" dirty="0"/>
           </a:p>
         </p:txBody>
       </p:sp>
@@ -11777,139 +12830,8 @@
         </p:nvSpPr>
         <p:spPr>
           <a:xfrm>
-            <a:off x="1161288" y="2404872"/>
-            <a:ext cx="3078328" cy="274320"/>
-          </a:xfrm>
-          <a:prstGeom prst="rect">
-            <a:avLst/>
-          </a:prstGeom>
-          <a:noFill/>
-          <a:ln/>
-        </p:spPr>
-        <p:txBody>
-          <a:bodyPr wrap="square" lIns="0" tIns="0" rIns="0" bIns="0" rtlCol="0" anchor="ctr"/>
-          <a:lstStyle/>
-          <a:p>
-            <a:pPr indent="0" marL="0">
-              <a:buNone/>
-            </a:pPr>
-            <a:r>
-              <a:rPr lang="en-US" sz="1100" dirty="0">
-                <a:solidFill>
-                  <a:srgbClr val="7A7A7A"/>
-                </a:solidFill>
-                <a:latin typeface="Meiryo" pitchFamily="34" charset="0"/>
-                <a:ea typeface="Meiryo" pitchFamily="34" charset="-122"/>
-                <a:cs typeface="Meiryo" pitchFamily="34" charset="-120"/>
-              </a:rPr>
-              <a:t>5分ごとのポーリング</a:t>
-            </a:r>
-            <a:endParaRPr lang="en-US" sz="1100" dirty="0"/>
-          </a:p>
-        </p:txBody>
-      </p:sp>
-      <p:sp>
-        <p:nvSpPr>
-          <p:cNvPr id="8" name="Text 6"/>
-          <p:cNvSpPr/>
-          <p:nvPr/>
-        </p:nvSpPr>
-        <p:spPr>
-          <a:xfrm>
-            <a:off x="3992728" y="2029968"/>
-            <a:ext cx="1508760" cy="685800"/>
-          </a:xfrm>
-          <a:prstGeom prst="rect">
-            <a:avLst/>
-          </a:prstGeom>
-          <a:noFill/>
-          <a:ln/>
-        </p:spPr>
-        <p:txBody>
-          <a:bodyPr wrap="square" lIns="0" tIns="0" rIns="0" bIns="0" rtlCol="0" anchor="ctr"/>
-          <a:lstStyle/>
-          <a:p>
-            <a:pPr algn="r" indent="0" marL="0">
-              <a:buNone/>
-            </a:pPr>
-            <a:r>
-              <a:rPr lang="en-US" sz="4400" b="1" dirty="0">
-                <a:solidFill>
-                  <a:srgbClr val="2C5F2D"/>
-                </a:solidFill>
-                <a:latin typeface="Georgia" pitchFamily="34" charset="0"/>
-                <a:ea typeface="Georgia" pitchFamily="34" charset="-122"/>
-                <a:cs typeface="Georgia" pitchFamily="34" charset="-120"/>
-              </a:rPr>
-              <a:t>0</a:t>
-            </a:r>
-            <a:pPr algn="r" indent="0" marL="0">
-              <a:buNone/>
-            </a:pPr>
-            <a:r>
-              <a:rPr lang="en-US" sz="1300" dirty="0">
-                <a:solidFill>
-                  <a:srgbClr val="2C5F2D"/>
-                </a:solidFill>
-                <a:latin typeface="Meiryo" pitchFamily="34" charset="0"/>
-                <a:ea typeface="Meiryo" pitchFamily="34" charset="-122"/>
-                <a:cs typeface="Meiryo" pitchFamily="34" charset="-120"/>
-              </a:rPr>
-              <a:t> 回</a:t>
-            </a:r>
-            <a:endParaRPr lang="en-US" sz="4400" dirty="0"/>
-          </a:p>
-        </p:txBody>
-      </p:sp>
-      <p:sp>
-        <p:nvSpPr>
-          <p:cNvPr id="9" name="Text 7"/>
-          <p:cNvSpPr/>
-          <p:nvPr/>
-        </p:nvSpPr>
-        <p:spPr>
-          <a:xfrm>
-            <a:off x="3992728" y="2697480"/>
-            <a:ext cx="1508760" cy="237744"/>
-          </a:xfrm>
-          <a:prstGeom prst="rect">
-            <a:avLst/>
-          </a:prstGeom>
-          <a:noFill/>
-          <a:ln/>
-        </p:spPr>
-        <p:txBody>
-          <a:bodyPr wrap="square" lIns="0" tIns="0" rIns="0" bIns="0" rtlCol="0" anchor="ctr"/>
-          <a:lstStyle/>
-          <a:p>
-            <a:pPr algn="r" indent="0" marL="0">
-              <a:buNone/>
-            </a:pPr>
-            <a:r>
-              <a:rPr lang="en-US" sz="1000" dirty="0">
-                <a:solidFill>
-                  <a:srgbClr val="7A7A7A"/>
-                </a:solidFill>
-                <a:latin typeface="Meiryo" pitchFamily="34" charset="0"/>
-                <a:ea typeface="Meiryo" pitchFamily="34" charset="-122"/>
-                <a:cs typeface="Meiryo" pitchFamily="34" charset="-120"/>
-              </a:rPr>
-              <a:t>LLM 呼び出し</a:t>
-            </a:r>
-            <a:endParaRPr lang="en-US" sz="1000" dirty="0"/>
-          </a:p>
-        </p:txBody>
-      </p:sp>
-      <p:sp>
-        <p:nvSpPr>
-          <p:cNvPr id="10" name="Text 8"/>
-          <p:cNvSpPr/>
-          <p:nvPr/>
-        </p:nvSpPr>
-        <p:spPr>
-          <a:xfrm>
-            <a:off x="1161288" y="3017520"/>
-            <a:ext cx="4321912" cy="658368"/>
+            <a:off x="2468880" y="2121408"/>
+            <a:ext cx="8945575" cy="530352"/>
           </a:xfrm>
           <a:prstGeom prst="rect">
             <a:avLst/>
@@ -11930,253 +12852,16 @@
             <a:r>
               <a:rPr lang="en-US" sz="1150" dirty="0">
                 <a:solidFill>
-                  <a:srgbClr val="2B2B2B"/>
-                </a:solidFill>
-                <a:latin typeface="Meiryo" pitchFamily="34" charset="0"/>
-                <a:ea typeface="Meiryo" pitchFamily="34" charset="-122"/>
-                <a:cs typeface="Meiryo" pitchFamily="34" charset="-120"/>
-              </a:rPr>
-              <a:t>1世帯あたり 288回/日 の取得と判定。すべてルールベースなので、デバイスが増えても LLM 費用は増えない。</a:t>
+                  <a:srgbClr val="7A7A7A"/>
+                </a:solidFill>
+                <a:latin typeface="Meiryo" pitchFamily="34" charset="0"/>
+                <a:ea typeface="Meiryo" pitchFamily="34" charset="-122"/>
+                <a:cs typeface="Meiryo" pitchFamily="34" charset="-120"/>
+              </a:rPr>
+              <a:t>本番の App Service には秘密情報が1件も無い。起動時に Key Vault から読み込み、</a:t>
             </a:r>
             <a:endParaRPr lang="en-US" sz="1150" dirty="0"/>
           </a:p>
-        </p:txBody>
-      </p:sp>
-      <p:sp>
-        <p:nvSpPr>
-          <p:cNvPr id="11" name="Shape 9"/>
-          <p:cNvSpPr/>
-          <p:nvPr/>
-        </p:nvSpPr>
-        <p:spPr>
-          <a:xfrm>
-            <a:off x="6324448" y="1847088"/>
-            <a:ext cx="5090008" cy="1847088"/>
-          </a:xfrm>
-          <a:prstGeom prst="rect">
-            <a:avLst/>
-          </a:prstGeom>
-          <a:solidFill>
-            <a:srgbClr val="FFFFFF"/>
-          </a:solidFill>
-          <a:ln w="15875">
-            <a:solidFill>
-              <a:srgbClr val="E4DEDA"/>
-            </a:solidFill>
-            <a:prstDash val="solid"/>
-          </a:ln>
-        </p:spPr>
-      </p:sp>
-      <p:sp>
-        <p:nvSpPr>
-          <p:cNvPr id="12" name="Shape 10"/>
-          <p:cNvSpPr/>
-          <p:nvPr/>
-        </p:nvSpPr>
-        <p:spPr>
-          <a:xfrm>
-            <a:off x="6324448" y="1847088"/>
-            <a:ext cx="5090008" cy="45720"/>
-          </a:xfrm>
-          <a:prstGeom prst="rect">
-            <a:avLst/>
-          </a:prstGeom>
-          <a:solidFill>
-            <a:srgbClr val="6D2E46"/>
-          </a:solidFill>
-          <a:ln/>
-        </p:spPr>
-      </p:sp>
-      <p:sp>
-        <p:nvSpPr>
-          <p:cNvPr id="13" name="Text 11"/>
-          <p:cNvSpPr/>
-          <p:nvPr/>
-        </p:nvSpPr>
-        <p:spPr>
-          <a:xfrm>
-            <a:off x="6708496" y="2066544"/>
-            <a:ext cx="3078328" cy="347472"/>
-          </a:xfrm>
-          <a:prstGeom prst="rect">
-            <a:avLst/>
-          </a:prstGeom>
-          <a:noFill/>
-          <a:ln/>
-        </p:spPr>
-        <p:txBody>
-          <a:bodyPr wrap="square" lIns="0" tIns="0" rIns="0" bIns="0" rtlCol="0" anchor="ctr"/>
-          <a:lstStyle/>
-          <a:p>
-            <a:pPr indent="0" marL="0">
-              <a:buNone/>
-            </a:pPr>
-            <a:r>
-              <a:rPr lang="en-US" sz="1500" b="1" dirty="0">
-                <a:solidFill>
-                  <a:srgbClr val="6D2E46"/>
-                </a:solidFill>
-                <a:latin typeface="Meiryo" pitchFamily="34" charset="0"/>
-                <a:ea typeface="Meiryo" pitchFamily="34" charset="-122"/>
-                <a:cs typeface="Meiryo" pitchFamily="34" charset="-120"/>
-              </a:rPr>
-              <a:t>会話経路</a:t>
-            </a:r>
-            <a:endParaRPr lang="en-US" sz="1500" dirty="0"/>
-          </a:p>
-        </p:txBody>
-      </p:sp>
-      <p:sp>
-        <p:nvSpPr>
-          <p:cNvPr id="14" name="Text 12"/>
-          <p:cNvSpPr/>
-          <p:nvPr/>
-        </p:nvSpPr>
-        <p:spPr>
-          <a:xfrm>
-            <a:off x="6708496" y="2404872"/>
-            <a:ext cx="3078328" cy="274320"/>
-          </a:xfrm>
-          <a:prstGeom prst="rect">
-            <a:avLst/>
-          </a:prstGeom>
-          <a:noFill/>
-          <a:ln/>
-        </p:spPr>
-        <p:txBody>
-          <a:bodyPr wrap="square" lIns="0" tIns="0" rIns="0" bIns="0" rtlCol="0" anchor="ctr"/>
-          <a:lstStyle/>
-          <a:p>
-            <a:pPr indent="0" marL="0">
-              <a:buNone/>
-            </a:pPr>
-            <a:r>
-              <a:rPr lang="en-US" sz="1100" dirty="0">
-                <a:solidFill>
-                  <a:srgbClr val="7A7A7A"/>
-                </a:solidFill>
-                <a:latin typeface="Meiryo" pitchFamily="34" charset="0"/>
-                <a:ea typeface="Meiryo" pitchFamily="34" charset="-122"/>
-                <a:cs typeface="Meiryo" pitchFamily="34" charset="-120"/>
-              </a:rPr>
-              <a:t>家族が話しかけたときだけ</a:t>
-            </a:r>
-            <a:endParaRPr lang="en-US" sz="1100" dirty="0"/>
-          </a:p>
-        </p:txBody>
-      </p:sp>
-      <p:sp>
-        <p:nvSpPr>
-          <p:cNvPr id="15" name="Text 13"/>
-          <p:cNvSpPr/>
-          <p:nvPr/>
-        </p:nvSpPr>
-        <p:spPr>
-          <a:xfrm>
-            <a:off x="9539935" y="2029968"/>
-            <a:ext cx="1508760" cy="685800"/>
-          </a:xfrm>
-          <a:prstGeom prst="rect">
-            <a:avLst/>
-          </a:prstGeom>
-          <a:noFill/>
-          <a:ln/>
-        </p:spPr>
-        <p:txBody>
-          <a:bodyPr wrap="square" lIns="0" tIns="0" rIns="0" bIns="0" rtlCol="0" anchor="ctr"/>
-          <a:lstStyle/>
-          <a:p>
-            <a:pPr algn="r" indent="0" marL="0">
-              <a:buNone/>
-            </a:pPr>
-            <a:r>
-              <a:rPr lang="en-US" sz="4400" b="1" dirty="0">
-                <a:solidFill>
-                  <a:srgbClr val="6D2E46"/>
-                </a:solidFill>
-                <a:latin typeface="Georgia" pitchFamily="34" charset="0"/>
-                <a:ea typeface="Georgia" pitchFamily="34" charset="-122"/>
-                <a:cs typeface="Georgia" pitchFamily="34" charset="-120"/>
-              </a:rPr>
-              <a:t>1</a:t>
-            </a:r>
-            <a:pPr algn="r" indent="0" marL="0">
-              <a:buNone/>
-            </a:pPr>
-            <a:r>
-              <a:rPr lang="en-US" sz="1300" dirty="0">
-                <a:solidFill>
-                  <a:srgbClr val="6D2E46"/>
-                </a:solidFill>
-                <a:latin typeface="Meiryo" pitchFamily="34" charset="0"/>
-                <a:ea typeface="Meiryo" pitchFamily="34" charset="-122"/>
-                <a:cs typeface="Meiryo" pitchFamily="34" charset="-120"/>
-              </a:rPr>
-              <a:t> 回</a:t>
-            </a:r>
-            <a:endParaRPr lang="en-US" sz="4400" dirty="0"/>
-          </a:p>
-        </p:txBody>
-      </p:sp>
-      <p:sp>
-        <p:nvSpPr>
-          <p:cNvPr id="16" name="Text 14"/>
-          <p:cNvSpPr/>
-          <p:nvPr/>
-        </p:nvSpPr>
-        <p:spPr>
-          <a:xfrm>
-            <a:off x="9539935" y="2697480"/>
-            <a:ext cx="1508760" cy="237744"/>
-          </a:xfrm>
-          <a:prstGeom prst="rect">
-            <a:avLst/>
-          </a:prstGeom>
-          <a:noFill/>
-          <a:ln/>
-        </p:spPr>
-        <p:txBody>
-          <a:bodyPr wrap="square" lIns="0" tIns="0" rIns="0" bIns="0" rtlCol="0" anchor="ctr"/>
-          <a:lstStyle/>
-          <a:p>
-            <a:pPr algn="r" indent="0" marL="0">
-              <a:buNone/>
-            </a:pPr>
-            <a:r>
-              <a:rPr lang="en-US" sz="1000" dirty="0">
-                <a:solidFill>
-                  <a:srgbClr val="7A7A7A"/>
-                </a:solidFill>
-                <a:latin typeface="Meiryo" pitchFamily="34" charset="0"/>
-                <a:ea typeface="Meiryo" pitchFamily="34" charset="-122"/>
-                <a:cs typeface="Meiryo" pitchFamily="34" charset="-120"/>
-              </a:rPr>
-              <a:t>LLM 呼び出し</a:t>
-            </a:r>
-            <a:endParaRPr lang="en-US" sz="1000" dirty="0"/>
-          </a:p>
-        </p:txBody>
-      </p:sp>
-      <p:sp>
-        <p:nvSpPr>
-          <p:cNvPr id="17" name="Text 15"/>
-          <p:cNvSpPr/>
-          <p:nvPr/>
-        </p:nvSpPr>
-        <p:spPr>
-          <a:xfrm>
-            <a:off x="6708496" y="3017520"/>
-            <a:ext cx="4321912" cy="658368"/>
-          </a:xfrm>
-          <a:prstGeom prst="rect">
-            <a:avLst/>
-          </a:prstGeom>
-          <a:noFill/>
-          <a:ln/>
-        </p:spPr>
-        <p:txBody>
-          <a:bodyPr wrap="square" lIns="0" tIns="0" rIns="0" bIns="0" rtlCol="0" anchor="t"/>
-          <a:lstStyle/>
           <a:p>
             <a:pPr indent="0" marL="0">
               <a:lnSpc>
@@ -12187,13 +12872,13 @@
             <a:r>
               <a:rPr lang="en-US" sz="1150" dirty="0">
                 <a:solidFill>
-                  <a:srgbClr val="2B2B2B"/>
-                </a:solidFill>
-                <a:latin typeface="Meiryo" pitchFamily="34" charset="0"/>
-                <a:ea typeface="Meiryo" pitchFamily="34" charset="-122"/>
-                <a:cs typeface="Meiryo" pitchFamily="34" charset="-120"/>
-              </a:rPr>
-              <a:t>意図解析・要約・通知文の生成のみ。費用は「世帯数」ではなく「会話した回数」に比例する。</a:t>
+                  <a:srgbClr val="7A7A7A"/>
+                </a:solidFill>
+                <a:latin typeface="Meiryo" pitchFamily="34" charset="0"/>
+                <a:ea typeface="Meiryo" pitchFamily="34" charset="-122"/>
+                <a:cs typeface="Meiryo" pitchFamily="34" charset="-120"/>
+              </a:rPr>
+              <a:t>認証はマネージドID。Key Vault に繋ぐための資格情報そのものが存在しない。</a:t>
             </a:r>
             <a:endParaRPr lang="en-US" sz="1150" dirty="0"/>
           </a:p>
@@ -12201,218 +12886,13 @@
       </p:sp>
       <p:sp>
         <p:nvSpPr>
-          <p:cNvPr id="18" name="Shape 16"/>
-          <p:cNvSpPr/>
-          <p:nvPr/>
-        </p:nvSpPr>
-        <p:spPr>
-          <a:xfrm>
-            <a:off x="777240" y="4041648"/>
-            <a:ext cx="10637215" cy="914400"/>
-          </a:xfrm>
-          <a:prstGeom prst="rect">
-            <a:avLst/>
-          </a:prstGeom>
-          <a:solidFill>
-            <a:srgbClr val="FFFFFF"/>
-          </a:solidFill>
-          <a:ln w="15875">
-            <a:solidFill>
-              <a:srgbClr val="E4DEDA"/>
-            </a:solidFill>
-            <a:prstDash val="solid"/>
-          </a:ln>
-        </p:spPr>
-      </p:sp>
-      <p:sp>
-        <p:nvSpPr>
-          <p:cNvPr id="19" name="Text 17"/>
-          <p:cNvSpPr/>
-          <p:nvPr/>
-        </p:nvSpPr>
-        <p:spPr>
-          <a:xfrm>
-            <a:off x="1161288" y="4151376"/>
-            <a:ext cx="9869119" cy="292608"/>
-          </a:xfrm>
-          <a:prstGeom prst="rect">
-            <a:avLst/>
-          </a:prstGeom>
-          <a:noFill/>
-          <a:ln/>
-        </p:spPr>
-        <p:txBody>
-          <a:bodyPr wrap="square" lIns="0" tIns="0" rIns="0" bIns="0" rtlCol="0" anchor="ctr"/>
-          <a:lstStyle/>
-          <a:p>
-            <a:pPr indent="0" marL="0">
-              <a:buNone/>
-            </a:pPr>
-            <a:r>
-              <a:rPr lang="en-US" sz="1350" b="1" dirty="0">
-                <a:solidFill>
-                  <a:srgbClr val="2B2B2B"/>
-                </a:solidFill>
-                <a:latin typeface="Meiryo" pitchFamily="34" charset="0"/>
-                <a:ea typeface="Meiryo" pitchFamily="34" charset="-122"/>
-                <a:cs typeface="Meiryo" pitchFamily="34" charset="-120"/>
-              </a:rPr>
-              <a:t>締切のある経路だけ、安いモデルに固定する</a:t>
-            </a:r>
-            <a:endParaRPr lang="en-US" sz="1350" dirty="0"/>
-          </a:p>
-        </p:txBody>
-      </p:sp>
-      <p:sp>
-        <p:nvSpPr>
-          <p:cNvPr id="20" name="Text 18"/>
-          <p:cNvSpPr/>
-          <p:nvPr/>
-        </p:nvSpPr>
-        <p:spPr>
-          <a:xfrm>
-            <a:off x="1161288" y="4443984"/>
-            <a:ext cx="9869119" cy="475488"/>
-          </a:xfrm>
-          <a:prstGeom prst="rect">
-            <a:avLst/>
-          </a:prstGeom>
-          <a:noFill/>
-          <a:ln/>
-        </p:spPr>
-        <p:txBody>
-          <a:bodyPr wrap="square" lIns="0" tIns="0" rIns="0" bIns="0" rtlCol="0" anchor="t"/>
-          <a:lstStyle/>
-          <a:p>
-            <a:pPr indent="0" marL="0">
-              <a:lnSpc>
-                <a:spcPct val="140000"/>
-              </a:lnSpc>
-              <a:buNone/>
-            </a:pPr>
-            <a:r>
-              <a:rPr lang="en-US" sz="1100" dirty="0">
-                <a:solidFill>
-                  <a:srgbClr val="7A7A7A"/>
-                </a:solidFill>
-                <a:latin typeface="Meiryo" pitchFamily="34" charset="0"/>
-                <a:ea typeface="Meiryo" pitchFamily="34" charset="-122"/>
-                <a:cs typeface="Meiryo" pitchFamily="34" charset="-120"/>
-              </a:rPr>
-              <a:t>LINE の webhook は 8 秒で打ち切られる。自動ルータは同じプロンプトで 5.6〜51 秒とばらついたため、</a:t>
-            </a:r>
-            <a:endParaRPr lang="en-US" sz="1100" dirty="0"/>
-          </a:p>
-          <a:p>
-            <a:pPr indent="0" marL="0">
-              <a:lnSpc>
-                <a:spcPct val="140000"/>
-              </a:lnSpc>
-              <a:buNone/>
-            </a:pPr>
-            <a:r>
-              <a:rPr lang="en-US" sz="1100" dirty="0">
-                <a:solidFill>
-                  <a:srgbClr val="7A7A7A"/>
-                </a:solidFill>
-                <a:latin typeface="Meiryo" pitchFamily="34" charset="0"/>
-                <a:ea typeface="Meiryo" pitchFamily="34" charset="-122"/>
-                <a:cs typeface="Meiryo" pitchFamily="34" charset="-120"/>
-              </a:rPr>
-              <a:t>この経路だけ gpt-4.1-mini に固定（実測 3〜5 秒）。他の画面は自動ルータのまま＝速さと費用を両取りする。</a:t>
-            </a:r>
-            <a:endParaRPr lang="en-US" sz="1100" dirty="0"/>
-          </a:p>
-        </p:txBody>
-      </p:sp>
-      <p:sp>
-        <p:nvSpPr>
-          <p:cNvPr id="21" name="Shape 19"/>
-          <p:cNvSpPr/>
-          <p:nvPr/>
-        </p:nvSpPr>
-        <p:spPr>
-          <a:xfrm>
-            <a:off x="777240" y="5230368"/>
-            <a:ext cx="10637215" cy="658368"/>
-          </a:xfrm>
-          <a:prstGeom prst="rect">
-            <a:avLst/>
-          </a:prstGeom>
-          <a:solidFill>
-            <a:srgbClr val="F7F4F2"/>
-          </a:solidFill>
-          <a:ln/>
-        </p:spPr>
-      </p:sp>
-      <p:sp>
-        <p:nvSpPr>
-          <p:cNvPr id="22" name="Shape 20"/>
-          <p:cNvSpPr/>
-          <p:nvPr/>
-        </p:nvSpPr>
-        <p:spPr>
-          <a:xfrm>
-            <a:off x="777240" y="5230368"/>
-            <a:ext cx="50292" cy="658368"/>
-          </a:xfrm>
-          <a:prstGeom prst="rect">
-            <a:avLst/>
-          </a:prstGeom>
-          <a:solidFill>
-            <a:srgbClr val="6D2E46"/>
-          </a:solidFill>
-          <a:ln/>
-        </p:spPr>
-      </p:sp>
-      <p:sp>
-        <p:nvSpPr>
-          <p:cNvPr id="23" name="Text 21"/>
-          <p:cNvSpPr/>
-          <p:nvPr/>
-        </p:nvSpPr>
-        <p:spPr>
-          <a:xfrm>
-            <a:off x="1051560" y="5230368"/>
-            <a:ext cx="10134295" cy="658368"/>
-          </a:xfrm>
-          <a:prstGeom prst="rect">
-            <a:avLst/>
-          </a:prstGeom>
-          <a:noFill/>
-          <a:ln/>
-        </p:spPr>
-        <p:txBody>
-          <a:bodyPr wrap="square" lIns="0" tIns="0" rIns="0" bIns="0" rtlCol="0" anchor="ctr"/>
-          <a:lstStyle/>
-          <a:p>
-            <a:pPr indent="0" marL="0">
-              <a:buNone/>
-            </a:pPr>
-            <a:r>
-              <a:rPr lang="en-US" sz="1450" b="1" dirty="0">
-                <a:solidFill>
-                  <a:srgbClr val="6D2E46"/>
-                </a:solidFill>
-                <a:latin typeface="Meiryo" pitchFamily="34" charset="0"/>
-                <a:ea typeface="Meiryo" pitchFamily="34" charset="-122"/>
-                <a:cs typeface="Meiryo" pitchFamily="34" charset="-120"/>
-              </a:rPr>
-              <a:t>API キー0本でも全機能が動く — 審査でも運用でも、課金せずに試せる状態を既定にした</a:t>
-            </a:r>
-            <a:endParaRPr lang="en-US" sz="1450" dirty="0"/>
-          </a:p>
-        </p:txBody>
-      </p:sp>
-      <p:sp>
-        <p:nvSpPr>
-          <p:cNvPr id="24" name="Shape 22"/>
-          <p:cNvSpPr/>
-          <p:nvPr/>
-        </p:nvSpPr>
-        <p:spPr>
-          <a:xfrm>
-            <a:off x="777240" y="6236208"/>
+          <p:cNvPr id="8" name="Shape 6"/>
+          <p:cNvSpPr/>
+          <p:nvPr/>
+        </p:nvSpPr>
+        <p:spPr>
+          <a:xfrm>
+            <a:off x="777240" y="2715768"/>
             <a:ext cx="10637215" cy="0"/>
           </a:xfrm>
           <a:prstGeom prst="line">
@@ -12429,7 +12909,491 @@
       </p:sp>
       <p:sp>
         <p:nvSpPr>
-          <p:cNvPr id="25" name="Text 23"/>
+          <p:cNvPr id="9" name="Shape 7"/>
+          <p:cNvSpPr/>
+          <p:nvPr/>
+        </p:nvSpPr>
+        <p:spPr>
+          <a:xfrm>
+            <a:off x="777240" y="2788920"/>
+            <a:ext cx="45720" cy="859536"/>
+          </a:xfrm>
+          <a:prstGeom prst="rect">
+            <a:avLst/>
+          </a:prstGeom>
+          <a:solidFill>
+            <a:srgbClr val="6D2E46"/>
+          </a:solidFill>
+          <a:ln/>
+        </p:spPr>
+      </p:sp>
+      <p:sp>
+        <p:nvSpPr>
+          <p:cNvPr id="10" name="Text 8"/>
+          <p:cNvSpPr/>
+          <p:nvPr/>
+        </p:nvSpPr>
+        <p:spPr>
+          <a:xfrm>
+            <a:off x="1051560" y="2788920"/>
+            <a:ext cx="1371600" cy="329184"/>
+          </a:xfrm>
+          <a:prstGeom prst="rect">
+            <a:avLst/>
+          </a:prstGeom>
+          <a:noFill/>
+          <a:ln/>
+        </p:spPr>
+        <p:txBody>
+          <a:bodyPr wrap="square" lIns="0" tIns="0" rIns="0" bIns="0" rtlCol="0" anchor="ctr"/>
+          <a:lstStyle/>
+          <a:p>
+            <a:pPr indent="0" marL="0">
+              <a:buNone/>
+            </a:pPr>
+            <a:r>
+              <a:rPr lang="en-US" sz="1450" b="1" dirty="0">
+                <a:solidFill>
+                  <a:srgbClr val="6D2E46"/>
+                </a:solidFill>
+                <a:latin typeface="Meiryo" pitchFamily="34" charset="0"/>
+                <a:ea typeface="Meiryo" pitchFamily="34" charset="-122"/>
+                <a:cs typeface="Meiryo" pitchFamily="34" charset="-120"/>
+              </a:rPr>
+              <a:t>渡さない</a:t>
+            </a:r>
+            <a:endParaRPr lang="en-US" sz="1450" dirty="0"/>
+          </a:p>
+        </p:txBody>
+      </p:sp>
+      <p:sp>
+        <p:nvSpPr>
+          <p:cNvPr id="11" name="Text 9"/>
+          <p:cNvSpPr/>
+          <p:nvPr/>
+        </p:nvSpPr>
+        <p:spPr>
+          <a:xfrm>
+            <a:off x="2468880" y="2788920"/>
+            <a:ext cx="8945575" cy="329184"/>
+          </a:xfrm>
+          <a:prstGeom prst="rect">
+            <a:avLst/>
+          </a:prstGeom>
+          <a:noFill/>
+          <a:ln/>
+        </p:spPr>
+        <p:txBody>
+          <a:bodyPr wrap="square" lIns="0" tIns="0" rIns="0" bIns="0" rtlCol="0" anchor="ctr"/>
+          <a:lstStyle/>
+          <a:p>
+            <a:pPr indent="0" marL="0">
+              <a:buNone/>
+            </a:pPr>
+            <a:r>
+              <a:rPr lang="en-US" sz="1450" b="1" dirty="0">
+                <a:solidFill>
+                  <a:srgbClr val="2B2B2B"/>
+                </a:solidFill>
+                <a:latin typeface="Meiryo" pitchFamily="34" charset="0"/>
+                <a:ea typeface="Meiryo" pitchFamily="34" charset="-122"/>
+                <a:cs typeface="Meiryo" pitchFamily="34" charset="-120"/>
+              </a:rPr>
+              <a:t>Entra External ID / LINE Login</a:t>
+            </a:r>
+            <a:endParaRPr lang="en-US" sz="1450" dirty="0"/>
+          </a:p>
+        </p:txBody>
+      </p:sp>
+      <p:sp>
+        <p:nvSpPr>
+          <p:cNvPr id="12" name="Text 10"/>
+          <p:cNvSpPr/>
+          <p:nvPr/>
+        </p:nvSpPr>
+        <p:spPr>
+          <a:xfrm>
+            <a:off x="2468880" y="3118104"/>
+            <a:ext cx="8945575" cy="530352"/>
+          </a:xfrm>
+          <a:prstGeom prst="rect">
+            <a:avLst/>
+          </a:prstGeom>
+          <a:noFill/>
+          <a:ln/>
+        </p:spPr>
+        <p:txBody>
+          <a:bodyPr wrap="square" lIns="0" tIns="0" rIns="0" bIns="0" rtlCol="0" anchor="t"/>
+          <a:lstStyle/>
+          <a:p>
+            <a:pPr indent="0" marL="0">
+              <a:lnSpc>
+                <a:spcPct val="140000"/>
+              </a:lnSpc>
+              <a:buNone/>
+            </a:pPr>
+            <a:r>
+              <a:rPr lang="en-US" sz="1150" dirty="0">
+                <a:solidFill>
+                  <a:srgbClr val="7A7A7A"/>
+                </a:solidFill>
+                <a:latin typeface="Meiryo" pitchFamily="34" charset="0"/>
+                <a:ea typeface="Meiryo" pitchFamily="34" charset="-122"/>
+                <a:cs typeface="Meiryo" pitchFamily="34" charset="-120"/>
+              </a:rPr>
+              <a:t>認証は OIDC に委譲し、パスワードを預からない。世帯の紐付けは発行元とサブジェクトで行い、</a:t>
+            </a:r>
+            <a:endParaRPr lang="en-US" sz="1150" dirty="0"/>
+          </a:p>
+          <a:p>
+            <a:pPr indent="0" marL="0">
+              <a:lnSpc>
+                <a:spcPct val="140000"/>
+              </a:lnSpc>
+              <a:buNone/>
+            </a:pPr>
+            <a:r>
+              <a:rPr lang="en-US" sz="1150" dirty="0">
+                <a:solidFill>
+                  <a:srgbClr val="7A7A7A"/>
+                </a:solidFill>
+                <a:latin typeface="Meiryo" pitchFamily="34" charset="0"/>
+                <a:ea typeface="Meiryo" pitchFamily="34" charset="-122"/>
+                <a:cs typeface="Meiryo" pitchFamily="34" charset="-120"/>
+              </a:rPr>
+              <a:t>どの世帯を見られるかはサーバー側で毎回判定する。</a:t>
+            </a:r>
+            <a:endParaRPr lang="en-US" sz="1150" dirty="0"/>
+          </a:p>
+        </p:txBody>
+      </p:sp>
+      <p:sp>
+        <p:nvSpPr>
+          <p:cNvPr id="13" name="Shape 11"/>
+          <p:cNvSpPr/>
+          <p:nvPr/>
+        </p:nvSpPr>
+        <p:spPr>
+          <a:xfrm>
+            <a:off x="777240" y="3712464"/>
+            <a:ext cx="10637215" cy="0"/>
+          </a:xfrm>
+          <a:prstGeom prst="line">
+            <a:avLst/>
+          </a:prstGeom>
+          <a:noFill/>
+          <a:ln w="9525">
+            <a:solidFill>
+              <a:srgbClr val="E4DEDA"/>
+            </a:solidFill>
+            <a:prstDash val="solid"/>
+          </a:ln>
+        </p:spPr>
+      </p:sp>
+      <p:sp>
+        <p:nvSpPr>
+          <p:cNvPr id="14" name="Shape 12"/>
+          <p:cNvSpPr/>
+          <p:nvPr/>
+        </p:nvSpPr>
+        <p:spPr>
+          <a:xfrm>
+            <a:off x="777240" y="3785616"/>
+            <a:ext cx="45720" cy="859536"/>
+          </a:xfrm>
+          <a:prstGeom prst="rect">
+            <a:avLst/>
+          </a:prstGeom>
+          <a:solidFill>
+            <a:srgbClr val="A26769"/>
+          </a:solidFill>
+          <a:ln/>
+        </p:spPr>
+      </p:sp>
+      <p:sp>
+        <p:nvSpPr>
+          <p:cNvPr id="15" name="Text 13"/>
+          <p:cNvSpPr/>
+          <p:nvPr/>
+        </p:nvSpPr>
+        <p:spPr>
+          <a:xfrm>
+            <a:off x="1051560" y="3785616"/>
+            <a:ext cx="1371600" cy="329184"/>
+          </a:xfrm>
+          <a:prstGeom prst="rect">
+            <a:avLst/>
+          </a:prstGeom>
+          <a:noFill/>
+          <a:ln/>
+        </p:spPr>
+        <p:txBody>
+          <a:bodyPr wrap="square" lIns="0" tIns="0" rIns="0" bIns="0" rtlCol="0" anchor="ctr"/>
+          <a:lstStyle/>
+          <a:p>
+            <a:pPr indent="0" marL="0">
+              <a:buNone/>
+            </a:pPr>
+            <a:r>
+              <a:rPr lang="en-US" sz="1450" b="1" dirty="0">
+                <a:solidFill>
+                  <a:srgbClr val="A26769"/>
+                </a:solidFill>
+                <a:latin typeface="Meiryo" pitchFamily="34" charset="0"/>
+                <a:ea typeface="Meiryo" pitchFamily="34" charset="-122"/>
+                <a:cs typeface="Meiryo" pitchFamily="34" charset="-120"/>
+              </a:rPr>
+              <a:t>見せない</a:t>
+            </a:r>
+            <a:endParaRPr lang="en-US" sz="1450" dirty="0"/>
+          </a:p>
+        </p:txBody>
+      </p:sp>
+      <p:sp>
+        <p:nvSpPr>
+          <p:cNvPr id="16" name="Text 14"/>
+          <p:cNvSpPr/>
+          <p:nvPr/>
+        </p:nvSpPr>
+        <p:spPr>
+          <a:xfrm>
+            <a:off x="2468880" y="3785616"/>
+            <a:ext cx="8945575" cy="329184"/>
+          </a:xfrm>
+          <a:prstGeom prst="rect">
+            <a:avLst/>
+          </a:prstGeom>
+          <a:noFill/>
+          <a:ln/>
+        </p:spPr>
+        <p:txBody>
+          <a:bodyPr wrap="square" lIns="0" tIns="0" rIns="0" bIns="0" rtlCol="0" anchor="ctr"/>
+          <a:lstStyle/>
+          <a:p>
+            <a:pPr indent="0" marL="0">
+              <a:buNone/>
+            </a:pPr>
+            <a:r>
+              <a:rPr lang="en-US" sz="1450" b="1" dirty="0">
+                <a:solidFill>
+                  <a:srgbClr val="2B2B2B"/>
+                </a:solidFill>
+                <a:latin typeface="Meiryo" pitchFamily="34" charset="0"/>
+                <a:ea typeface="Meiryo" pitchFamily="34" charset="-122"/>
+                <a:cs typeface="Meiryo" pitchFamily="34" charset="-120"/>
+              </a:rPr>
+              <a:t>Data Protection ＋ 署名検証</a:t>
+            </a:r>
+            <a:endParaRPr lang="en-US" sz="1450" dirty="0"/>
+          </a:p>
+        </p:txBody>
+      </p:sp>
+      <p:sp>
+        <p:nvSpPr>
+          <p:cNvPr id="17" name="Text 15"/>
+          <p:cNvSpPr/>
+          <p:nvPr/>
+        </p:nvSpPr>
+        <p:spPr>
+          <a:xfrm>
+            <a:off x="2468880" y="4114800"/>
+            <a:ext cx="8945575" cy="530352"/>
+          </a:xfrm>
+          <a:prstGeom prst="rect">
+            <a:avLst/>
+          </a:prstGeom>
+          <a:noFill/>
+          <a:ln/>
+        </p:spPr>
+        <p:txBody>
+          <a:bodyPr wrap="square" lIns="0" tIns="0" rIns="0" bIns="0" rtlCol="0" anchor="t"/>
+          <a:lstStyle/>
+          <a:p>
+            <a:pPr indent="0" marL="0">
+              <a:lnSpc>
+                <a:spcPct val="140000"/>
+              </a:lnSpc>
+              <a:buNone/>
+            </a:pPr>
+            <a:r>
+              <a:rPr lang="en-US" sz="1150" dirty="0">
+                <a:solidFill>
+                  <a:srgbClr val="7A7A7A"/>
+                </a:solidFill>
+                <a:latin typeface="Meiryo" pitchFamily="34" charset="0"/>
+                <a:ea typeface="Meiryo" pitchFamily="34" charset="-122"/>
+                <a:cs typeface="Meiryo" pitchFamily="34" charset="-120"/>
+              </a:rPr>
+              <a:t>家族が入力する SwitchBot のキーは暗号化して保存し、画面にも二度と出さない。</a:t>
+            </a:r>
+            <a:endParaRPr lang="en-US" sz="1150" dirty="0"/>
+          </a:p>
+          <a:p>
+            <a:pPr indent="0" marL="0">
+              <a:lnSpc>
+                <a:spcPct val="140000"/>
+              </a:lnSpc>
+              <a:buNone/>
+            </a:pPr>
+            <a:r>
+              <a:rPr lang="en-US" sz="1150" dirty="0">
+                <a:solidFill>
+                  <a:srgbClr val="7A7A7A"/>
+                </a:solidFill>
+                <a:latin typeface="Meiryo" pitchFamily="34" charset="0"/>
+                <a:ea typeface="Meiryo" pitchFamily="34" charset="-122"/>
+                <a:cs typeface="Meiryo" pitchFamily="34" charset="-120"/>
+              </a:rPr>
+              <a:t>LINE の webhook は HMAC-SHA256 を定数時間で比較し、合わなければ 401。</a:t>
+            </a:r>
+            <a:endParaRPr lang="en-US" sz="1150" dirty="0"/>
+          </a:p>
+        </p:txBody>
+      </p:sp>
+      <p:sp>
+        <p:nvSpPr>
+          <p:cNvPr id="18" name="Text 16"/>
+          <p:cNvSpPr/>
+          <p:nvPr/>
+        </p:nvSpPr>
+        <p:spPr>
+          <a:xfrm>
+            <a:off x="777240" y="4864608"/>
+            <a:ext cx="10637215" cy="274320"/>
+          </a:xfrm>
+          <a:prstGeom prst="rect">
+            <a:avLst/>
+          </a:prstGeom>
+          <a:noFill/>
+          <a:ln/>
+        </p:spPr>
+        <p:txBody>
+          <a:bodyPr wrap="square" lIns="0" tIns="0" rIns="0" bIns="0" rtlCol="0" anchor="ctr"/>
+          <a:lstStyle/>
+          <a:p>
+            <a:pPr indent="0" marL="0">
+              <a:buNone/>
+            </a:pPr>
+            <a:r>
+              <a:rPr lang="en-US" sz="1050" i="1" dirty="0">
+                <a:solidFill>
+                  <a:srgbClr val="B9B9B9"/>
+                </a:solidFill>
+                <a:latin typeface="Meiryo" pitchFamily="34" charset="0"/>
+                <a:ea typeface="Meiryo" pitchFamily="34" charset="-122"/>
+                <a:cs typeface="Meiryo" pitchFamily="34" charset="-120"/>
+              </a:rPr>
+              <a:t>秘密情報が無くても全機能が動く、という前提は変えていない。Key Vault の場所が未設定なら参照しない。</a:t>
+            </a:r>
+            <a:endParaRPr lang="en-US" sz="1050" dirty="0"/>
+          </a:p>
+        </p:txBody>
+      </p:sp>
+      <p:sp>
+        <p:nvSpPr>
+          <p:cNvPr id="19" name="Shape 17"/>
+          <p:cNvSpPr/>
+          <p:nvPr/>
+        </p:nvSpPr>
+        <p:spPr>
+          <a:xfrm>
+            <a:off x="777240" y="5230368"/>
+            <a:ext cx="10637215" cy="658368"/>
+          </a:xfrm>
+          <a:prstGeom prst="rect">
+            <a:avLst/>
+          </a:prstGeom>
+          <a:solidFill>
+            <a:srgbClr val="F7F4F2"/>
+          </a:solidFill>
+          <a:ln/>
+        </p:spPr>
+      </p:sp>
+      <p:sp>
+        <p:nvSpPr>
+          <p:cNvPr id="20" name="Shape 18"/>
+          <p:cNvSpPr/>
+          <p:nvPr/>
+        </p:nvSpPr>
+        <p:spPr>
+          <a:xfrm>
+            <a:off x="777240" y="5230368"/>
+            <a:ext cx="50292" cy="658368"/>
+          </a:xfrm>
+          <a:prstGeom prst="rect">
+            <a:avLst/>
+          </a:prstGeom>
+          <a:solidFill>
+            <a:srgbClr val="6D2E46"/>
+          </a:solidFill>
+          <a:ln/>
+        </p:spPr>
+      </p:sp>
+      <p:sp>
+        <p:nvSpPr>
+          <p:cNvPr id="21" name="Text 19"/>
+          <p:cNvSpPr/>
+          <p:nvPr/>
+        </p:nvSpPr>
+        <p:spPr>
+          <a:xfrm>
+            <a:off x="1051560" y="5230368"/>
+            <a:ext cx="10134295" cy="658368"/>
+          </a:xfrm>
+          <a:prstGeom prst="rect">
+            <a:avLst/>
+          </a:prstGeom>
+          <a:noFill/>
+          <a:ln/>
+        </p:spPr>
+        <p:txBody>
+          <a:bodyPr wrap="square" lIns="0" tIns="0" rIns="0" bIns="0" rtlCol="0" anchor="ctr"/>
+          <a:lstStyle/>
+          <a:p>
+            <a:pPr indent="0" marL="0">
+              <a:buNone/>
+            </a:pPr>
+            <a:r>
+              <a:rPr lang="en-US" sz="1450" b="1" dirty="0">
+                <a:solidFill>
+                  <a:srgbClr val="6D2E46"/>
+                </a:solidFill>
+                <a:latin typeface="Meiryo" pitchFamily="34" charset="0"/>
+                <a:ea typeface="Meiryo" pitchFamily="34" charset="-122"/>
+                <a:cs typeface="Meiryo" pitchFamily="34" charset="-120"/>
+              </a:rPr>
+              <a:t>秘密を扱う場所を減らす。持たなければ、漏れない</a:t>
+            </a:r>
+            <a:endParaRPr lang="en-US" sz="1450" dirty="0"/>
+          </a:p>
+        </p:txBody>
+      </p:sp>
+      <p:sp>
+        <p:nvSpPr>
+          <p:cNvPr id="22" name="Shape 20"/>
+          <p:cNvSpPr/>
+          <p:nvPr/>
+        </p:nvSpPr>
+        <p:spPr>
+          <a:xfrm>
+            <a:off x="777240" y="6236208"/>
+            <a:ext cx="10637215" cy="0"/>
+          </a:xfrm>
+          <a:prstGeom prst="line">
+            <a:avLst/>
+          </a:prstGeom>
+          <a:noFill/>
+          <a:ln w="9525">
+            <a:solidFill>
+              <a:srgbClr val="E4DEDA"/>
+            </a:solidFill>
+            <a:prstDash val="solid"/>
+          </a:ln>
+        </p:spPr>
+      </p:sp>
+      <p:sp>
+        <p:nvSpPr>
+          <p:cNvPr id="23" name="Text 21"/>
           <p:cNvSpPr/>
           <p:nvPr/>
         </p:nvSpPr>
@@ -12468,7 +13432,7 @@
       </p:sp>
       <p:sp>
         <p:nvSpPr>
-          <p:cNvPr id="26" name="Text 24"/>
+          <p:cNvPr id="24" name="Text 22"/>
           <p:cNvSpPr/>
           <p:nvPr/>
         </p:nvSpPr>

--- a/docs/mimamoritai-deck.pptx
+++ b/docs/mimamoritai-deck.pptx
@@ -4,6 +4,9 @@
   <p:sldMasterIdLst>
     <p:sldMasterId id="2147483648" r:id="rId1"/>
   </p:sldMasterIdLst>
+  <p:notesMasterIdLst>
+    <p:notesMasterId r:id="rId16"/>
+  </p:notesMasterIdLst>
   <p:sldIdLst>
     <p:sldId id="256" r:id="rId2"/>
     <p:sldId id="257" r:id="rId3"/>
@@ -20,11 +23,8 @@
     <p:sldId id="268" r:id="rId14"/>
     <p:sldId id="269" r:id="rId15"/>
   </p:sldIdLst>
-  <p:notesMasterIdLst>
-    <p:notesMasterId r:id="rId16"/>
-  </p:notesMasterIdLst>
-  <p:sldSz cx="12191695" cy="6858000"/>
-  <p:notesSz cx="6858000" cy="12191695"/>
+  <p:sldSz cx="12192000" cy="6858000"/>
+  <p:notesSz cx="6858000" cy="12192000"/>
   <p:defaultTextStyle>
     <a:lvl1pPr marL="0" algn="l" defTabSz="914400" rtl="0" eaLnBrk="1" latinLnBrk="0" hangingPunct="1">
       <a:defRPr sz="1800" kern="1200">
@@ -117,6 +117,11 @@
       </a:defRPr>
     </a:lvl9pPr>
   </p:defaultTextStyle>
+  <p:extLst>
+    <p:ext uri="{EFAFB233-063F-42B5-8137-9DF3F51BA10A}">
+      <p15:sldGuideLst xmlns:p15="http://schemas.microsoft.com/office/powerpoint/2012/main"/>
+    </p:ext>
+  </p:extLst>
 </p:presentation>
 </file>
 
@@ -142,241 +147,17 @@
           <a:chExt cx="0" cy="0"/>
         </a:xfrm>
       </p:grpSpPr>
-      <p:sp>
-        <p:nvSpPr>
-          <p:cNvPr id="2" name="Header Placeholder 1"/>
-          <p:cNvSpPr>
-            <a:spLocks noGrp="1"/>
-          </p:cNvSpPr>
-          <p:nvPr>
-            <p:ph type="hdr" sz="quarter"/>
-          </p:nvPr>
-        </p:nvSpPr>
-        <p:spPr>
-          <a:xfrm>
-            <a:off x="0" y="0"/>
-            <a:ext cx="2971800" cy="458788"/>
-          </a:xfrm>
-          <a:prstGeom prst="rect">
-            <a:avLst/>
-          </a:prstGeom>
-        </p:spPr>
-        <p:txBody>
-          <a:bodyPr vert="horz" lIns="91440" tIns="45720" rIns="91440" bIns="45720" rtlCol="0"/>
-          <a:lstStyle>
-            <a:lvl1pPr algn="l">
-              <a:defRPr sz="1200"/>
-            </a:lvl1pPr>
-          </a:lstStyle>
-          <a:p>
-            <a:endParaRPr lang="en-US"/>
-          </a:p>
-        </p:txBody>
-      </p:sp>
-      <p:sp>
-        <p:nvSpPr>
-          <p:cNvPr id="3" name="Date Placeholder 2"/>
-          <p:cNvSpPr>
-            <a:spLocks noGrp="1"/>
-          </p:cNvSpPr>
-          <p:nvPr>
-            <p:ph type="dt" idx="1"/>
-          </p:nvPr>
-        </p:nvSpPr>
-        <p:spPr>
-          <a:xfrm>
-            <a:off x="3884613" y="0"/>
-            <a:ext cx="2971800" cy="458788"/>
-          </a:xfrm>
-          <a:prstGeom prst="rect">
-            <a:avLst/>
-          </a:prstGeom>
-        </p:spPr>
-        <p:txBody>
-          <a:bodyPr vert="horz" lIns="91440" tIns="45720" rIns="91440" bIns="45720" rtlCol="0"/>
-          <a:lstStyle>
-            <a:lvl1pPr algn="r">
-              <a:defRPr sz="1200"/>
-            </a:lvl1pPr>
-          </a:lstStyle>
-          <a:p>
-            <a:fld id="{5282F153-3F37-0F45-9E97-73ACFA13230C}" type="datetimeFigureOut">
-              <a:rPr lang="en-US"/>
-              <a:t>7/23/19</a:t>
-            </a:fld>
-            <a:endParaRPr lang="en-US"/>
-          </a:p>
-        </p:txBody>
-      </p:sp>
-      <p:sp>
-        <p:nvSpPr>
-          <p:cNvPr id="4" name="Slide Image Placeholder 3"/>
-          <p:cNvSpPr>
-            <a:spLocks noGrp="1" noRot="1" noChangeAspect="1"/>
-          </p:cNvSpPr>
-          <p:nvPr>
-            <p:ph type="sldImg" idx="2"/>
-          </p:nvPr>
-        </p:nvSpPr>
-        <p:spPr>
-          <a:xfrm>
-            <a:off x="685800" y="1143000"/>
-            <a:ext cx="5486400" cy="3086100"/>
-          </a:xfrm>
-          <a:prstGeom prst="rect">
-            <a:avLst/>
-          </a:prstGeom>
-          <a:noFill/>
-          <a:ln w="12700">
-            <a:solidFill>
-              <a:prstClr val="black"/>
-            </a:solidFill>
-          </a:ln>
-        </p:spPr>
-        <p:txBody>
-          <a:bodyPr vert="horz" lIns="91440" tIns="45720" rIns="91440" bIns="45720" rtlCol="0" anchor="ctr"/>
-          <a:lstStyle/>
-          <a:p>
-            <a:endParaRPr lang="en-US"/>
-          </a:p>
-        </p:txBody>
-      </p:sp>
-      <p:sp>
-        <p:nvSpPr>
-          <p:cNvPr id="5" name="Notes Placeholder 4"/>
-          <p:cNvSpPr>
-            <a:spLocks noGrp="1"/>
-          </p:cNvSpPr>
-          <p:nvPr>
-            <p:ph type="body" sz="quarter" idx="3"/>
-          </p:nvPr>
-        </p:nvSpPr>
-        <p:spPr>
-          <a:xfrm>
-            <a:off x="685800" y="4400550"/>
-            <a:ext cx="5486400" cy="3600450"/>
-          </a:xfrm>
-          <a:prstGeom prst="rect">
-            <a:avLst/>
-          </a:prstGeom>
-        </p:spPr>
-        <p:txBody>
-          <a:bodyPr vert="horz" lIns="91440" tIns="45720" rIns="91440" bIns="45720" rtlCol="0"/>
-          <a:lstStyle/>
-          <a:p>
-            <a:pPr lvl="0"/>
-            <a:r>
-              <a:rPr lang="en-US"/>
-              <a:t>Click to edit Master text styles</a:t>
-            </a:r>
-          </a:p>
-          <a:p>
-            <a:pPr lvl="1"/>
-            <a:r>
-              <a:rPr lang="en-US"/>
-              <a:t>Second level</a:t>
-            </a:r>
-          </a:p>
-          <a:p>
-            <a:pPr lvl="2"/>
-            <a:r>
-              <a:rPr lang="en-US"/>
-              <a:t>Third level</a:t>
-            </a:r>
-          </a:p>
-          <a:p>
-            <a:pPr lvl="3"/>
-            <a:r>
-              <a:rPr lang="en-US"/>
-              <a:t>Fourth level</a:t>
-            </a:r>
-          </a:p>
-          <a:p>
-            <a:pPr lvl="4"/>
-            <a:r>
-              <a:rPr lang="en-US"/>
-              <a:t>Fifth level</a:t>
-            </a:r>
-          </a:p>
-        </p:txBody>
-      </p:sp>
-      <p:sp>
-        <p:nvSpPr>
-          <p:cNvPr id="6" name="Footer Placeholder 5"/>
-          <p:cNvSpPr>
-            <a:spLocks noGrp="1"/>
-          </p:cNvSpPr>
-          <p:nvPr>
-            <p:ph type="ftr" sz="quarter" idx="4"/>
-          </p:nvPr>
-        </p:nvSpPr>
-        <p:spPr>
-          <a:xfrm>
-            <a:off x="0" y="8685213"/>
-            <a:ext cx="2971800" cy="458787"/>
-          </a:xfrm>
-          <a:prstGeom prst="rect">
-            <a:avLst/>
-          </a:prstGeom>
-        </p:spPr>
-        <p:txBody>
-          <a:bodyPr vert="horz" lIns="91440" tIns="45720" rIns="91440" bIns="45720" rtlCol="0" anchor="b"/>
-          <a:lstStyle>
-            <a:lvl1pPr algn="l">
-              <a:defRPr sz="1200"/>
-            </a:lvl1pPr>
-          </a:lstStyle>
-          <a:p>
-            <a:endParaRPr lang="en-US"/>
-          </a:p>
-        </p:txBody>
-      </p:sp>
-      <p:sp>
-        <p:nvSpPr>
-          <p:cNvPr id="7" name="Slide Number Placeholder 6"/>
-          <p:cNvSpPr>
-            <a:spLocks noGrp="1"/>
-          </p:cNvSpPr>
-          <p:nvPr>
-            <p:ph type="sldNum" sz="quarter" idx="5"/>
-          </p:nvPr>
-        </p:nvSpPr>
-        <p:spPr>
-          <a:xfrm>
-            <a:off x="3884613" y="8685213"/>
-            <a:ext cx="2971800" cy="458787"/>
-          </a:xfrm>
-          <a:prstGeom prst="rect">
-            <a:avLst/>
-          </a:prstGeom>
-        </p:spPr>
-        <p:txBody>
-          <a:bodyPr vert="horz" lIns="91440" tIns="45720" rIns="91440" bIns="45720" rtlCol="0" anchor="b"/>
-          <a:lstStyle>
-            <a:lvl1pPr algn="r">
-              <a:defRPr sz="1200"/>
-            </a:lvl1pPr>
-          </a:lstStyle>
-          <a:p>
-            <a:fld id="{CE5E9CC1-C706-0F49-92D6-E571CC5EEA8F}" type="slidenum">
-              <a:rPr lang="en-US"/>
-              <a:t>‹#›</a:t>
-            </a:fld>
-            <a:endParaRPr lang="en-US"/>
-          </a:p>
-        </p:txBody>
-      </p:sp>
     </p:spTree>
     <p:extLst>
       <p:ext uri="{BB962C8B-B14F-4D97-AF65-F5344CB8AC3E}">
-        <p14:creationId xmlns:p14="http://schemas.microsoft.com/office/powerpoint/2010/main" val="1024086991"/>
+        <p14:creationId xmlns:p14="http://schemas.microsoft.com/office/powerpoint/2010/main" val="1912340048"/>
       </p:ext>
     </p:extLst>
   </p:cSld>
   <p:clrMap bg1="lt1" tx1="dk1" bg2="lt2" tx2="dk2" accent1="accent1" accent2="accent2" accent3="accent3" accent4="accent4" accent5="accent5" accent6="accent6" hlink="hlink" folHlink="folHlink"/>
   <p:notesStyle>
     <a:lvl1pPr marL="0" algn="l" defTabSz="914400" rtl="0" eaLnBrk="1" latinLnBrk="0" hangingPunct="1">
-      <a:defRPr sz="1200" kern="1200">
+      <a:defRPr kumimoji="1" sz="1200" kern="1200">
         <a:solidFill>
           <a:schemeClr val="tx1"/>
         </a:solidFill>
@@ -386,7 +167,7 @@
       </a:defRPr>
     </a:lvl1pPr>
     <a:lvl2pPr marL="457200" algn="l" defTabSz="914400" rtl="0" eaLnBrk="1" latinLnBrk="0" hangingPunct="1">
-      <a:defRPr sz="1200" kern="1200">
+      <a:defRPr kumimoji="1" sz="1200" kern="1200">
         <a:solidFill>
           <a:schemeClr val="tx1"/>
         </a:solidFill>
@@ -396,7 +177,7 @@
       </a:defRPr>
     </a:lvl2pPr>
     <a:lvl3pPr marL="914400" algn="l" defTabSz="914400" rtl="0" eaLnBrk="1" latinLnBrk="0" hangingPunct="1">
-      <a:defRPr sz="1200" kern="1200">
+      <a:defRPr kumimoji="1" sz="1200" kern="1200">
         <a:solidFill>
           <a:schemeClr val="tx1"/>
         </a:solidFill>
@@ -406,7 +187,7 @@
       </a:defRPr>
     </a:lvl3pPr>
     <a:lvl4pPr marL="1371600" algn="l" defTabSz="914400" rtl="0" eaLnBrk="1" latinLnBrk="0" hangingPunct="1">
-      <a:defRPr sz="1200" kern="1200">
+      <a:defRPr kumimoji="1" sz="1200" kern="1200">
         <a:solidFill>
           <a:schemeClr val="tx1"/>
         </a:solidFill>
@@ -416,7 +197,7 @@
       </a:defRPr>
     </a:lvl4pPr>
     <a:lvl5pPr marL="1828800" algn="l" defTabSz="914400" rtl="0" eaLnBrk="1" latinLnBrk="0" hangingPunct="1">
-      <a:defRPr sz="1200" kern="1200">
+      <a:defRPr kumimoji="1" sz="1200" kern="1200">
         <a:solidFill>
           <a:schemeClr val="tx1"/>
         </a:solidFill>
@@ -426,7 +207,7 @@
       </a:defRPr>
     </a:lvl5pPr>
     <a:lvl6pPr marL="2286000" algn="l" defTabSz="914400" rtl="0" eaLnBrk="1" latinLnBrk="0" hangingPunct="1">
-      <a:defRPr sz="1200" kern="1200">
+      <a:defRPr kumimoji="1" sz="1200" kern="1200">
         <a:solidFill>
           <a:schemeClr val="tx1"/>
         </a:solidFill>
@@ -436,7 +217,7 @@
       </a:defRPr>
     </a:lvl6pPr>
     <a:lvl7pPr marL="2743200" algn="l" defTabSz="914400" rtl="0" eaLnBrk="1" latinLnBrk="0" hangingPunct="1">
-      <a:defRPr sz="1200" kern="1200">
+      <a:defRPr kumimoji="1" sz="1200" kern="1200">
         <a:solidFill>
           <a:schemeClr val="tx1"/>
         </a:solidFill>
@@ -446,7 +227,7 @@
       </a:defRPr>
     </a:lvl7pPr>
     <a:lvl8pPr marL="3200400" algn="l" defTabSz="914400" rtl="0" eaLnBrk="1" latinLnBrk="0" hangingPunct="1">
-      <a:defRPr sz="1200" kern="1200">
+      <a:defRPr kumimoji="1" sz="1200" kern="1200">
         <a:solidFill>
           <a:schemeClr val="tx1"/>
         </a:solidFill>
@@ -456,7 +237,7 @@
       </a:defRPr>
     </a:lvl8pPr>
     <a:lvl9pPr marL="3657600" algn="l" defTabSz="914400" rtl="0" eaLnBrk="1" latinLnBrk="0" hangingPunct="1">
-      <a:defRPr sz="1200" kern="1200">
+      <a:defRPr kumimoji="1" sz="1200" kern="1200">
         <a:solidFill>
           <a:schemeClr val="tx1"/>
         </a:solidFill>
@@ -513,10 +294,6 @@
           <a:bodyPr/>
           <a:lstStyle/>
           <a:p>
-            <a:r>
-              <a:rPr lang="en-US" dirty="0"/>
-              <a:t/>
-            </a:r>
             <a:endParaRPr lang="en-US" dirty="0"/>
           </a:p>
         </p:txBody>
@@ -601,10 +378,6 @@
           <a:bodyPr/>
           <a:lstStyle/>
           <a:p>
-            <a:r>
-              <a:rPr lang="en-US" dirty="0"/>
-              <a:t/>
-            </a:r>
             <a:endParaRPr lang="en-US" dirty="0"/>
           </a:p>
         </p:txBody>
@@ -689,10 +462,6 @@
           <a:bodyPr/>
           <a:lstStyle/>
           <a:p>
-            <a:r>
-              <a:rPr lang="en-US" dirty="0"/>
-              <a:t/>
-            </a:r>
             <a:endParaRPr lang="en-US" dirty="0"/>
           </a:p>
         </p:txBody>
@@ -777,10 +546,6 @@
           <a:bodyPr/>
           <a:lstStyle/>
           <a:p>
-            <a:r>
-              <a:rPr lang="en-US" dirty="0"/>
-              <a:t/>
-            </a:r>
             <a:endParaRPr lang="en-US" dirty="0"/>
           </a:p>
         </p:txBody>
@@ -865,10 +630,6 @@
           <a:bodyPr/>
           <a:lstStyle/>
           <a:p>
-            <a:r>
-              <a:rPr lang="en-US" dirty="0"/>
-              <a:t/>
-            </a:r>
             <a:endParaRPr lang="en-US" dirty="0"/>
           </a:p>
         </p:txBody>
@@ -953,10 +714,6 @@
           <a:bodyPr/>
           <a:lstStyle/>
           <a:p>
-            <a:r>
-              <a:rPr lang="en-US" dirty="0"/>
-              <a:t/>
-            </a:r>
             <a:endParaRPr lang="en-US" dirty="0"/>
           </a:p>
         </p:txBody>
@@ -1041,10 +798,6 @@
           <a:bodyPr/>
           <a:lstStyle/>
           <a:p>
-            <a:r>
-              <a:rPr lang="en-US" dirty="0"/>
-              <a:t/>
-            </a:r>
             <a:endParaRPr lang="en-US" dirty="0"/>
           </a:p>
         </p:txBody>
@@ -1129,10 +882,6 @@
           <a:bodyPr/>
           <a:lstStyle/>
           <a:p>
-            <a:r>
-              <a:rPr lang="en-US" dirty="0"/>
-              <a:t/>
-            </a:r>
             <a:endParaRPr lang="en-US" dirty="0"/>
           </a:p>
         </p:txBody>
@@ -1217,10 +966,6 @@
           <a:bodyPr/>
           <a:lstStyle/>
           <a:p>
-            <a:r>
-              <a:rPr lang="en-US" dirty="0"/>
-              <a:t/>
-            </a:r>
             <a:endParaRPr lang="en-US" dirty="0"/>
           </a:p>
         </p:txBody>
@@ -1305,10 +1050,6 @@
           <a:bodyPr/>
           <a:lstStyle/>
           <a:p>
-            <a:r>
-              <a:rPr lang="en-US" dirty="0"/>
-              <a:t/>
-            </a:r>
             <a:endParaRPr lang="en-US" dirty="0"/>
           </a:p>
         </p:txBody>
@@ -1393,10 +1134,6 @@
           <a:bodyPr/>
           <a:lstStyle/>
           <a:p>
-            <a:r>
-              <a:rPr lang="en-US" dirty="0"/>
-              <a:t/>
-            </a:r>
             <a:endParaRPr lang="en-US" dirty="0"/>
           </a:p>
         </p:txBody>
@@ -1481,10 +1218,6 @@
           <a:bodyPr/>
           <a:lstStyle/>
           <a:p>
-            <a:r>
-              <a:rPr lang="en-US" dirty="0"/>
-              <a:t/>
-            </a:r>
             <a:endParaRPr lang="en-US" dirty="0"/>
           </a:p>
         </p:txBody>
@@ -1569,10 +1302,6 @@
           <a:bodyPr/>
           <a:lstStyle/>
           <a:p>
-            <a:r>
-              <a:rPr lang="en-US" dirty="0"/>
-              <a:t/>
-            </a:r>
             <a:endParaRPr lang="en-US" dirty="0"/>
           </a:p>
         </p:txBody>
@@ -1657,10 +1386,6 @@
           <a:bodyPr/>
           <a:lstStyle/>
           <a:p>
-            <a:r>
-              <a:rPr lang="en-US" dirty="0"/>
-              <a:t/>
-            </a:r>
             <a:endParaRPr lang="en-US" dirty="0"/>
           </a:p>
         </p:txBody>
@@ -1734,6 +1459,11 @@
 <file path=ppt/slideMasters/slideMaster1.xml><?xml version="1.0" encoding="utf-8"?>
 <p:sldMaster xmlns:a="http://schemas.openxmlformats.org/drawingml/2006/main" xmlns:r="http://schemas.openxmlformats.org/officeDocument/2006/relationships" xmlns:p="http://schemas.openxmlformats.org/presentationml/2006/main">
   <p:cSld>
+    <p:bg>
+      <p:bgRef idx="1001">
+        <a:schemeClr val="bg1"/>
+      </p:bgRef>
+    </p:bg>
     <p:spTree>
       <p:nvGrpSpPr>
         <p:cNvPr id="1" name=""/>
@@ -2016,6 +1746,7 @@
         <a:solidFill>
           <a:srgbClr val="FFFFFF"/>
         </a:solidFill>
+        <a:effectLst/>
       </p:bgPr>
     </p:bg>
     <p:spTree>
@@ -2051,6 +1782,13 @@
           </a:solidFill>
           <a:ln/>
         </p:spPr>
+        <p:txBody>
+          <a:bodyPr/>
+          <a:lstStyle/>
+          <a:p>
+            <a:endParaRPr lang="ja-JP" altLang="en-US"/>
+          </a:p>
+        </p:txBody>
       </p:sp>
       <p:sp>
         <p:nvSpPr>
@@ -2073,7 +1811,7 @@
           <a:bodyPr wrap="square" lIns="0" tIns="0" rIns="0" bIns="0" rtlCol="0" anchor="ctr"/>
           <a:lstStyle/>
           <a:p>
-            <a:pPr indent="0" marL="0">
+            <a:pPr marL="0" indent="0">
               <a:buNone/>
             </a:pPr>
             <a:r>
@@ -2112,11 +1850,11 @@
           <a:bodyPr wrap="square" lIns="0" tIns="0" rIns="0" bIns="0" rtlCol="0" anchor="ctr"/>
           <a:lstStyle/>
           <a:p>
-            <a:pPr indent="0" marL="0">
-              <a:buNone/>
-            </a:pPr>
-            <a:r>
-              <a:rPr lang="en-US" sz="2100" spc="200" kern="0" dirty="0">
+            <a:pPr marL="0" indent="0">
+              <a:buNone/>
+            </a:pPr>
+            <a:r>
+              <a:rPr lang="en-US" sz="2100" kern="0" spc="200" dirty="0">
                 <a:solidFill>
                   <a:srgbClr val="A26769"/>
                 </a:solidFill>
@@ -2149,6 +1887,13 @@
           </a:solidFill>
           <a:ln/>
         </p:spPr>
+        <p:txBody>
+          <a:bodyPr/>
+          <a:lstStyle/>
+          <a:p>
+            <a:endParaRPr lang="ja-JP" altLang="en-US"/>
+          </a:p>
+        </p:txBody>
       </p:sp>
       <p:sp>
         <p:nvSpPr>
@@ -2171,7 +1916,7 @@
           <a:bodyPr wrap="square" lIns="0" tIns="0" rIns="0" bIns="0" rtlCol="0" anchor="ctr"/>
           <a:lstStyle/>
           <a:p>
-            <a:pPr indent="0" marL="0">
+            <a:pPr marL="0" indent="0">
               <a:buNone/>
             </a:pPr>
             <a:r>
@@ -2210,7 +1955,7 @@
           <a:bodyPr wrap="square" lIns="0" tIns="0" rIns="0" bIns="0" rtlCol="0" anchor="ctr"/>
           <a:lstStyle/>
           <a:p>
-            <a:pPr indent="0" marL="0">
+            <a:pPr marL="0" indent="0">
               <a:buNone/>
             </a:pPr>
             <a:r>
@@ -2230,14 +1975,14 @@
       </p:sp>
       <p:pic>
         <p:nvPicPr>
-          <p:cNvPr id="8" name="Image 0" descr="C:\Users\msoga\OneDrive - Smart Designer\Projects\見守り隊\docs\images\01-top.png">    </p:cNvPr>
+          <p:cNvPr id="8" name="Image 0" descr="C:\Users\msoga\OneDrive - Smart Designer\Projects\見守り隊\docs\images\01-top.png"/>
           <p:cNvPicPr>
             <a:picLocks noChangeAspect="1"/>
           </p:cNvPicPr>
           <p:nvPr/>
         </p:nvPicPr>
         <p:blipFill>
-          <a:blip r:embed="rId1"/>
+          <a:blip r:embed="rId3"/>
           <a:stretch>
             <a:fillRect/>
           </a:stretch>
@@ -2273,6 +2018,13 @@
             <a:prstDash val="solid"/>
           </a:ln>
         </p:spPr>
+        <p:txBody>
+          <a:bodyPr/>
+          <a:lstStyle/>
+          <a:p>
+            <a:endParaRPr lang="ja-JP" altLang="en-US"/>
+          </a:p>
+        </p:txBody>
       </p:sp>
       <p:sp>
         <p:nvSpPr>
@@ -2295,7 +2047,7 @@
           <a:bodyPr wrap="square" lIns="0" tIns="0" rIns="0" bIns="0" rtlCol="0" anchor="ctr"/>
           <a:lstStyle/>
           <a:p>
-            <a:pPr algn="ctr" indent="0" marL="0">
+            <a:pPr marL="0" indent="0" algn="ctr">
               <a:buNone/>
             </a:pPr>
             <a:r>
@@ -2329,6 +2081,7 @@
         <a:solidFill>
           <a:srgbClr val="FFFFFF"/>
         </a:solidFill>
+        <a:effectLst/>
       </p:bgPr>
     </p:bg>
     <p:spTree>
@@ -2366,7 +2119,7 @@
           <a:bodyPr wrap="square" lIns="0" tIns="0" rIns="0" bIns="0" rtlCol="0" anchor="ctr"/>
           <a:lstStyle/>
           <a:p>
-            <a:pPr algn="l" indent="0" marL="0">
+            <a:pPr marL="0" indent="0" algn="l">
               <a:buNone/>
             </a:pPr>
             <a:r>
@@ -2405,7 +2158,7 @@
           <a:bodyPr wrap="square" lIns="0" tIns="0" rIns="0" bIns="0" rtlCol="0" anchor="ctr"/>
           <a:lstStyle/>
           <a:p>
-            <a:pPr algn="l" indent="0" marL="0">
+            <a:pPr marL="0" indent="0" algn="l">
               <a:buNone/>
             </a:pPr>
             <a:r>
@@ -2447,6 +2200,13 @@
             <a:prstDash val="solid"/>
           </a:ln>
         </p:spPr>
+        <p:txBody>
+          <a:bodyPr/>
+          <a:lstStyle/>
+          <a:p>
+            <a:endParaRPr lang="ja-JP" altLang="en-US"/>
+          </a:p>
+        </p:txBody>
       </p:sp>
       <p:sp>
         <p:nvSpPr>
@@ -2467,6 +2227,13 @@
           </a:solidFill>
           <a:ln/>
         </p:spPr>
+        <p:txBody>
+          <a:bodyPr/>
+          <a:lstStyle/>
+          <a:p>
+            <a:endParaRPr lang="ja-JP" altLang="en-US"/>
+          </a:p>
+        </p:txBody>
       </p:sp>
       <p:sp>
         <p:nvSpPr>
@@ -2489,7 +2256,7 @@
           <a:bodyPr wrap="square" lIns="0" tIns="0" rIns="0" bIns="0" rtlCol="0" anchor="ctr"/>
           <a:lstStyle/>
           <a:p>
-            <a:pPr indent="0" marL="0">
+            <a:pPr marL="0" indent="0">
               <a:buNone/>
             </a:pPr>
             <a:r>
@@ -2528,7 +2295,7 @@
           <a:bodyPr wrap="square" lIns="0" tIns="0" rIns="0" bIns="0" rtlCol="0" anchor="ctr"/>
           <a:lstStyle/>
           <a:p>
-            <a:pPr indent="0" marL="0">
+            <a:pPr marL="0" indent="0">
               <a:buNone/>
             </a:pPr>
             <a:r>
@@ -2567,7 +2334,7 @@
           <a:bodyPr wrap="square" lIns="0" tIns="0" rIns="0" bIns="0" rtlCol="0" anchor="ctr"/>
           <a:lstStyle/>
           <a:p>
-            <a:pPr algn="r" indent="0" marL="0">
+            <a:pPr marL="0" indent="0" algn="r">
               <a:buNone/>
             </a:pPr>
             <a:r>
@@ -2581,9 +2348,6 @@
               </a:rPr>
               <a:t>0</a:t>
             </a:r>
-            <a:pPr algn="r" indent="0" marL="0">
-              <a:buNone/>
-            </a:pPr>
             <a:r>
               <a:rPr lang="en-US" sz="1300" dirty="0">
                 <a:solidFill>
@@ -2620,7 +2384,7 @@
           <a:bodyPr wrap="square" lIns="0" tIns="0" rIns="0" bIns="0" rtlCol="0" anchor="ctr"/>
           <a:lstStyle/>
           <a:p>
-            <a:pPr algn="r" indent="0" marL="0">
+            <a:pPr marL="0" indent="0" algn="r">
               <a:buNone/>
             </a:pPr>
             <a:r>
@@ -2659,7 +2423,7 @@
           <a:bodyPr wrap="square" lIns="0" tIns="0" rIns="0" bIns="0" rtlCol="0" anchor="t"/>
           <a:lstStyle/>
           <a:p>
-            <a:pPr indent="0" marL="0">
+            <a:pPr marL="0" indent="0">
               <a:lnSpc>
                 <a:spcPct val="140000"/>
               </a:lnSpc>
@@ -2704,6 +2468,13 @@
             <a:prstDash val="solid"/>
           </a:ln>
         </p:spPr>
+        <p:txBody>
+          <a:bodyPr/>
+          <a:lstStyle/>
+          <a:p>
+            <a:endParaRPr lang="ja-JP" altLang="en-US"/>
+          </a:p>
+        </p:txBody>
       </p:sp>
       <p:sp>
         <p:nvSpPr>
@@ -2724,6 +2495,13 @@
           </a:solidFill>
           <a:ln/>
         </p:spPr>
+        <p:txBody>
+          <a:bodyPr/>
+          <a:lstStyle/>
+          <a:p>
+            <a:endParaRPr lang="ja-JP" altLang="en-US"/>
+          </a:p>
+        </p:txBody>
       </p:sp>
       <p:sp>
         <p:nvSpPr>
@@ -2746,7 +2524,7 @@
           <a:bodyPr wrap="square" lIns="0" tIns="0" rIns="0" bIns="0" rtlCol="0" anchor="ctr"/>
           <a:lstStyle/>
           <a:p>
-            <a:pPr indent="0" marL="0">
+            <a:pPr marL="0" indent="0">
               <a:buNone/>
             </a:pPr>
             <a:r>
@@ -2785,7 +2563,7 @@
           <a:bodyPr wrap="square" lIns="0" tIns="0" rIns="0" bIns="0" rtlCol="0" anchor="ctr"/>
           <a:lstStyle/>
           <a:p>
-            <a:pPr indent="0" marL="0">
+            <a:pPr marL="0" indent="0">
               <a:buNone/>
             </a:pPr>
             <a:r>
@@ -2824,7 +2602,7 @@
           <a:bodyPr wrap="square" lIns="0" tIns="0" rIns="0" bIns="0" rtlCol="0" anchor="ctr"/>
           <a:lstStyle/>
           <a:p>
-            <a:pPr algn="r" indent="0" marL="0">
+            <a:pPr marL="0" indent="0" algn="r">
               <a:buNone/>
             </a:pPr>
             <a:r>
@@ -2838,9 +2616,6 @@
               </a:rPr>
               <a:t>1</a:t>
             </a:r>
-            <a:pPr algn="r" indent="0" marL="0">
-              <a:buNone/>
-            </a:pPr>
             <a:r>
               <a:rPr lang="en-US" sz="1300" dirty="0">
                 <a:solidFill>
@@ -2877,7 +2652,7 @@
           <a:bodyPr wrap="square" lIns="0" tIns="0" rIns="0" bIns="0" rtlCol="0" anchor="ctr"/>
           <a:lstStyle/>
           <a:p>
-            <a:pPr algn="r" indent="0" marL="0">
+            <a:pPr marL="0" indent="0" algn="r">
               <a:buNone/>
             </a:pPr>
             <a:r>
@@ -2916,7 +2691,7 @@
           <a:bodyPr wrap="square" lIns="0" tIns="0" rIns="0" bIns="0" rtlCol="0" anchor="t"/>
           <a:lstStyle/>
           <a:p>
-            <a:pPr indent="0" marL="0">
+            <a:pPr marL="0" indent="0">
               <a:lnSpc>
                 <a:spcPct val="140000"/>
               </a:lnSpc>
@@ -2961,6 +2736,13 @@
             <a:prstDash val="solid"/>
           </a:ln>
         </p:spPr>
+        <p:txBody>
+          <a:bodyPr/>
+          <a:lstStyle/>
+          <a:p>
+            <a:endParaRPr lang="ja-JP" altLang="en-US"/>
+          </a:p>
+        </p:txBody>
       </p:sp>
       <p:sp>
         <p:nvSpPr>
@@ -2983,7 +2765,7 @@
           <a:bodyPr wrap="square" lIns="0" tIns="0" rIns="0" bIns="0" rtlCol="0" anchor="ctr"/>
           <a:lstStyle/>
           <a:p>
-            <a:pPr indent="0" marL="0">
+            <a:pPr marL="0" indent="0">
               <a:buNone/>
             </a:pPr>
             <a:r>
@@ -3022,7 +2804,7 @@
           <a:bodyPr wrap="square" lIns="0" tIns="0" rIns="0" bIns="0" rtlCol="0" anchor="t"/>
           <a:lstStyle/>
           <a:p>
-            <a:pPr indent="0" marL="0">
+            <a:pPr marL="0" indent="0">
               <a:lnSpc>
                 <a:spcPct val="132000"/>
               </a:lnSpc>
@@ -3042,7 +2824,7 @@
             <a:endParaRPr lang="en-US" sz="1000" dirty="0"/>
           </a:p>
           <a:p>
-            <a:pPr indent="0" marL="0">
+            <a:pPr marL="0" indent="0">
               <a:lnSpc>
                 <a:spcPct val="132000"/>
               </a:lnSpc>
@@ -3062,7 +2844,7 @@
             <a:endParaRPr lang="en-US" sz="1000" dirty="0"/>
           </a:p>
           <a:p>
-            <a:pPr indent="0" marL="0">
+            <a:pPr marL="0" indent="0">
               <a:lnSpc>
                 <a:spcPct val="132000"/>
               </a:lnSpc>
@@ -3102,6 +2884,13 @@
           </a:solidFill>
           <a:ln/>
         </p:spPr>
+        <p:txBody>
+          <a:bodyPr/>
+          <a:lstStyle/>
+          <a:p>
+            <a:endParaRPr lang="ja-JP" altLang="en-US"/>
+          </a:p>
+        </p:txBody>
       </p:sp>
       <p:sp>
         <p:nvSpPr>
@@ -3122,6 +2911,13 @@
           </a:solidFill>
           <a:ln/>
         </p:spPr>
+        <p:txBody>
+          <a:bodyPr/>
+          <a:lstStyle/>
+          <a:p>
+            <a:endParaRPr lang="ja-JP" altLang="en-US"/>
+          </a:p>
+        </p:txBody>
       </p:sp>
       <p:sp>
         <p:nvSpPr>
@@ -3144,7 +2940,7 @@
           <a:bodyPr wrap="square" lIns="0" tIns="0" rIns="0" bIns="0" rtlCol="0" anchor="ctr"/>
           <a:lstStyle/>
           <a:p>
-            <a:pPr indent="0" marL="0">
+            <a:pPr marL="0" indent="0">
               <a:buNone/>
             </a:pPr>
             <a:r>
@@ -3184,6 +2980,13 @@
             <a:prstDash val="solid"/>
           </a:ln>
         </p:spPr>
+        <p:txBody>
+          <a:bodyPr/>
+          <a:lstStyle/>
+          <a:p>
+            <a:endParaRPr lang="ja-JP" altLang="en-US"/>
+          </a:p>
+        </p:txBody>
       </p:sp>
       <p:sp>
         <p:nvSpPr>
@@ -3206,7 +3009,7 @@
           <a:bodyPr wrap="square" lIns="0" tIns="0" rIns="0" bIns="0" rtlCol="0" anchor="ctr"/>
           <a:lstStyle/>
           <a:p>
-            <a:pPr indent="0" marL="0">
+            <a:pPr marL="0" indent="0">
               <a:buNone/>
             </a:pPr>
             <a:r>
@@ -3245,7 +3048,7 @@
           <a:bodyPr wrap="square" lIns="0" tIns="0" rIns="0" bIns="0" rtlCol="0" anchor="ctr"/>
           <a:lstStyle/>
           <a:p>
-            <a:pPr algn="r" indent="0" marL="0">
+            <a:pPr marL="0" indent="0" algn="r">
               <a:buNone/>
             </a:pPr>
             <a:r>
@@ -3279,6 +3082,7 @@
         <a:solidFill>
           <a:srgbClr val="FFFFFF"/>
         </a:solidFill>
+        <a:effectLst/>
       </p:bgPr>
     </p:bg>
     <p:spTree>
@@ -3316,7 +3120,7 @@
           <a:bodyPr wrap="square" lIns="0" tIns="0" rIns="0" bIns="0" rtlCol="0" anchor="ctr"/>
           <a:lstStyle/>
           <a:p>
-            <a:pPr algn="l" indent="0" marL="0">
+            <a:pPr marL="0" indent="0" algn="l">
               <a:buNone/>
             </a:pPr>
             <a:r>
@@ -3355,7 +3159,7 @@
           <a:bodyPr wrap="square" lIns="0" tIns="0" rIns="0" bIns="0" rtlCol="0" anchor="ctr"/>
           <a:lstStyle/>
           <a:p>
-            <a:pPr algn="l" indent="0" marL="0">
+            <a:pPr marL="0" indent="0" algn="l">
               <a:buNone/>
             </a:pPr>
             <a:r>
@@ -3392,6 +3196,13 @@
           </a:solidFill>
           <a:ln/>
         </p:spPr>
+        <p:txBody>
+          <a:bodyPr/>
+          <a:lstStyle/>
+          <a:p>
+            <a:endParaRPr lang="ja-JP" altLang="en-US"/>
+          </a:p>
+        </p:txBody>
       </p:sp>
       <p:sp>
         <p:nvSpPr>
@@ -3414,7 +3225,7 @@
           <a:bodyPr wrap="square" lIns="0" tIns="0" rIns="0" bIns="0" rtlCol="0" anchor="ctr"/>
           <a:lstStyle/>
           <a:p>
-            <a:pPr indent="0" marL="0">
+            <a:pPr marL="0" indent="0">
               <a:buNone/>
             </a:pPr>
             <a:r>
@@ -3453,7 +3264,7 @@
           <a:bodyPr wrap="square" lIns="0" tIns="0" rIns="0" bIns="0" rtlCol="0" anchor="t"/>
           <a:lstStyle/>
           <a:p>
-            <a:pPr indent="0" marL="0">
+            <a:pPr marL="0" indent="0">
               <a:lnSpc>
                 <a:spcPct val="140000"/>
               </a:lnSpc>
@@ -3473,7 +3284,7 @@
             <a:endParaRPr lang="en-US" sz="1200" dirty="0"/>
           </a:p>
           <a:p>
-            <a:pPr indent="0" marL="0">
+            <a:pPr marL="0" indent="0">
               <a:lnSpc>
                 <a:spcPct val="140000"/>
               </a:lnSpc>
@@ -3516,6 +3327,13 @@
             <a:prstDash val="solid"/>
           </a:ln>
         </p:spPr>
+        <p:txBody>
+          <a:bodyPr/>
+          <a:lstStyle/>
+          <a:p>
+            <a:endParaRPr lang="ja-JP" altLang="en-US"/>
+          </a:p>
+        </p:txBody>
       </p:sp>
       <p:sp>
         <p:nvSpPr>
@@ -3536,6 +3354,13 @@
           </a:solidFill>
           <a:ln/>
         </p:spPr>
+        <p:txBody>
+          <a:bodyPr/>
+          <a:lstStyle/>
+          <a:p>
+            <a:endParaRPr lang="ja-JP" altLang="en-US"/>
+          </a:p>
+        </p:txBody>
       </p:sp>
       <p:sp>
         <p:nvSpPr>
@@ -3558,7 +3383,7 @@
           <a:bodyPr wrap="square" lIns="0" tIns="0" rIns="0" bIns="0" rtlCol="0" anchor="ctr"/>
           <a:lstStyle/>
           <a:p>
-            <a:pPr indent="0" marL="0">
+            <a:pPr marL="0" indent="0">
               <a:buNone/>
             </a:pPr>
             <a:r>
@@ -3597,7 +3422,7 @@
           <a:bodyPr wrap="square" lIns="0" tIns="0" rIns="0" bIns="0" rtlCol="0" anchor="t"/>
           <a:lstStyle/>
           <a:p>
-            <a:pPr indent="0" marL="0">
+            <a:pPr marL="0" indent="0">
               <a:lnSpc>
                 <a:spcPct val="140000"/>
               </a:lnSpc>
@@ -3617,7 +3442,7 @@
             <a:endParaRPr lang="en-US" sz="1200" dirty="0"/>
           </a:p>
           <a:p>
-            <a:pPr indent="0" marL="0">
+            <a:pPr marL="0" indent="0">
               <a:lnSpc>
                 <a:spcPct val="140000"/>
               </a:lnSpc>
@@ -3660,6 +3485,13 @@
             <a:prstDash val="solid"/>
           </a:ln>
         </p:spPr>
+        <p:txBody>
+          <a:bodyPr/>
+          <a:lstStyle/>
+          <a:p>
+            <a:endParaRPr lang="ja-JP" altLang="en-US"/>
+          </a:p>
+        </p:txBody>
       </p:sp>
       <p:sp>
         <p:nvSpPr>
@@ -3680,6 +3512,13 @@
           </a:solidFill>
           <a:ln/>
         </p:spPr>
+        <p:txBody>
+          <a:bodyPr/>
+          <a:lstStyle/>
+          <a:p>
+            <a:endParaRPr lang="ja-JP" altLang="en-US"/>
+          </a:p>
+        </p:txBody>
       </p:sp>
       <p:sp>
         <p:nvSpPr>
@@ -3702,7 +3541,7 @@
           <a:bodyPr wrap="square" lIns="0" tIns="0" rIns="0" bIns="0" rtlCol="0" anchor="ctr"/>
           <a:lstStyle/>
           <a:p>
-            <a:pPr indent="0" marL="0">
+            <a:pPr marL="0" indent="0">
               <a:buNone/>
             </a:pPr>
             <a:r>
@@ -3741,7 +3580,7 @@
           <a:bodyPr wrap="square" lIns="0" tIns="0" rIns="0" bIns="0" rtlCol="0" anchor="t"/>
           <a:lstStyle/>
           <a:p>
-            <a:pPr indent="0" marL="0">
+            <a:pPr marL="0" indent="0">
               <a:lnSpc>
                 <a:spcPct val="140000"/>
               </a:lnSpc>
@@ -3761,7 +3600,7 @@
             <a:endParaRPr lang="en-US" sz="1200" dirty="0"/>
           </a:p>
           <a:p>
-            <a:pPr indent="0" marL="0">
+            <a:pPr marL="0" indent="0">
               <a:lnSpc>
                 <a:spcPct val="140000"/>
               </a:lnSpc>
@@ -3801,6 +3640,13 @@
           </a:solidFill>
           <a:ln/>
         </p:spPr>
+        <p:txBody>
+          <a:bodyPr/>
+          <a:lstStyle/>
+          <a:p>
+            <a:endParaRPr lang="ja-JP" altLang="en-US"/>
+          </a:p>
+        </p:txBody>
       </p:sp>
       <p:sp>
         <p:nvSpPr>
@@ -3821,6 +3667,13 @@
           </a:solidFill>
           <a:ln/>
         </p:spPr>
+        <p:txBody>
+          <a:bodyPr/>
+          <a:lstStyle/>
+          <a:p>
+            <a:endParaRPr lang="ja-JP" altLang="en-US"/>
+          </a:p>
+        </p:txBody>
       </p:sp>
       <p:sp>
         <p:nvSpPr>
@@ -3843,7 +3696,7 @@
           <a:bodyPr wrap="square" lIns="0" tIns="0" rIns="0" bIns="0" rtlCol="0" anchor="ctr"/>
           <a:lstStyle/>
           <a:p>
-            <a:pPr indent="0" marL="0">
+            <a:pPr marL="0" indent="0">
               <a:buNone/>
             </a:pPr>
             <a:r>
@@ -3883,6 +3736,13 @@
             <a:prstDash val="solid"/>
           </a:ln>
         </p:spPr>
+        <p:txBody>
+          <a:bodyPr/>
+          <a:lstStyle/>
+          <a:p>
+            <a:endParaRPr lang="ja-JP" altLang="en-US"/>
+          </a:p>
+        </p:txBody>
       </p:sp>
       <p:sp>
         <p:nvSpPr>
@@ -3905,7 +3765,7 @@
           <a:bodyPr wrap="square" lIns="0" tIns="0" rIns="0" bIns="0" rtlCol="0" anchor="ctr"/>
           <a:lstStyle/>
           <a:p>
-            <a:pPr indent="0" marL="0">
+            <a:pPr marL="0" indent="0">
               <a:buNone/>
             </a:pPr>
             <a:r>
@@ -3944,7 +3804,7 @@
           <a:bodyPr wrap="square" lIns="0" tIns="0" rIns="0" bIns="0" rtlCol="0" anchor="ctr"/>
           <a:lstStyle/>
           <a:p>
-            <a:pPr algn="r" indent="0" marL="0">
+            <a:pPr marL="0" indent="0" algn="r">
               <a:buNone/>
             </a:pPr>
             <a:r>
@@ -3978,6 +3838,7 @@
         <a:solidFill>
           <a:srgbClr val="FFFFFF"/>
         </a:solidFill>
+        <a:effectLst/>
       </p:bgPr>
     </p:bg>
     <p:spTree>
@@ -4015,7 +3876,7 @@
           <a:bodyPr wrap="square" lIns="0" tIns="0" rIns="0" bIns="0" rtlCol="0" anchor="ctr"/>
           <a:lstStyle/>
           <a:p>
-            <a:pPr algn="l" indent="0" marL="0">
+            <a:pPr marL="0" indent="0" algn="l">
               <a:buNone/>
             </a:pPr>
             <a:r>
@@ -4054,7 +3915,7 @@
           <a:bodyPr wrap="square" lIns="0" tIns="0" rIns="0" bIns="0" rtlCol="0" anchor="ctr"/>
           <a:lstStyle/>
           <a:p>
-            <a:pPr algn="l" indent="0" marL="0">
+            <a:pPr marL="0" indent="0" algn="l">
               <a:buNone/>
             </a:pPr>
             <a:r>
@@ -4074,14 +3935,14 @@
       </p:sp>
       <p:pic>
         <p:nvPicPr>
-          <p:cNvPr id="4" name="Image 0" descr="C:\Users\msoga\OneDrive - Smart Designer\Projects\見守り隊\docs\images\06-one-touch.png">    </p:cNvPr>
+          <p:cNvPr id="4" name="Image 0" descr="C:\Users\msoga\OneDrive - Smart Designer\Projects\見守り隊\docs\images\06-one-touch.png"/>
           <p:cNvPicPr>
             <a:picLocks noChangeAspect="1"/>
           </p:cNvPicPr>
           <p:nvPr/>
         </p:nvPicPr>
         <p:blipFill>
-          <a:blip r:embed="rId1"/>
+          <a:blip r:embed="rId3"/>
           <a:stretch>
             <a:fillRect/>
           </a:stretch>
@@ -4117,6 +3978,13 @@
             <a:prstDash val="solid"/>
           </a:ln>
         </p:spPr>
+        <p:txBody>
+          <a:bodyPr/>
+          <a:lstStyle/>
+          <a:p>
+            <a:endParaRPr lang="ja-JP" altLang="en-US"/>
+          </a:p>
+        </p:txBody>
       </p:sp>
       <p:sp>
         <p:nvSpPr>
@@ -4139,7 +4007,7 @@
           <a:bodyPr wrap="square" lIns="0" tIns="0" rIns="0" bIns="0" rtlCol="0" anchor="t"/>
           <a:lstStyle/>
           <a:p>
-            <a:pPr algn="ctr" indent="0" marL="0">
+            <a:pPr marL="0" indent="0" algn="ctr">
               <a:buNone/>
             </a:pPr>
             <a:r>
@@ -4178,7 +4046,7 @@
           <a:bodyPr wrap="square" lIns="0" tIns="0" rIns="0" bIns="0" rtlCol="0" anchor="ctr"/>
           <a:lstStyle/>
           <a:p>
-            <a:pPr indent="0" marL="0">
+            <a:pPr marL="0" indent="0">
               <a:buNone/>
             </a:pPr>
             <a:r>
@@ -4215,6 +4083,13 @@
           </a:solidFill>
           <a:ln/>
         </p:spPr>
+        <p:txBody>
+          <a:bodyPr/>
+          <a:lstStyle/>
+          <a:p>
+            <a:endParaRPr lang="ja-JP" altLang="en-US"/>
+          </a:p>
+        </p:txBody>
       </p:sp>
       <p:sp>
         <p:nvSpPr>
@@ -4237,7 +4112,7 @@
           <a:bodyPr wrap="square" lIns="0" tIns="0" rIns="0" bIns="0" rtlCol="0" anchor="t"/>
           <a:lstStyle/>
           <a:p>
-            <a:pPr indent="0" marL="0">
+            <a:pPr marL="0" indent="0">
               <a:lnSpc>
                 <a:spcPct val="150000"/>
               </a:lnSpc>
@@ -4257,7 +4132,7 @@
             <a:endParaRPr lang="en-US" sz="1250" dirty="0"/>
           </a:p>
           <a:p>
-            <a:pPr indent="0" marL="0">
+            <a:pPr marL="0" indent="0">
               <a:lnSpc>
                 <a:spcPct val="150000"/>
               </a:lnSpc>
@@ -4299,7 +4174,7 @@
           <a:bodyPr wrap="square" lIns="0" tIns="0" rIns="0" bIns="0" rtlCol="0" anchor="ctr"/>
           <a:lstStyle/>
           <a:p>
-            <a:pPr indent="0" marL="0">
+            <a:pPr marL="0" indent="0">
               <a:buNone/>
             </a:pPr>
             <a:r>
@@ -4336,6 +4211,13 @@
           </a:solidFill>
           <a:ln/>
         </p:spPr>
+        <p:txBody>
+          <a:bodyPr/>
+          <a:lstStyle/>
+          <a:p>
+            <a:endParaRPr lang="ja-JP" altLang="en-US"/>
+          </a:p>
+        </p:txBody>
       </p:sp>
       <p:sp>
         <p:nvSpPr>
@@ -4358,7 +4240,7 @@
           <a:bodyPr wrap="square" lIns="0" tIns="0" rIns="0" bIns="0" rtlCol="0" anchor="t"/>
           <a:lstStyle/>
           <a:p>
-            <a:pPr indent="0" marL="0">
+            <a:pPr marL="0" indent="0">
               <a:lnSpc>
                 <a:spcPct val="150000"/>
               </a:lnSpc>
@@ -4378,7 +4260,7 @@
             <a:endParaRPr lang="en-US" sz="1250" dirty="0"/>
           </a:p>
           <a:p>
-            <a:pPr indent="0" marL="0">
+            <a:pPr marL="0" indent="0">
               <a:lnSpc>
                 <a:spcPct val="150000"/>
               </a:lnSpc>
@@ -4418,6 +4300,13 @@
           </a:solidFill>
           <a:ln/>
         </p:spPr>
+        <p:txBody>
+          <a:bodyPr/>
+          <a:lstStyle/>
+          <a:p>
+            <a:endParaRPr lang="ja-JP" altLang="en-US"/>
+          </a:p>
+        </p:txBody>
       </p:sp>
       <p:sp>
         <p:nvSpPr>
@@ -4438,6 +4327,13 @@
           </a:solidFill>
           <a:ln/>
         </p:spPr>
+        <p:txBody>
+          <a:bodyPr/>
+          <a:lstStyle/>
+          <a:p>
+            <a:endParaRPr lang="ja-JP" altLang="en-US"/>
+          </a:p>
+        </p:txBody>
       </p:sp>
       <p:sp>
         <p:nvSpPr>
@@ -4460,7 +4356,7 @@
           <a:bodyPr wrap="square" lIns="0" tIns="0" rIns="0" bIns="0" rtlCol="0" anchor="ctr"/>
           <a:lstStyle/>
           <a:p>
-            <a:pPr indent="0" marL="0">
+            <a:pPr marL="0" indent="0">
               <a:buNone/>
             </a:pPr>
             <a:r>
@@ -4500,6 +4396,13 @@
             <a:prstDash val="solid"/>
           </a:ln>
         </p:spPr>
+        <p:txBody>
+          <a:bodyPr/>
+          <a:lstStyle/>
+          <a:p>
+            <a:endParaRPr lang="ja-JP" altLang="en-US"/>
+          </a:p>
+        </p:txBody>
       </p:sp>
       <p:sp>
         <p:nvSpPr>
@@ -4522,7 +4425,7 @@
           <a:bodyPr wrap="square" lIns="0" tIns="0" rIns="0" bIns="0" rtlCol="0" anchor="ctr"/>
           <a:lstStyle/>
           <a:p>
-            <a:pPr indent="0" marL="0">
+            <a:pPr marL="0" indent="0">
               <a:buNone/>
             </a:pPr>
             <a:r>
@@ -4561,7 +4464,7 @@
           <a:bodyPr wrap="square" lIns="0" tIns="0" rIns="0" bIns="0" rtlCol="0" anchor="ctr"/>
           <a:lstStyle/>
           <a:p>
-            <a:pPr algn="r" indent="0" marL="0">
+            <a:pPr marL="0" indent="0" algn="r">
               <a:buNone/>
             </a:pPr>
             <a:r>
@@ -4595,6 +4498,7 @@
         <a:solidFill>
           <a:srgbClr val="FFFFFF"/>
         </a:solidFill>
+        <a:effectLst/>
       </p:bgPr>
     </p:bg>
     <p:spTree>
@@ -4632,7 +4536,7 @@
           <a:bodyPr wrap="square" lIns="0" tIns="0" rIns="0" bIns="0" rtlCol="0" anchor="ctr"/>
           <a:lstStyle/>
           <a:p>
-            <a:pPr algn="l" indent="0" marL="0">
+            <a:pPr marL="0" indent="0" algn="l">
               <a:buNone/>
             </a:pPr>
             <a:r>
@@ -4671,7 +4575,7 @@
           <a:bodyPr wrap="square" lIns="0" tIns="0" rIns="0" bIns="0" rtlCol="0" anchor="ctr"/>
           <a:lstStyle/>
           <a:p>
-            <a:pPr algn="l" indent="0" marL="0">
+            <a:pPr marL="0" indent="0" algn="l">
               <a:buNone/>
             </a:pPr>
             <a:r>
@@ -4708,6 +4612,13 @@
           </a:solidFill>
           <a:ln/>
         </p:spPr>
+        <p:txBody>
+          <a:bodyPr/>
+          <a:lstStyle/>
+          <a:p>
+            <a:endParaRPr lang="ja-JP" altLang="en-US"/>
+          </a:p>
+        </p:txBody>
       </p:sp>
       <p:sp>
         <p:nvSpPr>
@@ -4730,7 +4641,7 @@
           <a:bodyPr wrap="square" lIns="0" tIns="0" rIns="0" bIns="0" rtlCol="0" anchor="ctr"/>
           <a:lstStyle/>
           <a:p>
-            <a:pPr algn="ctr" indent="0" marL="0">
+            <a:pPr marL="0" indent="0" algn="ctr">
               <a:buNone/>
             </a:pPr>
             <a:r>
@@ -4769,7 +4680,7 @@
           <a:bodyPr wrap="square" lIns="0" tIns="0" rIns="0" bIns="0" rtlCol="0" anchor="ctr"/>
           <a:lstStyle/>
           <a:p>
-            <a:pPr algn="ctr" indent="0" marL="0">
+            <a:pPr marL="0" indent="0" algn="ctr">
               <a:buNone/>
             </a:pPr>
             <a:r>
@@ -4808,7 +4719,7 @@
           <a:bodyPr wrap="square" lIns="0" tIns="0" rIns="0" bIns="0" rtlCol="0" anchor="t"/>
           <a:lstStyle/>
           <a:p>
-            <a:pPr algn="ctr" indent="0" marL="0">
+            <a:pPr marL="0" indent="0" algn="ctr">
               <a:lnSpc>
                 <a:spcPct val="135000"/>
               </a:lnSpc>
@@ -4828,7 +4739,7 @@
             <a:endParaRPr lang="en-US" sz="1050" dirty="0"/>
           </a:p>
           <a:p>
-            <a:pPr algn="ctr" indent="0" marL="0">
+            <a:pPr marL="0" indent="0" algn="ctr">
               <a:lnSpc>
                 <a:spcPct val="135000"/>
               </a:lnSpc>
@@ -4868,6 +4779,13 @@
           </a:solidFill>
           <a:ln/>
         </p:spPr>
+        <p:txBody>
+          <a:bodyPr/>
+          <a:lstStyle/>
+          <a:p>
+            <a:endParaRPr lang="ja-JP" altLang="en-US"/>
+          </a:p>
+        </p:txBody>
       </p:sp>
       <p:sp>
         <p:nvSpPr>
@@ -4890,7 +4808,7 @@
           <a:bodyPr wrap="square" lIns="0" tIns="0" rIns="0" bIns="0" rtlCol="0" anchor="ctr"/>
           <a:lstStyle/>
           <a:p>
-            <a:pPr algn="ctr" indent="0" marL="0">
+            <a:pPr marL="0" indent="0" algn="ctr">
               <a:buNone/>
             </a:pPr>
             <a:r>
@@ -4929,7 +4847,7 @@
           <a:bodyPr wrap="square" lIns="0" tIns="0" rIns="0" bIns="0" rtlCol="0" anchor="ctr"/>
           <a:lstStyle/>
           <a:p>
-            <a:pPr algn="ctr" indent="0" marL="0">
+            <a:pPr marL="0" indent="0" algn="ctr">
               <a:buNone/>
             </a:pPr>
             <a:r>
@@ -4968,7 +4886,7 @@
           <a:bodyPr wrap="square" lIns="0" tIns="0" rIns="0" bIns="0" rtlCol="0" anchor="t"/>
           <a:lstStyle/>
           <a:p>
-            <a:pPr algn="ctr" indent="0" marL="0">
+            <a:pPr marL="0" indent="0" algn="ctr">
               <a:lnSpc>
                 <a:spcPct val="135000"/>
               </a:lnSpc>
@@ -4988,7 +4906,7 @@
             <a:endParaRPr lang="en-US" sz="1050" dirty="0"/>
           </a:p>
           <a:p>
-            <a:pPr algn="ctr" indent="0" marL="0">
+            <a:pPr marL="0" indent="0" algn="ctr">
               <a:lnSpc>
                 <a:spcPct val="135000"/>
               </a:lnSpc>
@@ -5028,6 +4946,13 @@
           </a:solidFill>
           <a:ln/>
         </p:spPr>
+        <p:txBody>
+          <a:bodyPr/>
+          <a:lstStyle/>
+          <a:p>
+            <a:endParaRPr lang="ja-JP" altLang="en-US"/>
+          </a:p>
+        </p:txBody>
       </p:sp>
       <p:sp>
         <p:nvSpPr>
@@ -5050,7 +4975,7 @@
           <a:bodyPr wrap="square" lIns="0" tIns="0" rIns="0" bIns="0" rtlCol="0" anchor="ctr"/>
           <a:lstStyle/>
           <a:p>
-            <a:pPr algn="ctr" indent="0" marL="0">
+            <a:pPr marL="0" indent="0" algn="ctr">
               <a:buNone/>
             </a:pPr>
             <a:r>
@@ -5089,7 +5014,7 @@
           <a:bodyPr wrap="square" lIns="0" tIns="0" rIns="0" bIns="0" rtlCol="0" anchor="ctr"/>
           <a:lstStyle/>
           <a:p>
-            <a:pPr algn="ctr" indent="0" marL="0">
+            <a:pPr marL="0" indent="0" algn="ctr">
               <a:buNone/>
             </a:pPr>
             <a:r>
@@ -5128,7 +5053,7 @@
           <a:bodyPr wrap="square" lIns="0" tIns="0" rIns="0" bIns="0" rtlCol="0" anchor="t"/>
           <a:lstStyle/>
           <a:p>
-            <a:pPr algn="ctr" indent="0" marL="0">
+            <a:pPr marL="0" indent="0" algn="ctr">
               <a:lnSpc>
                 <a:spcPct val="135000"/>
               </a:lnSpc>
@@ -5148,7 +5073,7 @@
             <a:endParaRPr lang="en-US" sz="1050" dirty="0"/>
           </a:p>
           <a:p>
-            <a:pPr algn="ctr" indent="0" marL="0">
+            <a:pPr marL="0" indent="0" algn="ctr">
               <a:lnSpc>
                 <a:spcPct val="135000"/>
               </a:lnSpc>
@@ -5190,7 +5115,7 @@
           <a:bodyPr wrap="square" lIns="0" tIns="0" rIns="0" bIns="0" rtlCol="0" anchor="ctr"/>
           <a:lstStyle/>
           <a:p>
-            <a:pPr indent="0" marL="0">
+            <a:pPr marL="0" indent="0">
               <a:buNone/>
             </a:pPr>
             <a:r>
@@ -5227,6 +5152,13 @@
           </a:solidFill>
           <a:ln/>
         </p:spPr>
+        <p:txBody>
+          <a:bodyPr/>
+          <a:lstStyle/>
+          <a:p>
+            <a:endParaRPr lang="ja-JP" altLang="en-US"/>
+          </a:p>
+        </p:txBody>
       </p:sp>
       <p:sp>
         <p:nvSpPr>
@@ -5249,7 +5181,7 @@
           <a:bodyPr wrap="square" lIns="0" tIns="0" rIns="0" bIns="0" rtlCol="0" anchor="ctr"/>
           <a:lstStyle/>
           <a:p>
-            <a:pPr indent="0" marL="0">
+            <a:pPr marL="0" indent="0">
               <a:buNone/>
             </a:pPr>
             <a:r>
@@ -5288,7 +5220,7 @@
           <a:bodyPr wrap="square" lIns="0" tIns="0" rIns="0" bIns="0" rtlCol="0" anchor="ctr"/>
           <a:lstStyle/>
           <a:p>
-            <a:pPr indent="0" marL="0">
+            <a:pPr marL="0" indent="0">
               <a:lnSpc>
                 <a:spcPct val="140000"/>
               </a:lnSpc>
@@ -5308,7 +5240,7 @@
             <a:endParaRPr lang="en-US" sz="1150" dirty="0"/>
           </a:p>
           <a:p>
-            <a:pPr indent="0" marL="0">
+            <a:pPr marL="0" indent="0">
               <a:lnSpc>
                 <a:spcPct val="140000"/>
               </a:lnSpc>
@@ -5348,6 +5280,13 @@
           </a:solidFill>
           <a:ln/>
         </p:spPr>
+        <p:txBody>
+          <a:bodyPr/>
+          <a:lstStyle/>
+          <a:p>
+            <a:endParaRPr lang="ja-JP" altLang="en-US"/>
+          </a:p>
+        </p:txBody>
       </p:sp>
       <p:sp>
         <p:nvSpPr>
@@ -5370,7 +5309,7 @@
           <a:bodyPr wrap="square" lIns="0" tIns="0" rIns="0" bIns="0" rtlCol="0" anchor="ctr"/>
           <a:lstStyle/>
           <a:p>
-            <a:pPr indent="0" marL="0">
+            <a:pPr marL="0" indent="0">
               <a:buNone/>
             </a:pPr>
             <a:r>
@@ -5409,7 +5348,7 @@
           <a:bodyPr wrap="square" lIns="0" tIns="0" rIns="0" bIns="0" rtlCol="0" anchor="ctr"/>
           <a:lstStyle/>
           <a:p>
-            <a:pPr indent="0" marL="0">
+            <a:pPr marL="0" indent="0">
               <a:lnSpc>
                 <a:spcPct val="140000"/>
               </a:lnSpc>
@@ -5429,7 +5368,7 @@
             <a:endParaRPr lang="en-US" sz="1150" dirty="0"/>
           </a:p>
           <a:p>
-            <a:pPr indent="0" marL="0">
+            <a:pPr marL="0" indent="0">
               <a:lnSpc>
                 <a:spcPct val="140000"/>
               </a:lnSpc>
@@ -5469,6 +5408,13 @@
           </a:solidFill>
           <a:ln/>
         </p:spPr>
+        <p:txBody>
+          <a:bodyPr/>
+          <a:lstStyle/>
+          <a:p>
+            <a:endParaRPr lang="ja-JP" altLang="en-US"/>
+          </a:p>
+        </p:txBody>
       </p:sp>
       <p:sp>
         <p:nvSpPr>
@@ -5491,7 +5437,7 @@
           <a:bodyPr wrap="square" lIns="0" tIns="0" rIns="0" bIns="0" rtlCol="0" anchor="ctr"/>
           <a:lstStyle/>
           <a:p>
-            <a:pPr indent="0" marL="0">
+            <a:pPr marL="0" indent="0">
               <a:buNone/>
             </a:pPr>
             <a:r>
@@ -5530,7 +5476,7 @@
           <a:bodyPr wrap="square" lIns="0" tIns="0" rIns="0" bIns="0" rtlCol="0" anchor="ctr"/>
           <a:lstStyle/>
           <a:p>
-            <a:pPr indent="0" marL="0">
+            <a:pPr marL="0" indent="0">
               <a:lnSpc>
                 <a:spcPct val="140000"/>
               </a:lnSpc>
@@ -5550,7 +5496,7 @@
             <a:endParaRPr lang="en-US" sz="1150" dirty="0"/>
           </a:p>
           <a:p>
-            <a:pPr indent="0" marL="0">
+            <a:pPr marL="0" indent="0">
               <a:lnSpc>
                 <a:spcPct val="140000"/>
               </a:lnSpc>
@@ -5593,6 +5539,13 @@
             <a:prstDash val="solid"/>
           </a:ln>
         </p:spPr>
+        <p:txBody>
+          <a:bodyPr/>
+          <a:lstStyle/>
+          <a:p>
+            <a:endParaRPr lang="ja-JP" altLang="en-US"/>
+          </a:p>
+        </p:txBody>
       </p:sp>
       <p:sp>
         <p:nvSpPr>
@@ -5615,7 +5568,7 @@
           <a:bodyPr wrap="square" lIns="0" tIns="0" rIns="0" bIns="0" rtlCol="0" anchor="ctr"/>
           <a:lstStyle/>
           <a:p>
-            <a:pPr indent="0" marL="0">
+            <a:pPr marL="0" indent="0">
               <a:buNone/>
             </a:pPr>
             <a:r>
@@ -5654,7 +5607,7 @@
           <a:bodyPr wrap="square" lIns="0" tIns="0" rIns="0" bIns="0" rtlCol="0" anchor="ctr"/>
           <a:lstStyle/>
           <a:p>
-            <a:pPr algn="r" indent="0" marL="0">
+            <a:pPr marL="0" indent="0" algn="r">
               <a:buNone/>
             </a:pPr>
             <a:r>
@@ -5688,6 +5641,7 @@
         <a:solidFill>
           <a:srgbClr val="FFFFFF"/>
         </a:solidFill>
+        <a:effectLst/>
       </p:bgPr>
     </p:bg>
     <p:spTree>
@@ -5723,6 +5677,13 @@
           </a:solidFill>
           <a:ln/>
         </p:spPr>
+        <p:txBody>
+          <a:bodyPr/>
+          <a:lstStyle/>
+          <a:p>
+            <a:endParaRPr lang="ja-JP" altLang="en-US"/>
+          </a:p>
+        </p:txBody>
       </p:sp>
       <p:sp>
         <p:nvSpPr>
@@ -5745,7 +5706,7 @@
           <a:bodyPr wrap="square" lIns="0" tIns="0" rIns="0" bIns="0" rtlCol="0" anchor="ctr"/>
           <a:lstStyle/>
           <a:p>
-            <a:pPr indent="0" marL="0">
+            <a:pPr marL="0" indent="0">
               <a:buNone/>
             </a:pPr>
             <a:r>
@@ -5784,7 +5745,7 @@
           <a:bodyPr wrap="square" lIns="0" tIns="0" rIns="0" bIns="0" rtlCol="0" anchor="ctr"/>
           <a:lstStyle/>
           <a:p>
-            <a:pPr indent="0" marL="0">
+            <a:pPr marL="0" indent="0">
               <a:buNone/>
             </a:pPr>
             <a:r>
@@ -5823,7 +5784,7 @@
           <a:bodyPr wrap="square" lIns="0" tIns="0" rIns="0" bIns="0" rtlCol="0" anchor="ctr"/>
           <a:lstStyle/>
           <a:p>
-            <a:pPr indent="0" marL="0">
+            <a:pPr marL="0" indent="0">
               <a:buNone/>
             </a:pPr>
             <a:r>
@@ -5860,6 +5821,13 @@
           </a:solidFill>
           <a:ln/>
         </p:spPr>
+        <p:txBody>
+          <a:bodyPr/>
+          <a:lstStyle/>
+          <a:p>
+            <a:endParaRPr lang="ja-JP" altLang="en-US"/>
+          </a:p>
+        </p:txBody>
       </p:sp>
       <p:sp>
         <p:nvSpPr>
@@ -5882,7 +5850,7 @@
           <a:bodyPr wrap="square" lIns="0" tIns="0" rIns="0" bIns="0" rtlCol="0" anchor="ctr"/>
           <a:lstStyle/>
           <a:p>
-            <a:pPr indent="0" marL="0">
+            <a:pPr marL="0" indent="0">
               <a:buNone/>
             </a:pPr>
             <a:r>
@@ -5921,7 +5889,7 @@
           <a:bodyPr wrap="square" lIns="0" tIns="0" rIns="0" bIns="0" rtlCol="0" anchor="ctr"/>
           <a:lstStyle/>
           <a:p>
-            <a:pPr indent="0" marL="0">
+            <a:pPr marL="0" indent="0">
               <a:buNone/>
             </a:pPr>
             <a:r>
@@ -5958,6 +5926,13 @@
           </a:solidFill>
           <a:ln/>
         </p:spPr>
+        <p:txBody>
+          <a:bodyPr/>
+          <a:lstStyle/>
+          <a:p>
+            <a:endParaRPr lang="ja-JP" altLang="en-US"/>
+          </a:p>
+        </p:txBody>
       </p:sp>
       <p:sp>
         <p:nvSpPr>
@@ -5980,7 +5955,7 @@
           <a:bodyPr wrap="square" lIns="0" tIns="0" rIns="0" bIns="0" rtlCol="0" anchor="ctr"/>
           <a:lstStyle/>
           <a:p>
-            <a:pPr indent="0" marL="0">
+            <a:pPr marL="0" indent="0">
               <a:buNone/>
             </a:pPr>
             <a:r>
@@ -6019,7 +5994,7 @@
           <a:bodyPr wrap="square" lIns="0" tIns="0" rIns="0" bIns="0" rtlCol="0" anchor="ctr"/>
           <a:lstStyle/>
           <a:p>
-            <a:pPr indent="0" marL="0">
+            <a:pPr marL="0" indent="0">
               <a:buNone/>
             </a:pPr>
             <a:r>
@@ -6056,6 +6031,13 @@
           </a:solidFill>
           <a:ln/>
         </p:spPr>
+        <p:txBody>
+          <a:bodyPr/>
+          <a:lstStyle/>
+          <a:p>
+            <a:endParaRPr lang="ja-JP" altLang="en-US"/>
+          </a:p>
+        </p:txBody>
       </p:sp>
       <p:sp>
         <p:nvSpPr>
@@ -6078,7 +6060,7 @@
           <a:bodyPr wrap="square" lIns="0" tIns="0" rIns="0" bIns="0" rtlCol="0" anchor="ctr"/>
           <a:lstStyle/>
           <a:p>
-            <a:pPr indent="0" marL="0">
+            <a:pPr marL="0" indent="0">
               <a:buNone/>
             </a:pPr>
             <a:r>
@@ -6115,6 +6097,13 @@
           </a:solidFill>
           <a:ln/>
         </p:spPr>
+        <p:txBody>
+          <a:bodyPr/>
+          <a:lstStyle/>
+          <a:p>
+            <a:endParaRPr lang="ja-JP" altLang="en-US"/>
+          </a:p>
+        </p:txBody>
       </p:sp>
       <p:sp>
         <p:nvSpPr>
@@ -6137,7 +6126,7 @@
           <a:bodyPr wrap="square" lIns="0" tIns="0" rIns="0" bIns="0" rtlCol="0" anchor="ctr"/>
           <a:lstStyle/>
           <a:p>
-            <a:pPr indent="0" marL="0">
+            <a:pPr marL="0" indent="0">
               <a:buNone/>
             </a:pPr>
             <a:r>
@@ -6176,7 +6165,7 @@
           <a:bodyPr wrap="square" lIns="0" tIns="0" rIns="0" bIns="0" rtlCol="0" anchor="ctr"/>
           <a:lstStyle/>
           <a:p>
-            <a:pPr indent="0" marL="0">
+            <a:pPr marL="0" indent="0">
               <a:buNone/>
             </a:pPr>
             <a:r>
@@ -6215,7 +6204,7 @@
           <a:bodyPr wrap="square" lIns="0" tIns="0" rIns="0" bIns="0" rtlCol="0" anchor="ctr"/>
           <a:lstStyle/>
           <a:p>
-            <a:pPr indent="0" marL="0">
+            <a:pPr marL="0" indent="0">
               <a:buNone/>
             </a:pPr>
             <a:r>
@@ -6254,11 +6243,11 @@
           <a:bodyPr wrap="square" lIns="0" tIns="0" rIns="0" bIns="0" rtlCol="0" anchor="ctr"/>
           <a:lstStyle/>
           <a:p>
-            <a:pPr indent="0" marL="0">
-              <a:buNone/>
-            </a:pPr>
-            <a:r>
-              <a:rPr lang="en-US" sz="1200" dirty="0">
+            <a:pPr marL="0" indent="0">
+              <a:buNone/>
+            </a:pPr>
+            <a:r>
+              <a:rPr lang="en-US" altLang="ja-JP" sz="1200">
                 <a:solidFill>
                   <a:srgbClr val="2B2B2B"/>
                 </a:solidFill>
@@ -6266,7 +6255,62 @@
                 <a:ea typeface="Meiryo" pitchFamily="34" charset="-122"/>
                 <a:cs typeface="Meiryo" pitchFamily="34" charset="-120"/>
               </a:rPr>
-              <a:t>docs/demo/mimamoritai-demo.mp4（字幕・ナレーション入り / 3分11秒）</a:t>
+              <a:t>https://youtu.be/TnM-RHFZ_Lc </a:t>
+            </a:r>
+            <a:r>
+              <a:rPr lang="ja-JP" altLang="en-US" sz="1200">
+                <a:solidFill>
+                  <a:srgbClr val="2B2B2B"/>
+                </a:solidFill>
+                <a:latin typeface="Meiryo" pitchFamily="34" charset="0"/>
+                <a:ea typeface="Meiryo" pitchFamily="34" charset="-122"/>
+                <a:cs typeface="Meiryo" pitchFamily="34" charset="-120"/>
+              </a:rPr>
+              <a:t>（字幕・ナレーション入り </a:t>
+            </a:r>
+            <a:r>
+              <a:rPr lang="en-US" altLang="ja-JP" sz="1200">
+                <a:solidFill>
+                  <a:srgbClr val="2B2B2B"/>
+                </a:solidFill>
+                <a:latin typeface="Meiryo" pitchFamily="34" charset="0"/>
+                <a:ea typeface="Meiryo" pitchFamily="34" charset="-122"/>
+                <a:cs typeface="Meiryo" pitchFamily="34" charset="-120"/>
+              </a:rPr>
+              <a:t>/ 3</a:t>
+            </a:r>
+            <a:r>
+              <a:rPr lang="ja-JP" altLang="en-US" sz="1200">
+                <a:solidFill>
+                  <a:srgbClr val="2B2B2B"/>
+                </a:solidFill>
+                <a:latin typeface="Meiryo" pitchFamily="34" charset="0"/>
+                <a:ea typeface="Meiryo" pitchFamily="34" charset="-122"/>
+                <a:cs typeface="Meiryo" pitchFamily="34" charset="-120"/>
+              </a:rPr>
+              <a:t>分</a:t>
+            </a:r>
+            <a:r>
+              <a:rPr lang="en-US" altLang="ja-JP" sz="1200">
+                <a:solidFill>
+                  <a:srgbClr val="2B2B2B"/>
+                </a:solidFill>
+                <a:latin typeface="Meiryo" pitchFamily="34" charset="0"/>
+                <a:ea typeface="Meiryo" pitchFamily="34" charset="-122"/>
+                <a:cs typeface="Meiryo" pitchFamily="34" charset="-120"/>
+              </a:rPr>
+              <a:t>11</a:t>
+            </a:r>
+            <a:r>
+              <a:rPr lang="ja-JP" altLang="en-US" sz="1200">
+                <a:solidFill>
+                  <a:srgbClr val="2B2B2B"/>
+                </a:solidFill>
+                <a:latin typeface="Meiryo" pitchFamily="34" charset="0"/>
+                <a:ea typeface="Meiryo" pitchFamily="34" charset="-122"/>
+                <a:cs typeface="Meiryo" pitchFamily="34" charset="-120"/>
+              </a:rPr>
+              <a:t>秒）</a:t>
             </a:r>
             <a:endParaRPr lang="en-US" sz="1200" dirty="0"/>
           </a:p>
@@ -6293,7 +6337,7 @@
           <a:bodyPr wrap="square" lIns="0" tIns="0" rIns="0" bIns="0" rtlCol="0" anchor="ctr"/>
           <a:lstStyle/>
           <a:p>
-            <a:pPr indent="0" marL="0">
+            <a:pPr marL="0" indent="0">
               <a:buNone/>
             </a:pPr>
             <a:r>
@@ -6332,11 +6376,11 @@
           <a:bodyPr wrap="square" lIns="0" tIns="0" rIns="0" bIns="0" rtlCol="0" anchor="ctr"/>
           <a:lstStyle/>
           <a:p>
-            <a:pPr indent="0" marL="0">
-              <a:buNone/>
-            </a:pPr>
-            <a:r>
-              <a:rPr lang="en-US" sz="1200" dirty="0">
+            <a:pPr marL="0" indent="0">
+              <a:buNone/>
+            </a:pPr>
+            <a:r>
+              <a:rPr lang="en-US" sz="1200">
                 <a:solidFill>
                   <a:srgbClr val="2B2B2B"/>
                 </a:solidFill>
@@ -6344,7 +6388,7 @@
                 <a:ea typeface="Meiryo" pitchFamily="34" charset="-122"/>
                 <a:cs typeface="Meiryo" pitchFamily="34" charset="-120"/>
               </a:rPr>
-              <a:t>https://qiita.com/monoqlo78/items/dcac9e0ee6c1d0bfe07d</a:t>
+              <a:t>https://qiita.com/monoqlo78/items/27ea5bfa760bd8e3c3b7</a:t>
             </a:r>
             <a:endParaRPr lang="en-US" sz="1200" dirty="0"/>
           </a:p>
@@ -6371,7 +6415,7 @@
           <a:bodyPr wrap="square" lIns="0" tIns="0" rIns="0" bIns="0" rtlCol="0" anchor="ctr"/>
           <a:lstStyle/>
           <a:p>
-            <a:pPr indent="0" marL="0">
+            <a:pPr marL="0" indent="0">
               <a:buNone/>
             </a:pPr>
             <a:r>
@@ -6411,6 +6455,13 @@
             <a:prstDash val="solid"/>
           </a:ln>
         </p:spPr>
+        <p:txBody>
+          <a:bodyPr/>
+          <a:lstStyle/>
+          <a:p>
+            <a:endParaRPr lang="ja-JP" altLang="en-US"/>
+          </a:p>
+        </p:txBody>
       </p:sp>
       <p:sp>
         <p:nvSpPr>
@@ -6433,7 +6484,7 @@
           <a:bodyPr wrap="square" lIns="0" tIns="0" rIns="0" bIns="0" rtlCol="0" anchor="ctr"/>
           <a:lstStyle/>
           <a:p>
-            <a:pPr indent="0" marL="0">
+            <a:pPr marL="0" indent="0">
               <a:buNone/>
             </a:pPr>
             <a:r>
@@ -6472,7 +6523,7 @@
           <a:bodyPr wrap="square" lIns="0" tIns="0" rIns="0" bIns="0" rtlCol="0" anchor="ctr"/>
           <a:lstStyle/>
           <a:p>
-            <a:pPr algn="r" indent="0" marL="0">
+            <a:pPr marL="0" indent="0" algn="r">
               <a:buNone/>
             </a:pPr>
             <a:r>
@@ -6506,6 +6557,7 @@
         <a:solidFill>
           <a:srgbClr val="FFFFFF"/>
         </a:solidFill>
+        <a:effectLst/>
       </p:bgPr>
     </p:bg>
     <p:spTree>
@@ -6543,7 +6595,7 @@
           <a:bodyPr wrap="square" lIns="0" tIns="0" rIns="0" bIns="0" rtlCol="0" anchor="ctr"/>
           <a:lstStyle/>
           <a:p>
-            <a:pPr algn="l" indent="0" marL="0">
+            <a:pPr marL="0" indent="0" algn="l">
               <a:buNone/>
             </a:pPr>
             <a:r>
@@ -6582,7 +6634,7 @@
           <a:bodyPr wrap="square" lIns="0" tIns="0" rIns="0" bIns="0" rtlCol="0" anchor="ctr"/>
           <a:lstStyle/>
           <a:p>
-            <a:pPr algn="l" indent="0" marL="0">
+            <a:pPr marL="0" indent="0" algn="l">
               <a:buNone/>
             </a:pPr>
             <a:r>
@@ -6624,6 +6676,13 @@
             <a:prstDash val="solid"/>
           </a:ln>
         </p:spPr>
+        <p:txBody>
+          <a:bodyPr/>
+          <a:lstStyle/>
+          <a:p>
+            <a:endParaRPr lang="ja-JP" altLang="en-US"/>
+          </a:p>
+        </p:txBody>
       </p:sp>
       <p:sp>
         <p:nvSpPr>
@@ -6644,6 +6703,13 @@
           </a:solidFill>
           <a:ln/>
         </p:spPr>
+        <p:txBody>
+          <a:bodyPr/>
+          <a:lstStyle/>
+          <a:p>
+            <a:endParaRPr lang="ja-JP" altLang="en-US"/>
+          </a:p>
+        </p:txBody>
       </p:sp>
       <p:sp>
         <p:nvSpPr>
@@ -6666,7 +6732,7 @@
           <a:bodyPr wrap="square" lIns="0" tIns="0" rIns="0" bIns="0" rtlCol="0" anchor="ctr"/>
           <a:lstStyle/>
           <a:p>
-            <a:pPr indent="0" marL="0">
+            <a:pPr marL="0" indent="0">
               <a:buNone/>
             </a:pPr>
             <a:r>
@@ -6705,7 +6771,7 @@
           <a:bodyPr wrap="square" lIns="0" tIns="0" rIns="0" bIns="0" rtlCol="0" anchor="t"/>
           <a:lstStyle/>
           <a:p>
-            <a:pPr indent="0" marL="0">
+            <a:pPr marL="0" indent="0">
               <a:lnSpc>
                 <a:spcPct val="145000"/>
               </a:lnSpc>
@@ -6725,7 +6791,7 @@
             <a:endParaRPr lang="en-US" sz="1350" dirty="0"/>
           </a:p>
           <a:p>
-            <a:pPr indent="0" marL="0">
+            <a:pPr marL="0" indent="0">
               <a:lnSpc>
                 <a:spcPct val="145000"/>
               </a:lnSpc>
@@ -6770,6 +6836,13 @@
             <a:prstDash val="solid"/>
           </a:ln>
         </p:spPr>
+        <p:txBody>
+          <a:bodyPr/>
+          <a:lstStyle/>
+          <a:p>
+            <a:endParaRPr lang="ja-JP" altLang="en-US"/>
+          </a:p>
+        </p:txBody>
       </p:sp>
       <p:sp>
         <p:nvSpPr>
@@ -6790,6 +6863,13 @@
           </a:solidFill>
           <a:ln/>
         </p:spPr>
+        <p:txBody>
+          <a:bodyPr/>
+          <a:lstStyle/>
+          <a:p>
+            <a:endParaRPr lang="ja-JP" altLang="en-US"/>
+          </a:p>
+        </p:txBody>
       </p:sp>
       <p:sp>
         <p:nvSpPr>
@@ -6812,7 +6892,7 @@
           <a:bodyPr wrap="square" lIns="0" tIns="0" rIns="0" bIns="0" rtlCol="0" anchor="ctr"/>
           <a:lstStyle/>
           <a:p>
-            <a:pPr indent="0" marL="0">
+            <a:pPr marL="0" indent="0">
               <a:buNone/>
             </a:pPr>
             <a:r>
@@ -6851,7 +6931,7 @@
           <a:bodyPr wrap="square" lIns="0" tIns="0" rIns="0" bIns="0" rtlCol="0" anchor="t"/>
           <a:lstStyle/>
           <a:p>
-            <a:pPr indent="0" marL="0">
+            <a:pPr marL="0" indent="0">
               <a:lnSpc>
                 <a:spcPct val="145000"/>
               </a:lnSpc>
@@ -6871,7 +6951,7 @@
             <a:endParaRPr lang="en-US" sz="1350" dirty="0"/>
           </a:p>
           <a:p>
-            <a:pPr indent="0" marL="0">
+            <a:pPr marL="0" indent="0">
               <a:lnSpc>
                 <a:spcPct val="145000"/>
               </a:lnSpc>
@@ -6913,7 +6993,7 @@
           <a:bodyPr wrap="square" lIns="0" tIns="0" rIns="0" bIns="0" rtlCol="0" anchor="ctr"/>
           <a:lstStyle/>
           <a:p>
-            <a:pPr indent="0" marL="0">
+            <a:pPr marL="0" indent="0">
               <a:buNone/>
             </a:pPr>
             <a:r>
@@ -6952,7 +7032,7 @@
           <a:bodyPr wrap="square" lIns="0" tIns="0" rIns="0" bIns="0" rtlCol="0" anchor="ctr"/>
           <a:lstStyle/>
           <a:p>
-            <a:pPr indent="0" marL="0">
+            <a:pPr marL="0" indent="0">
               <a:buNone/>
             </a:pPr>
             <a:r>
@@ -6989,6 +7069,13 @@
           </a:solidFill>
           <a:ln/>
         </p:spPr>
+        <p:txBody>
+          <a:bodyPr/>
+          <a:lstStyle/>
+          <a:p>
+            <a:endParaRPr lang="ja-JP" altLang="en-US"/>
+          </a:p>
+        </p:txBody>
       </p:sp>
       <p:sp>
         <p:nvSpPr>
@@ -7009,6 +7096,13 @@
           </a:solidFill>
           <a:ln/>
         </p:spPr>
+        <p:txBody>
+          <a:bodyPr/>
+          <a:lstStyle/>
+          <a:p>
+            <a:endParaRPr lang="ja-JP" altLang="en-US"/>
+          </a:p>
+        </p:txBody>
       </p:sp>
       <p:sp>
         <p:nvSpPr>
@@ -7031,7 +7125,7 @@
           <a:bodyPr wrap="square" lIns="0" tIns="0" rIns="0" bIns="0" rtlCol="0" anchor="ctr"/>
           <a:lstStyle/>
           <a:p>
-            <a:pPr indent="0" marL="0">
+            <a:pPr marL="0" indent="0">
               <a:buNone/>
             </a:pPr>
             <a:r>
@@ -7071,6 +7165,13 @@
             <a:prstDash val="solid"/>
           </a:ln>
         </p:spPr>
+        <p:txBody>
+          <a:bodyPr/>
+          <a:lstStyle/>
+          <a:p>
+            <a:endParaRPr lang="ja-JP" altLang="en-US"/>
+          </a:p>
+        </p:txBody>
       </p:sp>
       <p:sp>
         <p:nvSpPr>
@@ -7093,7 +7194,7 @@
           <a:bodyPr wrap="square" lIns="0" tIns="0" rIns="0" bIns="0" rtlCol="0" anchor="ctr"/>
           <a:lstStyle/>
           <a:p>
-            <a:pPr indent="0" marL="0">
+            <a:pPr marL="0" indent="0">
               <a:buNone/>
             </a:pPr>
             <a:r>
@@ -7132,7 +7233,7 @@
           <a:bodyPr wrap="square" lIns="0" tIns="0" rIns="0" bIns="0" rtlCol="0" anchor="ctr"/>
           <a:lstStyle/>
           <a:p>
-            <a:pPr algn="r" indent="0" marL="0">
+            <a:pPr marL="0" indent="0" algn="r">
               <a:buNone/>
             </a:pPr>
             <a:r>
@@ -7166,6 +7267,7 @@
         <a:solidFill>
           <a:srgbClr val="FFFFFF"/>
         </a:solidFill>
+        <a:effectLst/>
       </p:bgPr>
     </p:bg>
     <p:spTree>
@@ -7203,7 +7305,7 @@
           <a:bodyPr wrap="square" lIns="0" tIns="0" rIns="0" bIns="0" rtlCol="0" anchor="ctr"/>
           <a:lstStyle/>
           <a:p>
-            <a:pPr algn="l" indent="0" marL="0">
+            <a:pPr marL="0" indent="0" algn="l">
               <a:buNone/>
             </a:pPr>
             <a:r>
@@ -7242,7 +7344,7 @@
           <a:bodyPr wrap="square" lIns="0" tIns="0" rIns="0" bIns="0" rtlCol="0" anchor="ctr"/>
           <a:lstStyle/>
           <a:p>
-            <a:pPr algn="l" indent="0" marL="0">
+            <a:pPr marL="0" indent="0" algn="l">
               <a:buNone/>
             </a:pPr>
             <a:r>
@@ -7284,6 +7386,13 @@
             <a:prstDash val="solid"/>
           </a:ln>
         </p:spPr>
+        <p:txBody>
+          <a:bodyPr/>
+          <a:lstStyle/>
+          <a:p>
+            <a:endParaRPr lang="ja-JP" altLang="en-US"/>
+          </a:p>
+        </p:txBody>
       </p:sp>
       <p:sp>
         <p:nvSpPr>
@@ -7306,7 +7415,7 @@
           <a:bodyPr wrap="square" lIns="0" tIns="0" rIns="0" bIns="0" rtlCol="0" anchor="ctr"/>
           <a:lstStyle/>
           <a:p>
-            <a:pPr algn="ctr" indent="0" marL="0">
+            <a:pPr marL="0" indent="0" algn="ctr">
               <a:buNone/>
             </a:pPr>
             <a:r>
@@ -7345,7 +7454,7 @@
           <a:bodyPr wrap="square" lIns="0" tIns="0" rIns="0" bIns="0" rtlCol="0" anchor="ctr"/>
           <a:lstStyle/>
           <a:p>
-            <a:pPr indent="0" marL="0">
+            <a:pPr marL="0" indent="0">
               <a:buNone/>
             </a:pPr>
             <a:r>
@@ -7384,7 +7493,7 @@
           <a:bodyPr wrap="square" lIns="0" tIns="0" rIns="0" bIns="0" rtlCol="0" anchor="ctr"/>
           <a:lstStyle/>
           <a:p>
-            <a:pPr indent="0" marL="0">
+            <a:pPr marL="0" indent="0">
               <a:buNone/>
             </a:pPr>
             <a:r>
@@ -7423,7 +7532,7 @@
           <a:bodyPr wrap="square" lIns="0" tIns="0" rIns="0" bIns="0" rtlCol="0" anchor="ctr"/>
           <a:lstStyle/>
           <a:p>
-            <a:pPr algn="ctr" indent="0" marL="0">
+            <a:pPr marL="0" indent="0" algn="ctr">
               <a:buNone/>
             </a:pPr>
             <a:r>
@@ -7462,7 +7571,7 @@
           <a:bodyPr wrap="square" lIns="0" tIns="0" rIns="0" bIns="0" rtlCol="0" anchor="ctr"/>
           <a:lstStyle/>
           <a:p>
-            <a:pPr indent="0" marL="0">
+            <a:pPr marL="0" indent="0">
               <a:buNone/>
             </a:pPr>
             <a:r>
@@ -7502,6 +7611,13 @@
             <a:prstDash val="solid"/>
           </a:ln>
         </p:spPr>
+        <p:txBody>
+          <a:bodyPr/>
+          <a:lstStyle/>
+          <a:p>
+            <a:endParaRPr lang="ja-JP" altLang="en-US"/>
+          </a:p>
+        </p:txBody>
       </p:sp>
       <p:sp>
         <p:nvSpPr>
@@ -7527,6 +7643,13 @@
             <a:prstDash val="solid"/>
           </a:ln>
         </p:spPr>
+        <p:txBody>
+          <a:bodyPr/>
+          <a:lstStyle/>
+          <a:p>
+            <a:endParaRPr lang="ja-JP" altLang="en-US"/>
+          </a:p>
+        </p:txBody>
       </p:sp>
       <p:sp>
         <p:nvSpPr>
@@ -7549,7 +7672,7 @@
           <a:bodyPr wrap="square" lIns="0" tIns="0" rIns="0" bIns="0" rtlCol="0" anchor="ctr"/>
           <a:lstStyle/>
           <a:p>
-            <a:pPr algn="ctr" indent="0" marL="0">
+            <a:pPr marL="0" indent="0" algn="ctr">
               <a:buNone/>
             </a:pPr>
             <a:r>
@@ -7588,7 +7711,7 @@
           <a:bodyPr wrap="square" lIns="0" tIns="0" rIns="0" bIns="0" rtlCol="0" anchor="ctr"/>
           <a:lstStyle/>
           <a:p>
-            <a:pPr indent="0" marL="0">
+            <a:pPr marL="0" indent="0">
               <a:buNone/>
             </a:pPr>
             <a:r>
@@ -7627,7 +7750,7 @@
           <a:bodyPr wrap="square" lIns="0" tIns="0" rIns="0" bIns="0" rtlCol="0" anchor="ctr"/>
           <a:lstStyle/>
           <a:p>
-            <a:pPr indent="0" marL="0">
+            <a:pPr marL="0" indent="0">
               <a:buNone/>
             </a:pPr>
             <a:r>
@@ -7666,7 +7789,7 @@
           <a:bodyPr wrap="square" lIns="0" tIns="0" rIns="0" bIns="0" rtlCol="0" anchor="ctr"/>
           <a:lstStyle/>
           <a:p>
-            <a:pPr algn="ctr" indent="0" marL="0">
+            <a:pPr marL="0" indent="0" algn="ctr">
               <a:buNone/>
             </a:pPr>
             <a:r>
@@ -7705,7 +7828,7 @@
           <a:bodyPr wrap="square" lIns="0" tIns="0" rIns="0" bIns="0" rtlCol="0" anchor="ctr"/>
           <a:lstStyle/>
           <a:p>
-            <a:pPr indent="0" marL="0">
+            <a:pPr marL="0" indent="0">
               <a:buNone/>
             </a:pPr>
             <a:r>
@@ -7745,6 +7868,13 @@
             <a:prstDash val="solid"/>
           </a:ln>
         </p:spPr>
+        <p:txBody>
+          <a:bodyPr/>
+          <a:lstStyle/>
+          <a:p>
+            <a:endParaRPr lang="ja-JP" altLang="en-US"/>
+          </a:p>
+        </p:txBody>
       </p:sp>
       <p:sp>
         <p:nvSpPr>
@@ -7770,6 +7900,13 @@
             <a:prstDash val="solid"/>
           </a:ln>
         </p:spPr>
+        <p:txBody>
+          <a:bodyPr/>
+          <a:lstStyle/>
+          <a:p>
+            <a:endParaRPr lang="ja-JP" altLang="en-US"/>
+          </a:p>
+        </p:txBody>
       </p:sp>
       <p:sp>
         <p:nvSpPr>
@@ -7792,7 +7929,7 @@
           <a:bodyPr wrap="square" lIns="0" tIns="0" rIns="0" bIns="0" rtlCol="0" anchor="ctr"/>
           <a:lstStyle/>
           <a:p>
-            <a:pPr algn="ctr" indent="0" marL="0">
+            <a:pPr marL="0" indent="0" algn="ctr">
               <a:buNone/>
             </a:pPr>
             <a:r>
@@ -7831,7 +7968,7 @@
           <a:bodyPr wrap="square" lIns="0" tIns="0" rIns="0" bIns="0" rtlCol="0" anchor="ctr"/>
           <a:lstStyle/>
           <a:p>
-            <a:pPr indent="0" marL="0">
+            <a:pPr marL="0" indent="0">
               <a:buNone/>
             </a:pPr>
             <a:r>
@@ -7870,7 +8007,7 @@
           <a:bodyPr wrap="square" lIns="0" tIns="0" rIns="0" bIns="0" rtlCol="0" anchor="ctr"/>
           <a:lstStyle/>
           <a:p>
-            <a:pPr indent="0" marL="0">
+            <a:pPr marL="0" indent="0">
               <a:buNone/>
             </a:pPr>
             <a:r>
@@ -7909,7 +8046,7 @@
           <a:bodyPr wrap="square" lIns="0" tIns="0" rIns="0" bIns="0" rtlCol="0" anchor="ctr"/>
           <a:lstStyle/>
           <a:p>
-            <a:pPr algn="ctr" indent="0" marL="0">
+            <a:pPr marL="0" indent="0" algn="ctr">
               <a:buNone/>
             </a:pPr>
             <a:r>
@@ -7948,7 +8085,7 @@
           <a:bodyPr wrap="square" lIns="0" tIns="0" rIns="0" bIns="0" rtlCol="0" anchor="ctr"/>
           <a:lstStyle/>
           <a:p>
-            <a:pPr indent="0" marL="0">
+            <a:pPr marL="0" indent="0">
               <a:buNone/>
             </a:pPr>
             <a:r>
@@ -7987,7 +8124,7 @@
           <a:bodyPr wrap="square" lIns="0" tIns="0" rIns="0" bIns="0" rtlCol="0" anchor="ctr"/>
           <a:lstStyle/>
           <a:p>
-            <a:pPr indent="0" marL="0">
+            <a:pPr marL="0" indent="0">
               <a:buNone/>
             </a:pPr>
             <a:r>
@@ -8007,14 +8144,14 @@
       </p:sp>
       <p:pic>
         <p:nvPicPr>
-          <p:cNvPr id="25" name="Image 0" descr="C:\Users\msoga\OneDrive - Smart Designer\Projects\見守り隊\docs\images\05-trends.png">    </p:cNvPr>
+          <p:cNvPr id="25" name="Image 0" descr="C:\Users\msoga\OneDrive - Smart Designer\Projects\見守り隊\docs\images\05-trends.png"/>
           <p:cNvPicPr>
             <a:picLocks noChangeAspect="1"/>
           </p:cNvPicPr>
           <p:nvPr/>
         </p:nvPicPr>
         <p:blipFill>
-          <a:blip r:embed="rId1"/>
+          <a:blip r:embed="rId3"/>
           <a:stretch>
             <a:fillRect/>
           </a:stretch>
@@ -8050,6 +8187,13 @@
             <a:prstDash val="solid"/>
           </a:ln>
         </p:spPr>
+        <p:txBody>
+          <a:bodyPr/>
+          <a:lstStyle/>
+          <a:p>
+            <a:endParaRPr lang="ja-JP" altLang="en-US"/>
+          </a:p>
+        </p:txBody>
       </p:sp>
       <p:sp>
         <p:nvSpPr>
@@ -8072,7 +8216,7 @@
           <a:bodyPr wrap="square" lIns="0" tIns="0" rIns="0" bIns="0" rtlCol="0" anchor="t"/>
           <a:lstStyle/>
           <a:p>
-            <a:pPr algn="ctr" indent="0" marL="0">
+            <a:pPr marL="0" indent="0" algn="ctr">
               <a:buNone/>
             </a:pPr>
             <a:r>
@@ -8109,6 +8253,13 @@
           </a:solidFill>
           <a:ln/>
         </p:spPr>
+        <p:txBody>
+          <a:bodyPr/>
+          <a:lstStyle/>
+          <a:p>
+            <a:endParaRPr lang="ja-JP" altLang="en-US"/>
+          </a:p>
+        </p:txBody>
       </p:sp>
       <p:sp>
         <p:nvSpPr>
@@ -8129,6 +8280,13 @@
           </a:solidFill>
           <a:ln/>
         </p:spPr>
+        <p:txBody>
+          <a:bodyPr/>
+          <a:lstStyle/>
+          <a:p>
+            <a:endParaRPr lang="ja-JP" altLang="en-US"/>
+          </a:p>
+        </p:txBody>
       </p:sp>
       <p:sp>
         <p:nvSpPr>
@@ -8151,7 +8309,7 @@
           <a:bodyPr wrap="square" lIns="0" tIns="0" rIns="0" bIns="0" rtlCol="0" anchor="ctr"/>
           <a:lstStyle/>
           <a:p>
-            <a:pPr indent="0" marL="0">
+            <a:pPr marL="0" indent="0">
               <a:buNone/>
             </a:pPr>
             <a:r>
@@ -8191,6 +8349,13 @@
             <a:prstDash val="solid"/>
           </a:ln>
         </p:spPr>
+        <p:txBody>
+          <a:bodyPr/>
+          <a:lstStyle/>
+          <a:p>
+            <a:endParaRPr lang="ja-JP" altLang="en-US"/>
+          </a:p>
+        </p:txBody>
       </p:sp>
       <p:sp>
         <p:nvSpPr>
@@ -8213,7 +8378,7 @@
           <a:bodyPr wrap="square" lIns="0" tIns="0" rIns="0" bIns="0" rtlCol="0" anchor="ctr"/>
           <a:lstStyle/>
           <a:p>
-            <a:pPr indent="0" marL="0">
+            <a:pPr marL="0" indent="0">
               <a:buNone/>
             </a:pPr>
             <a:r>
@@ -8252,7 +8417,7 @@
           <a:bodyPr wrap="square" lIns="0" tIns="0" rIns="0" bIns="0" rtlCol="0" anchor="ctr"/>
           <a:lstStyle/>
           <a:p>
-            <a:pPr algn="r" indent="0" marL="0">
+            <a:pPr marL="0" indent="0" algn="r">
               <a:buNone/>
             </a:pPr>
             <a:r>
@@ -8286,6 +8451,7 @@
         <a:solidFill>
           <a:srgbClr val="FFFFFF"/>
         </a:solidFill>
+        <a:effectLst/>
       </p:bgPr>
     </p:bg>
     <p:spTree>
@@ -8323,7 +8489,7 @@
           <a:bodyPr wrap="square" lIns="0" tIns="0" rIns="0" bIns="0" rtlCol="0" anchor="ctr"/>
           <a:lstStyle/>
           <a:p>
-            <a:pPr algn="l" indent="0" marL="0">
+            <a:pPr marL="0" indent="0" algn="l">
               <a:buNone/>
             </a:pPr>
             <a:r>
@@ -8362,7 +8528,7 @@
           <a:bodyPr wrap="square" lIns="0" tIns="0" rIns="0" bIns="0" rtlCol="0" anchor="ctr"/>
           <a:lstStyle/>
           <a:p>
-            <a:pPr algn="l" indent="0" marL="0">
+            <a:pPr marL="0" indent="0" algn="l">
               <a:buNone/>
             </a:pPr>
             <a:r>
@@ -8404,6 +8570,13 @@
             <a:prstDash val="solid"/>
           </a:ln>
         </p:spPr>
+        <p:txBody>
+          <a:bodyPr/>
+          <a:lstStyle/>
+          <a:p>
+            <a:endParaRPr lang="ja-JP" altLang="en-US"/>
+          </a:p>
+        </p:txBody>
       </p:sp>
       <p:sp>
         <p:nvSpPr>
@@ -8424,6 +8597,13 @@
           </a:solidFill>
           <a:ln/>
         </p:spPr>
+        <p:txBody>
+          <a:bodyPr/>
+          <a:lstStyle/>
+          <a:p>
+            <a:endParaRPr lang="ja-JP" altLang="en-US"/>
+          </a:p>
+        </p:txBody>
       </p:sp>
       <p:sp>
         <p:nvSpPr>
@@ -8446,7 +8626,7 @@
           <a:bodyPr wrap="square" lIns="0" tIns="0" rIns="0" bIns="0" rtlCol="0" anchor="ctr"/>
           <a:lstStyle/>
           <a:p>
-            <a:pPr indent="0" marL="0">
+            <a:pPr marL="0" indent="0">
               <a:buNone/>
             </a:pPr>
             <a:r>
@@ -8570,7 +8750,7 @@
           <a:bodyPr wrap="square" lIns="0" tIns="0" rIns="0" bIns="0" rtlCol="0" anchor="t"/>
           <a:lstStyle/>
           <a:p>
-            <a:pPr indent="0" marL="0">
+            <a:pPr marL="0" indent="0">
               <a:lnSpc>
                 <a:spcPct val="135000"/>
               </a:lnSpc>
@@ -8590,7 +8770,7 @@
             <a:endParaRPr lang="en-US" sz="1150" dirty="0"/>
           </a:p>
           <a:p>
-            <a:pPr indent="0" marL="0">
+            <a:pPr marL="0" indent="0">
               <a:lnSpc>
                 <a:spcPct val="135000"/>
               </a:lnSpc>
@@ -8635,6 +8815,13 @@
             <a:prstDash val="solid"/>
           </a:ln>
         </p:spPr>
+        <p:txBody>
+          <a:bodyPr/>
+          <a:lstStyle/>
+          <a:p>
+            <a:endParaRPr lang="ja-JP" altLang="en-US"/>
+          </a:p>
+        </p:txBody>
       </p:sp>
       <p:sp>
         <p:nvSpPr>
@@ -8655,6 +8842,13 @@
           </a:solidFill>
           <a:ln/>
         </p:spPr>
+        <p:txBody>
+          <a:bodyPr/>
+          <a:lstStyle/>
+          <a:p>
+            <a:endParaRPr lang="ja-JP" altLang="en-US"/>
+          </a:p>
+        </p:txBody>
       </p:sp>
       <p:sp>
         <p:nvSpPr>
@@ -8677,7 +8871,7 @@
           <a:bodyPr wrap="square" lIns="0" tIns="0" rIns="0" bIns="0" rtlCol="0" anchor="ctr"/>
           <a:lstStyle/>
           <a:p>
-            <a:pPr indent="0" marL="0">
+            <a:pPr marL="0" indent="0">
               <a:buNone/>
             </a:pPr>
             <a:r>
@@ -8801,7 +8995,7 @@
           <a:bodyPr wrap="square" lIns="0" tIns="0" rIns="0" bIns="0" rtlCol="0" anchor="t"/>
           <a:lstStyle/>
           <a:p>
-            <a:pPr indent="0" marL="0">
+            <a:pPr marL="0" indent="0">
               <a:lnSpc>
                 <a:spcPct val="135000"/>
               </a:lnSpc>
@@ -8821,7 +9015,7 @@
             <a:endParaRPr lang="en-US" sz="1150" dirty="0"/>
           </a:p>
           <a:p>
-            <a:pPr indent="0" marL="0">
+            <a:pPr marL="0" indent="0">
               <a:lnSpc>
                 <a:spcPct val="135000"/>
               </a:lnSpc>
@@ -8861,6 +9055,13 @@
           </a:solidFill>
           <a:ln/>
         </p:spPr>
+        <p:txBody>
+          <a:bodyPr/>
+          <a:lstStyle/>
+          <a:p>
+            <a:endParaRPr lang="ja-JP" altLang="en-US"/>
+          </a:p>
+        </p:txBody>
       </p:sp>
       <p:sp>
         <p:nvSpPr>
@@ -8881,6 +9082,13 @@
           </a:solidFill>
           <a:ln/>
         </p:spPr>
+        <p:txBody>
+          <a:bodyPr/>
+          <a:lstStyle/>
+          <a:p>
+            <a:endParaRPr lang="ja-JP" altLang="en-US"/>
+          </a:p>
+        </p:txBody>
       </p:sp>
       <p:sp>
         <p:nvSpPr>
@@ -8903,7 +9111,7 @@
           <a:bodyPr wrap="square" lIns="0" tIns="0" rIns="0" bIns="0" rtlCol="0" anchor="ctr"/>
           <a:lstStyle/>
           <a:p>
-            <a:pPr indent="0" marL="0">
+            <a:pPr marL="0" indent="0">
               <a:buNone/>
             </a:pPr>
             <a:r>
@@ -8943,6 +9151,13 @@
             <a:prstDash val="solid"/>
           </a:ln>
         </p:spPr>
+        <p:txBody>
+          <a:bodyPr/>
+          <a:lstStyle/>
+          <a:p>
+            <a:endParaRPr lang="ja-JP" altLang="en-US"/>
+          </a:p>
+        </p:txBody>
       </p:sp>
       <p:sp>
         <p:nvSpPr>
@@ -8965,7 +9180,7 @@
           <a:bodyPr wrap="square" lIns="0" tIns="0" rIns="0" bIns="0" rtlCol="0" anchor="ctr"/>
           <a:lstStyle/>
           <a:p>
-            <a:pPr indent="0" marL="0">
+            <a:pPr marL="0" indent="0">
               <a:buNone/>
             </a:pPr>
             <a:r>
@@ -9004,7 +9219,7 @@
           <a:bodyPr wrap="square" lIns="0" tIns="0" rIns="0" bIns="0" rtlCol="0" anchor="ctr"/>
           <a:lstStyle/>
           <a:p>
-            <a:pPr algn="r" indent="0" marL="0">
+            <a:pPr marL="0" indent="0" algn="r">
               <a:buNone/>
             </a:pPr>
             <a:r>
@@ -9038,6 +9253,7 @@
         <a:solidFill>
           <a:srgbClr val="FFFFFF"/>
         </a:solidFill>
+        <a:effectLst/>
       </p:bgPr>
     </p:bg>
     <p:spTree>
@@ -9075,7 +9291,7 @@
           <a:bodyPr wrap="square" lIns="0" tIns="0" rIns="0" bIns="0" rtlCol="0" anchor="ctr"/>
           <a:lstStyle/>
           <a:p>
-            <a:pPr algn="l" indent="0" marL="0">
+            <a:pPr marL="0" indent="0" algn="l">
               <a:buNone/>
             </a:pPr>
             <a:r>
@@ -9114,7 +9330,7 @@
           <a:bodyPr wrap="square" lIns="0" tIns="0" rIns="0" bIns="0" rtlCol="0" anchor="ctr"/>
           <a:lstStyle/>
           <a:p>
-            <a:pPr algn="l" indent="0" marL="0">
+            <a:pPr marL="0" indent="0" algn="l">
               <a:buNone/>
             </a:pPr>
             <a:r>
@@ -9153,7 +9369,7 @@
           <a:bodyPr wrap="square" lIns="0" tIns="0" rIns="0" bIns="0" rtlCol="0" anchor="t"/>
           <a:lstStyle/>
           <a:p>
-            <a:pPr indent="0" marL="0">
+            <a:pPr marL="0" indent="0">
               <a:lnSpc>
                 <a:spcPct val="145000"/>
               </a:lnSpc>
@@ -9173,7 +9389,7 @@
             <a:endParaRPr lang="en-US" sz="1450" dirty="0"/>
           </a:p>
           <a:p>
-            <a:pPr indent="0" marL="0">
+            <a:pPr marL="0" indent="0">
               <a:lnSpc>
                 <a:spcPct val="145000"/>
               </a:lnSpc>
@@ -9215,7 +9431,7 @@
           <a:bodyPr wrap="square" lIns="0" tIns="0" rIns="0" bIns="0" rtlCol="0" anchor="ctr"/>
           <a:lstStyle/>
           <a:p>
-            <a:pPr algn="l" indent="0" marL="0">
+            <a:pPr marL="0" indent="0" algn="l">
               <a:buNone/>
             </a:pPr>
             <a:r>
@@ -9254,7 +9470,7 @@
           <a:bodyPr wrap="square" lIns="0" tIns="0" rIns="0" bIns="0" rtlCol="0" anchor="ctr"/>
           <a:lstStyle/>
           <a:p>
-            <a:pPr indent="0" marL="0">
+            <a:pPr marL="0" indent="0">
               <a:buNone/>
             </a:pPr>
             <a:r>
@@ -9293,7 +9509,7 @@
           <a:bodyPr wrap="square" lIns="0" tIns="0" rIns="0" bIns="0" rtlCol="0" anchor="ctr"/>
           <a:lstStyle/>
           <a:p>
-            <a:pPr indent="0" marL="0">
+            <a:pPr marL="0" indent="0">
               <a:buNone/>
             </a:pPr>
             <a:r>
@@ -9332,7 +9548,7 @@
           <a:bodyPr wrap="square" lIns="0" tIns="0" rIns="0" bIns="0" rtlCol="0" anchor="ctr"/>
           <a:lstStyle/>
           <a:p>
-            <a:pPr algn="l" indent="0" marL="0">
+            <a:pPr marL="0" indent="0" algn="l">
               <a:buNone/>
             </a:pPr>
             <a:r>
@@ -9371,7 +9587,7 @@
           <a:bodyPr wrap="square" lIns="0" tIns="0" rIns="0" bIns="0" rtlCol="0" anchor="ctr"/>
           <a:lstStyle/>
           <a:p>
-            <a:pPr indent="0" marL="0">
+            <a:pPr marL="0" indent="0">
               <a:buNone/>
             </a:pPr>
             <a:r>
@@ -9410,7 +9626,7 @@
           <a:bodyPr wrap="square" lIns="0" tIns="0" rIns="0" bIns="0" rtlCol="0" anchor="ctr"/>
           <a:lstStyle/>
           <a:p>
-            <a:pPr indent="0" marL="0">
+            <a:pPr marL="0" indent="0">
               <a:buNone/>
             </a:pPr>
             <a:r>
@@ -9449,7 +9665,7 @@
           <a:bodyPr wrap="square" lIns="0" tIns="0" rIns="0" bIns="0" rtlCol="0" anchor="ctr"/>
           <a:lstStyle/>
           <a:p>
-            <a:pPr algn="l" indent="0" marL="0">
+            <a:pPr marL="0" indent="0" algn="l">
               <a:buNone/>
             </a:pPr>
             <a:r>
@@ -9488,7 +9704,7 @@
           <a:bodyPr wrap="square" lIns="0" tIns="0" rIns="0" bIns="0" rtlCol="0" anchor="ctr"/>
           <a:lstStyle/>
           <a:p>
-            <a:pPr indent="0" marL="0">
+            <a:pPr marL="0" indent="0">
               <a:buNone/>
             </a:pPr>
             <a:r>
@@ -9527,7 +9743,7 @@
           <a:bodyPr wrap="square" lIns="0" tIns="0" rIns="0" bIns="0" rtlCol="0" anchor="ctr"/>
           <a:lstStyle/>
           <a:p>
-            <a:pPr indent="0" marL="0">
+            <a:pPr marL="0" indent="0">
               <a:buNone/>
             </a:pPr>
             <a:r>
@@ -9547,14 +9763,14 @@
       </p:sp>
       <p:pic>
         <p:nvPicPr>
-          <p:cNvPr id="14" name="Image 0" descr="C:\Users\msoga\OneDrive - Smart Designer\Projects\見守り隊\docs\images\02-guardrail.png">    </p:cNvPr>
+          <p:cNvPr id="14" name="Image 0" descr="C:\Users\msoga\OneDrive - Smart Designer\Projects\見守り隊\docs\images\02-guardrail.png"/>
           <p:cNvPicPr>
             <a:picLocks noChangeAspect="1"/>
           </p:cNvPicPr>
           <p:nvPr/>
         </p:nvPicPr>
         <p:blipFill>
-          <a:blip r:embed="rId1"/>
+          <a:blip r:embed="rId3"/>
           <a:stretch>
             <a:fillRect/>
           </a:stretch>
@@ -9590,6 +9806,13 @@
             <a:prstDash val="solid"/>
           </a:ln>
         </p:spPr>
+        <p:txBody>
+          <a:bodyPr/>
+          <a:lstStyle/>
+          <a:p>
+            <a:endParaRPr lang="ja-JP" altLang="en-US"/>
+          </a:p>
+        </p:txBody>
       </p:sp>
       <p:sp>
         <p:nvSpPr>
@@ -9612,7 +9835,7 @@
           <a:bodyPr wrap="square" lIns="0" tIns="0" rIns="0" bIns="0" rtlCol="0" anchor="t"/>
           <a:lstStyle/>
           <a:p>
-            <a:pPr algn="ctr" indent="0" marL="0">
+            <a:pPr marL="0" indent="0" algn="ctr">
               <a:buNone/>
             </a:pPr>
             <a:r>
@@ -9649,6 +9872,13 @@
           </a:solidFill>
           <a:ln/>
         </p:spPr>
+        <p:txBody>
+          <a:bodyPr/>
+          <a:lstStyle/>
+          <a:p>
+            <a:endParaRPr lang="ja-JP" altLang="en-US"/>
+          </a:p>
+        </p:txBody>
       </p:sp>
       <p:sp>
         <p:nvSpPr>
@@ -9669,6 +9899,13 @@
           </a:solidFill>
           <a:ln/>
         </p:spPr>
+        <p:txBody>
+          <a:bodyPr/>
+          <a:lstStyle/>
+          <a:p>
+            <a:endParaRPr lang="ja-JP" altLang="en-US"/>
+          </a:p>
+        </p:txBody>
       </p:sp>
       <p:sp>
         <p:nvSpPr>
@@ -9691,7 +9928,7 @@
           <a:bodyPr wrap="square" lIns="0" tIns="0" rIns="0" bIns="0" rtlCol="0" anchor="ctr"/>
           <a:lstStyle/>
           <a:p>
-            <a:pPr indent="0" marL="0">
+            <a:pPr marL="0" indent="0">
               <a:buNone/>
             </a:pPr>
             <a:r>
@@ -9731,6 +9968,13 @@
             <a:prstDash val="solid"/>
           </a:ln>
         </p:spPr>
+        <p:txBody>
+          <a:bodyPr/>
+          <a:lstStyle/>
+          <a:p>
+            <a:endParaRPr lang="ja-JP" altLang="en-US"/>
+          </a:p>
+        </p:txBody>
       </p:sp>
       <p:sp>
         <p:nvSpPr>
@@ -9753,7 +9997,7 @@
           <a:bodyPr wrap="square" lIns="0" tIns="0" rIns="0" bIns="0" rtlCol="0" anchor="ctr"/>
           <a:lstStyle/>
           <a:p>
-            <a:pPr indent="0" marL="0">
+            <a:pPr marL="0" indent="0">
               <a:buNone/>
             </a:pPr>
             <a:r>
@@ -9792,7 +10036,7 @@
           <a:bodyPr wrap="square" lIns="0" tIns="0" rIns="0" bIns="0" rtlCol="0" anchor="ctr"/>
           <a:lstStyle/>
           <a:p>
-            <a:pPr algn="r" indent="0" marL="0">
+            <a:pPr marL="0" indent="0" algn="r">
               <a:buNone/>
             </a:pPr>
             <a:r>
@@ -9826,6 +10070,7 @@
         <a:solidFill>
           <a:srgbClr val="FFFFFF"/>
         </a:solidFill>
+        <a:effectLst/>
       </p:bgPr>
     </p:bg>
     <p:spTree>
@@ -9863,7 +10108,7 @@
           <a:bodyPr wrap="square" lIns="0" tIns="0" rIns="0" bIns="0" rtlCol="0" anchor="ctr"/>
           <a:lstStyle/>
           <a:p>
-            <a:pPr algn="l" indent="0" marL="0">
+            <a:pPr marL="0" indent="0" algn="l">
               <a:buNone/>
             </a:pPr>
             <a:r>
@@ -9902,7 +10147,7 @@
           <a:bodyPr wrap="square" lIns="0" tIns="0" rIns="0" bIns="0" rtlCol="0" anchor="ctr"/>
           <a:lstStyle/>
           <a:p>
-            <a:pPr algn="l" indent="0" marL="0">
+            <a:pPr marL="0" indent="0" algn="l">
               <a:buNone/>
             </a:pPr>
             <a:r>
@@ -9944,6 +10189,13 @@
             <a:prstDash val="solid"/>
           </a:ln>
         </p:spPr>
+        <p:txBody>
+          <a:bodyPr/>
+          <a:lstStyle/>
+          <a:p>
+            <a:endParaRPr lang="ja-JP" altLang="en-US"/>
+          </a:p>
+        </p:txBody>
       </p:sp>
       <p:sp>
         <p:nvSpPr>
@@ -9966,7 +10218,7 @@
           <a:bodyPr wrap="square" lIns="0" tIns="0" rIns="0" bIns="0" rtlCol="0" anchor="ctr"/>
           <a:lstStyle/>
           <a:p>
-            <a:pPr algn="ctr" indent="0" marL="0">
+            <a:pPr marL="0" indent="0" algn="ctr">
               <a:lnSpc>
                 <a:spcPct val="125000"/>
               </a:lnSpc>
@@ -10010,6 +10262,13 @@
             <a:tailEnd type="triangle"/>
           </a:ln>
         </p:spPr>
+        <p:txBody>
+          <a:bodyPr/>
+          <a:lstStyle/>
+          <a:p>
+            <a:endParaRPr lang="ja-JP" altLang="en-US"/>
+          </a:p>
+        </p:txBody>
       </p:sp>
       <p:sp>
         <p:nvSpPr>
@@ -10035,6 +10294,13 @@
             <a:prstDash val="solid"/>
           </a:ln>
         </p:spPr>
+        <p:txBody>
+          <a:bodyPr/>
+          <a:lstStyle/>
+          <a:p>
+            <a:endParaRPr lang="ja-JP" altLang="en-US"/>
+          </a:p>
+        </p:txBody>
       </p:sp>
       <p:sp>
         <p:nvSpPr>
@@ -10057,7 +10323,7 @@
           <a:bodyPr wrap="square" lIns="0" tIns="0" rIns="0" bIns="0" rtlCol="0" anchor="ctr"/>
           <a:lstStyle/>
           <a:p>
-            <a:pPr algn="ctr" indent="0" marL="0">
+            <a:pPr marL="0" indent="0" algn="ctr">
               <a:lnSpc>
                 <a:spcPct val="125000"/>
               </a:lnSpc>
@@ -10077,7 +10343,7 @@
             <a:endParaRPr lang="en-US" sz="1300" dirty="0"/>
           </a:p>
           <a:p>
-            <a:pPr algn="ctr" indent="0" marL="0">
+            <a:pPr marL="0" indent="0" algn="ctr">
               <a:lnSpc>
                 <a:spcPct val="125000"/>
               </a:lnSpc>
@@ -10121,6 +10387,13 @@
             <a:tailEnd type="triangle"/>
           </a:ln>
         </p:spPr>
+        <p:txBody>
+          <a:bodyPr/>
+          <a:lstStyle/>
+          <a:p>
+            <a:endParaRPr lang="ja-JP" altLang="en-US"/>
+          </a:p>
+        </p:txBody>
       </p:sp>
       <p:sp>
         <p:nvSpPr>
@@ -10146,6 +10419,13 @@
             <a:prstDash val="solid"/>
           </a:ln>
         </p:spPr>
+        <p:txBody>
+          <a:bodyPr/>
+          <a:lstStyle/>
+          <a:p>
+            <a:endParaRPr lang="ja-JP" altLang="en-US"/>
+          </a:p>
+        </p:txBody>
       </p:sp>
       <p:sp>
         <p:nvSpPr>
@@ -10168,7 +10448,7 @@
           <a:bodyPr wrap="square" lIns="0" tIns="0" rIns="0" bIns="0" rtlCol="0" anchor="ctr"/>
           <a:lstStyle/>
           <a:p>
-            <a:pPr algn="ctr" indent="0" marL="0">
+            <a:pPr marL="0" indent="0" algn="ctr">
               <a:lnSpc>
                 <a:spcPct val="125000"/>
               </a:lnSpc>
@@ -10188,7 +10468,7 @@
             <a:endParaRPr lang="en-US" sz="1300" dirty="0"/>
           </a:p>
           <a:p>
-            <a:pPr algn="ctr" indent="0" marL="0">
+            <a:pPr marL="0" indent="0" algn="ctr">
               <a:lnSpc>
                 <a:spcPct val="125000"/>
               </a:lnSpc>
@@ -10232,6 +10512,13 @@
             <a:tailEnd type="triangle"/>
           </a:ln>
         </p:spPr>
+        <p:txBody>
+          <a:bodyPr/>
+          <a:lstStyle/>
+          <a:p>
+            <a:endParaRPr lang="ja-JP" altLang="en-US"/>
+          </a:p>
+        </p:txBody>
       </p:sp>
       <p:sp>
         <p:nvSpPr>
@@ -10257,6 +10544,13 @@
             <a:prstDash val="solid"/>
           </a:ln>
         </p:spPr>
+        <p:txBody>
+          <a:bodyPr/>
+          <a:lstStyle/>
+          <a:p>
+            <a:endParaRPr lang="ja-JP" altLang="en-US"/>
+          </a:p>
+        </p:txBody>
       </p:sp>
       <p:sp>
         <p:nvSpPr>
@@ -10279,7 +10573,7 @@
           <a:bodyPr wrap="square" lIns="0" tIns="0" rIns="0" bIns="0" rtlCol="0" anchor="ctr"/>
           <a:lstStyle/>
           <a:p>
-            <a:pPr algn="ctr" indent="0" marL="0">
+            <a:pPr marL="0" indent="0" algn="ctr">
               <a:lnSpc>
                 <a:spcPct val="125000"/>
               </a:lnSpc>
@@ -10299,7 +10593,7 @@
             <a:endParaRPr lang="en-US" sz="1300" dirty="0"/>
           </a:p>
           <a:p>
-            <a:pPr algn="ctr" indent="0" marL="0">
+            <a:pPr marL="0" indent="0" algn="ctr">
               <a:lnSpc>
                 <a:spcPct val="125000"/>
               </a:lnSpc>
@@ -10343,6 +10637,13 @@
             <a:tailEnd type="triangle"/>
           </a:ln>
         </p:spPr>
+        <p:txBody>
+          <a:bodyPr/>
+          <a:lstStyle/>
+          <a:p>
+            <a:endParaRPr lang="ja-JP" altLang="en-US"/>
+          </a:p>
+        </p:txBody>
       </p:sp>
       <p:sp>
         <p:nvSpPr>
@@ -10368,6 +10669,13 @@
             <a:prstDash val="solid"/>
           </a:ln>
         </p:spPr>
+        <p:txBody>
+          <a:bodyPr/>
+          <a:lstStyle/>
+          <a:p>
+            <a:endParaRPr lang="ja-JP" altLang="en-US"/>
+          </a:p>
+        </p:txBody>
       </p:sp>
       <p:sp>
         <p:nvSpPr>
@@ -10390,7 +10698,7 @@
           <a:bodyPr wrap="square" lIns="0" tIns="0" rIns="0" bIns="0" rtlCol="0" anchor="ctr"/>
           <a:lstStyle/>
           <a:p>
-            <a:pPr algn="ctr" indent="0" marL="0">
+            <a:pPr marL="0" indent="0" algn="ctr">
               <a:lnSpc>
                 <a:spcPct val="125000"/>
               </a:lnSpc>
@@ -10434,6 +10742,13 @@
             <a:tailEnd type="triangle"/>
           </a:ln>
         </p:spPr>
+        <p:txBody>
+          <a:bodyPr/>
+          <a:lstStyle/>
+          <a:p>
+            <a:endParaRPr lang="ja-JP" altLang="en-US"/>
+          </a:p>
+        </p:txBody>
       </p:sp>
       <p:sp>
         <p:nvSpPr>
@@ -10456,7 +10771,7 @@
           <a:bodyPr wrap="square" lIns="0" tIns="0" rIns="0" bIns="0" rtlCol="0" anchor="ctr"/>
           <a:lstStyle/>
           <a:p>
-            <a:pPr indent="0" marL="0">
+            <a:pPr marL="0" indent="0">
               <a:buNone/>
             </a:pPr>
             <a:r>
@@ -10498,6 +10813,13 @@
             <a:prstDash val="solid"/>
           </a:ln>
         </p:spPr>
+        <p:txBody>
+          <a:bodyPr/>
+          <a:lstStyle/>
+          <a:p>
+            <a:endParaRPr lang="ja-JP" altLang="en-US"/>
+          </a:p>
+        </p:txBody>
       </p:sp>
       <p:sp>
         <p:nvSpPr>
@@ -10520,7 +10842,7 @@
           <a:bodyPr wrap="square" lIns="0" tIns="0" rIns="0" bIns="0" rtlCol="0" anchor="ctr"/>
           <a:lstStyle/>
           <a:p>
-            <a:pPr algn="ctr" indent="0" marL="0">
+            <a:pPr marL="0" indent="0" algn="ctr">
               <a:buNone/>
             </a:pPr>
             <a:r>
@@ -10561,6 +10883,13 @@
             <a:tailEnd type="triangle"/>
           </a:ln>
         </p:spPr>
+        <p:txBody>
+          <a:bodyPr/>
+          <a:lstStyle/>
+          <a:p>
+            <a:endParaRPr lang="ja-JP" altLang="en-US"/>
+          </a:p>
+        </p:txBody>
       </p:sp>
       <p:sp>
         <p:nvSpPr>
@@ -10583,7 +10912,7 @@
           <a:bodyPr wrap="square" lIns="0" tIns="0" rIns="0" bIns="0" rtlCol="0" anchor="ctr"/>
           <a:lstStyle/>
           <a:p>
-            <a:pPr indent="0" marL="0">
+            <a:pPr marL="0" indent="0">
               <a:buNone/>
             </a:pPr>
             <a:r>
@@ -10625,6 +10954,13 @@
             <a:prstDash val="solid"/>
           </a:ln>
         </p:spPr>
+        <p:txBody>
+          <a:bodyPr/>
+          <a:lstStyle/>
+          <a:p>
+            <a:endParaRPr lang="ja-JP" altLang="en-US"/>
+          </a:p>
+        </p:txBody>
       </p:sp>
       <p:sp>
         <p:nvSpPr>
@@ -10647,7 +10983,7 @@
           <a:bodyPr wrap="square" lIns="0" tIns="0" rIns="0" bIns="0" rtlCol="0" anchor="ctr"/>
           <a:lstStyle/>
           <a:p>
-            <a:pPr algn="ctr" indent="0" marL="0">
+            <a:pPr marL="0" indent="0" algn="ctr">
               <a:buNone/>
             </a:pPr>
             <a:r>
@@ -10684,6 +11020,13 @@
           </a:solidFill>
           <a:ln/>
         </p:spPr>
+        <p:txBody>
+          <a:bodyPr/>
+          <a:lstStyle/>
+          <a:p>
+            <a:endParaRPr lang="ja-JP" altLang="en-US"/>
+          </a:p>
+        </p:txBody>
       </p:sp>
       <p:sp>
         <p:nvSpPr>
@@ -10704,6 +11047,13 @@
           </a:solidFill>
           <a:ln/>
         </p:spPr>
+        <p:txBody>
+          <a:bodyPr/>
+          <a:lstStyle/>
+          <a:p>
+            <a:endParaRPr lang="ja-JP" altLang="en-US"/>
+          </a:p>
+        </p:txBody>
       </p:sp>
       <p:sp>
         <p:nvSpPr>
@@ -10726,7 +11076,7 @@
           <a:bodyPr wrap="square" lIns="0" tIns="0" rIns="0" bIns="0" rtlCol="0" anchor="ctr"/>
           <a:lstStyle/>
           <a:p>
-            <a:pPr indent="0" marL="0">
+            <a:pPr marL="0" indent="0">
               <a:buNone/>
             </a:pPr>
             <a:r>
@@ -10766,6 +11116,13 @@
             <a:prstDash val="solid"/>
           </a:ln>
         </p:spPr>
+        <p:txBody>
+          <a:bodyPr/>
+          <a:lstStyle/>
+          <a:p>
+            <a:endParaRPr lang="ja-JP" altLang="en-US"/>
+          </a:p>
+        </p:txBody>
       </p:sp>
       <p:sp>
         <p:nvSpPr>
@@ -10788,7 +11145,7 @@
           <a:bodyPr wrap="square" lIns="0" tIns="0" rIns="0" bIns="0" rtlCol="0" anchor="ctr"/>
           <a:lstStyle/>
           <a:p>
-            <a:pPr indent="0" marL="0">
+            <a:pPr marL="0" indent="0">
               <a:buNone/>
             </a:pPr>
             <a:r>
@@ -10827,7 +11184,7 @@
           <a:bodyPr wrap="square" lIns="0" tIns="0" rIns="0" bIns="0" rtlCol="0" anchor="ctr"/>
           <a:lstStyle/>
           <a:p>
-            <a:pPr algn="r" indent="0" marL="0">
+            <a:pPr marL="0" indent="0" algn="r">
               <a:buNone/>
             </a:pPr>
             <a:r>
@@ -10861,6 +11218,7 @@
         <a:solidFill>
           <a:srgbClr val="FFFFFF"/>
         </a:solidFill>
+        <a:effectLst/>
       </p:bgPr>
     </p:bg>
     <p:spTree>
@@ -10898,7 +11256,7 @@
           <a:bodyPr wrap="square" lIns="0" tIns="0" rIns="0" bIns="0" rtlCol="0" anchor="ctr"/>
           <a:lstStyle/>
           <a:p>
-            <a:pPr algn="l" indent="0" marL="0">
+            <a:pPr marL="0" indent="0" algn="l">
               <a:buNone/>
             </a:pPr>
             <a:r>
@@ -10937,7 +11295,7 @@
           <a:bodyPr wrap="square" lIns="0" tIns="0" rIns="0" bIns="0" rtlCol="0" anchor="ctr"/>
           <a:lstStyle/>
           <a:p>
-            <a:pPr algn="l" indent="0" marL="0">
+            <a:pPr marL="0" indent="0" algn="l">
               <a:buNone/>
             </a:pPr>
             <a:r>
@@ -10979,6 +11337,13 @@
             <a:prstDash val="solid"/>
           </a:ln>
         </p:spPr>
+        <p:txBody>
+          <a:bodyPr/>
+          <a:lstStyle/>
+          <a:p>
+            <a:endParaRPr lang="ja-JP" altLang="en-US"/>
+          </a:p>
+        </p:txBody>
       </p:sp>
       <p:sp>
         <p:nvSpPr>
@@ -10999,6 +11364,13 @@
           </a:solidFill>
           <a:ln/>
         </p:spPr>
+        <p:txBody>
+          <a:bodyPr/>
+          <a:lstStyle/>
+          <a:p>
+            <a:endParaRPr lang="ja-JP" altLang="en-US"/>
+          </a:p>
+        </p:txBody>
       </p:sp>
       <p:sp>
         <p:nvSpPr>
@@ -11021,7 +11393,7 @@
           <a:bodyPr wrap="square" lIns="0" tIns="0" rIns="0" bIns="0" rtlCol="0" anchor="ctr"/>
           <a:lstStyle/>
           <a:p>
-            <a:pPr indent="0" marL="0">
+            <a:pPr marL="0" indent="0">
               <a:buNone/>
             </a:pPr>
             <a:r>
@@ -11060,7 +11432,7 @@
           <a:bodyPr wrap="square" lIns="0" tIns="0" rIns="0" bIns="0" rtlCol="0" anchor="ctr"/>
           <a:lstStyle/>
           <a:p>
-            <a:pPr indent="0" marL="0">
+            <a:pPr marL="0" indent="0">
               <a:buNone/>
             </a:pPr>
             <a:r>
@@ -11099,7 +11471,7 @@
           <a:bodyPr wrap="square" lIns="0" tIns="0" rIns="0" bIns="0" rtlCol="0" anchor="t"/>
           <a:lstStyle/>
           <a:p>
-            <a:pPr indent="0" marL="0">
+            <a:pPr marL="0" indent="0">
               <a:lnSpc>
                 <a:spcPct val="140000"/>
               </a:lnSpc>
@@ -11119,7 +11491,7 @@
             <a:endParaRPr lang="en-US" sz="1250" dirty="0"/>
           </a:p>
           <a:p>
-            <a:pPr indent="0" marL="0">
+            <a:pPr marL="0" indent="0">
               <a:lnSpc>
                 <a:spcPct val="140000"/>
               </a:lnSpc>
@@ -11164,6 +11536,13 @@
             <a:prstDash val="solid"/>
           </a:ln>
         </p:spPr>
+        <p:txBody>
+          <a:bodyPr/>
+          <a:lstStyle/>
+          <a:p>
+            <a:endParaRPr lang="ja-JP" altLang="en-US"/>
+          </a:p>
+        </p:txBody>
       </p:sp>
       <p:sp>
         <p:nvSpPr>
@@ -11184,6 +11563,13 @@
           </a:solidFill>
           <a:ln/>
         </p:spPr>
+        <p:txBody>
+          <a:bodyPr/>
+          <a:lstStyle/>
+          <a:p>
+            <a:endParaRPr lang="ja-JP" altLang="en-US"/>
+          </a:p>
+        </p:txBody>
       </p:sp>
       <p:sp>
         <p:nvSpPr>
@@ -11206,7 +11592,7 @@
           <a:bodyPr wrap="square" lIns="0" tIns="0" rIns="0" bIns="0" rtlCol="0" anchor="ctr"/>
           <a:lstStyle/>
           <a:p>
-            <a:pPr indent="0" marL="0">
+            <a:pPr marL="0" indent="0">
               <a:buNone/>
             </a:pPr>
             <a:r>
@@ -11245,7 +11631,7 @@
           <a:bodyPr wrap="square" lIns="0" tIns="0" rIns="0" bIns="0" rtlCol="0" anchor="ctr"/>
           <a:lstStyle/>
           <a:p>
-            <a:pPr indent="0" marL="0">
+            <a:pPr marL="0" indent="0">
               <a:buNone/>
             </a:pPr>
             <a:r>
@@ -11284,7 +11670,7 @@
           <a:bodyPr wrap="square" lIns="0" tIns="0" rIns="0" bIns="0" rtlCol="0" anchor="t"/>
           <a:lstStyle/>
           <a:p>
-            <a:pPr indent="0" marL="0">
+            <a:pPr marL="0" indent="0">
               <a:lnSpc>
                 <a:spcPct val="140000"/>
               </a:lnSpc>
@@ -11304,7 +11690,7 @@
             <a:endParaRPr lang="en-US" sz="1250" dirty="0"/>
           </a:p>
           <a:p>
-            <a:pPr indent="0" marL="0">
+            <a:pPr marL="0" indent="0">
               <a:lnSpc>
                 <a:spcPct val="140000"/>
               </a:lnSpc>
@@ -11346,7 +11732,7 @@
           <a:bodyPr wrap="square" lIns="0" tIns="0" rIns="0" bIns="0" rtlCol="0" anchor="t"/>
           <a:lstStyle/>
           <a:p>
-            <a:pPr indent="0" marL="0">
+            <a:pPr marL="0" indent="0">
               <a:lnSpc>
                 <a:spcPct val="145000"/>
               </a:lnSpc>
@@ -11366,7 +11752,7 @@
             <a:endParaRPr lang="en-US" sz="1300" dirty="0"/>
           </a:p>
           <a:p>
-            <a:pPr indent="0" marL="0">
+            <a:pPr marL="0" indent="0">
               <a:lnSpc>
                 <a:spcPct val="145000"/>
               </a:lnSpc>
@@ -11406,6 +11792,13 @@
           </a:solidFill>
           <a:ln/>
         </p:spPr>
+        <p:txBody>
+          <a:bodyPr/>
+          <a:lstStyle/>
+          <a:p>
+            <a:endParaRPr lang="ja-JP" altLang="en-US"/>
+          </a:p>
+        </p:txBody>
       </p:sp>
       <p:sp>
         <p:nvSpPr>
@@ -11426,6 +11819,13 @@
           </a:solidFill>
           <a:ln/>
         </p:spPr>
+        <p:txBody>
+          <a:bodyPr/>
+          <a:lstStyle/>
+          <a:p>
+            <a:endParaRPr lang="ja-JP" altLang="en-US"/>
+          </a:p>
+        </p:txBody>
       </p:sp>
       <p:sp>
         <p:nvSpPr>
@@ -11448,7 +11848,7 @@
           <a:bodyPr wrap="square" lIns="0" tIns="0" rIns="0" bIns="0" rtlCol="0" anchor="ctr"/>
           <a:lstStyle/>
           <a:p>
-            <a:pPr indent="0" marL="0">
+            <a:pPr marL="0" indent="0">
               <a:buNone/>
             </a:pPr>
             <a:r>
@@ -11488,6 +11888,13 @@
             <a:prstDash val="solid"/>
           </a:ln>
         </p:spPr>
+        <p:txBody>
+          <a:bodyPr/>
+          <a:lstStyle/>
+          <a:p>
+            <a:endParaRPr lang="ja-JP" altLang="en-US"/>
+          </a:p>
+        </p:txBody>
       </p:sp>
       <p:sp>
         <p:nvSpPr>
@@ -11510,7 +11917,7 @@
           <a:bodyPr wrap="square" lIns="0" tIns="0" rIns="0" bIns="0" rtlCol="0" anchor="ctr"/>
           <a:lstStyle/>
           <a:p>
-            <a:pPr indent="0" marL="0">
+            <a:pPr marL="0" indent="0">
               <a:buNone/>
             </a:pPr>
             <a:r>
@@ -11549,7 +11956,7 @@
           <a:bodyPr wrap="square" lIns="0" tIns="0" rIns="0" bIns="0" rtlCol="0" anchor="ctr"/>
           <a:lstStyle/>
           <a:p>
-            <a:pPr algn="r" indent="0" marL="0">
+            <a:pPr marL="0" indent="0" algn="r">
               <a:buNone/>
             </a:pPr>
             <a:r>
@@ -11583,6 +11990,7 @@
         <a:solidFill>
           <a:srgbClr val="FFFFFF"/>
         </a:solidFill>
+        <a:effectLst/>
       </p:bgPr>
     </p:bg>
     <p:spTree>
@@ -11620,7 +12028,7 @@
           <a:bodyPr wrap="square" lIns="0" tIns="0" rIns="0" bIns="0" rtlCol="0" anchor="ctr"/>
           <a:lstStyle/>
           <a:p>
-            <a:pPr algn="l" indent="0" marL="0">
+            <a:pPr marL="0" indent="0" algn="l">
               <a:buNone/>
             </a:pPr>
             <a:r>
@@ -11659,7 +12067,7 @@
           <a:bodyPr wrap="square" lIns="0" tIns="0" rIns="0" bIns="0" rtlCol="0" anchor="ctr"/>
           <a:lstStyle/>
           <a:p>
-            <a:pPr algn="l" indent="0" marL="0">
+            <a:pPr marL="0" indent="0" algn="l">
               <a:buNone/>
             </a:pPr>
             <a:r>
@@ -11701,6 +12109,13 @@
             <a:prstDash val="solid"/>
           </a:ln>
         </p:spPr>
+        <p:txBody>
+          <a:bodyPr/>
+          <a:lstStyle/>
+          <a:p>
+            <a:endParaRPr lang="ja-JP" altLang="en-US"/>
+          </a:p>
+        </p:txBody>
       </p:sp>
       <p:sp>
         <p:nvSpPr>
@@ -11721,6 +12136,13 @@
           </a:solidFill>
           <a:ln/>
         </p:spPr>
+        <p:txBody>
+          <a:bodyPr/>
+          <a:lstStyle/>
+          <a:p>
+            <a:endParaRPr lang="ja-JP" altLang="en-US"/>
+          </a:p>
+        </p:txBody>
       </p:sp>
       <p:sp>
         <p:nvSpPr>
@@ -11743,7 +12165,7 @@
           <a:bodyPr wrap="square" lIns="0" tIns="0" rIns="0" bIns="0" rtlCol="0" anchor="ctr"/>
           <a:lstStyle/>
           <a:p>
-            <a:pPr indent="0" marL="0">
+            <a:pPr marL="0" indent="0">
               <a:buNone/>
             </a:pPr>
             <a:r>
@@ -11782,7 +12204,7 @@
           <a:bodyPr wrap="square" lIns="0" tIns="0" rIns="0" bIns="0" rtlCol="0" anchor="t"/>
           <a:lstStyle/>
           <a:p>
-            <a:pPr indent="0" marL="0">
+            <a:pPr marL="0" indent="0">
               <a:lnSpc>
                 <a:spcPct val="150000"/>
               </a:lnSpc>
@@ -11802,7 +12224,7 @@
             <a:endParaRPr lang="en-US" sz="1250" dirty="0"/>
           </a:p>
           <a:p>
-            <a:pPr indent="0" marL="0">
+            <a:pPr marL="0" indent="0">
               <a:lnSpc>
                 <a:spcPct val="150000"/>
               </a:lnSpc>
@@ -11846,6 +12268,13 @@
             <a:tailEnd type="triangle"/>
           </a:ln>
         </p:spPr>
+        <p:txBody>
+          <a:bodyPr/>
+          <a:lstStyle/>
+          <a:p>
+            <a:endParaRPr lang="ja-JP" altLang="en-US"/>
+          </a:p>
+        </p:txBody>
       </p:sp>
       <p:sp>
         <p:nvSpPr>
@@ -11871,6 +12300,13 @@
             <a:prstDash val="solid"/>
           </a:ln>
         </p:spPr>
+        <p:txBody>
+          <a:bodyPr/>
+          <a:lstStyle/>
+          <a:p>
+            <a:endParaRPr lang="ja-JP" altLang="en-US"/>
+          </a:p>
+        </p:txBody>
       </p:sp>
       <p:sp>
         <p:nvSpPr>
@@ -11891,6 +12327,13 @@
           </a:solidFill>
           <a:ln/>
         </p:spPr>
+        <p:txBody>
+          <a:bodyPr/>
+          <a:lstStyle/>
+          <a:p>
+            <a:endParaRPr lang="ja-JP" altLang="en-US"/>
+          </a:p>
+        </p:txBody>
       </p:sp>
       <p:sp>
         <p:nvSpPr>
@@ -11913,7 +12356,7 @@
           <a:bodyPr wrap="square" lIns="0" tIns="0" rIns="0" bIns="0" rtlCol="0" anchor="ctr"/>
           <a:lstStyle/>
           <a:p>
-            <a:pPr indent="0" marL="0">
+            <a:pPr marL="0" indent="0">
               <a:buNone/>
             </a:pPr>
             <a:r>
@@ -11952,7 +12395,7 @@
           <a:bodyPr wrap="square" lIns="0" tIns="0" rIns="0" bIns="0" rtlCol="0" anchor="t"/>
           <a:lstStyle/>
           <a:p>
-            <a:pPr indent="0" marL="0">
+            <a:pPr marL="0" indent="0">
               <a:lnSpc>
                 <a:spcPct val="150000"/>
               </a:lnSpc>
@@ -11972,7 +12415,7 @@
             <a:endParaRPr lang="en-US" sz="1250" dirty="0"/>
           </a:p>
           <a:p>
-            <a:pPr indent="0" marL="0">
+            <a:pPr marL="0" indent="0">
               <a:lnSpc>
                 <a:spcPct val="150000"/>
               </a:lnSpc>
@@ -12016,6 +12459,13 @@
             <a:tailEnd type="triangle"/>
           </a:ln>
         </p:spPr>
+        <p:txBody>
+          <a:bodyPr/>
+          <a:lstStyle/>
+          <a:p>
+            <a:endParaRPr lang="ja-JP" altLang="en-US"/>
+          </a:p>
+        </p:txBody>
       </p:sp>
       <p:sp>
         <p:nvSpPr>
@@ -12041,6 +12491,13 @@
             <a:prstDash val="solid"/>
           </a:ln>
         </p:spPr>
+        <p:txBody>
+          <a:bodyPr/>
+          <a:lstStyle/>
+          <a:p>
+            <a:endParaRPr lang="ja-JP" altLang="en-US"/>
+          </a:p>
+        </p:txBody>
       </p:sp>
       <p:sp>
         <p:nvSpPr>
@@ -12061,6 +12518,13 @@
           </a:solidFill>
           <a:ln/>
         </p:spPr>
+        <p:txBody>
+          <a:bodyPr/>
+          <a:lstStyle/>
+          <a:p>
+            <a:endParaRPr lang="ja-JP" altLang="en-US"/>
+          </a:p>
+        </p:txBody>
       </p:sp>
       <p:sp>
         <p:nvSpPr>
@@ -12083,7 +12547,7 @@
           <a:bodyPr wrap="square" lIns="0" tIns="0" rIns="0" bIns="0" rtlCol="0" anchor="ctr"/>
           <a:lstStyle/>
           <a:p>
-            <a:pPr indent="0" marL="0">
+            <a:pPr marL="0" indent="0">
               <a:buNone/>
             </a:pPr>
             <a:r>
@@ -12122,7 +12586,7 @@
           <a:bodyPr wrap="square" lIns="0" tIns="0" rIns="0" bIns="0" rtlCol="0" anchor="t"/>
           <a:lstStyle/>
           <a:p>
-            <a:pPr indent="0" marL="0">
+            <a:pPr marL="0" indent="0">
               <a:lnSpc>
                 <a:spcPct val="150000"/>
               </a:lnSpc>
@@ -12142,7 +12606,7 @@
             <a:endParaRPr lang="en-US" sz="1250" dirty="0"/>
           </a:p>
           <a:p>
-            <a:pPr indent="0" marL="0">
+            <a:pPr marL="0" indent="0">
               <a:lnSpc>
                 <a:spcPct val="150000"/>
               </a:lnSpc>
@@ -12186,6 +12650,13 @@
             <a:tailEnd type="triangle"/>
           </a:ln>
         </p:spPr>
+        <p:txBody>
+          <a:bodyPr/>
+          <a:lstStyle/>
+          <a:p>
+            <a:endParaRPr lang="ja-JP" altLang="en-US"/>
+          </a:p>
+        </p:txBody>
       </p:sp>
       <p:sp>
         <p:nvSpPr>
@@ -12211,6 +12682,13 @@
             <a:prstDash val="solid"/>
           </a:ln>
         </p:spPr>
+        <p:txBody>
+          <a:bodyPr/>
+          <a:lstStyle/>
+          <a:p>
+            <a:endParaRPr lang="ja-JP" altLang="en-US"/>
+          </a:p>
+        </p:txBody>
       </p:sp>
       <p:sp>
         <p:nvSpPr>
@@ -12231,6 +12709,13 @@
           </a:solidFill>
           <a:ln/>
         </p:spPr>
+        <p:txBody>
+          <a:bodyPr/>
+          <a:lstStyle/>
+          <a:p>
+            <a:endParaRPr lang="ja-JP" altLang="en-US"/>
+          </a:p>
+        </p:txBody>
       </p:sp>
       <p:sp>
         <p:nvSpPr>
@@ -12253,7 +12738,7 @@
           <a:bodyPr wrap="square" lIns="0" tIns="0" rIns="0" bIns="0" rtlCol="0" anchor="ctr"/>
           <a:lstStyle/>
           <a:p>
-            <a:pPr indent="0" marL="0">
+            <a:pPr marL="0" indent="0">
               <a:buNone/>
             </a:pPr>
             <a:r>
@@ -12292,7 +12777,7 @@
           <a:bodyPr wrap="square" lIns="0" tIns="0" rIns="0" bIns="0" rtlCol="0" anchor="t"/>
           <a:lstStyle/>
           <a:p>
-            <a:pPr indent="0" marL="0">
+            <a:pPr marL="0" indent="0">
               <a:lnSpc>
                 <a:spcPct val="150000"/>
               </a:lnSpc>
@@ -12312,7 +12797,7 @@
             <a:endParaRPr lang="en-US" sz="1250" dirty="0"/>
           </a:p>
           <a:p>
-            <a:pPr indent="0" marL="0">
+            <a:pPr marL="0" indent="0">
               <a:lnSpc>
                 <a:spcPct val="150000"/>
               </a:lnSpc>
@@ -12354,7 +12839,7 @@
           <a:bodyPr wrap="square" lIns="0" tIns="0" rIns="0" bIns="0" rtlCol="0" anchor="ctr"/>
           <a:lstStyle/>
           <a:p>
-            <a:pPr indent="0" marL="0">
+            <a:pPr marL="0" indent="0">
               <a:buNone/>
             </a:pPr>
             <a:r>
@@ -12393,7 +12878,7 @@
           <a:bodyPr wrap="square" lIns="0" tIns="0" rIns="0" bIns="0" rtlCol="0" anchor="t"/>
           <a:lstStyle/>
           <a:p>
-            <a:pPr indent="0" marL="0">
+            <a:pPr marL="0" indent="0">
               <a:lnSpc>
                 <a:spcPct val="145000"/>
               </a:lnSpc>
@@ -12413,7 +12898,7 @@
             <a:endParaRPr lang="en-US" sz="1300" dirty="0"/>
           </a:p>
           <a:p>
-            <a:pPr indent="0" marL="0">
+            <a:pPr marL="0" indent="0">
               <a:lnSpc>
                 <a:spcPct val="145000"/>
               </a:lnSpc>
@@ -12453,6 +12938,13 @@
           </a:solidFill>
           <a:ln/>
         </p:spPr>
+        <p:txBody>
+          <a:bodyPr/>
+          <a:lstStyle/>
+          <a:p>
+            <a:endParaRPr lang="ja-JP" altLang="en-US"/>
+          </a:p>
+        </p:txBody>
       </p:sp>
       <p:sp>
         <p:nvSpPr>
@@ -12473,6 +12965,13 @@
           </a:solidFill>
           <a:ln/>
         </p:spPr>
+        <p:txBody>
+          <a:bodyPr/>
+          <a:lstStyle/>
+          <a:p>
+            <a:endParaRPr lang="ja-JP" altLang="en-US"/>
+          </a:p>
+        </p:txBody>
       </p:sp>
       <p:sp>
         <p:nvSpPr>
@@ -12495,7 +12994,7 @@
           <a:bodyPr wrap="square" lIns="0" tIns="0" rIns="0" bIns="0" rtlCol="0" anchor="ctr"/>
           <a:lstStyle/>
           <a:p>
-            <a:pPr indent="0" marL="0">
+            <a:pPr marL="0" indent="0">
               <a:buNone/>
             </a:pPr>
             <a:r>
@@ -12535,6 +13034,13 @@
             <a:prstDash val="solid"/>
           </a:ln>
         </p:spPr>
+        <p:txBody>
+          <a:bodyPr/>
+          <a:lstStyle/>
+          <a:p>
+            <a:endParaRPr lang="ja-JP" altLang="en-US"/>
+          </a:p>
+        </p:txBody>
       </p:sp>
       <p:sp>
         <p:nvSpPr>
@@ -12557,7 +13063,7 @@
           <a:bodyPr wrap="square" lIns="0" tIns="0" rIns="0" bIns="0" rtlCol="0" anchor="ctr"/>
           <a:lstStyle/>
           <a:p>
-            <a:pPr indent="0" marL="0">
+            <a:pPr marL="0" indent="0">
               <a:buNone/>
             </a:pPr>
             <a:r>
@@ -12596,7 +13102,7 @@
           <a:bodyPr wrap="square" lIns="0" tIns="0" rIns="0" bIns="0" rtlCol="0" anchor="ctr"/>
           <a:lstStyle/>
           <a:p>
-            <a:pPr algn="r" indent="0" marL="0">
+            <a:pPr marL="0" indent="0" algn="r">
               <a:buNone/>
             </a:pPr>
             <a:r>
@@ -12630,6 +13136,7 @@
         <a:solidFill>
           <a:srgbClr val="FFFFFF"/>
         </a:solidFill>
+        <a:effectLst/>
       </p:bgPr>
     </p:bg>
     <p:spTree>
@@ -12667,7 +13174,7 @@
           <a:bodyPr wrap="square" lIns="0" tIns="0" rIns="0" bIns="0" rtlCol="0" anchor="ctr"/>
           <a:lstStyle/>
           <a:p>
-            <a:pPr algn="l" indent="0" marL="0">
+            <a:pPr marL="0" indent="0" algn="l">
               <a:buNone/>
             </a:pPr>
             <a:r>
@@ -12706,7 +13213,7 @@
           <a:bodyPr wrap="square" lIns="0" tIns="0" rIns="0" bIns="0" rtlCol="0" anchor="ctr"/>
           <a:lstStyle/>
           <a:p>
-            <a:pPr algn="l" indent="0" marL="0">
+            <a:pPr marL="0" indent="0" algn="l">
               <a:buNone/>
             </a:pPr>
             <a:r>
@@ -12743,6 +13250,13 @@
           </a:solidFill>
           <a:ln/>
         </p:spPr>
+        <p:txBody>
+          <a:bodyPr/>
+          <a:lstStyle/>
+          <a:p>
+            <a:endParaRPr lang="ja-JP" altLang="en-US"/>
+          </a:p>
+        </p:txBody>
       </p:sp>
       <p:sp>
         <p:nvSpPr>
@@ -12765,7 +13279,7 @@
           <a:bodyPr wrap="square" lIns="0" tIns="0" rIns="0" bIns="0" rtlCol="0" anchor="ctr"/>
           <a:lstStyle/>
           <a:p>
-            <a:pPr indent="0" marL="0">
+            <a:pPr marL="0" indent="0">
               <a:buNone/>
             </a:pPr>
             <a:r>
@@ -12804,7 +13318,7 @@
           <a:bodyPr wrap="square" lIns="0" tIns="0" rIns="0" bIns="0" rtlCol="0" anchor="ctr"/>
           <a:lstStyle/>
           <a:p>
-            <a:pPr indent="0" marL="0">
+            <a:pPr marL="0" indent="0">
               <a:buNone/>
             </a:pPr>
             <a:r>
@@ -12843,7 +13357,7 @@
           <a:bodyPr wrap="square" lIns="0" tIns="0" rIns="0" bIns="0" rtlCol="0" anchor="t"/>
           <a:lstStyle/>
           <a:p>
-            <a:pPr indent="0" marL="0">
+            <a:pPr marL="0" indent="0">
               <a:lnSpc>
                 <a:spcPct val="140000"/>
               </a:lnSpc>
@@ -12863,7 +13377,7 @@
             <a:endParaRPr lang="en-US" sz="1150" dirty="0"/>
           </a:p>
           <a:p>
-            <a:pPr indent="0" marL="0">
+            <a:pPr marL="0" indent="0">
               <a:lnSpc>
                 <a:spcPct val="140000"/>
               </a:lnSpc>
@@ -12906,6 +13420,13 @@
             <a:prstDash val="solid"/>
           </a:ln>
         </p:spPr>
+        <p:txBody>
+          <a:bodyPr/>
+          <a:lstStyle/>
+          <a:p>
+            <a:endParaRPr lang="ja-JP" altLang="en-US"/>
+          </a:p>
+        </p:txBody>
       </p:sp>
       <p:sp>
         <p:nvSpPr>
@@ -12926,6 +13447,13 @@
           </a:solidFill>
           <a:ln/>
         </p:spPr>
+        <p:txBody>
+          <a:bodyPr/>
+          <a:lstStyle/>
+          <a:p>
+            <a:endParaRPr lang="ja-JP" altLang="en-US"/>
+          </a:p>
+        </p:txBody>
       </p:sp>
       <p:sp>
         <p:nvSpPr>
@@ -12948,7 +13476,7 @@
           <a:bodyPr wrap="square" lIns="0" tIns="0" rIns="0" bIns="0" rtlCol="0" anchor="ctr"/>
           <a:lstStyle/>
           <a:p>
-            <a:pPr indent="0" marL="0">
+            <a:pPr marL="0" indent="0">
               <a:buNone/>
             </a:pPr>
             <a:r>
@@ -12987,7 +13515,7 @@
           <a:bodyPr wrap="square" lIns="0" tIns="0" rIns="0" bIns="0" rtlCol="0" anchor="ctr"/>
           <a:lstStyle/>
           <a:p>
-            <a:pPr indent="0" marL="0">
+            <a:pPr marL="0" indent="0">
               <a:buNone/>
             </a:pPr>
             <a:r>
@@ -13026,7 +13554,7 @@
           <a:bodyPr wrap="square" lIns="0" tIns="0" rIns="0" bIns="0" rtlCol="0" anchor="t"/>
           <a:lstStyle/>
           <a:p>
-            <a:pPr indent="0" marL="0">
+            <a:pPr marL="0" indent="0">
               <a:lnSpc>
                 <a:spcPct val="140000"/>
               </a:lnSpc>
@@ -13046,7 +13574,7 @@
             <a:endParaRPr lang="en-US" sz="1150" dirty="0"/>
           </a:p>
           <a:p>
-            <a:pPr indent="0" marL="0">
+            <a:pPr marL="0" indent="0">
               <a:lnSpc>
                 <a:spcPct val="140000"/>
               </a:lnSpc>
@@ -13089,6 +13617,13 @@
             <a:prstDash val="solid"/>
           </a:ln>
         </p:spPr>
+        <p:txBody>
+          <a:bodyPr/>
+          <a:lstStyle/>
+          <a:p>
+            <a:endParaRPr lang="ja-JP" altLang="en-US"/>
+          </a:p>
+        </p:txBody>
       </p:sp>
       <p:sp>
         <p:nvSpPr>
@@ -13109,6 +13644,13 @@
           </a:solidFill>
           <a:ln/>
         </p:spPr>
+        <p:txBody>
+          <a:bodyPr/>
+          <a:lstStyle/>
+          <a:p>
+            <a:endParaRPr lang="ja-JP" altLang="en-US"/>
+          </a:p>
+        </p:txBody>
       </p:sp>
       <p:sp>
         <p:nvSpPr>
@@ -13131,7 +13673,7 @@
           <a:bodyPr wrap="square" lIns="0" tIns="0" rIns="0" bIns="0" rtlCol="0" anchor="ctr"/>
           <a:lstStyle/>
           <a:p>
-            <a:pPr indent="0" marL="0">
+            <a:pPr marL="0" indent="0">
               <a:buNone/>
             </a:pPr>
             <a:r>
@@ -13170,7 +13712,7 @@
           <a:bodyPr wrap="square" lIns="0" tIns="0" rIns="0" bIns="0" rtlCol="0" anchor="ctr"/>
           <a:lstStyle/>
           <a:p>
-            <a:pPr indent="0" marL="0">
+            <a:pPr marL="0" indent="0">
               <a:buNone/>
             </a:pPr>
             <a:r>
@@ -13209,7 +13751,7 @@
           <a:bodyPr wrap="square" lIns="0" tIns="0" rIns="0" bIns="0" rtlCol="0" anchor="t"/>
           <a:lstStyle/>
           <a:p>
-            <a:pPr indent="0" marL="0">
+            <a:pPr marL="0" indent="0">
               <a:lnSpc>
                 <a:spcPct val="140000"/>
               </a:lnSpc>
@@ -13229,7 +13771,7 @@
             <a:endParaRPr lang="en-US" sz="1150" dirty="0"/>
           </a:p>
           <a:p>
-            <a:pPr indent="0" marL="0">
+            <a:pPr marL="0" indent="0">
               <a:lnSpc>
                 <a:spcPct val="140000"/>
               </a:lnSpc>
@@ -13271,7 +13813,7 @@
           <a:bodyPr wrap="square" lIns="0" tIns="0" rIns="0" bIns="0" rtlCol="0" anchor="ctr"/>
           <a:lstStyle/>
           <a:p>
-            <a:pPr indent="0" marL="0">
+            <a:pPr marL="0" indent="0">
               <a:buNone/>
             </a:pPr>
             <a:r>
@@ -13308,6 +13850,13 @@
           </a:solidFill>
           <a:ln/>
         </p:spPr>
+        <p:txBody>
+          <a:bodyPr/>
+          <a:lstStyle/>
+          <a:p>
+            <a:endParaRPr lang="ja-JP" altLang="en-US"/>
+          </a:p>
+        </p:txBody>
       </p:sp>
       <p:sp>
         <p:nvSpPr>
@@ -13328,6 +13877,13 @@
           </a:solidFill>
           <a:ln/>
         </p:spPr>
+        <p:txBody>
+          <a:bodyPr/>
+          <a:lstStyle/>
+          <a:p>
+            <a:endParaRPr lang="ja-JP" altLang="en-US"/>
+          </a:p>
+        </p:txBody>
       </p:sp>
       <p:sp>
         <p:nvSpPr>
@@ -13350,7 +13906,7 @@
           <a:bodyPr wrap="square" lIns="0" tIns="0" rIns="0" bIns="0" rtlCol="0" anchor="ctr"/>
           <a:lstStyle/>
           <a:p>
-            <a:pPr indent="0" marL="0">
+            <a:pPr marL="0" indent="0">
               <a:buNone/>
             </a:pPr>
             <a:r>
@@ -13390,6 +13946,13 @@
             <a:prstDash val="solid"/>
           </a:ln>
         </p:spPr>
+        <p:txBody>
+          <a:bodyPr/>
+          <a:lstStyle/>
+          <a:p>
+            <a:endParaRPr lang="ja-JP" altLang="en-US"/>
+          </a:p>
+        </p:txBody>
       </p:sp>
       <p:sp>
         <p:nvSpPr>
@@ -13412,7 +13975,7 @@
           <a:bodyPr wrap="square" lIns="0" tIns="0" rIns="0" bIns="0" rtlCol="0" anchor="ctr"/>
           <a:lstStyle/>
           <a:p>
-            <a:pPr indent="0" marL="0">
+            <a:pPr marL="0" indent="0">
               <a:buNone/>
             </a:pPr>
             <a:r>
@@ -13451,7 +14014,7 @@
           <a:bodyPr wrap="square" lIns="0" tIns="0" rIns="0" bIns="0" rtlCol="0" anchor="ctr"/>
           <a:lstStyle/>
           <a:p>
-            <a:pPr algn="r" indent="0" marL="0">
+            <a:pPr marL="0" indent="0" algn="r">
               <a:buNone/>
             </a:pPr>
             <a:r>
@@ -13770,4 +14333,325 @@
     </a:ext>
   </a:extLst>
 </a:theme>
+</file>
+
+<file path=ppt/theme/theme2.xml><?xml version="1.0" encoding="utf-8"?>
+<a:theme xmlns:a="http://schemas.openxmlformats.org/drawingml/2006/main" name="Office テーマ">
+  <a:themeElements>
+    <a:clrScheme name="Office">
+      <a:dk1>
+        <a:sysClr val="windowText" lastClr="000000"/>
+      </a:dk1>
+      <a:lt1>
+        <a:sysClr val="window" lastClr="FFFFFF"/>
+      </a:lt1>
+      <a:dk2>
+        <a:srgbClr val="0E2841"/>
+      </a:dk2>
+      <a:lt2>
+        <a:srgbClr val="E8E8E8"/>
+      </a:lt2>
+      <a:accent1>
+        <a:srgbClr val="156082"/>
+      </a:accent1>
+      <a:accent2>
+        <a:srgbClr val="E97132"/>
+      </a:accent2>
+      <a:accent3>
+        <a:srgbClr val="196B24"/>
+      </a:accent3>
+      <a:accent4>
+        <a:srgbClr val="0F9ED5"/>
+      </a:accent4>
+      <a:accent5>
+        <a:srgbClr val="A02B93"/>
+      </a:accent5>
+      <a:accent6>
+        <a:srgbClr val="4EA72E"/>
+      </a:accent6>
+      <a:hlink>
+        <a:srgbClr val="467886"/>
+      </a:hlink>
+      <a:folHlink>
+        <a:srgbClr val="96607D"/>
+      </a:folHlink>
+    </a:clrScheme>
+    <a:fontScheme name="Office">
+      <a:majorFont>
+        <a:latin typeface="游ゴシック Light" panose="02110004020202020204"/>
+        <a:ea typeface=""/>
+        <a:cs typeface=""/>
+        <a:font script="Jpan" typeface="游ゴシック Light"/>
+        <a:font script="Hang" typeface="맑은 고딕"/>
+        <a:font script="Hans" typeface="等线 Light"/>
+        <a:font script="Hant" typeface="新細明體"/>
+        <a:font script="Arab" typeface="Times New Roman"/>
+        <a:font script="Hebr" typeface="Times New Roman"/>
+        <a:font script="Thai" typeface="Angsana New"/>
+        <a:font script="Ethi" typeface="Nyala"/>
+        <a:font script="Beng" typeface="Vrinda"/>
+        <a:font script="Gujr" typeface="Shruti"/>
+        <a:font script="Khmr" typeface="MoolBoran"/>
+        <a:font script="Knda" typeface="Tunga"/>
+        <a:font script="Guru" typeface="Raavi"/>
+        <a:font script="Cans" typeface="Euphemia"/>
+        <a:font script="Cher" typeface="Plantagenet Cherokee"/>
+        <a:font script="Yiii" typeface="Microsoft Yi Baiti"/>
+        <a:font script="Tibt" typeface="Microsoft Himalaya"/>
+        <a:font script="Thaa" typeface="MV Boli"/>
+        <a:font script="Deva" typeface="Mangal"/>
+        <a:font script="Telu" typeface="Gautami"/>
+        <a:font script="Taml" typeface="Latha"/>
+        <a:font script="Syrc" typeface="Estrangelo Edessa"/>
+        <a:font script="Orya" typeface="Kalinga"/>
+        <a:font script="Mlym" typeface="Kartika"/>
+        <a:font script="Laoo" typeface="DokChampa"/>
+        <a:font script="Sinh" typeface="Iskoola Pota"/>
+        <a:font script="Mong" typeface="Mongolian Baiti"/>
+        <a:font script="Viet" typeface="Times New Roman"/>
+        <a:font script="Uigh" typeface="Microsoft Uighur"/>
+        <a:font script="Geor" typeface="Sylfaen"/>
+        <a:font script="Armn" typeface="Arial"/>
+        <a:font script="Bugi" typeface="Leelawadee UI"/>
+        <a:font script="Bopo" typeface="Microsoft JhengHei"/>
+        <a:font script="Java" typeface="Javanese Text"/>
+        <a:font script="Lisu" typeface="Segoe UI"/>
+        <a:font script="Mymr" typeface="Myanmar Text"/>
+        <a:font script="Nkoo" typeface="Ebrima"/>
+        <a:font script="Olck" typeface="Nirmala UI"/>
+        <a:font script="Osma" typeface="Ebrima"/>
+        <a:font script="Phag" typeface="Phagspa"/>
+        <a:font script="Syrn" typeface="Estrangelo Edessa"/>
+        <a:font script="Syrj" typeface="Estrangelo Edessa"/>
+        <a:font script="Syre" typeface="Estrangelo Edessa"/>
+        <a:font script="Sora" typeface="Nirmala UI"/>
+        <a:font script="Tale" typeface="Microsoft Tai Le"/>
+        <a:font script="Talu" typeface="Microsoft New Tai Lue"/>
+        <a:font script="Tfng" typeface="Ebrima"/>
+      </a:majorFont>
+      <a:minorFont>
+        <a:latin typeface="游ゴシック" panose="02110004020202020204"/>
+        <a:ea typeface=""/>
+        <a:cs typeface=""/>
+        <a:font script="Jpan" typeface="游ゴシック"/>
+        <a:font script="Hang" typeface="맑은 고딕"/>
+        <a:font script="Hans" typeface="等线"/>
+        <a:font script="Hant" typeface="新細明體"/>
+        <a:font script="Arab" typeface="Arial"/>
+        <a:font script="Hebr" typeface="Arial"/>
+        <a:font script="Thai" typeface="Cordia New"/>
+        <a:font script="Ethi" typeface="Nyala"/>
+        <a:font script="Beng" typeface="Vrinda"/>
+        <a:font script="Gujr" typeface="Shruti"/>
+        <a:font script="Khmr" typeface="DaunPenh"/>
+        <a:font script="Knda" typeface="Tunga"/>
+        <a:font script="Guru" typeface="Raavi"/>
+        <a:font script="Cans" typeface="Euphemia"/>
+        <a:font script="Cher" typeface="Plantagenet Cherokee"/>
+        <a:font script="Yiii" typeface="Microsoft Yi Baiti"/>
+        <a:font script="Tibt" typeface="Microsoft Himalaya"/>
+        <a:font script="Thaa" typeface="MV Boli"/>
+        <a:font script="Deva" typeface="Mangal"/>
+        <a:font script="Telu" typeface="Gautami"/>
+        <a:font script="Taml" typeface="Latha"/>
+        <a:font script="Syrc" typeface="Estrangelo Edessa"/>
+        <a:font script="Orya" typeface="Kalinga"/>
+        <a:font script="Mlym" typeface="Kartika"/>
+        <a:font script="Laoo" typeface="DokChampa"/>
+        <a:font script="Sinh" typeface="Iskoola Pota"/>
+        <a:font script="Mong" typeface="Mongolian Baiti"/>
+        <a:font script="Viet" typeface="Arial"/>
+        <a:font script="Uigh" typeface="Microsoft Uighur"/>
+        <a:font script="Geor" typeface="Sylfaen"/>
+        <a:font script="Armn" typeface="Arial"/>
+        <a:font script="Bugi" typeface="Leelawadee UI"/>
+        <a:font script="Bopo" typeface="Microsoft JhengHei"/>
+        <a:font script="Java" typeface="Javanese Text"/>
+        <a:font script="Lisu" typeface="Segoe UI"/>
+        <a:font script="Mymr" typeface="Myanmar Text"/>
+        <a:font script="Nkoo" typeface="Ebrima"/>
+        <a:font script="Olck" typeface="Nirmala UI"/>
+        <a:font script="Osma" typeface="Ebrima"/>
+        <a:font script="Phag" typeface="Phagspa"/>
+        <a:font script="Syrn" typeface="Estrangelo Edessa"/>
+        <a:font script="Syrj" typeface="Estrangelo Edessa"/>
+        <a:font script="Syre" typeface="Estrangelo Edessa"/>
+        <a:font script="Sora" typeface="Nirmala UI"/>
+        <a:font script="Tale" typeface="Microsoft Tai Le"/>
+        <a:font script="Talu" typeface="Microsoft New Tai Lue"/>
+        <a:font script="Tfng" typeface="Ebrima"/>
+      </a:minorFont>
+    </a:fontScheme>
+    <a:fmtScheme name="Office">
+      <a:fillStyleLst>
+        <a:solidFill>
+          <a:schemeClr val="phClr"/>
+        </a:solidFill>
+        <a:gradFill rotWithShape="1">
+          <a:gsLst>
+            <a:gs pos="0">
+              <a:schemeClr val="phClr">
+                <a:lumMod val="110000"/>
+                <a:satMod val="105000"/>
+                <a:tint val="67000"/>
+              </a:schemeClr>
+            </a:gs>
+            <a:gs pos="50000">
+              <a:schemeClr val="phClr">
+                <a:lumMod val="105000"/>
+                <a:satMod val="103000"/>
+                <a:tint val="73000"/>
+              </a:schemeClr>
+            </a:gs>
+            <a:gs pos="100000">
+              <a:schemeClr val="phClr">
+                <a:lumMod val="105000"/>
+                <a:satMod val="109000"/>
+                <a:tint val="81000"/>
+              </a:schemeClr>
+            </a:gs>
+          </a:gsLst>
+          <a:lin ang="5400000" scaled="0"/>
+        </a:gradFill>
+        <a:gradFill rotWithShape="1">
+          <a:gsLst>
+            <a:gs pos="0">
+              <a:schemeClr val="phClr">
+                <a:satMod val="103000"/>
+                <a:lumMod val="102000"/>
+                <a:tint val="94000"/>
+              </a:schemeClr>
+            </a:gs>
+            <a:gs pos="50000">
+              <a:schemeClr val="phClr">
+                <a:satMod val="110000"/>
+                <a:lumMod val="100000"/>
+                <a:shade val="100000"/>
+              </a:schemeClr>
+            </a:gs>
+            <a:gs pos="100000">
+              <a:schemeClr val="phClr">
+                <a:lumMod val="99000"/>
+                <a:satMod val="120000"/>
+                <a:shade val="78000"/>
+              </a:schemeClr>
+            </a:gs>
+          </a:gsLst>
+          <a:lin ang="5400000" scaled="0"/>
+        </a:gradFill>
+      </a:fillStyleLst>
+      <a:lnStyleLst>
+        <a:ln w="12700" cap="flat" cmpd="sng" algn="ctr">
+          <a:solidFill>
+            <a:schemeClr val="phClr"/>
+          </a:solidFill>
+          <a:prstDash val="solid"/>
+          <a:miter lim="800000"/>
+        </a:ln>
+        <a:ln w="19050" cap="flat" cmpd="sng" algn="ctr">
+          <a:solidFill>
+            <a:schemeClr val="phClr"/>
+          </a:solidFill>
+          <a:prstDash val="solid"/>
+          <a:miter lim="800000"/>
+        </a:ln>
+        <a:ln w="25400" cap="flat" cmpd="sng" algn="ctr">
+          <a:solidFill>
+            <a:schemeClr val="phClr"/>
+          </a:solidFill>
+          <a:prstDash val="solid"/>
+          <a:miter lim="800000"/>
+        </a:ln>
+      </a:lnStyleLst>
+      <a:effectStyleLst>
+        <a:effectStyle>
+          <a:effectLst/>
+        </a:effectStyle>
+        <a:effectStyle>
+          <a:effectLst/>
+        </a:effectStyle>
+        <a:effectStyle>
+          <a:effectLst>
+            <a:outerShdw blurRad="57150" dist="19050" dir="5400000" algn="ctr" rotWithShape="0">
+              <a:srgbClr val="000000">
+                <a:alpha val="63000"/>
+              </a:srgbClr>
+            </a:outerShdw>
+          </a:effectLst>
+        </a:effectStyle>
+      </a:effectStyleLst>
+      <a:bgFillStyleLst>
+        <a:solidFill>
+          <a:schemeClr val="phClr"/>
+        </a:solidFill>
+        <a:solidFill>
+          <a:schemeClr val="phClr">
+            <a:tint val="95000"/>
+            <a:satMod val="170000"/>
+          </a:schemeClr>
+        </a:solidFill>
+        <a:gradFill rotWithShape="1">
+          <a:gsLst>
+            <a:gs pos="0">
+              <a:schemeClr val="phClr">
+                <a:tint val="93000"/>
+                <a:satMod val="150000"/>
+                <a:shade val="98000"/>
+                <a:lumMod val="102000"/>
+              </a:schemeClr>
+            </a:gs>
+            <a:gs pos="50000">
+              <a:schemeClr val="phClr">
+                <a:tint val="98000"/>
+                <a:satMod val="130000"/>
+                <a:shade val="90000"/>
+                <a:lumMod val="103000"/>
+              </a:schemeClr>
+            </a:gs>
+            <a:gs pos="100000">
+              <a:schemeClr val="phClr">
+                <a:shade val="63000"/>
+                <a:satMod val="120000"/>
+              </a:schemeClr>
+            </a:gs>
+          </a:gsLst>
+          <a:lin ang="5400000" scaled="0"/>
+        </a:gradFill>
+      </a:bgFillStyleLst>
+    </a:fmtScheme>
+  </a:themeElements>
+  <a:objectDefaults>
+    <a:lnDef>
+      <a:spPr/>
+      <a:bodyPr/>
+      <a:lstStyle/>
+      <a:style>
+        <a:lnRef idx="2">
+          <a:schemeClr val="accent1"/>
+        </a:lnRef>
+        <a:fillRef idx="0">
+          <a:schemeClr val="accent1"/>
+        </a:fillRef>
+        <a:effectRef idx="1">
+          <a:schemeClr val="accent1"/>
+        </a:effectRef>
+        <a:fontRef idx="minor">
+          <a:schemeClr val="tx1"/>
+        </a:fontRef>
+      </a:style>
+    </a:lnDef>
+  </a:objectDefaults>
+  <a:extraClrSchemeLst/>
+  <a:extLst>
+    <a:ext uri="{05A4C25C-085E-4340-85A3-A5531E510DB2}">
+      <thm15:themeFamily xmlns:thm15="http://schemas.microsoft.com/office/thememl/2012/main" name="Office Theme" id="{2E142A2C-CD16-42D6-873A-C26D2A0506FA}" vid="{1BDDFF52-6CD6-40A5-AB3C-68EB2F1E4D0A}"/>
+    </a:ext>
+  </a:extLst>
+</a:theme>
+</file>
+
+<file path=docMetadata/LabelInfo.xml><?xml version="1.0" encoding="utf-8"?>
+<clbl:labelList xmlns:clbl="http://schemas.microsoft.com/office/2020/mipLabelMetadata">
+  <clbl:label id="{defa4170-0d19-0005-0004-bc88714345d2}" enabled="1" method="Standard" siteId="{772d181e-a36c-44c0-ac2b-6f70d3b3baf2}" contentBits="0" removed="0"/>
+</clbl:labelList>
 </file>